--- a/VisionVirtue_PPT_Template.pptx
+++ b/VisionVirtue_PPT_Template.pptx
@@ -762,7 +762,7 @@
           </c:tx>
           <c:spPr>
             <a:solidFill>
-              <a:srgbClr val="4A66AC"/>
+              <a:srgbClr val="3D6FCE"/>
             </a:solidFill>
           </c:spPr>
           <c:cat>
@@ -5706,7 +5706,7 @@
     <p:bg>
       <p:bgPr>
         <a:solidFill>
-          <a:srgbClr val="242852"/>
+          <a:srgbClr val="0A1628"/>
         </a:solidFill>
         <a:effectLst/>
       </p:bgPr>
@@ -5830,7 +5830,7 @@
             <a:r>
               <a:rPr sz="30000" b="1" i="0">
                 <a:solidFill>
-                  <a:srgbClr val="2C3160"/>
+                  <a:srgbClr val="122440"/>
                 </a:solidFill>
                 <a:latin typeface="Calibri"/>
               </a:rPr>
@@ -5970,7 +5970,7 @@
             <a:r>
               <a:rPr sz="1300" b="0" i="0">
                 <a:solidFill>
-                  <a:srgbClr val="8FA1CF"/>
+                  <a:srgbClr val="6B9BDB"/>
                 </a:solidFill>
                 <a:latin typeface="Calibri"/>
               </a:rPr>
@@ -6161,7 +6161,7 @@
             <a:r>
               <a:rPr sz="1000" b="0" i="0">
                 <a:solidFill>
-                  <a:srgbClr val="8892AA"/>
+                  <a:srgbClr val="7085A8"/>
                 </a:solidFill>
                 <a:latin typeface="Calibri"/>
               </a:rPr>
@@ -6196,11 +6196,89 @@
             <a:r>
               <a:rPr sz="1000" b="0" i="1">
                 <a:solidFill>
-                  <a:srgbClr val="8892AA"/>
+                  <a:srgbClr val="7085A8"/>
                 </a:solidFill>
                 <a:latin typeface="Calibri"/>
               </a:rPr>
               <a:t>Prepared for: [INVESTOR / BOARD MEMBER]</a:t>
+            </a:r>
+          </a:p>
+        </p:txBody>
+      </p:sp>
+      <p:sp>
+        <p:nvSpPr>
+          <p:cNvPr id="15" name="Oval 14"/>
+          <p:cNvSpPr/>
+          <p:nvPr/>
+        </p:nvSpPr>
+        <p:spPr>
+          <a:xfrm>
+            <a:off x="9756648" y="3904488"/>
+            <a:ext cx="1920240" cy="1920240"/>
+          </a:xfrm>
+          <a:prstGeom prst="ellipse">
+            <a:avLst/>
+          </a:prstGeom>
+          <a:noFill/>
+          <a:ln w="25400">
+            <a:solidFill>
+              <a:srgbClr val="E7CC59"/>
+            </a:solidFill>
+          </a:ln>
+        </p:spPr>
+        <p:style>
+          <a:lnRef idx="1">
+            <a:schemeClr val="accent1"/>
+          </a:lnRef>
+          <a:fillRef idx="3">
+            <a:schemeClr val="accent1"/>
+          </a:fillRef>
+          <a:effectRef idx="2">
+            <a:schemeClr val="accent1"/>
+          </a:effectRef>
+          <a:fontRef idx="minor">
+            <a:schemeClr val="lt1"/>
+          </a:fontRef>
+        </p:style>
+        <p:txBody>
+          <a:bodyPr rtlCol="0" anchor="ctr"/>
+          <a:lstStyle/>
+          <a:p>
+            <a:pPr algn="ctr"/>
+          </a:p>
+        </p:txBody>
+      </p:sp>
+      <p:sp>
+        <p:nvSpPr>
+          <p:cNvPr id="16" name="TextBox 15"/>
+          <p:cNvSpPr txBox="1"/>
+          <p:nvPr/>
+        </p:nvSpPr>
+        <p:spPr>
+          <a:xfrm>
+            <a:off x="9829800" y="3831336"/>
+            <a:ext cx="1773936" cy="1920240"/>
+          </a:xfrm>
+          <a:prstGeom prst="rect">
+            <a:avLst/>
+          </a:prstGeom>
+          <a:noFill/>
+        </p:spPr>
+        <p:txBody>
+          <a:bodyPr wrap="square">
+            <a:spAutoFit/>
+          </a:bodyPr>
+          <a:lstStyle/>
+          <a:p>
+            <a:pPr algn="ctr"/>
+            <a:r>
+              <a:rPr sz="11000" b="1" i="0">
+                <a:solidFill>
+                  <a:srgbClr val="142A4A"/>
+                </a:solidFill>
+                <a:latin typeface="Calibri"/>
+              </a:rPr>
+              <a:t>V</a:t>
             </a:r>
           </a:p>
         </p:txBody>
@@ -6219,7 +6297,7 @@
     <p:bg>
       <p:bgPr>
         <a:solidFill>
-          <a:srgbClr val="242852"/>
+          <a:srgbClr val="0A1628"/>
         </a:solidFill>
         <a:effectLst/>
       </p:bgPr>
@@ -6292,7 +6370,7 @@
             <a:r>
               <a:rPr sz="1000" b="0" i="1">
                 <a:solidFill>
-                  <a:srgbClr val="8FA1CF"/>
+                  <a:srgbClr val="6B9BDB"/>
                 </a:solidFill>
                 <a:latin typeface="Calibri"/>
               </a:rPr>
@@ -6417,7 +6495,7 @@
             <a:r>
               <a:rPr sz="400" b="0">
                 <a:solidFill>
-                  <a:srgbClr val="242852"/>
+                  <a:srgbClr val="0A1628"/>
                 </a:solidFill>
                 <a:latin typeface="Calibri"/>
               </a:rPr>
@@ -6441,7 +6519,7 @@
             <a:r>
               <a:rPr sz="300" b="0">
                 <a:solidFill>
-                  <a:srgbClr val="242852"/>
+                  <a:srgbClr val="0A1628"/>
                 </a:solidFill>
                 <a:latin typeface="Calibri"/>
               </a:rPr>
@@ -6465,7 +6543,7 @@
             <a:r>
               <a:rPr sz="400" b="0">
                 <a:solidFill>
-                  <a:srgbClr val="242852"/>
+                  <a:srgbClr val="0A1628"/>
                 </a:solidFill>
                 <a:latin typeface="Calibri"/>
               </a:rPr>
@@ -6489,7 +6567,7 @@
             <a:r>
               <a:rPr sz="300" b="0">
                 <a:solidFill>
-                  <a:srgbClr val="242852"/>
+                  <a:srgbClr val="0A1628"/>
                 </a:solidFill>
                 <a:latin typeface="Calibri"/>
               </a:rPr>
@@ -6513,7 +6591,7 @@
             <a:r>
               <a:rPr sz="300" b="0">
                 <a:solidFill>
-                  <a:srgbClr val="242852"/>
+                  <a:srgbClr val="0A1628"/>
                 </a:solidFill>
                 <a:latin typeface="Calibri"/>
               </a:rPr>
@@ -6537,7 +6615,7 @@
             <a:r>
               <a:rPr sz="300" b="0">
                 <a:solidFill>
-                  <a:srgbClr val="242852"/>
+                  <a:srgbClr val="0A1628"/>
                 </a:solidFill>
                 <a:latin typeface="Calibri"/>
               </a:rPr>
@@ -6561,7 +6639,7 @@
             <a:r>
               <a:rPr sz="400" b="0">
                 <a:solidFill>
-                  <a:srgbClr val="242852"/>
+                  <a:srgbClr val="0A1628"/>
                 </a:solidFill>
                 <a:latin typeface="Calibri"/>
               </a:rPr>
@@ -6585,7 +6663,7 @@
             <a:r>
               <a:rPr sz="300" b="0">
                 <a:solidFill>
-                  <a:srgbClr val="242852"/>
+                  <a:srgbClr val="0A1628"/>
                 </a:solidFill>
                 <a:latin typeface="Calibri"/>
               </a:rPr>
@@ -6609,7 +6687,7 @@
             <a:r>
               <a:rPr sz="300" b="0">
                 <a:solidFill>
-                  <a:srgbClr val="242852"/>
+                  <a:srgbClr val="0A1628"/>
                 </a:solidFill>
                 <a:latin typeface="Calibri"/>
               </a:rPr>
@@ -6633,7 +6711,7 @@
             <a:r>
               <a:rPr sz="400" b="0">
                 <a:solidFill>
-                  <a:srgbClr val="242852"/>
+                  <a:srgbClr val="0A1628"/>
                 </a:solidFill>
                 <a:latin typeface="Calibri"/>
               </a:rPr>
@@ -6657,7 +6735,7 @@
             <a:r>
               <a:rPr sz="400" b="0">
                 <a:solidFill>
-                  <a:srgbClr val="242852"/>
+                  <a:srgbClr val="0A1628"/>
                 </a:solidFill>
                 <a:latin typeface="Calibri"/>
               </a:rPr>
@@ -6681,7 +6759,7 @@
             <a:avLst/>
           </a:prstGeom>
           <a:solidFill>
-            <a:srgbClr val="1A1E42"/>
+            <a:srgbClr val="10203C"/>
           </a:solidFill>
           <a:ln>
             <a:noFill/>
@@ -6724,7 +6802,7 @@
             <a:avLst/>
           </a:prstGeom>
           <a:solidFill>
-            <a:srgbClr val="4A66AC"/>
+            <a:srgbClr val="3D6FCE"/>
           </a:solidFill>
           <a:ln>
             <a:noFill/>
@@ -6813,7 +6891,7 @@
             <a:r>
               <a:rPr sz="750" b="0" i="0">
                 <a:solidFill>
-                  <a:srgbClr val="8FA1CF"/>
+                  <a:srgbClr val="6B9BDB"/>
                 </a:solidFill>
                 <a:latin typeface="Calibri"/>
               </a:rPr>
@@ -6883,7 +6961,7 @@
             <a:r>
               <a:rPr sz="750" b="0" i="0">
                 <a:solidFill>
-                  <a:srgbClr val="8892AA"/>
+                  <a:srgbClr val="7085A8"/>
                 </a:solidFill>
                 <a:latin typeface="Calibri"/>
               </a:rPr>
@@ -6907,7 +6985,7 @@
             <a:avLst/>
           </a:prstGeom>
           <a:solidFill>
-            <a:srgbClr val="0F1125"/>
+            <a:srgbClr val="060E1A"/>
           </a:solidFill>
           <a:ln>
             <a:noFill/>
@@ -6961,7 +7039,7 @@
             <a:r>
               <a:rPr sz="750" b="0" i="0">
                 <a:solidFill>
-                  <a:srgbClr val="8FA1CF"/>
+                  <a:srgbClr val="6B9BDB"/>
                 </a:solidFill>
                 <a:latin typeface="Calibri"/>
               </a:rPr>
@@ -7031,7 +7109,7 @@
             <a:r>
               <a:rPr sz="750" b="0" i="0">
                 <a:solidFill>
-                  <a:srgbClr val="8892AA"/>
+                  <a:srgbClr val="7085A8"/>
                 </a:solidFill>
                 <a:latin typeface="Calibri"/>
               </a:rPr>
@@ -7055,7 +7133,7 @@
             <a:avLst/>
           </a:prstGeom>
           <a:solidFill>
-            <a:srgbClr val="0F1125"/>
+            <a:srgbClr val="060E1A"/>
           </a:solidFill>
           <a:ln>
             <a:noFill/>
@@ -7109,7 +7187,7 @@
             <a:r>
               <a:rPr sz="750" b="0" i="0">
                 <a:solidFill>
-                  <a:srgbClr val="8FA1CF"/>
+                  <a:srgbClr val="6B9BDB"/>
                 </a:solidFill>
                 <a:latin typeface="Calibri"/>
               </a:rPr>
@@ -7179,7 +7257,7 @@
             <a:r>
               <a:rPr sz="750" b="0" i="0">
                 <a:solidFill>
-                  <a:srgbClr val="8892AA"/>
+                  <a:srgbClr val="7085A8"/>
                 </a:solidFill>
                 <a:latin typeface="Calibri"/>
               </a:rPr>
@@ -7203,7 +7281,7 @@
             <a:avLst/>
           </a:prstGeom>
           <a:solidFill>
-            <a:srgbClr val="0F1125"/>
+            <a:srgbClr val="060E1A"/>
           </a:solidFill>
           <a:ln>
             <a:noFill/>
@@ -7257,7 +7335,7 @@
             <a:r>
               <a:rPr sz="750" b="0" i="0">
                 <a:solidFill>
-                  <a:srgbClr val="8FA1CF"/>
+                  <a:srgbClr val="6B9BDB"/>
                 </a:solidFill>
                 <a:latin typeface="Calibri"/>
               </a:rPr>
@@ -7327,7 +7405,7 @@
             <a:r>
               <a:rPr sz="750" b="0" i="0">
                 <a:solidFill>
-                  <a:srgbClr val="8892AA"/>
+                  <a:srgbClr val="7085A8"/>
                 </a:solidFill>
                 <a:latin typeface="Calibri"/>
               </a:rPr>
@@ -7351,7 +7429,7 @@
             <a:avLst/>
           </a:prstGeom>
           <a:solidFill>
-            <a:srgbClr val="0F1125"/>
+            <a:srgbClr val="060E1A"/>
           </a:solidFill>
           <a:ln>
             <a:noFill/>
@@ -7405,7 +7483,7 @@
             <a:r>
               <a:rPr sz="750" b="0" i="0">
                 <a:solidFill>
-                  <a:srgbClr val="8FA1CF"/>
+                  <a:srgbClr val="6B9BDB"/>
                 </a:solidFill>
                 <a:latin typeface="Calibri"/>
               </a:rPr>
@@ -7475,7 +7553,7 @@
             <a:r>
               <a:rPr sz="750" b="0" i="0">
                 <a:solidFill>
-                  <a:srgbClr val="8892AA"/>
+                  <a:srgbClr val="7085A8"/>
                 </a:solidFill>
                 <a:latin typeface="Calibri"/>
               </a:rPr>
@@ -7499,7 +7577,7 @@
             <a:avLst/>
           </a:prstGeom>
           <a:solidFill>
-            <a:srgbClr val="0F1125"/>
+            <a:srgbClr val="060E1A"/>
           </a:solidFill>
           <a:ln>
             <a:noFill/>
@@ -7553,7 +7631,7 @@
             <a:r>
               <a:rPr sz="750" b="0" i="0">
                 <a:solidFill>
-                  <a:srgbClr val="8FA1CF"/>
+                  <a:srgbClr val="6B9BDB"/>
                 </a:solidFill>
                 <a:latin typeface="Calibri"/>
               </a:rPr>
@@ -7623,7 +7701,7 @@
             <a:r>
               <a:rPr sz="750" b="0" i="0">
                 <a:solidFill>
-                  <a:srgbClr val="8892AA"/>
+                  <a:srgbClr val="7085A8"/>
                 </a:solidFill>
                 <a:latin typeface="Calibri"/>
               </a:rPr>
@@ -7693,7 +7771,7 @@
             <a:r>
               <a:rPr sz="700" b="0" i="0">
                 <a:solidFill>
-                  <a:srgbClr val="8892AA"/>
+                  <a:srgbClr val="7085A8"/>
                 </a:solidFill>
                 <a:latin typeface="Calibri"/>
               </a:rPr>
@@ -7728,11 +7806,89 @@
             <a:r>
               <a:rPr sz="800" b="0" i="0">
                 <a:solidFill>
-                  <a:srgbClr val="8892AA"/>
+                  <a:srgbClr val="7085A8"/>
                 </a:solidFill>
                 <a:latin typeface="Calibri"/>
               </a:rPr>
               <a:t>10 / 20</a:t>
+            </a:r>
+          </a:p>
+        </p:txBody>
+      </p:sp>
+      <p:sp>
+        <p:nvSpPr>
+          <p:cNvPr id="36" name="Oval 35"/>
+          <p:cNvSpPr/>
+          <p:nvPr/>
+        </p:nvSpPr>
+        <p:spPr>
+          <a:xfrm>
+            <a:off x="9756648" y="3904488"/>
+            <a:ext cx="1920240" cy="1920240"/>
+          </a:xfrm>
+          <a:prstGeom prst="ellipse">
+            <a:avLst/>
+          </a:prstGeom>
+          <a:noFill/>
+          <a:ln w="25400">
+            <a:solidFill>
+              <a:srgbClr val="E7CC59"/>
+            </a:solidFill>
+          </a:ln>
+        </p:spPr>
+        <p:style>
+          <a:lnRef idx="1">
+            <a:schemeClr val="accent1"/>
+          </a:lnRef>
+          <a:fillRef idx="3">
+            <a:schemeClr val="accent1"/>
+          </a:fillRef>
+          <a:effectRef idx="2">
+            <a:schemeClr val="accent1"/>
+          </a:effectRef>
+          <a:fontRef idx="minor">
+            <a:schemeClr val="lt1"/>
+          </a:fontRef>
+        </p:style>
+        <p:txBody>
+          <a:bodyPr rtlCol="0" anchor="ctr"/>
+          <a:lstStyle/>
+          <a:p>
+            <a:pPr algn="ctr"/>
+          </a:p>
+        </p:txBody>
+      </p:sp>
+      <p:sp>
+        <p:nvSpPr>
+          <p:cNvPr id="37" name="TextBox 36"/>
+          <p:cNvSpPr txBox="1"/>
+          <p:nvPr/>
+        </p:nvSpPr>
+        <p:spPr>
+          <a:xfrm>
+            <a:off x="9829800" y="3831336"/>
+            <a:ext cx="1773936" cy="1920240"/>
+          </a:xfrm>
+          <a:prstGeom prst="rect">
+            <a:avLst/>
+          </a:prstGeom>
+          <a:noFill/>
+        </p:spPr>
+        <p:txBody>
+          <a:bodyPr wrap="square">
+            <a:spAutoFit/>
+          </a:bodyPr>
+          <a:lstStyle/>
+          <a:p>
+            <a:pPr algn="ctr"/>
+            <a:r>
+              <a:rPr sz="11000" b="1" i="0">
+                <a:solidFill>
+                  <a:srgbClr val="142A4A"/>
+                </a:solidFill>
+                <a:latin typeface="Calibri"/>
+              </a:rPr>
+              <a:t>V</a:t>
             </a:r>
           </a:p>
         </p:txBody>
@@ -7751,7 +7907,7 @@
     <p:bg>
       <p:bgPr>
         <a:solidFill>
-          <a:srgbClr val="242852"/>
+          <a:srgbClr val="0A1628"/>
         </a:solidFill>
         <a:effectLst/>
       </p:bgPr>
@@ -7824,7 +7980,7 @@
             <a:r>
               <a:rPr sz="1000" b="0" i="1">
                 <a:solidFill>
-                  <a:srgbClr val="8FA1CF"/>
+                  <a:srgbClr val="6B9BDB"/>
                 </a:solidFill>
                 <a:latin typeface="Calibri"/>
               </a:rPr>
@@ -7922,7 +8078,7 @@
                   </a:txBody>
                   <a:tcPr>
                     <a:solidFill>
-                      <a:srgbClr val="0F1125"/>
+                      <a:srgbClr val="060E1A"/>
                     </a:solidFill>
                   </a:tcPr>
                 </a:tc>
@@ -7945,7 +8101,7 @@
                   </a:txBody>
                   <a:tcPr>
                     <a:solidFill>
-                      <a:srgbClr val="0F1125"/>
+                      <a:srgbClr val="060E1A"/>
                     </a:solidFill>
                   </a:tcPr>
                 </a:tc>
@@ -7968,7 +8124,7 @@
                   </a:txBody>
                   <a:tcPr>
                     <a:solidFill>
-                      <a:srgbClr val="0F1125"/>
+                      <a:srgbClr val="060E1A"/>
                     </a:solidFill>
                   </a:tcPr>
                 </a:tc>
@@ -7991,7 +8147,7 @@
                   </a:txBody>
                   <a:tcPr>
                     <a:solidFill>
-                      <a:srgbClr val="0F1125"/>
+                      <a:srgbClr val="060E1A"/>
                     </a:solidFill>
                   </a:tcPr>
                 </a:tc>
@@ -8014,7 +8170,7 @@
                   </a:txBody>
                   <a:tcPr>
                     <a:solidFill>
-                      <a:srgbClr val="0F1125"/>
+                      <a:srgbClr val="060E1A"/>
                     </a:solidFill>
                   </a:tcPr>
                 </a:tc>
@@ -8037,7 +8193,7 @@
                   </a:txBody>
                   <a:tcPr>
                     <a:solidFill>
-                      <a:srgbClr val="0F1125"/>
+                      <a:srgbClr val="060E1A"/>
                     </a:solidFill>
                   </a:tcPr>
                 </a:tc>
@@ -8062,7 +8218,7 @@
                   </a:txBody>
                   <a:tcPr>
                     <a:solidFill>
-                      <a:srgbClr val="1E2248"/>
+                      <a:srgbClr val="0D1B32"/>
                     </a:solidFill>
                   </a:tcPr>
                 </a:tc>
@@ -8085,7 +8241,7 @@
                   </a:txBody>
                   <a:tcPr>
                     <a:solidFill>
-                      <a:srgbClr val="1E2248"/>
+                      <a:srgbClr val="0D1B32"/>
                     </a:solidFill>
                   </a:tcPr>
                 </a:tc>
@@ -8108,7 +8264,7 @@
                   </a:txBody>
                   <a:tcPr>
                     <a:solidFill>
-                      <a:srgbClr val="1E2248"/>
+                      <a:srgbClr val="0D1B32"/>
                     </a:solidFill>
                   </a:tcPr>
                 </a:tc>
@@ -8131,7 +8287,7 @@
                   </a:txBody>
                   <a:tcPr>
                     <a:solidFill>
-                      <a:srgbClr val="1E2248"/>
+                      <a:srgbClr val="0D1B32"/>
                     </a:solidFill>
                   </a:tcPr>
                 </a:tc>
@@ -8154,7 +8310,7 @@
                   </a:txBody>
                   <a:tcPr>
                     <a:solidFill>
-                      <a:srgbClr val="1E2248"/>
+                      <a:srgbClr val="0D1B32"/>
                     </a:solidFill>
                   </a:tcPr>
                 </a:tc>
@@ -8177,7 +8333,7 @@
                   </a:txBody>
                   <a:tcPr>
                     <a:solidFill>
-                      <a:srgbClr val="1E2248"/>
+                      <a:srgbClr val="0D1B32"/>
                     </a:solidFill>
                   </a:tcPr>
                 </a:tc>
@@ -8202,7 +8358,7 @@
                   </a:txBody>
                   <a:tcPr>
                     <a:solidFill>
-                      <a:srgbClr val="1A1E42"/>
+                      <a:srgbClr val="10203C"/>
                     </a:solidFill>
                   </a:tcPr>
                 </a:tc>
@@ -8225,7 +8381,7 @@
                   </a:txBody>
                   <a:tcPr>
                     <a:solidFill>
-                      <a:srgbClr val="1A1E42"/>
+                      <a:srgbClr val="10203C"/>
                     </a:solidFill>
                   </a:tcPr>
                 </a:tc>
@@ -8248,7 +8404,7 @@
                   </a:txBody>
                   <a:tcPr>
                     <a:solidFill>
-                      <a:srgbClr val="1A1E42"/>
+                      <a:srgbClr val="10203C"/>
                     </a:solidFill>
                   </a:tcPr>
                 </a:tc>
@@ -8271,7 +8427,7 @@
                   </a:txBody>
                   <a:tcPr>
                     <a:solidFill>
-                      <a:srgbClr val="1A1E42"/>
+                      <a:srgbClr val="10203C"/>
                     </a:solidFill>
                   </a:tcPr>
                 </a:tc>
@@ -8294,7 +8450,7 @@
                   </a:txBody>
                   <a:tcPr>
                     <a:solidFill>
-                      <a:srgbClr val="1A1E42"/>
+                      <a:srgbClr val="10203C"/>
                     </a:solidFill>
                   </a:tcPr>
                 </a:tc>
@@ -8317,7 +8473,7 @@
                   </a:txBody>
                   <a:tcPr>
                     <a:solidFill>
-                      <a:srgbClr val="1A1E42"/>
+                      <a:srgbClr val="10203C"/>
                     </a:solidFill>
                   </a:tcPr>
                 </a:tc>
@@ -8342,7 +8498,7 @@
                   </a:txBody>
                   <a:tcPr>
                     <a:solidFill>
-                      <a:srgbClr val="1E2248"/>
+                      <a:srgbClr val="0D1B32"/>
                     </a:solidFill>
                   </a:tcPr>
                 </a:tc>
@@ -8365,7 +8521,7 @@
                   </a:txBody>
                   <a:tcPr>
                     <a:solidFill>
-                      <a:srgbClr val="1E2248"/>
+                      <a:srgbClr val="0D1B32"/>
                     </a:solidFill>
                   </a:tcPr>
                 </a:tc>
@@ -8388,7 +8544,7 @@
                   </a:txBody>
                   <a:tcPr>
                     <a:solidFill>
-                      <a:srgbClr val="1E2248"/>
+                      <a:srgbClr val="0D1B32"/>
                     </a:solidFill>
                   </a:tcPr>
                 </a:tc>
@@ -8411,7 +8567,7 @@
                   </a:txBody>
                   <a:tcPr>
                     <a:solidFill>
-                      <a:srgbClr val="1E2248"/>
+                      <a:srgbClr val="0D1B32"/>
                     </a:solidFill>
                   </a:tcPr>
                 </a:tc>
@@ -8434,7 +8590,7 @@
                   </a:txBody>
                   <a:tcPr>
                     <a:solidFill>
-                      <a:srgbClr val="1E2248"/>
+                      <a:srgbClr val="0D1B32"/>
                     </a:solidFill>
                   </a:tcPr>
                 </a:tc>
@@ -8457,7 +8613,7 @@
                   </a:txBody>
                   <a:tcPr>
                     <a:solidFill>
-                      <a:srgbClr val="1E2248"/>
+                      <a:srgbClr val="0D1B32"/>
                     </a:solidFill>
                   </a:tcPr>
                 </a:tc>
@@ -8482,7 +8638,7 @@
                   </a:txBody>
                   <a:tcPr>
                     <a:solidFill>
-                      <a:srgbClr val="1A1E42"/>
+                      <a:srgbClr val="10203C"/>
                     </a:solidFill>
                   </a:tcPr>
                 </a:tc>
@@ -8505,7 +8661,7 @@
                   </a:txBody>
                   <a:tcPr>
                     <a:solidFill>
-                      <a:srgbClr val="1A1E42"/>
+                      <a:srgbClr val="10203C"/>
                     </a:solidFill>
                   </a:tcPr>
                 </a:tc>
@@ -8528,7 +8684,7 @@
                   </a:txBody>
                   <a:tcPr>
                     <a:solidFill>
-                      <a:srgbClr val="1A1E42"/>
+                      <a:srgbClr val="10203C"/>
                     </a:solidFill>
                   </a:tcPr>
                 </a:tc>
@@ -8551,7 +8707,7 @@
                   </a:txBody>
                   <a:tcPr>
                     <a:solidFill>
-                      <a:srgbClr val="1A1E42"/>
+                      <a:srgbClr val="10203C"/>
                     </a:solidFill>
                   </a:tcPr>
                 </a:tc>
@@ -8574,7 +8730,7 @@
                   </a:txBody>
                   <a:tcPr>
                     <a:solidFill>
-                      <a:srgbClr val="1A1E42"/>
+                      <a:srgbClr val="10203C"/>
                     </a:solidFill>
                   </a:tcPr>
                 </a:tc>
@@ -8597,7 +8753,7 @@
                   </a:txBody>
                   <a:tcPr>
                     <a:solidFill>
-                      <a:srgbClr val="1A1E42"/>
+                      <a:srgbClr val="10203C"/>
                     </a:solidFill>
                   </a:tcPr>
                 </a:tc>
@@ -8622,7 +8778,7 @@
                   </a:txBody>
                   <a:tcPr>
                     <a:solidFill>
-                      <a:srgbClr val="1E2248"/>
+                      <a:srgbClr val="0D1B32"/>
                     </a:solidFill>
                   </a:tcPr>
                 </a:tc>
@@ -8645,7 +8801,7 @@
                   </a:txBody>
                   <a:tcPr>
                     <a:solidFill>
-                      <a:srgbClr val="1E2248"/>
+                      <a:srgbClr val="0D1B32"/>
                     </a:solidFill>
                   </a:tcPr>
                 </a:tc>
@@ -8668,7 +8824,7 @@
                   </a:txBody>
                   <a:tcPr>
                     <a:solidFill>
-                      <a:srgbClr val="1E2248"/>
+                      <a:srgbClr val="0D1B32"/>
                     </a:solidFill>
                   </a:tcPr>
                 </a:tc>
@@ -8691,7 +8847,7 @@
                   </a:txBody>
                   <a:tcPr>
                     <a:solidFill>
-                      <a:srgbClr val="1E2248"/>
+                      <a:srgbClr val="0D1B32"/>
                     </a:solidFill>
                   </a:tcPr>
                 </a:tc>
@@ -8714,7 +8870,7 @@
                   </a:txBody>
                   <a:tcPr>
                     <a:solidFill>
-                      <a:srgbClr val="1E2248"/>
+                      <a:srgbClr val="0D1B32"/>
                     </a:solidFill>
                   </a:tcPr>
                 </a:tc>
@@ -8737,7 +8893,7 @@
                   </a:txBody>
                   <a:tcPr>
                     <a:solidFill>
-                      <a:srgbClr val="1E2248"/>
+                      <a:srgbClr val="0D1B32"/>
                     </a:solidFill>
                   </a:tcPr>
                 </a:tc>
@@ -8762,7 +8918,7 @@
                   </a:txBody>
                   <a:tcPr>
                     <a:solidFill>
-                      <a:srgbClr val="1A1E42"/>
+                      <a:srgbClr val="10203C"/>
                     </a:solidFill>
                   </a:tcPr>
                 </a:tc>
@@ -8785,7 +8941,7 @@
                   </a:txBody>
                   <a:tcPr>
                     <a:solidFill>
-                      <a:srgbClr val="1A1E42"/>
+                      <a:srgbClr val="10203C"/>
                     </a:solidFill>
                   </a:tcPr>
                 </a:tc>
@@ -8808,7 +8964,7 @@
                   </a:txBody>
                   <a:tcPr>
                     <a:solidFill>
-                      <a:srgbClr val="1A1E42"/>
+                      <a:srgbClr val="10203C"/>
                     </a:solidFill>
                   </a:tcPr>
                 </a:tc>
@@ -8831,7 +8987,7 @@
                   </a:txBody>
                   <a:tcPr>
                     <a:solidFill>
-                      <a:srgbClr val="1A1E42"/>
+                      <a:srgbClr val="10203C"/>
                     </a:solidFill>
                   </a:tcPr>
                 </a:tc>
@@ -8854,7 +9010,7 @@
                   </a:txBody>
                   <a:tcPr>
                     <a:solidFill>
-                      <a:srgbClr val="1A1E42"/>
+                      <a:srgbClr val="10203C"/>
                     </a:solidFill>
                   </a:tcPr>
                 </a:tc>
@@ -8877,7 +9033,7 @@
                   </a:txBody>
                   <a:tcPr>
                     <a:solidFill>
-                      <a:srgbClr val="1A1E42"/>
+                      <a:srgbClr val="10203C"/>
                     </a:solidFill>
                   </a:tcPr>
                 </a:tc>
@@ -8902,7 +9058,7 @@
                   </a:txBody>
                   <a:tcPr>
                     <a:solidFill>
-                      <a:srgbClr val="1E2248"/>
+                      <a:srgbClr val="0D1B32"/>
                     </a:solidFill>
                   </a:tcPr>
                 </a:tc>
@@ -8925,7 +9081,7 @@
                   </a:txBody>
                   <a:tcPr>
                     <a:solidFill>
-                      <a:srgbClr val="1E2248"/>
+                      <a:srgbClr val="0D1B32"/>
                     </a:solidFill>
                   </a:tcPr>
                 </a:tc>
@@ -8948,7 +9104,7 @@
                   </a:txBody>
                   <a:tcPr>
                     <a:solidFill>
-                      <a:srgbClr val="1E2248"/>
+                      <a:srgbClr val="0D1B32"/>
                     </a:solidFill>
                   </a:tcPr>
                 </a:tc>
@@ -8971,7 +9127,7 @@
                   </a:txBody>
                   <a:tcPr>
                     <a:solidFill>
-                      <a:srgbClr val="1E2248"/>
+                      <a:srgbClr val="0D1B32"/>
                     </a:solidFill>
                   </a:tcPr>
                 </a:tc>
@@ -8994,7 +9150,7 @@
                   </a:txBody>
                   <a:tcPr>
                     <a:solidFill>
-                      <a:srgbClr val="1E2248"/>
+                      <a:srgbClr val="0D1B32"/>
                     </a:solidFill>
                   </a:tcPr>
                 </a:tc>
@@ -9017,7 +9173,7 @@
                   </a:txBody>
                   <a:tcPr>
                     <a:solidFill>
-                      <a:srgbClr val="1E2248"/>
+                      <a:srgbClr val="0D1B32"/>
                     </a:solidFill>
                   </a:tcPr>
                 </a:tc>
@@ -9042,7 +9198,7 @@
                   </a:txBody>
                   <a:tcPr>
                     <a:solidFill>
-                      <a:srgbClr val="1A1E42"/>
+                      <a:srgbClr val="10203C"/>
                     </a:solidFill>
                   </a:tcPr>
                 </a:tc>
@@ -9065,7 +9221,7 @@
                   </a:txBody>
                   <a:tcPr>
                     <a:solidFill>
-                      <a:srgbClr val="1A1E42"/>
+                      <a:srgbClr val="10203C"/>
                     </a:solidFill>
                   </a:tcPr>
                 </a:tc>
@@ -9088,7 +9244,7 @@
                   </a:txBody>
                   <a:tcPr>
                     <a:solidFill>
-                      <a:srgbClr val="1A1E42"/>
+                      <a:srgbClr val="10203C"/>
                     </a:solidFill>
                   </a:tcPr>
                 </a:tc>
@@ -9111,7 +9267,7 @@
                   </a:txBody>
                   <a:tcPr>
                     <a:solidFill>
-                      <a:srgbClr val="1A1E42"/>
+                      <a:srgbClr val="10203C"/>
                     </a:solidFill>
                   </a:tcPr>
                 </a:tc>
@@ -9134,7 +9290,7 @@
                   </a:txBody>
                   <a:tcPr>
                     <a:solidFill>
-                      <a:srgbClr val="1A1E42"/>
+                      <a:srgbClr val="10203C"/>
                     </a:solidFill>
                   </a:tcPr>
                 </a:tc>
@@ -9157,7 +9313,7 @@
                   </a:txBody>
                   <a:tcPr>
                     <a:solidFill>
-                      <a:srgbClr val="1A1E42"/>
+                      <a:srgbClr val="10203C"/>
                     </a:solidFill>
                   </a:tcPr>
                 </a:tc>
@@ -9182,7 +9338,7 @@
                   </a:txBody>
                   <a:tcPr>
                     <a:solidFill>
-                      <a:srgbClr val="1E2248"/>
+                      <a:srgbClr val="0D1B32"/>
                     </a:solidFill>
                   </a:tcPr>
                 </a:tc>
@@ -9205,7 +9361,7 @@
                   </a:txBody>
                   <a:tcPr>
                     <a:solidFill>
-                      <a:srgbClr val="1E2248"/>
+                      <a:srgbClr val="0D1B32"/>
                     </a:solidFill>
                   </a:tcPr>
                 </a:tc>
@@ -9228,7 +9384,7 @@
                   </a:txBody>
                   <a:tcPr>
                     <a:solidFill>
-                      <a:srgbClr val="1E2248"/>
+                      <a:srgbClr val="0D1B32"/>
                     </a:solidFill>
                   </a:tcPr>
                 </a:tc>
@@ -9251,7 +9407,7 @@
                   </a:txBody>
                   <a:tcPr>
                     <a:solidFill>
-                      <a:srgbClr val="1E2248"/>
+                      <a:srgbClr val="0D1B32"/>
                     </a:solidFill>
                   </a:tcPr>
                 </a:tc>
@@ -9274,7 +9430,7 @@
                   </a:txBody>
                   <a:tcPr>
                     <a:solidFill>
-                      <a:srgbClr val="1E2248"/>
+                      <a:srgbClr val="0D1B32"/>
                     </a:solidFill>
                   </a:tcPr>
                 </a:tc>
@@ -9297,7 +9453,7 @@
                   </a:txBody>
                   <a:tcPr>
                     <a:solidFill>
-                      <a:srgbClr val="1E2248"/>
+                      <a:srgbClr val="0D1B32"/>
                     </a:solidFill>
                   </a:tcPr>
                 </a:tc>
@@ -9322,7 +9478,7 @@
                   </a:txBody>
                   <a:tcPr>
                     <a:solidFill>
-                      <a:srgbClr val="1A1E42"/>
+                      <a:srgbClr val="10203C"/>
                     </a:solidFill>
                   </a:tcPr>
                 </a:tc>
@@ -9345,7 +9501,7 @@
                   </a:txBody>
                   <a:tcPr>
                     <a:solidFill>
-                      <a:srgbClr val="1A1E42"/>
+                      <a:srgbClr val="10203C"/>
                     </a:solidFill>
                   </a:tcPr>
                 </a:tc>
@@ -9368,7 +9524,7 @@
                   </a:txBody>
                   <a:tcPr>
                     <a:solidFill>
-                      <a:srgbClr val="1A1E42"/>
+                      <a:srgbClr val="10203C"/>
                     </a:solidFill>
                   </a:tcPr>
                 </a:tc>
@@ -9391,7 +9547,7 @@
                   </a:txBody>
                   <a:tcPr>
                     <a:solidFill>
-                      <a:srgbClr val="1A1E42"/>
+                      <a:srgbClr val="10203C"/>
                     </a:solidFill>
                   </a:tcPr>
                 </a:tc>
@@ -9414,7 +9570,7 @@
                   </a:txBody>
                   <a:tcPr>
                     <a:solidFill>
-                      <a:srgbClr val="1A1E42"/>
+                      <a:srgbClr val="10203C"/>
                     </a:solidFill>
                   </a:tcPr>
                 </a:tc>
@@ -9437,7 +9593,7 @@
                   </a:txBody>
                   <a:tcPr>
                     <a:solidFill>
-                      <a:srgbClr val="1A1E42"/>
+                      <a:srgbClr val="10203C"/>
                     </a:solidFill>
                   </a:tcPr>
                 </a:tc>
@@ -9462,7 +9618,7 @@
                   </a:txBody>
                   <a:tcPr>
                     <a:solidFill>
-                      <a:srgbClr val="1E2248"/>
+                      <a:srgbClr val="0D1B32"/>
                     </a:solidFill>
                   </a:tcPr>
                 </a:tc>
@@ -9485,7 +9641,7 @@
                   </a:txBody>
                   <a:tcPr>
                     <a:solidFill>
-                      <a:srgbClr val="1E2248"/>
+                      <a:srgbClr val="0D1B32"/>
                     </a:solidFill>
                   </a:tcPr>
                 </a:tc>
@@ -9508,7 +9664,7 @@
                   </a:txBody>
                   <a:tcPr>
                     <a:solidFill>
-                      <a:srgbClr val="1E2248"/>
+                      <a:srgbClr val="0D1B32"/>
                     </a:solidFill>
                   </a:tcPr>
                 </a:tc>
@@ -9531,7 +9687,7 @@
                   </a:txBody>
                   <a:tcPr>
                     <a:solidFill>
-                      <a:srgbClr val="1E2248"/>
+                      <a:srgbClr val="0D1B32"/>
                     </a:solidFill>
                   </a:tcPr>
                 </a:tc>
@@ -9554,7 +9710,7 @@
                   </a:txBody>
                   <a:tcPr>
                     <a:solidFill>
-                      <a:srgbClr val="1E2248"/>
+                      <a:srgbClr val="0D1B32"/>
                     </a:solidFill>
                   </a:tcPr>
                 </a:tc>
@@ -9577,7 +9733,7 @@
                   </a:txBody>
                   <a:tcPr>
                     <a:solidFill>
-                      <a:srgbClr val="1E2248"/>
+                      <a:srgbClr val="0D1B32"/>
                     </a:solidFill>
                   </a:tcPr>
                 </a:tc>
@@ -9602,7 +9758,7 @@
                   </a:txBody>
                   <a:tcPr>
                     <a:solidFill>
-                      <a:srgbClr val="1A1E42"/>
+                      <a:srgbClr val="10203C"/>
                     </a:solidFill>
                   </a:tcPr>
                 </a:tc>
@@ -9625,7 +9781,7 @@
                   </a:txBody>
                   <a:tcPr>
                     <a:solidFill>
-                      <a:srgbClr val="1A1E42"/>
+                      <a:srgbClr val="10203C"/>
                     </a:solidFill>
                   </a:tcPr>
                 </a:tc>
@@ -9648,7 +9804,7 @@
                   </a:txBody>
                   <a:tcPr>
                     <a:solidFill>
-                      <a:srgbClr val="1A1E42"/>
+                      <a:srgbClr val="10203C"/>
                     </a:solidFill>
                   </a:tcPr>
                 </a:tc>
@@ -9671,7 +9827,7 @@
                   </a:txBody>
                   <a:tcPr>
                     <a:solidFill>
-                      <a:srgbClr val="1A1E42"/>
+                      <a:srgbClr val="10203C"/>
                     </a:solidFill>
                   </a:tcPr>
                 </a:tc>
@@ -9694,7 +9850,7 @@
                   </a:txBody>
                   <a:tcPr>
                     <a:solidFill>
-                      <a:srgbClr val="1A1E42"/>
+                      <a:srgbClr val="10203C"/>
                     </a:solidFill>
                   </a:tcPr>
                 </a:tc>
@@ -9717,7 +9873,7 @@
                   </a:txBody>
                   <a:tcPr>
                     <a:solidFill>
-                      <a:srgbClr val="1A1E42"/>
+                      <a:srgbClr val="10203C"/>
                     </a:solidFill>
                   </a:tcPr>
                 </a:tc>
@@ -9742,7 +9898,7 @@
                   </a:txBody>
                   <a:tcPr>
                     <a:solidFill>
-                      <a:srgbClr val="1E2248"/>
+                      <a:srgbClr val="0D1B32"/>
                     </a:solidFill>
                   </a:tcPr>
                 </a:tc>
@@ -9765,7 +9921,7 @@
                   </a:txBody>
                   <a:tcPr>
                     <a:solidFill>
-                      <a:srgbClr val="1E2248"/>
+                      <a:srgbClr val="0D1B32"/>
                     </a:solidFill>
                   </a:tcPr>
                 </a:tc>
@@ -9788,7 +9944,7 @@
                   </a:txBody>
                   <a:tcPr>
                     <a:solidFill>
-                      <a:srgbClr val="1E2248"/>
+                      <a:srgbClr val="0D1B32"/>
                     </a:solidFill>
                   </a:tcPr>
                 </a:tc>
@@ -9811,7 +9967,7 @@
                   </a:txBody>
                   <a:tcPr>
                     <a:solidFill>
-                      <a:srgbClr val="1E2248"/>
+                      <a:srgbClr val="0D1B32"/>
                     </a:solidFill>
                   </a:tcPr>
                 </a:tc>
@@ -9834,7 +9990,7 @@
                   </a:txBody>
                   <a:tcPr>
                     <a:solidFill>
-                      <a:srgbClr val="1E2248"/>
+                      <a:srgbClr val="0D1B32"/>
                     </a:solidFill>
                   </a:tcPr>
                 </a:tc>
@@ -9857,7 +10013,7 @@
                   </a:txBody>
                   <a:tcPr>
                     <a:solidFill>
-                      <a:srgbClr val="1E2248"/>
+                      <a:srgbClr val="0D1B32"/>
                     </a:solidFill>
                   </a:tcPr>
                 </a:tc>
@@ -9927,7 +10083,7 @@
             <a:r>
               <a:rPr sz="700" b="0" i="0">
                 <a:solidFill>
-                  <a:srgbClr val="8892AA"/>
+                  <a:srgbClr val="7085A8"/>
                 </a:solidFill>
                 <a:latin typeface="Calibri"/>
               </a:rPr>
@@ -9962,11 +10118,89 @@
             <a:r>
               <a:rPr sz="800" b="0" i="0">
                 <a:solidFill>
-                  <a:srgbClr val="8892AA"/>
+                  <a:srgbClr val="7085A8"/>
                 </a:solidFill>
                 <a:latin typeface="Calibri"/>
               </a:rPr>
               <a:t>11 / 20</a:t>
+            </a:r>
+          </a:p>
+        </p:txBody>
+      </p:sp>
+      <p:sp>
+        <p:nvSpPr>
+          <p:cNvPr id="9" name="Oval 8"/>
+          <p:cNvSpPr/>
+          <p:nvPr/>
+        </p:nvSpPr>
+        <p:spPr>
+          <a:xfrm>
+            <a:off x="9756648" y="3904488"/>
+            <a:ext cx="1920240" cy="1920240"/>
+          </a:xfrm>
+          <a:prstGeom prst="ellipse">
+            <a:avLst/>
+          </a:prstGeom>
+          <a:noFill/>
+          <a:ln w="25400">
+            <a:solidFill>
+              <a:srgbClr val="E7CC59"/>
+            </a:solidFill>
+          </a:ln>
+        </p:spPr>
+        <p:style>
+          <a:lnRef idx="1">
+            <a:schemeClr val="accent1"/>
+          </a:lnRef>
+          <a:fillRef idx="3">
+            <a:schemeClr val="accent1"/>
+          </a:fillRef>
+          <a:effectRef idx="2">
+            <a:schemeClr val="accent1"/>
+          </a:effectRef>
+          <a:fontRef idx="minor">
+            <a:schemeClr val="lt1"/>
+          </a:fontRef>
+        </p:style>
+        <p:txBody>
+          <a:bodyPr rtlCol="0" anchor="ctr"/>
+          <a:lstStyle/>
+          <a:p>
+            <a:pPr algn="ctr"/>
+          </a:p>
+        </p:txBody>
+      </p:sp>
+      <p:sp>
+        <p:nvSpPr>
+          <p:cNvPr id="10" name="TextBox 9"/>
+          <p:cNvSpPr txBox="1"/>
+          <p:nvPr/>
+        </p:nvSpPr>
+        <p:spPr>
+          <a:xfrm>
+            <a:off x="9829800" y="3831336"/>
+            <a:ext cx="1773936" cy="1920240"/>
+          </a:xfrm>
+          <a:prstGeom prst="rect">
+            <a:avLst/>
+          </a:prstGeom>
+          <a:noFill/>
+        </p:spPr>
+        <p:txBody>
+          <a:bodyPr wrap="square">
+            <a:spAutoFit/>
+          </a:bodyPr>
+          <a:lstStyle/>
+          <a:p>
+            <a:pPr algn="ctr"/>
+            <a:r>
+              <a:rPr sz="11000" b="1" i="0">
+                <a:solidFill>
+                  <a:srgbClr val="142A4A"/>
+                </a:solidFill>
+                <a:latin typeface="Calibri"/>
+              </a:rPr>
+              <a:t>V</a:t>
             </a:r>
           </a:p>
         </p:txBody>
@@ -9985,7 +10219,7 @@
     <p:bg>
       <p:bgPr>
         <a:solidFill>
-          <a:srgbClr val="242852"/>
+          <a:srgbClr val="0A1628"/>
         </a:solidFill>
         <a:effectLst/>
       </p:bgPr>
@@ -10058,7 +10292,7 @@
             <a:r>
               <a:rPr sz="1000" b="0" i="1">
                 <a:solidFill>
-                  <a:srgbClr val="8FA1CF"/>
+                  <a:srgbClr val="6B9BDB"/>
                 </a:solidFill>
                 <a:latin typeface="Calibri"/>
               </a:rPr>
@@ -10156,7 +10390,7 @@
                   </a:txBody>
                   <a:tcPr>
                     <a:solidFill>
-                      <a:srgbClr val="0F1125"/>
+                      <a:srgbClr val="060E1A"/>
                     </a:solidFill>
                   </a:tcPr>
                 </a:tc>
@@ -10179,7 +10413,7 @@
                   </a:txBody>
                   <a:tcPr>
                     <a:solidFill>
-                      <a:srgbClr val="0F1125"/>
+                      <a:srgbClr val="060E1A"/>
                     </a:solidFill>
                   </a:tcPr>
                 </a:tc>
@@ -10202,7 +10436,7 @@
                   </a:txBody>
                   <a:tcPr>
                     <a:solidFill>
-                      <a:srgbClr val="0F1125"/>
+                      <a:srgbClr val="060E1A"/>
                     </a:solidFill>
                   </a:tcPr>
                 </a:tc>
@@ -10225,7 +10459,7 @@
                   </a:txBody>
                   <a:tcPr>
                     <a:solidFill>
-                      <a:srgbClr val="0F1125"/>
+                      <a:srgbClr val="060E1A"/>
                     </a:solidFill>
                   </a:tcPr>
                 </a:tc>
@@ -10248,7 +10482,7 @@
                   </a:txBody>
                   <a:tcPr>
                     <a:solidFill>
-                      <a:srgbClr val="0F1125"/>
+                      <a:srgbClr val="060E1A"/>
                     </a:solidFill>
                   </a:tcPr>
                 </a:tc>
@@ -10271,7 +10505,7 @@
                   </a:txBody>
                   <a:tcPr>
                     <a:solidFill>
-                      <a:srgbClr val="0F1125"/>
+                      <a:srgbClr val="060E1A"/>
                     </a:solidFill>
                   </a:tcPr>
                 </a:tc>
@@ -10296,7 +10530,7 @@
                   </a:txBody>
                   <a:tcPr>
                     <a:solidFill>
-                      <a:srgbClr val="1E2248"/>
+                      <a:srgbClr val="0D1B32"/>
                     </a:solidFill>
                   </a:tcPr>
                 </a:tc>
@@ -10319,7 +10553,7 @@
                   </a:txBody>
                   <a:tcPr>
                     <a:solidFill>
-                      <a:srgbClr val="1E2248"/>
+                      <a:srgbClr val="0D1B32"/>
                     </a:solidFill>
                   </a:tcPr>
                 </a:tc>
@@ -10342,7 +10576,7 @@
                   </a:txBody>
                   <a:tcPr>
                     <a:solidFill>
-                      <a:srgbClr val="1E2248"/>
+                      <a:srgbClr val="0D1B32"/>
                     </a:solidFill>
                   </a:tcPr>
                 </a:tc>
@@ -10365,7 +10599,7 @@
                   </a:txBody>
                   <a:tcPr>
                     <a:solidFill>
-                      <a:srgbClr val="1E2248"/>
+                      <a:srgbClr val="0D1B32"/>
                     </a:solidFill>
                   </a:tcPr>
                 </a:tc>
@@ -10388,7 +10622,7 @@
                   </a:txBody>
                   <a:tcPr>
                     <a:solidFill>
-                      <a:srgbClr val="1E2248"/>
+                      <a:srgbClr val="0D1B32"/>
                     </a:solidFill>
                   </a:tcPr>
                 </a:tc>
@@ -10411,7 +10645,7 @@
                   </a:txBody>
                   <a:tcPr>
                     <a:solidFill>
-                      <a:srgbClr val="1E2248"/>
+                      <a:srgbClr val="0D1B32"/>
                     </a:solidFill>
                   </a:tcPr>
                 </a:tc>
@@ -10436,7 +10670,7 @@
                   </a:txBody>
                   <a:tcPr>
                     <a:solidFill>
-                      <a:srgbClr val="1A1E42"/>
+                      <a:srgbClr val="10203C"/>
                     </a:solidFill>
                   </a:tcPr>
                 </a:tc>
@@ -10459,7 +10693,7 @@
                   </a:txBody>
                   <a:tcPr>
                     <a:solidFill>
-                      <a:srgbClr val="1A1E42"/>
+                      <a:srgbClr val="10203C"/>
                     </a:solidFill>
                   </a:tcPr>
                 </a:tc>
@@ -10482,7 +10716,7 @@
                   </a:txBody>
                   <a:tcPr>
                     <a:solidFill>
-                      <a:srgbClr val="1A1E42"/>
+                      <a:srgbClr val="10203C"/>
                     </a:solidFill>
                   </a:tcPr>
                 </a:tc>
@@ -10505,7 +10739,7 @@
                   </a:txBody>
                   <a:tcPr>
                     <a:solidFill>
-                      <a:srgbClr val="1A1E42"/>
+                      <a:srgbClr val="10203C"/>
                     </a:solidFill>
                   </a:tcPr>
                 </a:tc>
@@ -10528,7 +10762,7 @@
                   </a:txBody>
                   <a:tcPr>
                     <a:solidFill>
-                      <a:srgbClr val="1A1E42"/>
+                      <a:srgbClr val="10203C"/>
                     </a:solidFill>
                   </a:tcPr>
                 </a:tc>
@@ -10551,7 +10785,7 @@
                   </a:txBody>
                   <a:tcPr>
                     <a:solidFill>
-                      <a:srgbClr val="1A1E42"/>
+                      <a:srgbClr val="10203C"/>
                     </a:solidFill>
                   </a:tcPr>
                 </a:tc>
@@ -10576,7 +10810,7 @@
                   </a:txBody>
                   <a:tcPr>
                     <a:solidFill>
-                      <a:srgbClr val="1E2248"/>
+                      <a:srgbClr val="0D1B32"/>
                     </a:solidFill>
                   </a:tcPr>
                 </a:tc>
@@ -10599,7 +10833,7 @@
                   </a:txBody>
                   <a:tcPr>
                     <a:solidFill>
-                      <a:srgbClr val="1E2248"/>
+                      <a:srgbClr val="0D1B32"/>
                     </a:solidFill>
                   </a:tcPr>
                 </a:tc>
@@ -10622,7 +10856,7 @@
                   </a:txBody>
                   <a:tcPr>
                     <a:solidFill>
-                      <a:srgbClr val="1E2248"/>
+                      <a:srgbClr val="0D1B32"/>
                     </a:solidFill>
                   </a:tcPr>
                 </a:tc>
@@ -10645,7 +10879,7 @@
                   </a:txBody>
                   <a:tcPr>
                     <a:solidFill>
-                      <a:srgbClr val="1E2248"/>
+                      <a:srgbClr val="0D1B32"/>
                     </a:solidFill>
                   </a:tcPr>
                 </a:tc>
@@ -10668,7 +10902,7 @@
                   </a:txBody>
                   <a:tcPr>
                     <a:solidFill>
-                      <a:srgbClr val="1E2248"/>
+                      <a:srgbClr val="0D1B32"/>
                     </a:solidFill>
                   </a:tcPr>
                 </a:tc>
@@ -10691,7 +10925,7 @@
                   </a:txBody>
                   <a:tcPr>
                     <a:solidFill>
-                      <a:srgbClr val="1E2248"/>
+                      <a:srgbClr val="0D1B32"/>
                     </a:solidFill>
                   </a:tcPr>
                 </a:tc>
@@ -10716,7 +10950,7 @@
                   </a:txBody>
                   <a:tcPr>
                     <a:solidFill>
-                      <a:srgbClr val="1A1E42"/>
+                      <a:srgbClr val="10203C"/>
                     </a:solidFill>
                   </a:tcPr>
                 </a:tc>
@@ -10739,7 +10973,7 @@
                   </a:txBody>
                   <a:tcPr>
                     <a:solidFill>
-                      <a:srgbClr val="1A1E42"/>
+                      <a:srgbClr val="10203C"/>
                     </a:solidFill>
                   </a:tcPr>
                 </a:tc>
@@ -10762,7 +10996,7 @@
                   </a:txBody>
                   <a:tcPr>
                     <a:solidFill>
-                      <a:srgbClr val="1A1E42"/>
+                      <a:srgbClr val="10203C"/>
                     </a:solidFill>
                   </a:tcPr>
                 </a:tc>
@@ -10785,7 +11019,7 @@
                   </a:txBody>
                   <a:tcPr>
                     <a:solidFill>
-                      <a:srgbClr val="1A1E42"/>
+                      <a:srgbClr val="10203C"/>
                     </a:solidFill>
                   </a:tcPr>
                 </a:tc>
@@ -10808,7 +11042,7 @@
                   </a:txBody>
                   <a:tcPr>
                     <a:solidFill>
-                      <a:srgbClr val="1A1E42"/>
+                      <a:srgbClr val="10203C"/>
                     </a:solidFill>
                   </a:tcPr>
                 </a:tc>
@@ -10831,7 +11065,7 @@
                   </a:txBody>
                   <a:tcPr>
                     <a:solidFill>
-                      <a:srgbClr val="1A1E42"/>
+                      <a:srgbClr val="10203C"/>
                     </a:solidFill>
                   </a:tcPr>
                 </a:tc>
@@ -10856,7 +11090,7 @@
                   </a:txBody>
                   <a:tcPr>
                     <a:solidFill>
-                      <a:srgbClr val="1E2248"/>
+                      <a:srgbClr val="0D1B32"/>
                     </a:solidFill>
                   </a:tcPr>
                 </a:tc>
@@ -10879,7 +11113,7 @@
                   </a:txBody>
                   <a:tcPr>
                     <a:solidFill>
-                      <a:srgbClr val="1E2248"/>
+                      <a:srgbClr val="0D1B32"/>
                     </a:solidFill>
                   </a:tcPr>
                 </a:tc>
@@ -10902,7 +11136,7 @@
                   </a:txBody>
                   <a:tcPr>
                     <a:solidFill>
-                      <a:srgbClr val="1E2248"/>
+                      <a:srgbClr val="0D1B32"/>
                     </a:solidFill>
                   </a:tcPr>
                 </a:tc>
@@ -10925,7 +11159,7 @@
                   </a:txBody>
                   <a:tcPr>
                     <a:solidFill>
-                      <a:srgbClr val="1E2248"/>
+                      <a:srgbClr val="0D1B32"/>
                     </a:solidFill>
                   </a:tcPr>
                 </a:tc>
@@ -10948,7 +11182,7 @@
                   </a:txBody>
                   <a:tcPr>
                     <a:solidFill>
-                      <a:srgbClr val="1E2248"/>
+                      <a:srgbClr val="0D1B32"/>
                     </a:solidFill>
                   </a:tcPr>
                 </a:tc>
@@ -10971,7 +11205,7 @@
                   </a:txBody>
                   <a:tcPr>
                     <a:solidFill>
-                      <a:srgbClr val="1E2248"/>
+                      <a:srgbClr val="0D1B32"/>
                     </a:solidFill>
                   </a:tcPr>
                 </a:tc>
@@ -10996,7 +11230,7 @@
                   </a:txBody>
                   <a:tcPr>
                     <a:solidFill>
-                      <a:srgbClr val="1A1E42"/>
+                      <a:srgbClr val="10203C"/>
                     </a:solidFill>
                   </a:tcPr>
                 </a:tc>
@@ -11019,7 +11253,7 @@
                   </a:txBody>
                   <a:tcPr>
                     <a:solidFill>
-                      <a:srgbClr val="1A1E42"/>
+                      <a:srgbClr val="10203C"/>
                     </a:solidFill>
                   </a:tcPr>
                 </a:tc>
@@ -11042,7 +11276,7 @@
                   </a:txBody>
                   <a:tcPr>
                     <a:solidFill>
-                      <a:srgbClr val="1A1E42"/>
+                      <a:srgbClr val="10203C"/>
                     </a:solidFill>
                   </a:tcPr>
                 </a:tc>
@@ -11065,7 +11299,7 @@
                   </a:txBody>
                   <a:tcPr>
                     <a:solidFill>
-                      <a:srgbClr val="1A1E42"/>
+                      <a:srgbClr val="10203C"/>
                     </a:solidFill>
                   </a:tcPr>
                 </a:tc>
@@ -11088,7 +11322,7 @@
                   </a:txBody>
                   <a:tcPr>
                     <a:solidFill>
-                      <a:srgbClr val="1A1E42"/>
+                      <a:srgbClr val="10203C"/>
                     </a:solidFill>
                   </a:tcPr>
                 </a:tc>
@@ -11111,7 +11345,7 @@
                   </a:txBody>
                   <a:tcPr>
                     <a:solidFill>
-                      <a:srgbClr val="1A1E42"/>
+                      <a:srgbClr val="10203C"/>
                     </a:solidFill>
                   </a:tcPr>
                 </a:tc>
@@ -11136,7 +11370,7 @@
                   </a:txBody>
                   <a:tcPr>
                     <a:solidFill>
-                      <a:srgbClr val="1E2248"/>
+                      <a:srgbClr val="0D1B32"/>
                     </a:solidFill>
                   </a:tcPr>
                 </a:tc>
@@ -11159,7 +11393,7 @@
                   </a:txBody>
                   <a:tcPr>
                     <a:solidFill>
-                      <a:srgbClr val="1E2248"/>
+                      <a:srgbClr val="0D1B32"/>
                     </a:solidFill>
                   </a:tcPr>
                 </a:tc>
@@ -11182,7 +11416,7 @@
                   </a:txBody>
                   <a:tcPr>
                     <a:solidFill>
-                      <a:srgbClr val="1E2248"/>
+                      <a:srgbClr val="0D1B32"/>
                     </a:solidFill>
                   </a:tcPr>
                 </a:tc>
@@ -11205,7 +11439,7 @@
                   </a:txBody>
                   <a:tcPr>
                     <a:solidFill>
-                      <a:srgbClr val="1E2248"/>
+                      <a:srgbClr val="0D1B32"/>
                     </a:solidFill>
                   </a:tcPr>
                 </a:tc>
@@ -11228,7 +11462,7 @@
                   </a:txBody>
                   <a:tcPr>
                     <a:solidFill>
-                      <a:srgbClr val="1E2248"/>
+                      <a:srgbClr val="0D1B32"/>
                     </a:solidFill>
                   </a:tcPr>
                 </a:tc>
@@ -11251,7 +11485,7 @@
                   </a:txBody>
                   <a:tcPr>
                     <a:solidFill>
-                      <a:srgbClr val="1E2248"/>
+                      <a:srgbClr val="0D1B32"/>
                     </a:solidFill>
                   </a:tcPr>
                 </a:tc>
@@ -11276,7 +11510,7 @@
                   </a:txBody>
                   <a:tcPr>
                     <a:solidFill>
-                      <a:srgbClr val="1A1E42"/>
+                      <a:srgbClr val="10203C"/>
                     </a:solidFill>
                   </a:tcPr>
                 </a:tc>
@@ -11299,7 +11533,7 @@
                   </a:txBody>
                   <a:tcPr>
                     <a:solidFill>
-                      <a:srgbClr val="1A1E42"/>
+                      <a:srgbClr val="10203C"/>
                     </a:solidFill>
                   </a:tcPr>
                 </a:tc>
@@ -11322,7 +11556,7 @@
                   </a:txBody>
                   <a:tcPr>
                     <a:solidFill>
-                      <a:srgbClr val="1A1E42"/>
+                      <a:srgbClr val="10203C"/>
                     </a:solidFill>
                   </a:tcPr>
                 </a:tc>
@@ -11345,7 +11579,7 @@
                   </a:txBody>
                   <a:tcPr>
                     <a:solidFill>
-                      <a:srgbClr val="1A1E42"/>
+                      <a:srgbClr val="10203C"/>
                     </a:solidFill>
                   </a:tcPr>
                 </a:tc>
@@ -11368,7 +11602,7 @@
                   </a:txBody>
                   <a:tcPr>
                     <a:solidFill>
-                      <a:srgbClr val="1A1E42"/>
+                      <a:srgbClr val="10203C"/>
                     </a:solidFill>
                   </a:tcPr>
                 </a:tc>
@@ -11391,7 +11625,7 @@
                   </a:txBody>
                   <a:tcPr>
                     <a:solidFill>
-                      <a:srgbClr val="1A1E42"/>
+                      <a:srgbClr val="10203C"/>
                     </a:solidFill>
                   </a:tcPr>
                 </a:tc>
@@ -11416,7 +11650,7 @@
                   </a:txBody>
                   <a:tcPr>
                     <a:solidFill>
-                      <a:srgbClr val="1E2248"/>
+                      <a:srgbClr val="0D1B32"/>
                     </a:solidFill>
                   </a:tcPr>
                 </a:tc>
@@ -11439,7 +11673,7 @@
                   </a:txBody>
                   <a:tcPr>
                     <a:solidFill>
-                      <a:srgbClr val="1E2248"/>
+                      <a:srgbClr val="0D1B32"/>
                     </a:solidFill>
                   </a:tcPr>
                 </a:tc>
@@ -11462,7 +11696,7 @@
                   </a:txBody>
                   <a:tcPr>
                     <a:solidFill>
-                      <a:srgbClr val="1E2248"/>
+                      <a:srgbClr val="0D1B32"/>
                     </a:solidFill>
                   </a:tcPr>
                 </a:tc>
@@ -11485,7 +11719,7 @@
                   </a:txBody>
                   <a:tcPr>
                     <a:solidFill>
-                      <a:srgbClr val="1E2248"/>
+                      <a:srgbClr val="0D1B32"/>
                     </a:solidFill>
                   </a:tcPr>
                 </a:tc>
@@ -11508,7 +11742,7 @@
                   </a:txBody>
                   <a:tcPr>
                     <a:solidFill>
-                      <a:srgbClr val="1E2248"/>
+                      <a:srgbClr val="0D1B32"/>
                     </a:solidFill>
                   </a:tcPr>
                 </a:tc>
@@ -11531,7 +11765,7 @@
                   </a:txBody>
                   <a:tcPr>
                     <a:solidFill>
-                      <a:srgbClr val="1E2248"/>
+                      <a:srgbClr val="0D1B32"/>
                     </a:solidFill>
                   </a:tcPr>
                 </a:tc>
@@ -11556,7 +11790,7 @@
                   </a:txBody>
                   <a:tcPr>
                     <a:solidFill>
-                      <a:srgbClr val="1A1E42"/>
+                      <a:srgbClr val="10203C"/>
                     </a:solidFill>
                   </a:tcPr>
                 </a:tc>
@@ -11579,7 +11813,7 @@
                   </a:txBody>
                   <a:tcPr>
                     <a:solidFill>
-                      <a:srgbClr val="1A1E42"/>
+                      <a:srgbClr val="10203C"/>
                     </a:solidFill>
                   </a:tcPr>
                 </a:tc>
@@ -11602,7 +11836,7 @@
                   </a:txBody>
                   <a:tcPr>
                     <a:solidFill>
-                      <a:srgbClr val="1A1E42"/>
+                      <a:srgbClr val="10203C"/>
                     </a:solidFill>
                   </a:tcPr>
                 </a:tc>
@@ -11625,7 +11859,7 @@
                   </a:txBody>
                   <a:tcPr>
                     <a:solidFill>
-                      <a:srgbClr val="1A1E42"/>
+                      <a:srgbClr val="10203C"/>
                     </a:solidFill>
                   </a:tcPr>
                 </a:tc>
@@ -11648,7 +11882,7 @@
                   </a:txBody>
                   <a:tcPr>
                     <a:solidFill>
-                      <a:srgbClr val="1A1E42"/>
+                      <a:srgbClr val="10203C"/>
                     </a:solidFill>
                   </a:tcPr>
                 </a:tc>
@@ -11671,7 +11905,7 @@
                   </a:txBody>
                   <a:tcPr>
                     <a:solidFill>
-                      <a:srgbClr val="1A1E42"/>
+                      <a:srgbClr val="10203C"/>
                     </a:solidFill>
                   </a:tcPr>
                 </a:tc>
@@ -11706,7 +11940,7 @@
             <a:r>
               <a:rPr sz="750" b="0" i="1">
                 <a:solidFill>
-                  <a:srgbClr val="8892AA"/>
+                  <a:srgbClr val="7085A8"/>
                 </a:solidFill>
                 <a:latin typeface="Calibri"/>
               </a:rPr>
@@ -11776,7 +12010,7 @@
             <a:r>
               <a:rPr sz="700" b="0" i="0">
                 <a:solidFill>
-                  <a:srgbClr val="8892AA"/>
+                  <a:srgbClr val="7085A8"/>
                 </a:solidFill>
                 <a:latin typeface="Calibri"/>
               </a:rPr>
@@ -11811,11 +12045,89 @@
             <a:r>
               <a:rPr sz="800" b="0" i="0">
                 <a:solidFill>
-                  <a:srgbClr val="8892AA"/>
+                  <a:srgbClr val="7085A8"/>
                 </a:solidFill>
                 <a:latin typeface="Calibri"/>
               </a:rPr>
               <a:t>12 / 20</a:t>
+            </a:r>
+          </a:p>
+        </p:txBody>
+      </p:sp>
+      <p:sp>
+        <p:nvSpPr>
+          <p:cNvPr id="10" name="Oval 9"/>
+          <p:cNvSpPr/>
+          <p:nvPr/>
+        </p:nvSpPr>
+        <p:spPr>
+          <a:xfrm>
+            <a:off x="9756648" y="3904488"/>
+            <a:ext cx="1920240" cy="1920240"/>
+          </a:xfrm>
+          <a:prstGeom prst="ellipse">
+            <a:avLst/>
+          </a:prstGeom>
+          <a:noFill/>
+          <a:ln w="25400">
+            <a:solidFill>
+              <a:srgbClr val="E7CC59"/>
+            </a:solidFill>
+          </a:ln>
+        </p:spPr>
+        <p:style>
+          <a:lnRef idx="1">
+            <a:schemeClr val="accent1"/>
+          </a:lnRef>
+          <a:fillRef idx="3">
+            <a:schemeClr val="accent1"/>
+          </a:fillRef>
+          <a:effectRef idx="2">
+            <a:schemeClr val="accent1"/>
+          </a:effectRef>
+          <a:fontRef idx="minor">
+            <a:schemeClr val="lt1"/>
+          </a:fontRef>
+        </p:style>
+        <p:txBody>
+          <a:bodyPr rtlCol="0" anchor="ctr"/>
+          <a:lstStyle/>
+          <a:p>
+            <a:pPr algn="ctr"/>
+          </a:p>
+        </p:txBody>
+      </p:sp>
+      <p:sp>
+        <p:nvSpPr>
+          <p:cNvPr id="11" name="TextBox 10"/>
+          <p:cNvSpPr txBox="1"/>
+          <p:nvPr/>
+        </p:nvSpPr>
+        <p:spPr>
+          <a:xfrm>
+            <a:off x="9829800" y="3831336"/>
+            <a:ext cx="1773936" cy="1920240"/>
+          </a:xfrm>
+          <a:prstGeom prst="rect">
+            <a:avLst/>
+          </a:prstGeom>
+          <a:noFill/>
+        </p:spPr>
+        <p:txBody>
+          <a:bodyPr wrap="square">
+            <a:spAutoFit/>
+          </a:bodyPr>
+          <a:lstStyle/>
+          <a:p>
+            <a:pPr algn="ctr"/>
+            <a:r>
+              <a:rPr sz="11000" b="1" i="0">
+                <a:solidFill>
+                  <a:srgbClr val="142A4A"/>
+                </a:solidFill>
+                <a:latin typeface="Calibri"/>
+              </a:rPr>
+              <a:t>V</a:t>
             </a:r>
           </a:p>
         </p:txBody>
@@ -11834,7 +12146,7 @@
     <p:bg>
       <p:bgPr>
         <a:solidFill>
-          <a:srgbClr val="242852"/>
+          <a:srgbClr val="0A1628"/>
         </a:solidFill>
         <a:effectLst/>
       </p:bgPr>
@@ -11907,7 +12219,7 @@
             <a:r>
               <a:rPr sz="1000" b="0" i="1">
                 <a:solidFill>
-                  <a:srgbClr val="8FA1CF"/>
+                  <a:srgbClr val="6B9BDB"/>
                 </a:solidFill>
                 <a:latin typeface="Calibri"/>
               </a:rPr>
@@ -11974,7 +12286,7 @@
             <a:avLst/>
           </a:prstGeom>
           <a:solidFill>
-            <a:srgbClr val="1A1E42"/>
+            <a:srgbClr val="10203C"/>
           </a:solidFill>
           <a:ln>
             <a:noFill/>
@@ -12017,7 +12329,7 @@
             <a:avLst/>
           </a:prstGeom>
           <a:solidFill>
-            <a:srgbClr val="4A66AC"/>
+            <a:srgbClr val="3D6FCE"/>
           </a:solidFill>
           <a:ln>
             <a:noFill/>
@@ -12141,7 +12453,7 @@
             <a:r>
               <a:rPr sz="850" b="0" i="0">
                 <a:solidFill>
-                  <a:srgbClr val="8892AA"/>
+                  <a:srgbClr val="7085A8"/>
                 </a:solidFill>
                 <a:latin typeface="Calibri"/>
               </a:rPr>
@@ -12165,7 +12477,7 @@
             <a:avLst/>
           </a:prstGeom>
           <a:solidFill>
-            <a:srgbClr val="1A1E42"/>
+            <a:srgbClr val="10203C"/>
           </a:solidFill>
           <a:ln>
             <a:noFill/>
@@ -12208,7 +12520,7 @@
             <a:avLst/>
           </a:prstGeom>
           <a:solidFill>
-            <a:srgbClr val="4A66AC"/>
+            <a:srgbClr val="3D6FCE"/>
           </a:solidFill>
           <a:ln>
             <a:noFill/>
@@ -12332,7 +12644,7 @@
             <a:r>
               <a:rPr sz="850" b="0" i="0">
                 <a:solidFill>
-                  <a:srgbClr val="8892AA"/>
+                  <a:srgbClr val="7085A8"/>
                 </a:solidFill>
                 <a:latin typeface="Calibri"/>
               </a:rPr>
@@ -12356,7 +12668,7 @@
             <a:avLst/>
           </a:prstGeom>
           <a:solidFill>
-            <a:srgbClr val="1A1E42"/>
+            <a:srgbClr val="10203C"/>
           </a:solidFill>
           <a:ln>
             <a:noFill/>
@@ -12399,7 +12711,7 @@
             <a:avLst/>
           </a:prstGeom>
           <a:solidFill>
-            <a:srgbClr val="4A66AC"/>
+            <a:srgbClr val="3D6FCE"/>
           </a:solidFill>
           <a:ln>
             <a:noFill/>
@@ -12523,7 +12835,7 @@
             <a:r>
               <a:rPr sz="850" b="0" i="0">
                 <a:solidFill>
-                  <a:srgbClr val="8892AA"/>
+                  <a:srgbClr val="7085A8"/>
                 </a:solidFill>
                 <a:latin typeface="Calibri"/>
               </a:rPr>
@@ -12547,7 +12859,7 @@
             <a:avLst/>
           </a:prstGeom>
           <a:solidFill>
-            <a:srgbClr val="1A1E42"/>
+            <a:srgbClr val="10203C"/>
           </a:solidFill>
           <a:ln>
             <a:noFill/>
@@ -12590,7 +12902,7 @@
             <a:avLst/>
           </a:prstGeom>
           <a:solidFill>
-            <a:srgbClr val="4A66AC"/>
+            <a:srgbClr val="3D6FCE"/>
           </a:solidFill>
           <a:ln>
             <a:noFill/>
@@ -12714,7 +13026,7 @@
             <a:r>
               <a:rPr sz="850" b="0" i="0">
                 <a:solidFill>
-                  <a:srgbClr val="8892AA"/>
+                  <a:srgbClr val="7085A8"/>
                 </a:solidFill>
                 <a:latin typeface="Calibri"/>
               </a:rPr>
@@ -12738,7 +13050,7 @@
             <a:avLst/>
           </a:prstGeom>
           <a:solidFill>
-            <a:srgbClr val="1A1E42"/>
+            <a:srgbClr val="10203C"/>
           </a:solidFill>
           <a:ln>
             <a:noFill/>
@@ -12781,7 +13093,7 @@
             <a:avLst/>
           </a:prstGeom>
           <a:solidFill>
-            <a:srgbClr val="4A66AC"/>
+            <a:srgbClr val="3D6FCE"/>
           </a:solidFill>
           <a:ln>
             <a:noFill/>
@@ -12905,7 +13217,7 @@
             <a:r>
               <a:rPr sz="850" b="0" i="0">
                 <a:solidFill>
-                  <a:srgbClr val="8892AA"/>
+                  <a:srgbClr val="7085A8"/>
                 </a:solidFill>
                 <a:latin typeface="Calibri"/>
               </a:rPr>
@@ -12929,7 +13241,7 @@
             <a:avLst/>
           </a:prstGeom>
           <a:solidFill>
-            <a:srgbClr val="1A1E42"/>
+            <a:srgbClr val="10203C"/>
           </a:solidFill>
           <a:ln>
             <a:noFill/>
@@ -12972,7 +13284,7 @@
             <a:avLst/>
           </a:prstGeom>
           <a:solidFill>
-            <a:srgbClr val="4A66AC"/>
+            <a:srgbClr val="3D6FCE"/>
           </a:solidFill>
           <a:ln>
             <a:noFill/>
@@ -13096,7 +13408,7 @@
             <a:r>
               <a:rPr sz="850" b="0" i="0">
                 <a:solidFill>
-                  <a:srgbClr val="8892AA"/>
+                  <a:srgbClr val="7085A8"/>
                 </a:solidFill>
                 <a:latin typeface="Calibri"/>
               </a:rPr>
@@ -13120,7 +13432,7 @@
             <a:avLst/>
           </a:prstGeom>
           <a:solidFill>
-            <a:srgbClr val="1A1E42"/>
+            <a:srgbClr val="10203C"/>
           </a:solidFill>
           <a:ln>
             <a:noFill/>
@@ -13163,7 +13475,7 @@
             <a:avLst/>
           </a:prstGeom>
           <a:solidFill>
-            <a:srgbClr val="4A66AC"/>
+            <a:srgbClr val="3D6FCE"/>
           </a:solidFill>
           <a:ln>
             <a:noFill/>
@@ -13287,7 +13599,7 @@
             <a:r>
               <a:rPr sz="850" b="0" i="0">
                 <a:solidFill>
-                  <a:srgbClr val="8892AA"/>
+                  <a:srgbClr val="7085A8"/>
                 </a:solidFill>
                 <a:latin typeface="Calibri"/>
               </a:rPr>
@@ -13311,7 +13623,7 @@
             <a:avLst/>
           </a:prstGeom>
           <a:solidFill>
-            <a:srgbClr val="1A1E42"/>
+            <a:srgbClr val="10203C"/>
           </a:solidFill>
           <a:ln>
             <a:noFill/>
@@ -13354,7 +13666,7 @@
             <a:avLst/>
           </a:prstGeom>
           <a:solidFill>
-            <a:srgbClr val="4A66AC"/>
+            <a:srgbClr val="3D6FCE"/>
           </a:solidFill>
           <a:ln>
             <a:noFill/>
@@ -13478,7 +13790,7 @@
             <a:r>
               <a:rPr sz="850" b="0" i="0">
                 <a:solidFill>
-                  <a:srgbClr val="8892AA"/>
+                  <a:srgbClr val="7085A8"/>
                 </a:solidFill>
                 <a:latin typeface="Calibri"/>
               </a:rPr>
@@ -13502,7 +13814,7 @@
             <a:avLst/>
           </a:prstGeom>
           <a:solidFill>
-            <a:srgbClr val="1A1E42"/>
+            <a:srgbClr val="10203C"/>
           </a:solidFill>
           <a:ln>
             <a:noFill/>
@@ -13545,7 +13857,7 @@
             <a:avLst/>
           </a:prstGeom>
           <a:solidFill>
-            <a:srgbClr val="4A66AC"/>
+            <a:srgbClr val="3D6FCE"/>
           </a:solidFill>
           <a:ln>
             <a:noFill/>
@@ -13669,7 +13981,7 @@
             <a:r>
               <a:rPr sz="850" b="0" i="0">
                 <a:solidFill>
-                  <a:srgbClr val="8892AA"/>
+                  <a:srgbClr val="7085A8"/>
                 </a:solidFill>
                 <a:latin typeface="Calibri"/>
               </a:rPr>
@@ -13693,7 +14005,7 @@
             <a:avLst/>
           </a:prstGeom>
           <a:solidFill>
-            <a:srgbClr val="1A1E42"/>
+            <a:srgbClr val="10203C"/>
           </a:solidFill>
           <a:ln>
             <a:noFill/>
@@ -13736,7 +14048,7 @@
             <a:avLst/>
           </a:prstGeom>
           <a:solidFill>
-            <a:srgbClr val="4A66AC"/>
+            <a:srgbClr val="3D6FCE"/>
           </a:solidFill>
           <a:ln>
             <a:noFill/>
@@ -13860,7 +14172,7 @@
             <a:r>
               <a:rPr sz="850" b="0" i="0">
                 <a:solidFill>
-                  <a:srgbClr val="8892AA"/>
+                  <a:srgbClr val="7085A8"/>
                 </a:solidFill>
                 <a:latin typeface="Calibri"/>
               </a:rPr>
@@ -13884,7 +14196,7 @@
             <a:avLst/>
           </a:prstGeom>
           <a:solidFill>
-            <a:srgbClr val="1A1E42"/>
+            <a:srgbClr val="10203C"/>
           </a:solidFill>
           <a:ln>
             <a:noFill/>
@@ -13927,7 +14239,7 @@
             <a:avLst/>
           </a:prstGeom>
           <a:solidFill>
-            <a:srgbClr val="4A66AC"/>
+            <a:srgbClr val="3D6FCE"/>
           </a:solidFill>
           <a:ln>
             <a:noFill/>
@@ -14051,7 +14363,7 @@
             <a:r>
               <a:rPr sz="850" b="0" i="0">
                 <a:solidFill>
-                  <a:srgbClr val="8892AA"/>
+                  <a:srgbClr val="7085A8"/>
                 </a:solidFill>
                 <a:latin typeface="Calibri"/>
               </a:rPr>
@@ -14121,7 +14433,7 @@
             <a:r>
               <a:rPr sz="700" b="0" i="0">
                 <a:solidFill>
-                  <a:srgbClr val="8892AA"/>
+                  <a:srgbClr val="7085A8"/>
                 </a:solidFill>
                 <a:latin typeface="Calibri"/>
               </a:rPr>
@@ -14156,11 +14468,89 @@
             <a:r>
               <a:rPr sz="800" b="0" i="0">
                 <a:solidFill>
-                  <a:srgbClr val="8892AA"/>
+                  <a:srgbClr val="7085A8"/>
                 </a:solidFill>
                 <a:latin typeface="Calibri"/>
               </a:rPr>
               <a:t>13 / 20</a:t>
+            </a:r>
+          </a:p>
+        </p:txBody>
+      </p:sp>
+      <p:sp>
+        <p:nvSpPr>
+          <p:cNvPr id="63" name="Oval 62"/>
+          <p:cNvSpPr/>
+          <p:nvPr/>
+        </p:nvSpPr>
+        <p:spPr>
+          <a:xfrm>
+            <a:off x="9756648" y="3904488"/>
+            <a:ext cx="1920240" cy="1920240"/>
+          </a:xfrm>
+          <a:prstGeom prst="ellipse">
+            <a:avLst/>
+          </a:prstGeom>
+          <a:noFill/>
+          <a:ln w="25400">
+            <a:solidFill>
+              <a:srgbClr val="E7CC59"/>
+            </a:solidFill>
+          </a:ln>
+        </p:spPr>
+        <p:style>
+          <a:lnRef idx="1">
+            <a:schemeClr val="accent1"/>
+          </a:lnRef>
+          <a:fillRef idx="3">
+            <a:schemeClr val="accent1"/>
+          </a:fillRef>
+          <a:effectRef idx="2">
+            <a:schemeClr val="accent1"/>
+          </a:effectRef>
+          <a:fontRef idx="minor">
+            <a:schemeClr val="lt1"/>
+          </a:fontRef>
+        </p:style>
+        <p:txBody>
+          <a:bodyPr rtlCol="0" anchor="ctr"/>
+          <a:lstStyle/>
+          <a:p>
+            <a:pPr algn="ctr"/>
+          </a:p>
+        </p:txBody>
+      </p:sp>
+      <p:sp>
+        <p:nvSpPr>
+          <p:cNvPr id="64" name="TextBox 63"/>
+          <p:cNvSpPr txBox="1"/>
+          <p:nvPr/>
+        </p:nvSpPr>
+        <p:spPr>
+          <a:xfrm>
+            <a:off x="9829800" y="3831336"/>
+            <a:ext cx="1773936" cy="1920240"/>
+          </a:xfrm>
+          <a:prstGeom prst="rect">
+            <a:avLst/>
+          </a:prstGeom>
+          <a:noFill/>
+        </p:spPr>
+        <p:txBody>
+          <a:bodyPr wrap="square">
+            <a:spAutoFit/>
+          </a:bodyPr>
+          <a:lstStyle/>
+          <a:p>
+            <a:pPr algn="ctr"/>
+            <a:r>
+              <a:rPr sz="11000" b="1" i="0">
+                <a:solidFill>
+                  <a:srgbClr val="142A4A"/>
+                </a:solidFill>
+                <a:latin typeface="Calibri"/>
+              </a:rPr>
+              <a:t>V</a:t>
             </a:r>
           </a:p>
         </p:txBody>
@@ -14179,7 +14569,7 @@
     <p:bg>
       <p:bgPr>
         <a:solidFill>
-          <a:srgbClr val="242852"/>
+          <a:srgbClr val="0A1628"/>
         </a:solidFill>
         <a:effectLst/>
       </p:bgPr>
@@ -14252,7 +14642,7 @@
             <a:r>
               <a:rPr sz="1000" b="0" i="1">
                 <a:solidFill>
-                  <a:srgbClr val="8FA1CF"/>
+                  <a:srgbClr val="6B9BDB"/>
                 </a:solidFill>
                 <a:latin typeface="Calibri"/>
               </a:rPr>
@@ -14437,7 +14827,7 @@
             <a:r>
               <a:rPr sz="700" b="0" i="0">
                 <a:solidFill>
-                  <a:srgbClr val="8892AA"/>
+                  <a:srgbClr val="7085A8"/>
                 </a:solidFill>
                 <a:latin typeface="Calibri"/>
               </a:rPr>
@@ -14472,11 +14862,89 @@
             <a:r>
               <a:rPr sz="800" b="0" i="0">
                 <a:solidFill>
-                  <a:srgbClr val="8892AA"/>
+                  <a:srgbClr val="7085A8"/>
                 </a:solidFill>
                 <a:latin typeface="Calibri"/>
               </a:rPr>
               <a:t>14 / 20</a:t>
+            </a:r>
+          </a:p>
+        </p:txBody>
+      </p:sp>
+      <p:sp>
+        <p:nvSpPr>
+          <p:cNvPr id="12" name="Oval 11"/>
+          <p:cNvSpPr/>
+          <p:nvPr/>
+        </p:nvSpPr>
+        <p:spPr>
+          <a:xfrm>
+            <a:off x="9756648" y="3904488"/>
+            <a:ext cx="1920240" cy="1920240"/>
+          </a:xfrm>
+          <a:prstGeom prst="ellipse">
+            <a:avLst/>
+          </a:prstGeom>
+          <a:noFill/>
+          <a:ln w="25400">
+            <a:solidFill>
+              <a:srgbClr val="E7CC59"/>
+            </a:solidFill>
+          </a:ln>
+        </p:spPr>
+        <p:style>
+          <a:lnRef idx="1">
+            <a:schemeClr val="accent1"/>
+          </a:lnRef>
+          <a:fillRef idx="3">
+            <a:schemeClr val="accent1"/>
+          </a:fillRef>
+          <a:effectRef idx="2">
+            <a:schemeClr val="accent1"/>
+          </a:effectRef>
+          <a:fontRef idx="minor">
+            <a:schemeClr val="lt1"/>
+          </a:fontRef>
+        </p:style>
+        <p:txBody>
+          <a:bodyPr rtlCol="0" anchor="ctr"/>
+          <a:lstStyle/>
+          <a:p>
+            <a:pPr algn="ctr"/>
+          </a:p>
+        </p:txBody>
+      </p:sp>
+      <p:sp>
+        <p:nvSpPr>
+          <p:cNvPr id="13" name="TextBox 12"/>
+          <p:cNvSpPr txBox="1"/>
+          <p:nvPr/>
+        </p:nvSpPr>
+        <p:spPr>
+          <a:xfrm>
+            <a:off x="9829800" y="3831336"/>
+            <a:ext cx="1773936" cy="1920240"/>
+          </a:xfrm>
+          <a:prstGeom prst="rect">
+            <a:avLst/>
+          </a:prstGeom>
+          <a:noFill/>
+        </p:spPr>
+        <p:txBody>
+          <a:bodyPr wrap="square">
+            <a:spAutoFit/>
+          </a:bodyPr>
+          <a:lstStyle/>
+          <a:p>
+            <a:pPr algn="ctr"/>
+            <a:r>
+              <a:rPr sz="11000" b="1" i="0">
+                <a:solidFill>
+                  <a:srgbClr val="142A4A"/>
+                </a:solidFill>
+                <a:latin typeface="Calibri"/>
+              </a:rPr>
+              <a:t>V</a:t>
             </a:r>
           </a:p>
         </p:txBody>
@@ -14495,7 +14963,7 @@
     <p:bg>
       <p:bgPr>
         <a:solidFill>
-          <a:srgbClr val="242852"/>
+          <a:srgbClr val="0A1628"/>
         </a:solidFill>
         <a:effectLst/>
       </p:bgPr>
@@ -14568,7 +15036,7 @@
             <a:r>
               <a:rPr sz="1000" b="0" i="1">
                 <a:solidFill>
-                  <a:srgbClr val="8FA1CF"/>
+                  <a:srgbClr val="6B9BDB"/>
                 </a:solidFill>
                 <a:latin typeface="Calibri"/>
               </a:rPr>
@@ -14689,7 +15157,7 @@
             <a:r>
               <a:rPr sz="1000" b="1" i="0">
                 <a:solidFill>
-                  <a:srgbClr val="0F1125"/>
+                  <a:srgbClr val="060E1A"/>
                 </a:solidFill>
                 <a:latin typeface="Calibri"/>
               </a:rPr>
@@ -14713,7 +15181,7 @@
             <a:avLst/>
           </a:prstGeom>
           <a:solidFill>
-            <a:srgbClr val="1A1E42"/>
+            <a:srgbClr val="10203C"/>
           </a:solidFill>
           <a:ln>
             <a:noFill/>
@@ -14767,7 +15235,7 @@
             <a:r>
               <a:rPr sz="800" b="0" i="0">
                 <a:solidFill>
-                  <a:srgbClr val="8FA1CF"/>
+                  <a:srgbClr val="6B9BDB"/>
                 </a:solidFill>
                 <a:latin typeface="Calibri"/>
               </a:rPr>
@@ -14826,7 +15294,7 @@
             <a:avLst/>
           </a:prstGeom>
           <a:solidFill>
-            <a:srgbClr val="0F1125"/>
+            <a:srgbClr val="060E1A"/>
           </a:solidFill>
           <a:ln>
             <a:noFill/>
@@ -14880,7 +15348,7 @@
             <a:r>
               <a:rPr sz="800" b="0" i="0">
                 <a:solidFill>
-                  <a:srgbClr val="8FA1CF"/>
+                  <a:srgbClr val="6B9BDB"/>
                 </a:solidFill>
                 <a:latin typeface="Calibri"/>
               </a:rPr>
@@ -14939,7 +15407,7 @@
             <a:avLst/>
           </a:prstGeom>
           <a:solidFill>
-            <a:srgbClr val="0F1125"/>
+            <a:srgbClr val="060E1A"/>
           </a:solidFill>
           <a:ln>
             <a:noFill/>
@@ -14993,7 +15461,7 @@
             <a:r>
               <a:rPr sz="800" b="0" i="0">
                 <a:solidFill>
-                  <a:srgbClr val="8FA1CF"/>
+                  <a:srgbClr val="6B9BDB"/>
                 </a:solidFill>
                 <a:latin typeface="Calibri"/>
               </a:rPr>
@@ -15052,7 +15520,7 @@
             <a:avLst/>
           </a:prstGeom>
           <a:solidFill>
-            <a:srgbClr val="0F1125"/>
+            <a:srgbClr val="060E1A"/>
           </a:solidFill>
           <a:ln>
             <a:noFill/>
@@ -15106,7 +15574,7 @@
             <a:r>
               <a:rPr sz="800" b="0" i="0">
                 <a:solidFill>
-                  <a:srgbClr val="8FA1CF"/>
+                  <a:srgbClr val="6B9BDB"/>
                 </a:solidFill>
                 <a:latin typeface="Calibri"/>
               </a:rPr>
@@ -15254,7 +15722,7 @@
             <a:r>
               <a:rPr sz="1000" b="1" i="0">
                 <a:solidFill>
-                  <a:srgbClr val="0F1125"/>
+                  <a:srgbClr val="060E1A"/>
                 </a:solidFill>
                 <a:latin typeface="Calibri"/>
               </a:rPr>
@@ -15278,7 +15746,7 @@
             <a:avLst/>
           </a:prstGeom>
           <a:solidFill>
-            <a:srgbClr val="1A1E42"/>
+            <a:srgbClr val="10203C"/>
           </a:solidFill>
           <a:ln>
             <a:noFill/>
@@ -15332,7 +15800,7 @@
             <a:r>
               <a:rPr sz="800" b="0" i="0">
                 <a:solidFill>
-                  <a:srgbClr val="8FA1CF"/>
+                  <a:srgbClr val="6B9BDB"/>
                 </a:solidFill>
                 <a:latin typeface="Calibri"/>
               </a:rPr>
@@ -15391,7 +15859,7 @@
             <a:avLst/>
           </a:prstGeom>
           <a:solidFill>
-            <a:srgbClr val="0F1125"/>
+            <a:srgbClr val="060E1A"/>
           </a:solidFill>
           <a:ln>
             <a:noFill/>
@@ -15445,7 +15913,7 @@
             <a:r>
               <a:rPr sz="800" b="0" i="0">
                 <a:solidFill>
-                  <a:srgbClr val="8FA1CF"/>
+                  <a:srgbClr val="6B9BDB"/>
                 </a:solidFill>
                 <a:latin typeface="Calibri"/>
               </a:rPr>
@@ -15504,7 +15972,7 @@
             <a:avLst/>
           </a:prstGeom>
           <a:solidFill>
-            <a:srgbClr val="0F1125"/>
+            <a:srgbClr val="060E1A"/>
           </a:solidFill>
           <a:ln>
             <a:noFill/>
@@ -15558,7 +16026,7 @@
             <a:r>
               <a:rPr sz="800" b="0" i="0">
                 <a:solidFill>
-                  <a:srgbClr val="8FA1CF"/>
+                  <a:srgbClr val="6B9BDB"/>
                 </a:solidFill>
                 <a:latin typeface="Calibri"/>
               </a:rPr>
@@ -15617,7 +16085,7 @@
             <a:avLst/>
           </a:prstGeom>
           <a:solidFill>
-            <a:srgbClr val="0F1125"/>
+            <a:srgbClr val="060E1A"/>
           </a:solidFill>
           <a:ln>
             <a:noFill/>
@@ -15671,7 +16139,7 @@
             <a:r>
               <a:rPr sz="800" b="0" i="0">
                 <a:solidFill>
-                  <a:srgbClr val="8FA1CF"/>
+                  <a:srgbClr val="6B9BDB"/>
                 </a:solidFill>
                 <a:latin typeface="Calibri"/>
               </a:rPr>
@@ -15819,7 +16287,7 @@
             <a:r>
               <a:rPr sz="1000" b="1" i="0">
                 <a:solidFill>
-                  <a:srgbClr val="0F1125"/>
+                  <a:srgbClr val="060E1A"/>
                 </a:solidFill>
                 <a:latin typeface="Calibri"/>
               </a:rPr>
@@ -15843,7 +16311,7 @@
             <a:avLst/>
           </a:prstGeom>
           <a:solidFill>
-            <a:srgbClr val="1A1E42"/>
+            <a:srgbClr val="10203C"/>
           </a:solidFill>
           <a:ln>
             <a:noFill/>
@@ -15897,7 +16365,7 @@
             <a:r>
               <a:rPr sz="800" b="0" i="0">
                 <a:solidFill>
-                  <a:srgbClr val="8FA1CF"/>
+                  <a:srgbClr val="6B9BDB"/>
                 </a:solidFill>
                 <a:latin typeface="Calibri"/>
               </a:rPr>
@@ -15956,7 +16424,7 @@
             <a:avLst/>
           </a:prstGeom>
           <a:solidFill>
-            <a:srgbClr val="0F1125"/>
+            <a:srgbClr val="060E1A"/>
           </a:solidFill>
           <a:ln>
             <a:noFill/>
@@ -16010,7 +16478,7 @@
             <a:r>
               <a:rPr sz="800" b="0" i="0">
                 <a:solidFill>
-                  <a:srgbClr val="8FA1CF"/>
+                  <a:srgbClr val="6B9BDB"/>
                 </a:solidFill>
                 <a:latin typeface="Calibri"/>
               </a:rPr>
@@ -16069,7 +16537,7 @@
             <a:avLst/>
           </a:prstGeom>
           <a:solidFill>
-            <a:srgbClr val="0F1125"/>
+            <a:srgbClr val="060E1A"/>
           </a:solidFill>
           <a:ln>
             <a:noFill/>
@@ -16123,7 +16591,7 @@
             <a:r>
               <a:rPr sz="800" b="0" i="0">
                 <a:solidFill>
-                  <a:srgbClr val="8FA1CF"/>
+                  <a:srgbClr val="6B9BDB"/>
                 </a:solidFill>
                 <a:latin typeface="Calibri"/>
               </a:rPr>
@@ -16182,7 +16650,7 @@
             <a:avLst/>
           </a:prstGeom>
           <a:solidFill>
-            <a:srgbClr val="0F1125"/>
+            <a:srgbClr val="060E1A"/>
           </a:solidFill>
           <a:ln>
             <a:noFill/>
@@ -16236,7 +16704,7 @@
             <a:r>
               <a:rPr sz="800" b="0" i="0">
                 <a:solidFill>
-                  <a:srgbClr val="8FA1CF"/>
+                  <a:srgbClr val="6B9BDB"/>
                 </a:solidFill>
                 <a:latin typeface="Calibri"/>
               </a:rPr>
@@ -16376,7 +16844,7 @@
             <a:r>
               <a:rPr sz="700" b="0" i="0">
                 <a:solidFill>
-                  <a:srgbClr val="8892AA"/>
+                  <a:srgbClr val="7085A8"/>
                 </a:solidFill>
                 <a:latin typeface="Calibri"/>
               </a:rPr>
@@ -16411,11 +16879,89 @@
             <a:r>
               <a:rPr sz="800" b="0" i="0">
                 <a:solidFill>
-                  <a:srgbClr val="8892AA"/>
+                  <a:srgbClr val="7085A8"/>
                 </a:solidFill>
                 <a:latin typeface="Calibri"/>
               </a:rPr>
               <a:t>15 / 20</a:t>
+            </a:r>
+          </a:p>
+        </p:txBody>
+      </p:sp>
+      <p:sp>
+        <p:nvSpPr>
+          <p:cNvPr id="53" name="Oval 52"/>
+          <p:cNvSpPr/>
+          <p:nvPr/>
+        </p:nvSpPr>
+        <p:spPr>
+          <a:xfrm>
+            <a:off x="9756648" y="3904488"/>
+            <a:ext cx="1920240" cy="1920240"/>
+          </a:xfrm>
+          <a:prstGeom prst="ellipse">
+            <a:avLst/>
+          </a:prstGeom>
+          <a:noFill/>
+          <a:ln w="25400">
+            <a:solidFill>
+              <a:srgbClr val="E7CC59"/>
+            </a:solidFill>
+          </a:ln>
+        </p:spPr>
+        <p:style>
+          <a:lnRef idx="1">
+            <a:schemeClr val="accent1"/>
+          </a:lnRef>
+          <a:fillRef idx="3">
+            <a:schemeClr val="accent1"/>
+          </a:fillRef>
+          <a:effectRef idx="2">
+            <a:schemeClr val="accent1"/>
+          </a:effectRef>
+          <a:fontRef idx="minor">
+            <a:schemeClr val="lt1"/>
+          </a:fontRef>
+        </p:style>
+        <p:txBody>
+          <a:bodyPr rtlCol="0" anchor="ctr"/>
+          <a:lstStyle/>
+          <a:p>
+            <a:pPr algn="ctr"/>
+          </a:p>
+        </p:txBody>
+      </p:sp>
+      <p:sp>
+        <p:nvSpPr>
+          <p:cNvPr id="54" name="TextBox 53"/>
+          <p:cNvSpPr txBox="1"/>
+          <p:nvPr/>
+        </p:nvSpPr>
+        <p:spPr>
+          <a:xfrm>
+            <a:off x="9829800" y="3831336"/>
+            <a:ext cx="1773936" cy="1920240"/>
+          </a:xfrm>
+          <a:prstGeom prst="rect">
+            <a:avLst/>
+          </a:prstGeom>
+          <a:noFill/>
+        </p:spPr>
+        <p:txBody>
+          <a:bodyPr wrap="square">
+            <a:spAutoFit/>
+          </a:bodyPr>
+          <a:lstStyle/>
+          <a:p>
+            <a:pPr algn="ctr"/>
+            <a:r>
+              <a:rPr sz="11000" b="1" i="0">
+                <a:solidFill>
+                  <a:srgbClr val="142A4A"/>
+                </a:solidFill>
+                <a:latin typeface="Calibri"/>
+              </a:rPr>
+              <a:t>V</a:t>
             </a:r>
           </a:p>
         </p:txBody>
@@ -16434,7 +16980,7 @@
     <p:bg>
       <p:bgPr>
         <a:solidFill>
-          <a:srgbClr val="242852"/>
+          <a:srgbClr val="0A1628"/>
         </a:solidFill>
         <a:effectLst/>
       </p:bgPr>
@@ -16507,7 +17053,7 @@
             <a:r>
               <a:rPr sz="1000" b="0" i="1">
                 <a:solidFill>
-                  <a:srgbClr val="8FA1CF"/>
+                  <a:srgbClr val="6B9BDB"/>
                 </a:solidFill>
                 <a:latin typeface="Calibri"/>
               </a:rPr>
@@ -16632,7 +17178,7 @@
             <a:r>
               <a:rPr sz="400" b="0">
                 <a:solidFill>
-                  <a:srgbClr val="242852"/>
+                  <a:srgbClr val="0A1628"/>
                 </a:solidFill>
                 <a:latin typeface="Calibri"/>
               </a:rPr>
@@ -16656,7 +17202,7 @@
             <a:r>
               <a:rPr sz="300" b="0">
                 <a:solidFill>
-                  <a:srgbClr val="242852"/>
+                  <a:srgbClr val="0A1628"/>
                 </a:solidFill>
                 <a:latin typeface="Calibri"/>
               </a:rPr>
@@ -16680,7 +17226,7 @@
             <a:r>
               <a:rPr sz="400" b="0">
                 <a:solidFill>
-                  <a:srgbClr val="242852"/>
+                  <a:srgbClr val="0A1628"/>
                 </a:solidFill>
                 <a:latin typeface="Calibri"/>
               </a:rPr>
@@ -16704,7 +17250,7 @@
             <a:r>
               <a:rPr sz="300" b="0">
                 <a:solidFill>
-                  <a:srgbClr val="242852"/>
+                  <a:srgbClr val="0A1628"/>
                 </a:solidFill>
                 <a:latin typeface="Calibri"/>
               </a:rPr>
@@ -16728,7 +17274,7 @@
             <a:r>
               <a:rPr sz="300" b="0">
                 <a:solidFill>
-                  <a:srgbClr val="242852"/>
+                  <a:srgbClr val="0A1628"/>
                 </a:solidFill>
                 <a:latin typeface="Calibri"/>
               </a:rPr>
@@ -16752,7 +17298,7 @@
             <a:r>
               <a:rPr sz="300" b="0">
                 <a:solidFill>
-                  <a:srgbClr val="242852"/>
+                  <a:srgbClr val="0A1628"/>
                 </a:solidFill>
                 <a:latin typeface="Calibri"/>
               </a:rPr>
@@ -16776,7 +17322,7 @@
             <a:r>
               <a:rPr sz="300" b="0">
                 <a:solidFill>
-                  <a:srgbClr val="242852"/>
+                  <a:srgbClr val="0A1628"/>
                 </a:solidFill>
                 <a:latin typeface="Calibri"/>
               </a:rPr>
@@ -16800,7 +17346,7 @@
             <a:r>
               <a:rPr sz="400" b="0">
                 <a:solidFill>
-                  <a:srgbClr val="242852"/>
+                  <a:srgbClr val="0A1628"/>
                 </a:solidFill>
                 <a:latin typeface="Calibri"/>
               </a:rPr>
@@ -16824,7 +17370,7 @@
             <a:r>
               <a:rPr sz="300" b="0">
                 <a:solidFill>
-                  <a:srgbClr val="242852"/>
+                  <a:srgbClr val="0A1628"/>
                 </a:solidFill>
                 <a:latin typeface="Calibri"/>
               </a:rPr>
@@ -16848,7 +17394,7 @@
             <a:r>
               <a:rPr sz="300" b="0">
                 <a:solidFill>
-                  <a:srgbClr val="242852"/>
+                  <a:srgbClr val="0A1628"/>
                 </a:solidFill>
                 <a:latin typeface="Calibri"/>
               </a:rPr>
@@ -16872,7 +17418,7 @@
             <a:r>
               <a:rPr sz="300" b="0">
                 <a:solidFill>
-                  <a:srgbClr val="242852"/>
+                  <a:srgbClr val="0A1628"/>
                 </a:solidFill>
                 <a:latin typeface="Calibri"/>
               </a:rPr>
@@ -16896,7 +17442,7 @@
             <a:r>
               <a:rPr sz="300" b="0">
                 <a:solidFill>
-                  <a:srgbClr val="242852"/>
+                  <a:srgbClr val="0A1628"/>
                 </a:solidFill>
                 <a:latin typeface="Calibri"/>
               </a:rPr>
@@ -16920,7 +17466,7 @@
             <a:r>
               <a:rPr sz="400" b="0">
                 <a:solidFill>
-                  <a:srgbClr val="242852"/>
+                  <a:srgbClr val="0A1628"/>
                 </a:solidFill>
                 <a:latin typeface="Calibri"/>
               </a:rPr>
@@ -16944,7 +17490,7 @@
             <a:avLst/>
           </a:prstGeom>
           <a:solidFill>
-            <a:srgbClr val="1A1E42"/>
+            <a:srgbClr val="10203C"/>
           </a:solidFill>
           <a:ln>
             <a:noFill/>
@@ -16987,7 +17533,7 @@
             <a:avLst/>
           </a:prstGeom>
           <a:solidFill>
-            <a:srgbClr val="4A66AC"/>
+            <a:srgbClr val="3D6FCE"/>
           </a:solidFill>
           <a:ln>
             <a:noFill/>
@@ -17076,7 +17622,7 @@
             <a:r>
               <a:rPr sz="750" b="0" i="0">
                 <a:solidFill>
-                  <a:srgbClr val="8FA1CF"/>
+                  <a:srgbClr val="6B9BDB"/>
                 </a:solidFill>
                 <a:latin typeface="Calibri"/>
               </a:rPr>
@@ -17146,7 +17692,7 @@
             <a:r>
               <a:rPr sz="750" b="0" i="0">
                 <a:solidFill>
-                  <a:srgbClr val="8892AA"/>
+                  <a:srgbClr val="7085A8"/>
                 </a:solidFill>
                 <a:latin typeface="Calibri"/>
               </a:rPr>
@@ -17170,7 +17716,7 @@
             <a:avLst/>
           </a:prstGeom>
           <a:solidFill>
-            <a:srgbClr val="0F1125"/>
+            <a:srgbClr val="060E1A"/>
           </a:solidFill>
           <a:ln>
             <a:noFill/>
@@ -17224,7 +17770,7 @@
             <a:r>
               <a:rPr sz="750" b="0" i="0">
                 <a:solidFill>
-                  <a:srgbClr val="8FA1CF"/>
+                  <a:srgbClr val="6B9BDB"/>
                 </a:solidFill>
                 <a:latin typeface="Calibri"/>
               </a:rPr>
@@ -17294,7 +17840,7 @@
             <a:r>
               <a:rPr sz="750" b="0" i="0">
                 <a:solidFill>
-                  <a:srgbClr val="8892AA"/>
+                  <a:srgbClr val="7085A8"/>
                 </a:solidFill>
                 <a:latin typeface="Calibri"/>
               </a:rPr>
@@ -17318,7 +17864,7 @@
             <a:avLst/>
           </a:prstGeom>
           <a:solidFill>
-            <a:srgbClr val="0F1125"/>
+            <a:srgbClr val="060E1A"/>
           </a:solidFill>
           <a:ln>
             <a:noFill/>
@@ -17372,7 +17918,7 @@
             <a:r>
               <a:rPr sz="750" b="0" i="0">
                 <a:solidFill>
-                  <a:srgbClr val="8FA1CF"/>
+                  <a:srgbClr val="6B9BDB"/>
                 </a:solidFill>
                 <a:latin typeface="Calibri"/>
               </a:rPr>
@@ -17431,7 +17977,7 @@
             <a:avLst/>
           </a:prstGeom>
           <a:solidFill>
-            <a:srgbClr val="0F1125"/>
+            <a:srgbClr val="060E1A"/>
           </a:solidFill>
           <a:ln>
             <a:noFill/>
@@ -17485,7 +18031,7 @@
             <a:r>
               <a:rPr sz="750" b="0" i="0">
                 <a:solidFill>
-                  <a:srgbClr val="8FA1CF"/>
+                  <a:srgbClr val="6B9BDB"/>
                 </a:solidFill>
                 <a:latin typeface="Calibri"/>
               </a:rPr>
@@ -17555,7 +18101,7 @@
             <a:r>
               <a:rPr sz="750" b="0" i="0">
                 <a:solidFill>
-                  <a:srgbClr val="8892AA"/>
+                  <a:srgbClr val="7085A8"/>
                 </a:solidFill>
                 <a:latin typeface="Calibri"/>
               </a:rPr>
@@ -17579,7 +18125,7 @@
             <a:avLst/>
           </a:prstGeom>
           <a:solidFill>
-            <a:srgbClr val="0F1125"/>
+            <a:srgbClr val="060E1A"/>
           </a:solidFill>
           <a:ln>
             <a:noFill/>
@@ -17633,7 +18179,7 @@
             <a:r>
               <a:rPr sz="750" b="0" i="0">
                 <a:solidFill>
-                  <a:srgbClr val="8FA1CF"/>
+                  <a:srgbClr val="6B9BDB"/>
                 </a:solidFill>
                 <a:latin typeface="Calibri"/>
               </a:rPr>
@@ -17703,7 +18249,7 @@
             <a:r>
               <a:rPr sz="750" b="0" i="0">
                 <a:solidFill>
-                  <a:srgbClr val="8892AA"/>
+                  <a:srgbClr val="7085A8"/>
                 </a:solidFill>
                 <a:latin typeface="Calibri"/>
               </a:rPr>
@@ -17727,7 +18273,7 @@
             <a:avLst/>
           </a:prstGeom>
           <a:solidFill>
-            <a:srgbClr val="0F1125"/>
+            <a:srgbClr val="060E1A"/>
           </a:solidFill>
           <a:ln>
             <a:noFill/>
@@ -17781,7 +18327,7 @@
             <a:r>
               <a:rPr sz="750" b="0" i="0">
                 <a:solidFill>
-                  <a:srgbClr val="8FA1CF"/>
+                  <a:srgbClr val="6B9BDB"/>
                 </a:solidFill>
                 <a:latin typeface="Calibri"/>
               </a:rPr>
@@ -17851,7 +18397,7 @@
             <a:r>
               <a:rPr sz="750" b="0" i="0">
                 <a:solidFill>
-                  <a:srgbClr val="8892AA"/>
+                  <a:srgbClr val="7085A8"/>
                 </a:solidFill>
                 <a:latin typeface="Calibri"/>
               </a:rPr>
@@ -17921,7 +18467,7 @@
             <a:r>
               <a:rPr sz="700" b="0" i="0">
                 <a:solidFill>
-                  <a:srgbClr val="8892AA"/>
+                  <a:srgbClr val="7085A8"/>
                 </a:solidFill>
                 <a:latin typeface="Calibri"/>
               </a:rPr>
@@ -17956,11 +18502,89 @@
             <a:r>
               <a:rPr sz="800" b="0" i="0">
                 <a:solidFill>
-                  <a:srgbClr val="8892AA"/>
+                  <a:srgbClr val="7085A8"/>
                 </a:solidFill>
                 <a:latin typeface="Calibri"/>
               </a:rPr>
               <a:t>16 / 20</a:t>
+            </a:r>
+          </a:p>
+        </p:txBody>
+      </p:sp>
+      <p:sp>
+        <p:nvSpPr>
+          <p:cNvPr id="35" name="Oval 34"/>
+          <p:cNvSpPr/>
+          <p:nvPr/>
+        </p:nvSpPr>
+        <p:spPr>
+          <a:xfrm>
+            <a:off x="9756648" y="3904488"/>
+            <a:ext cx="1920240" cy="1920240"/>
+          </a:xfrm>
+          <a:prstGeom prst="ellipse">
+            <a:avLst/>
+          </a:prstGeom>
+          <a:noFill/>
+          <a:ln w="25400">
+            <a:solidFill>
+              <a:srgbClr val="E7CC59"/>
+            </a:solidFill>
+          </a:ln>
+        </p:spPr>
+        <p:style>
+          <a:lnRef idx="1">
+            <a:schemeClr val="accent1"/>
+          </a:lnRef>
+          <a:fillRef idx="3">
+            <a:schemeClr val="accent1"/>
+          </a:fillRef>
+          <a:effectRef idx="2">
+            <a:schemeClr val="accent1"/>
+          </a:effectRef>
+          <a:fontRef idx="minor">
+            <a:schemeClr val="lt1"/>
+          </a:fontRef>
+        </p:style>
+        <p:txBody>
+          <a:bodyPr rtlCol="0" anchor="ctr"/>
+          <a:lstStyle/>
+          <a:p>
+            <a:pPr algn="ctr"/>
+          </a:p>
+        </p:txBody>
+      </p:sp>
+      <p:sp>
+        <p:nvSpPr>
+          <p:cNvPr id="36" name="TextBox 35"/>
+          <p:cNvSpPr txBox="1"/>
+          <p:nvPr/>
+        </p:nvSpPr>
+        <p:spPr>
+          <a:xfrm>
+            <a:off x="9829800" y="3831336"/>
+            <a:ext cx="1773936" cy="1920240"/>
+          </a:xfrm>
+          <a:prstGeom prst="rect">
+            <a:avLst/>
+          </a:prstGeom>
+          <a:noFill/>
+        </p:spPr>
+        <p:txBody>
+          <a:bodyPr wrap="square">
+            <a:spAutoFit/>
+          </a:bodyPr>
+          <a:lstStyle/>
+          <a:p>
+            <a:pPr algn="ctr"/>
+            <a:r>
+              <a:rPr sz="11000" b="1" i="0">
+                <a:solidFill>
+                  <a:srgbClr val="142A4A"/>
+                </a:solidFill>
+                <a:latin typeface="Calibri"/>
+              </a:rPr>
+              <a:t>V</a:t>
             </a:r>
           </a:p>
         </p:txBody>
@@ -17979,7 +18603,7 @@
     <p:bg>
       <p:bgPr>
         <a:solidFill>
-          <a:srgbClr val="242852"/>
+          <a:srgbClr val="0A1628"/>
         </a:solidFill>
         <a:effectLst/>
       </p:bgPr>
@@ -18052,7 +18676,7 @@
             <a:r>
               <a:rPr sz="1000" b="0" i="1">
                 <a:solidFill>
-                  <a:srgbClr val="8FA1CF"/>
+                  <a:srgbClr val="6B9BDB"/>
                 </a:solidFill>
                 <a:latin typeface="Calibri"/>
               </a:rPr>
@@ -18177,7 +18801,7 @@
             <a:r>
               <a:rPr sz="400" b="0">
                 <a:solidFill>
-                  <a:srgbClr val="242852"/>
+                  <a:srgbClr val="0A1628"/>
                 </a:solidFill>
                 <a:latin typeface="Calibri"/>
               </a:rPr>
@@ -18201,7 +18825,7 @@
             <a:r>
               <a:rPr sz="400" b="0">
                 <a:solidFill>
-                  <a:srgbClr val="242852"/>
+                  <a:srgbClr val="0A1628"/>
                 </a:solidFill>
                 <a:latin typeface="Calibri"/>
               </a:rPr>
@@ -18225,7 +18849,7 @@
             <a:r>
               <a:rPr sz="400" b="0">
                 <a:solidFill>
-                  <a:srgbClr val="242852"/>
+                  <a:srgbClr val="0A1628"/>
                 </a:solidFill>
                 <a:latin typeface="Calibri"/>
               </a:rPr>
@@ -18249,7 +18873,7 @@
             <a:r>
               <a:rPr sz="300" b="0">
                 <a:solidFill>
-                  <a:srgbClr val="242852"/>
+                  <a:srgbClr val="0A1628"/>
                 </a:solidFill>
                 <a:latin typeface="Calibri"/>
               </a:rPr>
@@ -18273,7 +18897,7 @@
             <a:r>
               <a:rPr sz="300" b="0">
                 <a:solidFill>
-                  <a:srgbClr val="242852"/>
+                  <a:srgbClr val="0A1628"/>
                 </a:solidFill>
                 <a:latin typeface="Calibri"/>
               </a:rPr>
@@ -18297,7 +18921,7 @@
             <a:r>
               <a:rPr sz="300" b="0">
                 <a:solidFill>
-                  <a:srgbClr val="242852"/>
+                  <a:srgbClr val="0A1628"/>
                 </a:solidFill>
                 <a:latin typeface="Calibri"/>
               </a:rPr>
@@ -18321,7 +18945,7 @@
             <a:r>
               <a:rPr sz="400" b="0">
                 <a:solidFill>
-                  <a:srgbClr val="242852"/>
+                  <a:srgbClr val="0A1628"/>
                 </a:solidFill>
                 <a:latin typeface="Calibri"/>
               </a:rPr>
@@ -18345,7 +18969,7 @@
             <a:r>
               <a:rPr sz="400" b="0">
                 <a:solidFill>
-                  <a:srgbClr val="242852"/>
+                  <a:srgbClr val="0A1628"/>
                 </a:solidFill>
                 <a:latin typeface="Calibri"/>
               </a:rPr>
@@ -18369,7 +18993,7 @@
             <a:r>
               <a:rPr sz="300" b="0">
                 <a:solidFill>
-                  <a:srgbClr val="242852"/>
+                  <a:srgbClr val="0A1628"/>
                 </a:solidFill>
                 <a:latin typeface="Calibri"/>
               </a:rPr>
@@ -18393,7 +19017,7 @@
             <a:r>
               <a:rPr sz="300" b="0">
                 <a:solidFill>
-                  <a:srgbClr val="242852"/>
+                  <a:srgbClr val="0A1628"/>
                 </a:solidFill>
                 <a:latin typeface="Calibri"/>
               </a:rPr>
@@ -18417,7 +19041,7 @@
             <a:r>
               <a:rPr sz="300" b="0">
                 <a:solidFill>
-                  <a:srgbClr val="242852"/>
+                  <a:srgbClr val="0A1628"/>
                 </a:solidFill>
                 <a:latin typeface="Calibri"/>
               </a:rPr>
@@ -18441,7 +19065,7 @@
             <a:r>
               <a:rPr sz="400" b="0">
                 <a:solidFill>
-                  <a:srgbClr val="242852"/>
+                  <a:srgbClr val="0A1628"/>
                 </a:solidFill>
                 <a:latin typeface="Calibri"/>
               </a:rPr>
@@ -18465,7 +19089,7 @@
             <a:r>
               <a:rPr sz="400" b="0">
                 <a:solidFill>
-                  <a:srgbClr val="242852"/>
+                  <a:srgbClr val="0A1628"/>
                 </a:solidFill>
                 <a:latin typeface="Calibri"/>
               </a:rPr>
@@ -18489,7 +19113,7 @@
             <a:r>
               <a:rPr sz="300" b="0">
                 <a:solidFill>
-                  <a:srgbClr val="242852"/>
+                  <a:srgbClr val="0A1628"/>
                 </a:solidFill>
                 <a:latin typeface="Calibri"/>
               </a:rPr>
@@ -18513,7 +19137,7 @@
             <a:r>
               <a:rPr sz="300" b="0">
                 <a:solidFill>
-                  <a:srgbClr val="242852"/>
+                  <a:srgbClr val="0A1628"/>
                 </a:solidFill>
                 <a:latin typeface="Calibri"/>
               </a:rPr>
@@ -18537,7 +19161,7 @@
             <a:r>
               <a:rPr sz="300" b="0">
                 <a:solidFill>
-                  <a:srgbClr val="242852"/>
+                  <a:srgbClr val="0A1628"/>
                 </a:solidFill>
                 <a:latin typeface="Calibri"/>
               </a:rPr>
@@ -18561,7 +19185,7 @@
             <a:avLst/>
           </a:prstGeom>
           <a:solidFill>
-            <a:srgbClr val="1A1E42"/>
+            <a:srgbClr val="10203C"/>
           </a:solidFill>
           <a:ln>
             <a:noFill/>
@@ -18604,7 +19228,7 @@
             <a:avLst/>
           </a:prstGeom>
           <a:solidFill>
-            <a:srgbClr val="4A66AC"/>
+            <a:srgbClr val="3D6FCE"/>
           </a:solidFill>
           <a:ln>
             <a:noFill/>
@@ -18693,7 +19317,7 @@
             <a:r>
               <a:rPr sz="750" b="0" i="0">
                 <a:solidFill>
-                  <a:srgbClr val="8FA1CF"/>
+                  <a:srgbClr val="6B9BDB"/>
                 </a:solidFill>
                 <a:latin typeface="Calibri"/>
               </a:rPr>
@@ -18763,7 +19387,7 @@
             <a:r>
               <a:rPr sz="750" b="0" i="0">
                 <a:solidFill>
-                  <a:srgbClr val="8892AA"/>
+                  <a:srgbClr val="7085A8"/>
                 </a:solidFill>
                 <a:latin typeface="Calibri"/>
               </a:rPr>
@@ -18787,7 +19411,7 @@
             <a:avLst/>
           </a:prstGeom>
           <a:solidFill>
-            <a:srgbClr val="0F1125"/>
+            <a:srgbClr val="060E1A"/>
           </a:solidFill>
           <a:ln>
             <a:noFill/>
@@ -18841,7 +19465,7 @@
             <a:r>
               <a:rPr sz="750" b="0" i="0">
                 <a:solidFill>
-                  <a:srgbClr val="8FA1CF"/>
+                  <a:srgbClr val="6B9BDB"/>
                 </a:solidFill>
                 <a:latin typeface="Calibri"/>
               </a:rPr>
@@ -18911,7 +19535,7 @@
             <a:r>
               <a:rPr sz="750" b="0" i="0">
                 <a:solidFill>
-                  <a:srgbClr val="8892AA"/>
+                  <a:srgbClr val="7085A8"/>
                 </a:solidFill>
                 <a:latin typeface="Calibri"/>
               </a:rPr>
@@ -18935,7 +19559,7 @@
             <a:avLst/>
           </a:prstGeom>
           <a:solidFill>
-            <a:srgbClr val="0F1125"/>
+            <a:srgbClr val="060E1A"/>
           </a:solidFill>
           <a:ln>
             <a:noFill/>
@@ -18989,7 +19613,7 @@
             <a:r>
               <a:rPr sz="750" b="0" i="0">
                 <a:solidFill>
-                  <a:srgbClr val="8FA1CF"/>
+                  <a:srgbClr val="6B9BDB"/>
                 </a:solidFill>
                 <a:latin typeface="Calibri"/>
               </a:rPr>
@@ -19059,7 +19683,7 @@
             <a:r>
               <a:rPr sz="750" b="0" i="0">
                 <a:solidFill>
-                  <a:srgbClr val="8892AA"/>
+                  <a:srgbClr val="7085A8"/>
                 </a:solidFill>
                 <a:latin typeface="Calibri"/>
               </a:rPr>
@@ -19083,7 +19707,7 @@
             <a:avLst/>
           </a:prstGeom>
           <a:solidFill>
-            <a:srgbClr val="0F1125"/>
+            <a:srgbClr val="060E1A"/>
           </a:solidFill>
           <a:ln>
             <a:noFill/>
@@ -19137,7 +19761,7 @@
             <a:r>
               <a:rPr sz="750" b="0" i="0">
                 <a:solidFill>
-                  <a:srgbClr val="8FA1CF"/>
+                  <a:srgbClr val="6B9BDB"/>
                 </a:solidFill>
                 <a:latin typeface="Calibri"/>
               </a:rPr>
@@ -19207,7 +19831,7 @@
             <a:r>
               <a:rPr sz="750" b="0" i="0">
                 <a:solidFill>
-                  <a:srgbClr val="8892AA"/>
+                  <a:srgbClr val="7085A8"/>
                 </a:solidFill>
                 <a:latin typeface="Calibri"/>
               </a:rPr>
@@ -19231,7 +19855,7 @@
             <a:avLst/>
           </a:prstGeom>
           <a:solidFill>
-            <a:srgbClr val="0F1125"/>
+            <a:srgbClr val="060E1A"/>
           </a:solidFill>
           <a:ln>
             <a:noFill/>
@@ -19285,7 +19909,7 @@
             <a:r>
               <a:rPr sz="750" b="0" i="0">
                 <a:solidFill>
-                  <a:srgbClr val="8FA1CF"/>
+                  <a:srgbClr val="6B9BDB"/>
                 </a:solidFill>
                 <a:latin typeface="Calibri"/>
               </a:rPr>
@@ -19355,7 +19979,7 @@
             <a:r>
               <a:rPr sz="750" b="0" i="0">
                 <a:solidFill>
-                  <a:srgbClr val="8892AA"/>
+                  <a:srgbClr val="7085A8"/>
                 </a:solidFill>
                 <a:latin typeface="Calibri"/>
               </a:rPr>
@@ -19379,7 +20003,7 @@
             <a:avLst/>
           </a:prstGeom>
           <a:solidFill>
-            <a:srgbClr val="0F1125"/>
+            <a:srgbClr val="060E1A"/>
           </a:solidFill>
           <a:ln>
             <a:noFill/>
@@ -19433,7 +20057,7 @@
             <a:r>
               <a:rPr sz="750" b="0" i="0">
                 <a:solidFill>
-                  <a:srgbClr val="8FA1CF"/>
+                  <a:srgbClr val="6B9BDB"/>
                 </a:solidFill>
                 <a:latin typeface="Calibri"/>
               </a:rPr>
@@ -19503,7 +20127,7 @@
             <a:r>
               <a:rPr sz="750" b="0" i="0">
                 <a:solidFill>
-                  <a:srgbClr val="8892AA"/>
+                  <a:srgbClr val="7085A8"/>
                 </a:solidFill>
                 <a:latin typeface="Calibri"/>
               </a:rPr>
@@ -19573,7 +20197,7 @@
             <a:r>
               <a:rPr sz="700" b="0" i="0">
                 <a:solidFill>
-                  <a:srgbClr val="8892AA"/>
+                  <a:srgbClr val="7085A8"/>
                 </a:solidFill>
                 <a:latin typeface="Calibri"/>
               </a:rPr>
@@ -19608,11 +20232,89 @@
             <a:r>
               <a:rPr sz="800" b="0" i="0">
                 <a:solidFill>
-                  <a:srgbClr val="8892AA"/>
+                  <a:srgbClr val="7085A8"/>
                 </a:solidFill>
                 <a:latin typeface="Calibri"/>
               </a:rPr>
               <a:t>17 / 20</a:t>
+            </a:r>
+          </a:p>
+        </p:txBody>
+      </p:sp>
+      <p:sp>
+        <p:nvSpPr>
+          <p:cNvPr id="36" name="Oval 35"/>
+          <p:cNvSpPr/>
+          <p:nvPr/>
+        </p:nvSpPr>
+        <p:spPr>
+          <a:xfrm>
+            <a:off x="9756648" y="3904488"/>
+            <a:ext cx="1920240" cy="1920240"/>
+          </a:xfrm>
+          <a:prstGeom prst="ellipse">
+            <a:avLst/>
+          </a:prstGeom>
+          <a:noFill/>
+          <a:ln w="25400">
+            <a:solidFill>
+              <a:srgbClr val="E7CC59"/>
+            </a:solidFill>
+          </a:ln>
+        </p:spPr>
+        <p:style>
+          <a:lnRef idx="1">
+            <a:schemeClr val="accent1"/>
+          </a:lnRef>
+          <a:fillRef idx="3">
+            <a:schemeClr val="accent1"/>
+          </a:fillRef>
+          <a:effectRef idx="2">
+            <a:schemeClr val="accent1"/>
+          </a:effectRef>
+          <a:fontRef idx="minor">
+            <a:schemeClr val="lt1"/>
+          </a:fontRef>
+        </p:style>
+        <p:txBody>
+          <a:bodyPr rtlCol="0" anchor="ctr"/>
+          <a:lstStyle/>
+          <a:p>
+            <a:pPr algn="ctr"/>
+          </a:p>
+        </p:txBody>
+      </p:sp>
+      <p:sp>
+        <p:nvSpPr>
+          <p:cNvPr id="37" name="TextBox 36"/>
+          <p:cNvSpPr txBox="1"/>
+          <p:nvPr/>
+        </p:nvSpPr>
+        <p:spPr>
+          <a:xfrm>
+            <a:off x="9829800" y="3831336"/>
+            <a:ext cx="1773936" cy="1920240"/>
+          </a:xfrm>
+          <a:prstGeom prst="rect">
+            <a:avLst/>
+          </a:prstGeom>
+          <a:noFill/>
+        </p:spPr>
+        <p:txBody>
+          <a:bodyPr wrap="square">
+            <a:spAutoFit/>
+          </a:bodyPr>
+          <a:lstStyle/>
+          <a:p>
+            <a:pPr algn="ctr"/>
+            <a:r>
+              <a:rPr sz="11000" b="1" i="0">
+                <a:solidFill>
+                  <a:srgbClr val="142A4A"/>
+                </a:solidFill>
+                <a:latin typeface="Calibri"/>
+              </a:rPr>
+              <a:t>V</a:t>
             </a:r>
           </a:p>
         </p:txBody>
@@ -19631,7 +20333,7 @@
     <p:bg>
       <p:bgPr>
         <a:solidFill>
-          <a:srgbClr val="242852"/>
+          <a:srgbClr val="0A1628"/>
         </a:solidFill>
         <a:effectLst/>
       </p:bgPr>
@@ -19704,7 +20406,7 @@
             <a:r>
               <a:rPr sz="1000" b="0" i="1">
                 <a:solidFill>
-                  <a:srgbClr val="8FA1CF"/>
+                  <a:srgbClr val="6B9BDB"/>
                 </a:solidFill>
                 <a:latin typeface="Calibri"/>
               </a:rPr>
@@ -19825,7 +20527,7 @@
             <a:r>
               <a:rPr sz="900" b="1" i="0">
                 <a:solidFill>
-                  <a:srgbClr val="0F1125"/>
+                  <a:srgbClr val="060E1A"/>
                 </a:solidFill>
                 <a:latin typeface="Calibri"/>
               </a:rPr>
@@ -19849,7 +20551,7 @@
             <a:avLst/>
           </a:prstGeom>
           <a:solidFill>
-            <a:srgbClr val="1A1E42"/>
+            <a:srgbClr val="10203C"/>
           </a:solidFill>
           <a:ln>
             <a:noFill/>
@@ -20040,7 +20742,7 @@
             <a:avLst/>
           </a:prstGeom>
           <a:solidFill>
-            <a:srgbClr val="1A1E42"/>
+            <a:srgbClr val="10203C"/>
           </a:solidFill>
           <a:ln>
             <a:noFill/>
@@ -20231,7 +20933,7 @@
             <a:avLst/>
           </a:prstGeom>
           <a:solidFill>
-            <a:srgbClr val="1A1E42"/>
+            <a:srgbClr val="10203C"/>
           </a:solidFill>
           <a:ln>
             <a:noFill/>
@@ -20422,7 +21124,7 @@
             <a:avLst/>
           </a:prstGeom>
           <a:solidFill>
-            <a:srgbClr val="4A66AC"/>
+            <a:srgbClr val="3D6FCE"/>
           </a:solidFill>
           <a:ln>
             <a:noFill/>
@@ -20476,7 +21178,7 @@
             <a:r>
               <a:rPr sz="900" b="1" i="0">
                 <a:solidFill>
-                  <a:srgbClr val="0F1125"/>
+                  <a:srgbClr val="060E1A"/>
                 </a:solidFill>
                 <a:latin typeface="Calibri"/>
               </a:rPr>
@@ -20500,7 +21202,7 @@
             <a:avLst/>
           </a:prstGeom>
           <a:solidFill>
-            <a:srgbClr val="1A1E42"/>
+            <a:srgbClr val="10203C"/>
           </a:solidFill>
           <a:ln>
             <a:noFill/>
@@ -20691,7 +21393,7 @@
             <a:avLst/>
           </a:prstGeom>
           <a:solidFill>
-            <a:srgbClr val="1A1E42"/>
+            <a:srgbClr val="10203C"/>
           </a:solidFill>
           <a:ln>
             <a:noFill/>
@@ -20882,7 +21584,7 @@
             <a:avLst/>
           </a:prstGeom>
           <a:solidFill>
-            <a:srgbClr val="1A1E42"/>
+            <a:srgbClr val="10203C"/>
           </a:solidFill>
           <a:ln>
             <a:noFill/>
@@ -21119,7 +21821,7 @@
             <a:r>
               <a:rPr sz="700" b="0" i="0">
                 <a:solidFill>
-                  <a:srgbClr val="8892AA"/>
+                  <a:srgbClr val="7085A8"/>
                 </a:solidFill>
                 <a:latin typeface="Calibri"/>
               </a:rPr>
@@ -21154,11 +21856,89 @@
             <a:r>
               <a:rPr sz="800" b="0" i="0">
                 <a:solidFill>
-                  <a:srgbClr val="8892AA"/>
+                  <a:srgbClr val="7085A8"/>
                 </a:solidFill>
                 <a:latin typeface="Calibri"/>
               </a:rPr>
               <a:t>18 / 20</a:t>
+            </a:r>
+          </a:p>
+        </p:txBody>
+      </p:sp>
+      <p:sp>
+        <p:nvSpPr>
+          <p:cNvPr id="42" name="Oval 41"/>
+          <p:cNvSpPr/>
+          <p:nvPr/>
+        </p:nvSpPr>
+        <p:spPr>
+          <a:xfrm>
+            <a:off x="9756648" y="3904488"/>
+            <a:ext cx="1920240" cy="1920240"/>
+          </a:xfrm>
+          <a:prstGeom prst="ellipse">
+            <a:avLst/>
+          </a:prstGeom>
+          <a:noFill/>
+          <a:ln w="25400">
+            <a:solidFill>
+              <a:srgbClr val="E7CC59"/>
+            </a:solidFill>
+          </a:ln>
+        </p:spPr>
+        <p:style>
+          <a:lnRef idx="1">
+            <a:schemeClr val="accent1"/>
+          </a:lnRef>
+          <a:fillRef idx="3">
+            <a:schemeClr val="accent1"/>
+          </a:fillRef>
+          <a:effectRef idx="2">
+            <a:schemeClr val="accent1"/>
+          </a:effectRef>
+          <a:fontRef idx="minor">
+            <a:schemeClr val="lt1"/>
+          </a:fontRef>
+        </p:style>
+        <p:txBody>
+          <a:bodyPr rtlCol="0" anchor="ctr"/>
+          <a:lstStyle/>
+          <a:p>
+            <a:pPr algn="ctr"/>
+          </a:p>
+        </p:txBody>
+      </p:sp>
+      <p:sp>
+        <p:nvSpPr>
+          <p:cNvPr id="43" name="TextBox 42"/>
+          <p:cNvSpPr txBox="1"/>
+          <p:nvPr/>
+        </p:nvSpPr>
+        <p:spPr>
+          <a:xfrm>
+            <a:off x="9829800" y="3831336"/>
+            <a:ext cx="1773936" cy="1920240"/>
+          </a:xfrm>
+          <a:prstGeom prst="rect">
+            <a:avLst/>
+          </a:prstGeom>
+          <a:noFill/>
+        </p:spPr>
+        <p:txBody>
+          <a:bodyPr wrap="square">
+            <a:spAutoFit/>
+          </a:bodyPr>
+          <a:lstStyle/>
+          <a:p>
+            <a:pPr algn="ctr"/>
+            <a:r>
+              <a:rPr sz="11000" b="1" i="0">
+                <a:solidFill>
+                  <a:srgbClr val="142A4A"/>
+                </a:solidFill>
+                <a:latin typeface="Calibri"/>
+              </a:rPr>
+              <a:t>V</a:t>
             </a:r>
           </a:p>
         </p:txBody>
@@ -21177,7 +21957,7 @@
     <p:bg>
       <p:bgPr>
         <a:solidFill>
-          <a:srgbClr val="242852"/>
+          <a:srgbClr val="0A1628"/>
         </a:solidFill>
         <a:effectLst/>
       </p:bgPr>
@@ -21250,7 +22030,7 @@
             <a:r>
               <a:rPr sz="1000" b="0" i="1">
                 <a:solidFill>
-                  <a:srgbClr val="8FA1CF"/>
+                  <a:srgbClr val="6B9BDB"/>
                 </a:solidFill>
                 <a:latin typeface="Calibri"/>
               </a:rPr>
@@ -21317,7 +22097,7 @@
             <a:avLst/>
           </a:prstGeom>
           <a:solidFill>
-            <a:srgbClr val="1A1E42"/>
+            <a:srgbClr val="10203C"/>
           </a:solidFill>
           <a:ln>
             <a:noFill/>
@@ -21508,7 +22288,7 @@
             <a:avLst/>
           </a:prstGeom>
           <a:solidFill>
-            <a:srgbClr val="1A1E42"/>
+            <a:srgbClr val="10203C"/>
           </a:solidFill>
           <a:ln>
             <a:noFill/>
@@ -21699,7 +22479,7 @@
             <a:avLst/>
           </a:prstGeom>
           <a:solidFill>
-            <a:srgbClr val="1A1E42"/>
+            <a:srgbClr val="10203C"/>
           </a:solidFill>
           <a:ln>
             <a:noFill/>
@@ -21890,7 +22670,7 @@
             <a:avLst/>
           </a:prstGeom>
           <a:solidFill>
-            <a:srgbClr val="1A1E42"/>
+            <a:srgbClr val="10203C"/>
           </a:solidFill>
           <a:ln>
             <a:noFill/>
@@ -22135,7 +22915,7 @@
             <a:r>
               <a:rPr sz="1100" b="1" i="0">
                 <a:solidFill>
-                  <a:srgbClr val="0F1125"/>
+                  <a:srgbClr val="060E1A"/>
                 </a:solidFill>
                 <a:latin typeface="Calibri"/>
               </a:rPr>
@@ -22205,7 +22985,7 @@
             <a:r>
               <a:rPr sz="700" b="0" i="0">
                 <a:solidFill>
-                  <a:srgbClr val="8892AA"/>
+                  <a:srgbClr val="7085A8"/>
                 </a:solidFill>
                 <a:latin typeface="Calibri"/>
               </a:rPr>
@@ -22240,11 +23020,89 @@
             <a:r>
               <a:rPr sz="800" b="0" i="0">
                 <a:solidFill>
-                  <a:srgbClr val="8892AA"/>
+                  <a:srgbClr val="7085A8"/>
                 </a:solidFill>
                 <a:latin typeface="Calibri"/>
               </a:rPr>
               <a:t>19 / 20</a:t>
+            </a:r>
+          </a:p>
+        </p:txBody>
+      </p:sp>
+      <p:sp>
+        <p:nvSpPr>
+          <p:cNvPr id="30" name="Oval 29"/>
+          <p:cNvSpPr/>
+          <p:nvPr/>
+        </p:nvSpPr>
+        <p:spPr>
+          <a:xfrm>
+            <a:off x="9756648" y="3904488"/>
+            <a:ext cx="1920240" cy="1920240"/>
+          </a:xfrm>
+          <a:prstGeom prst="ellipse">
+            <a:avLst/>
+          </a:prstGeom>
+          <a:noFill/>
+          <a:ln w="25400">
+            <a:solidFill>
+              <a:srgbClr val="E7CC59"/>
+            </a:solidFill>
+          </a:ln>
+        </p:spPr>
+        <p:style>
+          <a:lnRef idx="1">
+            <a:schemeClr val="accent1"/>
+          </a:lnRef>
+          <a:fillRef idx="3">
+            <a:schemeClr val="accent1"/>
+          </a:fillRef>
+          <a:effectRef idx="2">
+            <a:schemeClr val="accent1"/>
+          </a:effectRef>
+          <a:fontRef idx="minor">
+            <a:schemeClr val="lt1"/>
+          </a:fontRef>
+        </p:style>
+        <p:txBody>
+          <a:bodyPr rtlCol="0" anchor="ctr"/>
+          <a:lstStyle/>
+          <a:p>
+            <a:pPr algn="ctr"/>
+          </a:p>
+        </p:txBody>
+      </p:sp>
+      <p:sp>
+        <p:nvSpPr>
+          <p:cNvPr id="31" name="TextBox 30"/>
+          <p:cNvSpPr txBox="1"/>
+          <p:nvPr/>
+        </p:nvSpPr>
+        <p:spPr>
+          <a:xfrm>
+            <a:off x="9829800" y="3831336"/>
+            <a:ext cx="1773936" cy="1920240"/>
+          </a:xfrm>
+          <a:prstGeom prst="rect">
+            <a:avLst/>
+          </a:prstGeom>
+          <a:noFill/>
+        </p:spPr>
+        <p:txBody>
+          <a:bodyPr wrap="square">
+            <a:spAutoFit/>
+          </a:bodyPr>
+          <a:lstStyle/>
+          <a:p>
+            <a:pPr algn="ctr"/>
+            <a:r>
+              <a:rPr sz="11000" b="1" i="0">
+                <a:solidFill>
+                  <a:srgbClr val="142A4A"/>
+                </a:solidFill>
+                <a:latin typeface="Calibri"/>
+              </a:rPr>
+              <a:t>V</a:t>
             </a:r>
           </a:p>
         </p:txBody>
@@ -22263,7 +23121,7 @@
     <p:bg>
       <p:bgPr>
         <a:solidFill>
-          <a:srgbClr val="242852"/>
+          <a:srgbClr val="0A1628"/>
         </a:solidFill>
         <a:effectLst/>
       </p:bgPr>
@@ -22336,7 +23194,7 @@
             <a:r>
               <a:rPr sz="1000" b="0" i="1">
                 <a:solidFill>
-                  <a:srgbClr val="8FA1CF"/>
+                  <a:srgbClr val="6B9BDB"/>
                 </a:solidFill>
                 <a:latin typeface="Calibri"/>
               </a:rPr>
@@ -22461,7 +23319,7 @@
             <a:r>
               <a:rPr sz="400" b="0">
                 <a:solidFill>
-                  <a:srgbClr val="242852"/>
+                  <a:srgbClr val="0A1628"/>
                 </a:solidFill>
                 <a:latin typeface="Calibri"/>
               </a:rPr>
@@ -22485,7 +23343,7 @@
             <a:r>
               <a:rPr sz="300" b="0">
                 <a:solidFill>
-                  <a:srgbClr val="242852"/>
+                  <a:srgbClr val="0A1628"/>
                 </a:solidFill>
                 <a:latin typeface="Calibri"/>
               </a:rPr>
@@ -22509,7 +23367,7 @@
             <a:r>
               <a:rPr sz="400" b="0">
                 <a:solidFill>
-                  <a:srgbClr val="242852"/>
+                  <a:srgbClr val="0A1628"/>
                 </a:solidFill>
                 <a:latin typeface="Calibri"/>
               </a:rPr>
@@ -22533,7 +23391,7 @@
             <a:r>
               <a:rPr sz="400" b="0">
                 <a:solidFill>
-                  <a:srgbClr val="242852"/>
+                  <a:srgbClr val="0A1628"/>
                 </a:solidFill>
                 <a:latin typeface="Calibri"/>
               </a:rPr>
@@ -22557,7 +23415,7 @@
             <a:r>
               <a:rPr sz="300" b="0">
                 <a:solidFill>
-                  <a:srgbClr val="242852"/>
+                  <a:srgbClr val="0A1628"/>
                 </a:solidFill>
                 <a:latin typeface="Calibri"/>
               </a:rPr>
@@ -22581,7 +23439,7 @@
             <a:r>
               <a:rPr sz="400" b="0">
                 <a:solidFill>
-                  <a:srgbClr val="242852"/>
+                  <a:srgbClr val="0A1628"/>
                 </a:solidFill>
                 <a:latin typeface="Calibri"/>
               </a:rPr>
@@ -22605,7 +23463,7 @@
             <a:r>
               <a:rPr sz="400" b="0">
                 <a:solidFill>
-                  <a:srgbClr val="242852"/>
+                  <a:srgbClr val="0A1628"/>
                 </a:solidFill>
                 <a:latin typeface="Calibri"/>
               </a:rPr>
@@ -22629,7 +23487,7 @@
             <a:r>
               <a:rPr sz="400" b="0">
                 <a:solidFill>
-                  <a:srgbClr val="242852"/>
+                  <a:srgbClr val="0A1628"/>
                 </a:solidFill>
                 <a:latin typeface="Calibri"/>
               </a:rPr>
@@ -22653,7 +23511,7 @@
             <a:avLst/>
           </a:prstGeom>
           <a:solidFill>
-            <a:srgbClr val="1A1E42"/>
+            <a:srgbClr val="10203C"/>
           </a:solidFill>
           <a:ln>
             <a:noFill/>
@@ -22696,7 +23554,7 @@
             <a:avLst/>
           </a:prstGeom>
           <a:solidFill>
-            <a:srgbClr val="4A66AC"/>
+            <a:srgbClr val="3D6FCE"/>
           </a:solidFill>
           <a:ln>
             <a:noFill/>
@@ -22785,7 +23643,7 @@
             <a:r>
               <a:rPr sz="750" b="0" i="0">
                 <a:solidFill>
-                  <a:srgbClr val="8FA1CF"/>
+                  <a:srgbClr val="6B9BDB"/>
                 </a:solidFill>
                 <a:latin typeface="Calibri"/>
               </a:rPr>
@@ -22855,7 +23713,7 @@
             <a:r>
               <a:rPr sz="750" b="0" i="0">
                 <a:solidFill>
-                  <a:srgbClr val="8892AA"/>
+                  <a:srgbClr val="7085A8"/>
                 </a:solidFill>
                 <a:latin typeface="Calibri"/>
               </a:rPr>
@@ -22879,7 +23737,7 @@
             <a:avLst/>
           </a:prstGeom>
           <a:solidFill>
-            <a:srgbClr val="0F1125"/>
+            <a:srgbClr val="060E1A"/>
           </a:solidFill>
           <a:ln>
             <a:noFill/>
@@ -22933,7 +23791,7 @@
             <a:r>
               <a:rPr sz="750" b="0" i="0">
                 <a:solidFill>
-                  <a:srgbClr val="8FA1CF"/>
+                  <a:srgbClr val="6B9BDB"/>
                 </a:solidFill>
                 <a:latin typeface="Calibri"/>
               </a:rPr>
@@ -23003,7 +23861,7 @@
             <a:r>
               <a:rPr sz="750" b="0" i="0">
                 <a:solidFill>
-                  <a:srgbClr val="8892AA"/>
+                  <a:srgbClr val="7085A8"/>
                 </a:solidFill>
                 <a:latin typeface="Calibri"/>
               </a:rPr>
@@ -23027,7 +23885,7 @@
             <a:avLst/>
           </a:prstGeom>
           <a:solidFill>
-            <a:srgbClr val="0F1125"/>
+            <a:srgbClr val="060E1A"/>
           </a:solidFill>
           <a:ln>
             <a:noFill/>
@@ -23081,7 +23939,7 @@
             <a:r>
               <a:rPr sz="750" b="0" i="0">
                 <a:solidFill>
-                  <a:srgbClr val="8FA1CF"/>
+                  <a:srgbClr val="6B9BDB"/>
                 </a:solidFill>
                 <a:latin typeface="Calibri"/>
               </a:rPr>
@@ -23151,7 +24009,7 @@
             <a:r>
               <a:rPr sz="750" b="0" i="0">
                 <a:solidFill>
-                  <a:srgbClr val="8892AA"/>
+                  <a:srgbClr val="7085A8"/>
                 </a:solidFill>
                 <a:latin typeface="Calibri"/>
               </a:rPr>
@@ -23175,7 +24033,7 @@
             <a:avLst/>
           </a:prstGeom>
           <a:solidFill>
-            <a:srgbClr val="0F1125"/>
+            <a:srgbClr val="060E1A"/>
           </a:solidFill>
           <a:ln>
             <a:noFill/>
@@ -23229,7 +24087,7 @@
             <a:r>
               <a:rPr sz="750" b="0" i="0">
                 <a:solidFill>
-                  <a:srgbClr val="8FA1CF"/>
+                  <a:srgbClr val="6B9BDB"/>
                 </a:solidFill>
                 <a:latin typeface="Calibri"/>
               </a:rPr>
@@ -23299,7 +24157,7 @@
             <a:r>
               <a:rPr sz="750" b="0" i="0">
                 <a:solidFill>
-                  <a:srgbClr val="8892AA"/>
+                  <a:srgbClr val="7085A8"/>
                 </a:solidFill>
                 <a:latin typeface="Calibri"/>
               </a:rPr>
@@ -23323,7 +24181,7 @@
             <a:avLst/>
           </a:prstGeom>
           <a:solidFill>
-            <a:srgbClr val="0F1125"/>
+            <a:srgbClr val="060E1A"/>
           </a:solidFill>
           <a:ln>
             <a:noFill/>
@@ -23377,7 +24235,7 @@
             <a:r>
               <a:rPr sz="750" b="0" i="0">
                 <a:solidFill>
-                  <a:srgbClr val="8FA1CF"/>
+                  <a:srgbClr val="6B9BDB"/>
                 </a:solidFill>
                 <a:latin typeface="Calibri"/>
               </a:rPr>
@@ -23436,7 +24294,7 @@
             <a:avLst/>
           </a:prstGeom>
           <a:solidFill>
-            <a:srgbClr val="0F1125"/>
+            <a:srgbClr val="060E1A"/>
           </a:solidFill>
           <a:ln>
             <a:noFill/>
@@ -23490,7 +24348,7 @@
             <a:r>
               <a:rPr sz="750" b="0" i="0">
                 <a:solidFill>
-                  <a:srgbClr val="8FA1CF"/>
+                  <a:srgbClr val="6B9BDB"/>
                 </a:solidFill>
                 <a:latin typeface="Calibri"/>
               </a:rPr>
@@ -23560,7 +24418,7 @@
             <a:r>
               <a:rPr sz="750" b="0" i="0">
                 <a:solidFill>
-                  <a:srgbClr val="8892AA"/>
+                  <a:srgbClr val="7085A8"/>
                 </a:solidFill>
                 <a:latin typeface="Calibri"/>
               </a:rPr>
@@ -23630,7 +24488,7 @@
             <a:r>
               <a:rPr sz="700" b="0" i="0">
                 <a:solidFill>
-                  <a:srgbClr val="8892AA"/>
+                  <a:srgbClr val="7085A8"/>
                 </a:solidFill>
                 <a:latin typeface="Calibri"/>
               </a:rPr>
@@ -23665,11 +24523,89 @@
             <a:r>
               <a:rPr sz="800" b="0" i="0">
                 <a:solidFill>
-                  <a:srgbClr val="8892AA"/>
+                  <a:srgbClr val="7085A8"/>
                 </a:solidFill>
                 <a:latin typeface="Calibri"/>
               </a:rPr>
               <a:t>2 / 20</a:t>
+            </a:r>
+          </a:p>
+        </p:txBody>
+      </p:sp>
+      <p:sp>
+        <p:nvSpPr>
+          <p:cNvPr id="35" name="Oval 34"/>
+          <p:cNvSpPr/>
+          <p:nvPr/>
+        </p:nvSpPr>
+        <p:spPr>
+          <a:xfrm>
+            <a:off x="9756648" y="3904488"/>
+            <a:ext cx="1920240" cy="1920240"/>
+          </a:xfrm>
+          <a:prstGeom prst="ellipse">
+            <a:avLst/>
+          </a:prstGeom>
+          <a:noFill/>
+          <a:ln w="25400">
+            <a:solidFill>
+              <a:srgbClr val="E7CC59"/>
+            </a:solidFill>
+          </a:ln>
+        </p:spPr>
+        <p:style>
+          <a:lnRef idx="1">
+            <a:schemeClr val="accent1"/>
+          </a:lnRef>
+          <a:fillRef idx="3">
+            <a:schemeClr val="accent1"/>
+          </a:fillRef>
+          <a:effectRef idx="2">
+            <a:schemeClr val="accent1"/>
+          </a:effectRef>
+          <a:fontRef idx="minor">
+            <a:schemeClr val="lt1"/>
+          </a:fontRef>
+        </p:style>
+        <p:txBody>
+          <a:bodyPr rtlCol="0" anchor="ctr"/>
+          <a:lstStyle/>
+          <a:p>
+            <a:pPr algn="ctr"/>
+          </a:p>
+        </p:txBody>
+      </p:sp>
+      <p:sp>
+        <p:nvSpPr>
+          <p:cNvPr id="36" name="TextBox 35"/>
+          <p:cNvSpPr txBox="1"/>
+          <p:nvPr/>
+        </p:nvSpPr>
+        <p:spPr>
+          <a:xfrm>
+            <a:off x="9829800" y="3831336"/>
+            <a:ext cx="1773936" cy="1920240"/>
+          </a:xfrm>
+          <a:prstGeom prst="rect">
+            <a:avLst/>
+          </a:prstGeom>
+          <a:noFill/>
+        </p:spPr>
+        <p:txBody>
+          <a:bodyPr wrap="square">
+            <a:spAutoFit/>
+          </a:bodyPr>
+          <a:lstStyle/>
+          <a:p>
+            <a:pPr algn="ctr"/>
+            <a:r>
+              <a:rPr sz="11000" b="1" i="0">
+                <a:solidFill>
+                  <a:srgbClr val="142A4A"/>
+                </a:solidFill>
+                <a:latin typeface="Calibri"/>
+              </a:rPr>
+              <a:t>V</a:t>
             </a:r>
           </a:p>
         </p:txBody>
@@ -23688,7 +24624,7 @@
     <p:bg>
       <p:bgPr>
         <a:solidFill>
-          <a:srgbClr val="242852"/>
+          <a:srgbClr val="0A1628"/>
         </a:solidFill>
         <a:effectLst/>
       </p:bgPr>
@@ -23761,7 +24697,7 @@
             <a:r>
               <a:rPr sz="1000" b="0" i="1">
                 <a:solidFill>
-                  <a:srgbClr val="8FA1CF"/>
+                  <a:srgbClr val="6B9BDB"/>
                 </a:solidFill>
                 <a:latin typeface="Calibri"/>
               </a:rPr>
@@ -23906,7 +24842,7 @@
             <a:avLst/>
           </a:prstGeom>
           <a:solidFill>
-            <a:srgbClr val="1A1E42"/>
+            <a:srgbClr val="10203C"/>
           </a:solidFill>
           <a:ln>
             <a:noFill/>
@@ -24019,7 +24955,7 @@
             <a:avLst/>
           </a:prstGeom>
           <a:solidFill>
-            <a:srgbClr val="4A66AC"/>
+            <a:srgbClr val="3D6FCE"/>
           </a:solidFill>
           <a:ln>
             <a:noFill/>
@@ -24062,7 +24998,7 @@
             <a:avLst/>
           </a:prstGeom>
           <a:solidFill>
-            <a:srgbClr val="1E2248"/>
+            <a:srgbClr val="0D1B32"/>
           </a:solidFill>
           <a:ln>
             <a:noFill/>
@@ -24175,7 +25111,7 @@
             <a:avLst/>
           </a:prstGeom>
           <a:solidFill>
-            <a:srgbClr val="4A66AC"/>
+            <a:srgbClr val="3D6FCE"/>
           </a:solidFill>
           <a:ln>
             <a:noFill/>
@@ -24218,7 +25154,7 @@
             <a:avLst/>
           </a:prstGeom>
           <a:solidFill>
-            <a:srgbClr val="1A1E42"/>
+            <a:srgbClr val="10203C"/>
           </a:solidFill>
           <a:ln>
             <a:noFill/>
@@ -24331,7 +25267,7 @@
             <a:avLst/>
           </a:prstGeom>
           <a:solidFill>
-            <a:srgbClr val="4A66AC"/>
+            <a:srgbClr val="3D6FCE"/>
           </a:solidFill>
           <a:ln>
             <a:noFill/>
@@ -24374,7 +25310,7 @@
             <a:avLst/>
           </a:prstGeom>
           <a:solidFill>
-            <a:srgbClr val="1E2248"/>
+            <a:srgbClr val="0D1B32"/>
           </a:solidFill>
           <a:ln>
             <a:noFill/>
@@ -24487,7 +25423,7 @@
             <a:avLst/>
           </a:prstGeom>
           <a:solidFill>
-            <a:srgbClr val="4A66AC"/>
+            <a:srgbClr val="3D6FCE"/>
           </a:solidFill>
           <a:ln>
             <a:noFill/>
@@ -24530,7 +25466,7 @@
             <a:avLst/>
           </a:prstGeom>
           <a:solidFill>
-            <a:srgbClr val="1A1E42"/>
+            <a:srgbClr val="10203C"/>
           </a:solidFill>
           <a:ln>
             <a:noFill/>
@@ -24643,7 +25579,7 @@
             <a:avLst/>
           </a:prstGeom>
           <a:solidFill>
-            <a:srgbClr val="4A66AC"/>
+            <a:srgbClr val="3D6FCE"/>
           </a:solidFill>
           <a:ln>
             <a:noFill/>
@@ -24732,7 +25668,7 @@
             <a:r>
               <a:rPr sz="700" b="0" i="0">
                 <a:solidFill>
-                  <a:srgbClr val="8892AA"/>
+                  <a:srgbClr val="7085A8"/>
                 </a:solidFill>
                 <a:latin typeface="Calibri"/>
               </a:rPr>
@@ -24767,11 +25703,89 @@
             <a:r>
               <a:rPr sz="800" b="0" i="0">
                 <a:solidFill>
-                  <a:srgbClr val="8892AA"/>
+                  <a:srgbClr val="7085A8"/>
                 </a:solidFill>
                 <a:latin typeface="Calibri"/>
               </a:rPr>
               <a:t>20 / 20</a:t>
+            </a:r>
+          </a:p>
+        </p:txBody>
+      </p:sp>
+      <p:sp>
+        <p:nvSpPr>
+          <p:cNvPr id="30" name="Oval 29"/>
+          <p:cNvSpPr/>
+          <p:nvPr/>
+        </p:nvSpPr>
+        <p:spPr>
+          <a:xfrm>
+            <a:off x="9756648" y="3904488"/>
+            <a:ext cx="1920240" cy="1920240"/>
+          </a:xfrm>
+          <a:prstGeom prst="ellipse">
+            <a:avLst/>
+          </a:prstGeom>
+          <a:noFill/>
+          <a:ln w="25400">
+            <a:solidFill>
+              <a:srgbClr val="E7CC59"/>
+            </a:solidFill>
+          </a:ln>
+        </p:spPr>
+        <p:style>
+          <a:lnRef idx="1">
+            <a:schemeClr val="accent1"/>
+          </a:lnRef>
+          <a:fillRef idx="3">
+            <a:schemeClr val="accent1"/>
+          </a:fillRef>
+          <a:effectRef idx="2">
+            <a:schemeClr val="accent1"/>
+          </a:effectRef>
+          <a:fontRef idx="minor">
+            <a:schemeClr val="lt1"/>
+          </a:fontRef>
+        </p:style>
+        <p:txBody>
+          <a:bodyPr rtlCol="0" anchor="ctr"/>
+          <a:lstStyle/>
+          <a:p>
+            <a:pPr algn="ctr"/>
+          </a:p>
+        </p:txBody>
+      </p:sp>
+      <p:sp>
+        <p:nvSpPr>
+          <p:cNvPr id="31" name="TextBox 30"/>
+          <p:cNvSpPr txBox="1"/>
+          <p:nvPr/>
+        </p:nvSpPr>
+        <p:spPr>
+          <a:xfrm>
+            <a:off x="9829800" y="3831336"/>
+            <a:ext cx="1773936" cy="1920240"/>
+          </a:xfrm>
+          <a:prstGeom prst="rect">
+            <a:avLst/>
+          </a:prstGeom>
+          <a:noFill/>
+        </p:spPr>
+        <p:txBody>
+          <a:bodyPr wrap="square">
+            <a:spAutoFit/>
+          </a:bodyPr>
+          <a:lstStyle/>
+          <a:p>
+            <a:pPr algn="ctr"/>
+            <a:r>
+              <a:rPr sz="11000" b="1" i="0">
+                <a:solidFill>
+                  <a:srgbClr val="142A4A"/>
+                </a:solidFill>
+                <a:latin typeface="Calibri"/>
+              </a:rPr>
+              <a:t>V</a:t>
             </a:r>
           </a:p>
         </p:txBody>
@@ -24790,7 +25804,7 @@
     <p:bg>
       <p:bgPr>
         <a:solidFill>
-          <a:srgbClr val="242852"/>
+          <a:srgbClr val="0A1628"/>
         </a:solidFill>
         <a:effectLst/>
       </p:bgPr>
@@ -24863,7 +25877,7 @@
             <a:r>
               <a:rPr sz="1000" b="0" i="1">
                 <a:solidFill>
-                  <a:srgbClr val="8FA1CF"/>
+                  <a:srgbClr val="6B9BDB"/>
                 </a:solidFill>
                 <a:latin typeface="Calibri"/>
               </a:rPr>
@@ -24988,7 +26002,7 @@
             <a:r>
               <a:rPr sz="400" b="0">
                 <a:solidFill>
-                  <a:srgbClr val="242852"/>
+                  <a:srgbClr val="0A1628"/>
                 </a:solidFill>
                 <a:latin typeface="Calibri"/>
               </a:rPr>
@@ -25012,7 +26026,7 @@
             <a:r>
               <a:rPr sz="300" b="0">
                 <a:solidFill>
-                  <a:srgbClr val="242852"/>
+                  <a:srgbClr val="0A1628"/>
                 </a:solidFill>
                 <a:latin typeface="Calibri"/>
               </a:rPr>
@@ -25036,7 +26050,7 @@
             <a:r>
               <a:rPr sz="400" b="0">
                 <a:solidFill>
-                  <a:srgbClr val="242852"/>
+                  <a:srgbClr val="0A1628"/>
                 </a:solidFill>
                 <a:latin typeface="Calibri"/>
               </a:rPr>
@@ -25060,7 +26074,7 @@
             <a:r>
               <a:rPr sz="300" b="0">
                 <a:solidFill>
-                  <a:srgbClr val="242852"/>
+                  <a:srgbClr val="0A1628"/>
                 </a:solidFill>
                 <a:latin typeface="Calibri"/>
               </a:rPr>
@@ -25084,7 +26098,7 @@
             <a:r>
               <a:rPr sz="300" b="0">
                 <a:solidFill>
-                  <a:srgbClr val="242852"/>
+                  <a:srgbClr val="0A1628"/>
                 </a:solidFill>
                 <a:latin typeface="Calibri"/>
               </a:rPr>
@@ -25108,7 +26122,7 @@
             <a:r>
               <a:rPr sz="300" b="0">
                 <a:solidFill>
-                  <a:srgbClr val="242852"/>
+                  <a:srgbClr val="0A1628"/>
                 </a:solidFill>
                 <a:latin typeface="Calibri"/>
               </a:rPr>
@@ -25132,7 +26146,7 @@
             <a:r>
               <a:rPr sz="400" b="0">
                 <a:solidFill>
-                  <a:srgbClr val="242852"/>
+                  <a:srgbClr val="0A1628"/>
                 </a:solidFill>
                 <a:latin typeface="Calibri"/>
               </a:rPr>
@@ -25156,7 +26170,7 @@
             <a:r>
               <a:rPr sz="400" b="0">
                 <a:solidFill>
-                  <a:srgbClr val="242852"/>
+                  <a:srgbClr val="0A1628"/>
                 </a:solidFill>
                 <a:latin typeface="Calibri"/>
               </a:rPr>
@@ -25180,7 +26194,7 @@
             <a:r>
               <a:rPr sz="300" b="0">
                 <a:solidFill>
-                  <a:srgbClr val="242852"/>
+                  <a:srgbClr val="0A1628"/>
                 </a:solidFill>
                 <a:latin typeface="Calibri"/>
               </a:rPr>
@@ -25204,7 +26218,7 @@
             <a:r>
               <a:rPr sz="400" b="0">
                 <a:solidFill>
-                  <a:srgbClr val="242852"/>
+                  <a:srgbClr val="0A1628"/>
                 </a:solidFill>
                 <a:latin typeface="Calibri"/>
               </a:rPr>
@@ -25228,7 +26242,7 @@
             <a:avLst/>
           </a:prstGeom>
           <a:solidFill>
-            <a:srgbClr val="1A1E42"/>
+            <a:srgbClr val="10203C"/>
           </a:solidFill>
           <a:ln>
             <a:noFill/>
@@ -25271,7 +26285,7 @@
             <a:avLst/>
           </a:prstGeom>
           <a:solidFill>
-            <a:srgbClr val="4A66AC"/>
+            <a:srgbClr val="3D6FCE"/>
           </a:solidFill>
           <a:ln>
             <a:noFill/>
@@ -25360,7 +26374,7 @@
             <a:r>
               <a:rPr sz="750" b="0" i="0">
                 <a:solidFill>
-                  <a:srgbClr val="8FA1CF"/>
+                  <a:srgbClr val="6B9BDB"/>
                 </a:solidFill>
                 <a:latin typeface="Calibri"/>
               </a:rPr>
@@ -25430,7 +26444,7 @@
             <a:r>
               <a:rPr sz="750" b="0" i="0">
                 <a:solidFill>
-                  <a:srgbClr val="8892AA"/>
+                  <a:srgbClr val="7085A8"/>
                 </a:solidFill>
                 <a:latin typeface="Calibri"/>
               </a:rPr>
@@ -25454,7 +26468,7 @@
             <a:avLst/>
           </a:prstGeom>
           <a:solidFill>
-            <a:srgbClr val="0F1125"/>
+            <a:srgbClr val="060E1A"/>
           </a:solidFill>
           <a:ln>
             <a:noFill/>
@@ -25508,7 +26522,7 @@
             <a:r>
               <a:rPr sz="750" b="0" i="0">
                 <a:solidFill>
-                  <a:srgbClr val="8FA1CF"/>
+                  <a:srgbClr val="6B9BDB"/>
                 </a:solidFill>
                 <a:latin typeface="Calibri"/>
               </a:rPr>
@@ -25578,7 +26592,7 @@
             <a:r>
               <a:rPr sz="750" b="0" i="0">
                 <a:solidFill>
-                  <a:srgbClr val="8892AA"/>
+                  <a:srgbClr val="7085A8"/>
                 </a:solidFill>
                 <a:latin typeface="Calibri"/>
               </a:rPr>
@@ -25602,7 +26616,7 @@
             <a:avLst/>
           </a:prstGeom>
           <a:solidFill>
-            <a:srgbClr val="0F1125"/>
+            <a:srgbClr val="060E1A"/>
           </a:solidFill>
           <a:ln>
             <a:noFill/>
@@ -25656,7 +26670,7 @@
             <a:r>
               <a:rPr sz="750" b="0" i="0">
                 <a:solidFill>
-                  <a:srgbClr val="8FA1CF"/>
+                  <a:srgbClr val="6B9BDB"/>
                 </a:solidFill>
                 <a:latin typeface="Calibri"/>
               </a:rPr>
@@ -25726,7 +26740,7 @@
             <a:r>
               <a:rPr sz="750" b="0" i="0">
                 <a:solidFill>
-                  <a:srgbClr val="8892AA"/>
+                  <a:srgbClr val="7085A8"/>
                 </a:solidFill>
                 <a:latin typeface="Calibri"/>
               </a:rPr>
@@ -25750,7 +26764,7 @@
             <a:avLst/>
           </a:prstGeom>
           <a:solidFill>
-            <a:srgbClr val="0F1125"/>
+            <a:srgbClr val="060E1A"/>
           </a:solidFill>
           <a:ln>
             <a:noFill/>
@@ -25804,7 +26818,7 @@
             <a:r>
               <a:rPr sz="750" b="0" i="0">
                 <a:solidFill>
-                  <a:srgbClr val="8FA1CF"/>
+                  <a:srgbClr val="6B9BDB"/>
                 </a:solidFill>
                 <a:latin typeface="Calibri"/>
               </a:rPr>
@@ -25874,7 +26888,7 @@
             <a:r>
               <a:rPr sz="750" b="0" i="0">
                 <a:solidFill>
-                  <a:srgbClr val="8892AA"/>
+                  <a:srgbClr val="7085A8"/>
                 </a:solidFill>
                 <a:latin typeface="Calibri"/>
               </a:rPr>
@@ -25898,7 +26912,7 @@
             <a:avLst/>
           </a:prstGeom>
           <a:solidFill>
-            <a:srgbClr val="0F1125"/>
+            <a:srgbClr val="060E1A"/>
           </a:solidFill>
           <a:ln>
             <a:noFill/>
@@ -25952,7 +26966,7 @@
             <a:r>
               <a:rPr sz="750" b="0" i="0">
                 <a:solidFill>
-                  <a:srgbClr val="8FA1CF"/>
+                  <a:srgbClr val="6B9BDB"/>
                 </a:solidFill>
                 <a:latin typeface="Calibri"/>
               </a:rPr>
@@ -26022,7 +27036,7 @@
             <a:r>
               <a:rPr sz="750" b="0" i="0">
                 <a:solidFill>
-                  <a:srgbClr val="8892AA"/>
+                  <a:srgbClr val="7085A8"/>
                 </a:solidFill>
                 <a:latin typeface="Calibri"/>
               </a:rPr>
@@ -26046,7 +27060,7 @@
             <a:avLst/>
           </a:prstGeom>
           <a:solidFill>
-            <a:srgbClr val="0F1125"/>
+            <a:srgbClr val="060E1A"/>
           </a:solidFill>
           <a:ln>
             <a:noFill/>
@@ -26100,7 +27114,7 @@
             <a:r>
               <a:rPr sz="750" b="0" i="0">
                 <a:solidFill>
-                  <a:srgbClr val="8FA1CF"/>
+                  <a:srgbClr val="6B9BDB"/>
                 </a:solidFill>
                 <a:latin typeface="Calibri"/>
               </a:rPr>
@@ -26170,7 +27184,7 @@
             <a:r>
               <a:rPr sz="750" b="0" i="0">
                 <a:solidFill>
-                  <a:srgbClr val="8892AA"/>
+                  <a:srgbClr val="7085A8"/>
                 </a:solidFill>
                 <a:latin typeface="Calibri"/>
               </a:rPr>
@@ -26240,7 +27254,7 @@
             <a:r>
               <a:rPr sz="700" b="0" i="0">
                 <a:solidFill>
-                  <a:srgbClr val="8892AA"/>
+                  <a:srgbClr val="7085A8"/>
                 </a:solidFill>
                 <a:latin typeface="Calibri"/>
               </a:rPr>
@@ -26275,11 +27289,89 @@
             <a:r>
               <a:rPr sz="800" b="0" i="0">
                 <a:solidFill>
-                  <a:srgbClr val="8892AA"/>
+                  <a:srgbClr val="7085A8"/>
                 </a:solidFill>
                 <a:latin typeface="Calibri"/>
               </a:rPr>
               <a:t>3 / 20</a:t>
+            </a:r>
+          </a:p>
+        </p:txBody>
+      </p:sp>
+      <p:sp>
+        <p:nvSpPr>
+          <p:cNvPr id="36" name="Oval 35"/>
+          <p:cNvSpPr/>
+          <p:nvPr/>
+        </p:nvSpPr>
+        <p:spPr>
+          <a:xfrm>
+            <a:off x="9756648" y="3904488"/>
+            <a:ext cx="1920240" cy="1920240"/>
+          </a:xfrm>
+          <a:prstGeom prst="ellipse">
+            <a:avLst/>
+          </a:prstGeom>
+          <a:noFill/>
+          <a:ln w="25400">
+            <a:solidFill>
+              <a:srgbClr val="E7CC59"/>
+            </a:solidFill>
+          </a:ln>
+        </p:spPr>
+        <p:style>
+          <a:lnRef idx="1">
+            <a:schemeClr val="accent1"/>
+          </a:lnRef>
+          <a:fillRef idx="3">
+            <a:schemeClr val="accent1"/>
+          </a:fillRef>
+          <a:effectRef idx="2">
+            <a:schemeClr val="accent1"/>
+          </a:effectRef>
+          <a:fontRef idx="minor">
+            <a:schemeClr val="lt1"/>
+          </a:fontRef>
+        </p:style>
+        <p:txBody>
+          <a:bodyPr rtlCol="0" anchor="ctr"/>
+          <a:lstStyle/>
+          <a:p>
+            <a:pPr algn="ctr"/>
+          </a:p>
+        </p:txBody>
+      </p:sp>
+      <p:sp>
+        <p:nvSpPr>
+          <p:cNvPr id="37" name="TextBox 36"/>
+          <p:cNvSpPr txBox="1"/>
+          <p:nvPr/>
+        </p:nvSpPr>
+        <p:spPr>
+          <a:xfrm>
+            <a:off x="9829800" y="3831336"/>
+            <a:ext cx="1773936" cy="1920240"/>
+          </a:xfrm>
+          <a:prstGeom prst="rect">
+            <a:avLst/>
+          </a:prstGeom>
+          <a:noFill/>
+        </p:spPr>
+        <p:txBody>
+          <a:bodyPr wrap="square">
+            <a:spAutoFit/>
+          </a:bodyPr>
+          <a:lstStyle/>
+          <a:p>
+            <a:pPr algn="ctr"/>
+            <a:r>
+              <a:rPr sz="11000" b="1" i="0">
+                <a:solidFill>
+                  <a:srgbClr val="142A4A"/>
+                </a:solidFill>
+                <a:latin typeface="Calibri"/>
+              </a:rPr>
+              <a:t>V</a:t>
             </a:r>
           </a:p>
         </p:txBody>
@@ -26298,7 +27390,7 @@
     <p:bg>
       <p:bgPr>
         <a:solidFill>
-          <a:srgbClr val="242852"/>
+          <a:srgbClr val="0A1628"/>
         </a:solidFill>
         <a:effectLst/>
       </p:bgPr>
@@ -26371,7 +27463,7 @@
             <a:r>
               <a:rPr sz="1000" b="0" i="1">
                 <a:solidFill>
-                  <a:srgbClr val="8FA1CF"/>
+                  <a:srgbClr val="6B9BDB"/>
                 </a:solidFill>
                 <a:latin typeface="Calibri"/>
               </a:rPr>
@@ -26496,7 +27588,7 @@
             <a:r>
               <a:rPr sz="400" b="0">
                 <a:solidFill>
-                  <a:srgbClr val="242852"/>
+                  <a:srgbClr val="0A1628"/>
                 </a:solidFill>
                 <a:latin typeface="Calibri"/>
               </a:rPr>
@@ -26520,7 +27612,7 @@
             <a:r>
               <a:rPr sz="400" b="0">
                 <a:solidFill>
-                  <a:srgbClr val="242852"/>
+                  <a:srgbClr val="0A1628"/>
                 </a:solidFill>
                 <a:latin typeface="Calibri"/>
               </a:rPr>
@@ -26544,7 +27636,7 @@
             <a:r>
               <a:rPr sz="300" b="0">
                 <a:solidFill>
-                  <a:srgbClr val="242852"/>
+                  <a:srgbClr val="0A1628"/>
                 </a:solidFill>
                 <a:latin typeface="Calibri"/>
               </a:rPr>
@@ -26568,7 +27660,7 @@
             <a:r>
               <a:rPr sz="300" b="0">
                 <a:solidFill>
-                  <a:srgbClr val="242852"/>
+                  <a:srgbClr val="0A1628"/>
                 </a:solidFill>
                 <a:latin typeface="Calibri"/>
               </a:rPr>
@@ -26592,7 +27684,7 @@
             <a:r>
               <a:rPr sz="300" b="0">
                 <a:solidFill>
-                  <a:srgbClr val="242852"/>
+                  <a:srgbClr val="0A1628"/>
                 </a:solidFill>
                 <a:latin typeface="Calibri"/>
               </a:rPr>
@@ -26616,7 +27708,7 @@
             <a:r>
               <a:rPr sz="400" b="0">
                 <a:solidFill>
-                  <a:srgbClr val="242852"/>
+                  <a:srgbClr val="0A1628"/>
                 </a:solidFill>
                 <a:latin typeface="Calibri"/>
               </a:rPr>
@@ -26640,7 +27732,7 @@
             <a:r>
               <a:rPr sz="300" b="0">
                 <a:solidFill>
-                  <a:srgbClr val="242852"/>
+                  <a:srgbClr val="0A1628"/>
                 </a:solidFill>
                 <a:latin typeface="Calibri"/>
               </a:rPr>
@@ -26664,7 +27756,7 @@
             <a:r>
               <a:rPr sz="300" b="0">
                 <a:solidFill>
-                  <a:srgbClr val="242852"/>
+                  <a:srgbClr val="0A1628"/>
                 </a:solidFill>
                 <a:latin typeface="Calibri"/>
               </a:rPr>
@@ -26688,7 +27780,7 @@
             <a:r>
               <a:rPr sz="300" b="0">
                 <a:solidFill>
-                  <a:srgbClr val="242852"/>
+                  <a:srgbClr val="0A1628"/>
                 </a:solidFill>
                 <a:latin typeface="Calibri"/>
               </a:rPr>
@@ -26712,7 +27804,7 @@
             <a:r>
               <a:rPr sz="400" b="0">
                 <a:solidFill>
-                  <a:srgbClr val="242852"/>
+                  <a:srgbClr val="0A1628"/>
                 </a:solidFill>
                 <a:latin typeface="Calibri"/>
               </a:rPr>
@@ -26736,7 +27828,7 @@
             <a:r>
               <a:rPr sz="400" b="0">
                 <a:solidFill>
-                  <a:srgbClr val="242852"/>
+                  <a:srgbClr val="0A1628"/>
                 </a:solidFill>
                 <a:latin typeface="Calibri"/>
               </a:rPr>
@@ -26760,7 +27852,7 @@
             <a:avLst/>
           </a:prstGeom>
           <a:solidFill>
-            <a:srgbClr val="1A1E42"/>
+            <a:srgbClr val="10203C"/>
           </a:solidFill>
           <a:ln>
             <a:noFill/>
@@ -26803,7 +27895,7 @@
             <a:avLst/>
           </a:prstGeom>
           <a:solidFill>
-            <a:srgbClr val="4A66AC"/>
+            <a:srgbClr val="3D6FCE"/>
           </a:solidFill>
           <a:ln>
             <a:noFill/>
@@ -26892,7 +27984,7 @@
             <a:r>
               <a:rPr sz="750" b="0" i="0">
                 <a:solidFill>
-                  <a:srgbClr val="8FA1CF"/>
+                  <a:srgbClr val="6B9BDB"/>
                 </a:solidFill>
                 <a:latin typeface="Calibri"/>
               </a:rPr>
@@ -26962,7 +28054,7 @@
             <a:r>
               <a:rPr sz="750" b="0" i="0">
                 <a:solidFill>
-                  <a:srgbClr val="8892AA"/>
+                  <a:srgbClr val="7085A8"/>
                 </a:solidFill>
                 <a:latin typeface="Calibri"/>
               </a:rPr>
@@ -26986,7 +28078,7 @@
             <a:avLst/>
           </a:prstGeom>
           <a:solidFill>
-            <a:srgbClr val="0F1125"/>
+            <a:srgbClr val="060E1A"/>
           </a:solidFill>
           <a:ln>
             <a:noFill/>
@@ -27040,7 +28132,7 @@
             <a:r>
               <a:rPr sz="750" b="0" i="0">
                 <a:solidFill>
-                  <a:srgbClr val="8FA1CF"/>
+                  <a:srgbClr val="6B9BDB"/>
                 </a:solidFill>
                 <a:latin typeface="Calibri"/>
               </a:rPr>
@@ -27110,7 +28202,7 @@
             <a:r>
               <a:rPr sz="750" b="0" i="0">
                 <a:solidFill>
-                  <a:srgbClr val="8892AA"/>
+                  <a:srgbClr val="7085A8"/>
                 </a:solidFill>
                 <a:latin typeface="Calibri"/>
               </a:rPr>
@@ -27134,7 +28226,7 @@
             <a:avLst/>
           </a:prstGeom>
           <a:solidFill>
-            <a:srgbClr val="0F1125"/>
+            <a:srgbClr val="060E1A"/>
           </a:solidFill>
           <a:ln>
             <a:noFill/>
@@ -27188,7 +28280,7 @@
             <a:r>
               <a:rPr sz="750" b="0" i="0">
                 <a:solidFill>
-                  <a:srgbClr val="8FA1CF"/>
+                  <a:srgbClr val="6B9BDB"/>
                 </a:solidFill>
                 <a:latin typeface="Calibri"/>
               </a:rPr>
@@ -27258,7 +28350,7 @@
             <a:r>
               <a:rPr sz="750" b="0" i="0">
                 <a:solidFill>
-                  <a:srgbClr val="8892AA"/>
+                  <a:srgbClr val="7085A8"/>
                 </a:solidFill>
                 <a:latin typeface="Calibri"/>
               </a:rPr>
@@ -27282,7 +28374,7 @@
             <a:avLst/>
           </a:prstGeom>
           <a:solidFill>
-            <a:srgbClr val="0F1125"/>
+            <a:srgbClr val="060E1A"/>
           </a:solidFill>
           <a:ln>
             <a:noFill/>
@@ -27336,7 +28428,7 @@
             <a:r>
               <a:rPr sz="750" b="0" i="0">
                 <a:solidFill>
-                  <a:srgbClr val="8FA1CF"/>
+                  <a:srgbClr val="6B9BDB"/>
                 </a:solidFill>
                 <a:latin typeface="Calibri"/>
               </a:rPr>
@@ -27406,7 +28498,7 @@
             <a:r>
               <a:rPr sz="750" b="0" i="0">
                 <a:solidFill>
-                  <a:srgbClr val="8892AA"/>
+                  <a:srgbClr val="7085A8"/>
                 </a:solidFill>
                 <a:latin typeface="Calibri"/>
               </a:rPr>
@@ -27430,7 +28522,7 @@
             <a:avLst/>
           </a:prstGeom>
           <a:solidFill>
-            <a:srgbClr val="0F1125"/>
+            <a:srgbClr val="060E1A"/>
           </a:solidFill>
           <a:ln>
             <a:noFill/>
@@ -27484,7 +28576,7 @@
             <a:r>
               <a:rPr sz="750" b="0" i="0">
                 <a:solidFill>
-                  <a:srgbClr val="8FA1CF"/>
+                  <a:srgbClr val="6B9BDB"/>
                 </a:solidFill>
                 <a:latin typeface="Calibri"/>
               </a:rPr>
@@ -27554,7 +28646,7 @@
             <a:r>
               <a:rPr sz="750" b="0" i="0">
                 <a:solidFill>
-                  <a:srgbClr val="8892AA"/>
+                  <a:srgbClr val="7085A8"/>
                 </a:solidFill>
                 <a:latin typeface="Calibri"/>
               </a:rPr>
@@ -27578,7 +28670,7 @@
             <a:avLst/>
           </a:prstGeom>
           <a:solidFill>
-            <a:srgbClr val="0F1125"/>
+            <a:srgbClr val="060E1A"/>
           </a:solidFill>
           <a:ln>
             <a:noFill/>
@@ -27632,7 +28724,7 @@
             <a:r>
               <a:rPr sz="750" b="0" i="0">
                 <a:solidFill>
-                  <a:srgbClr val="8FA1CF"/>
+                  <a:srgbClr val="6B9BDB"/>
                 </a:solidFill>
                 <a:latin typeface="Calibri"/>
               </a:rPr>
@@ -27702,7 +28794,7 @@
             <a:r>
               <a:rPr sz="750" b="0" i="0">
                 <a:solidFill>
-                  <a:srgbClr val="8892AA"/>
+                  <a:srgbClr val="7085A8"/>
                 </a:solidFill>
                 <a:latin typeface="Calibri"/>
               </a:rPr>
@@ -27772,7 +28864,7 @@
             <a:r>
               <a:rPr sz="700" b="0" i="0">
                 <a:solidFill>
-                  <a:srgbClr val="8892AA"/>
+                  <a:srgbClr val="7085A8"/>
                 </a:solidFill>
                 <a:latin typeface="Calibri"/>
               </a:rPr>
@@ -27807,11 +28899,89 @@
             <a:r>
               <a:rPr sz="800" b="0" i="0">
                 <a:solidFill>
-                  <a:srgbClr val="8892AA"/>
+                  <a:srgbClr val="7085A8"/>
                 </a:solidFill>
                 <a:latin typeface="Calibri"/>
               </a:rPr>
               <a:t>4 / 20</a:t>
+            </a:r>
+          </a:p>
+        </p:txBody>
+      </p:sp>
+      <p:sp>
+        <p:nvSpPr>
+          <p:cNvPr id="36" name="Oval 35"/>
+          <p:cNvSpPr/>
+          <p:nvPr/>
+        </p:nvSpPr>
+        <p:spPr>
+          <a:xfrm>
+            <a:off x="9756648" y="3904488"/>
+            <a:ext cx="1920240" cy="1920240"/>
+          </a:xfrm>
+          <a:prstGeom prst="ellipse">
+            <a:avLst/>
+          </a:prstGeom>
+          <a:noFill/>
+          <a:ln w="25400">
+            <a:solidFill>
+              <a:srgbClr val="E7CC59"/>
+            </a:solidFill>
+          </a:ln>
+        </p:spPr>
+        <p:style>
+          <a:lnRef idx="1">
+            <a:schemeClr val="accent1"/>
+          </a:lnRef>
+          <a:fillRef idx="3">
+            <a:schemeClr val="accent1"/>
+          </a:fillRef>
+          <a:effectRef idx="2">
+            <a:schemeClr val="accent1"/>
+          </a:effectRef>
+          <a:fontRef idx="minor">
+            <a:schemeClr val="lt1"/>
+          </a:fontRef>
+        </p:style>
+        <p:txBody>
+          <a:bodyPr rtlCol="0" anchor="ctr"/>
+          <a:lstStyle/>
+          <a:p>
+            <a:pPr algn="ctr"/>
+          </a:p>
+        </p:txBody>
+      </p:sp>
+      <p:sp>
+        <p:nvSpPr>
+          <p:cNvPr id="37" name="TextBox 36"/>
+          <p:cNvSpPr txBox="1"/>
+          <p:nvPr/>
+        </p:nvSpPr>
+        <p:spPr>
+          <a:xfrm>
+            <a:off x="9829800" y="3831336"/>
+            <a:ext cx="1773936" cy="1920240"/>
+          </a:xfrm>
+          <a:prstGeom prst="rect">
+            <a:avLst/>
+          </a:prstGeom>
+          <a:noFill/>
+        </p:spPr>
+        <p:txBody>
+          <a:bodyPr wrap="square">
+            <a:spAutoFit/>
+          </a:bodyPr>
+          <a:lstStyle/>
+          <a:p>
+            <a:pPr algn="ctr"/>
+            <a:r>
+              <a:rPr sz="11000" b="1" i="0">
+                <a:solidFill>
+                  <a:srgbClr val="142A4A"/>
+                </a:solidFill>
+                <a:latin typeface="Calibri"/>
+              </a:rPr>
+              <a:t>V</a:t>
             </a:r>
           </a:p>
         </p:txBody>
@@ -27830,7 +29000,7 @@
     <p:bg>
       <p:bgPr>
         <a:solidFill>
-          <a:srgbClr val="242852"/>
+          <a:srgbClr val="0A1628"/>
         </a:solidFill>
         <a:effectLst/>
       </p:bgPr>
@@ -27903,7 +29073,7 @@
             <a:r>
               <a:rPr sz="1000" b="0" i="1">
                 <a:solidFill>
-                  <a:srgbClr val="8FA1CF"/>
+                  <a:srgbClr val="6B9BDB"/>
                 </a:solidFill>
                 <a:latin typeface="Calibri"/>
               </a:rPr>
@@ -28028,7 +29198,7 @@
             <a:r>
               <a:rPr sz="400" b="0">
                 <a:solidFill>
-                  <a:srgbClr val="242852"/>
+                  <a:srgbClr val="0A1628"/>
                 </a:solidFill>
                 <a:latin typeface="Calibri"/>
               </a:rPr>
@@ -28052,7 +29222,7 @@
             <a:r>
               <a:rPr sz="300" b="0">
                 <a:solidFill>
-                  <a:srgbClr val="242852"/>
+                  <a:srgbClr val="0A1628"/>
                 </a:solidFill>
                 <a:latin typeface="Calibri"/>
               </a:rPr>
@@ -28076,7 +29246,7 @@
             <a:r>
               <a:rPr sz="300" b="0">
                 <a:solidFill>
-                  <a:srgbClr val="242852"/>
+                  <a:srgbClr val="0A1628"/>
                 </a:solidFill>
                 <a:latin typeface="Calibri"/>
               </a:rPr>
@@ -28100,7 +29270,7 @@
             <a:r>
               <a:rPr sz="300" b="0">
                 <a:solidFill>
-                  <a:srgbClr val="242852"/>
+                  <a:srgbClr val="0A1628"/>
                 </a:solidFill>
                 <a:latin typeface="Calibri"/>
               </a:rPr>
@@ -28124,7 +29294,7 @@
             <a:r>
               <a:rPr sz="400" b="0">
                 <a:solidFill>
-                  <a:srgbClr val="242852"/>
+                  <a:srgbClr val="0A1628"/>
                 </a:solidFill>
                 <a:latin typeface="Calibri"/>
               </a:rPr>
@@ -28148,7 +29318,7 @@
             <a:r>
               <a:rPr sz="300" b="0">
                 <a:solidFill>
-                  <a:srgbClr val="242852"/>
+                  <a:srgbClr val="0A1628"/>
                 </a:solidFill>
                 <a:latin typeface="Calibri"/>
               </a:rPr>
@@ -28172,7 +29342,7 @@
             <a:r>
               <a:rPr sz="400" b="0">
                 <a:solidFill>
-                  <a:srgbClr val="242852"/>
+                  <a:srgbClr val="0A1628"/>
                 </a:solidFill>
                 <a:latin typeface="Calibri"/>
               </a:rPr>
@@ -28196,7 +29366,7 @@
             <a:r>
               <a:rPr sz="400" b="0">
                 <a:solidFill>
-                  <a:srgbClr val="242852"/>
+                  <a:srgbClr val="0A1628"/>
                 </a:solidFill>
                 <a:latin typeface="Calibri"/>
               </a:rPr>
@@ -28220,7 +29390,7 @@
             <a:r>
               <a:rPr sz="400" b="0">
                 <a:solidFill>
-                  <a:srgbClr val="242852"/>
+                  <a:srgbClr val="0A1628"/>
                 </a:solidFill>
                 <a:latin typeface="Calibri"/>
               </a:rPr>
@@ -28244,7 +29414,7 @@
             <a:r>
               <a:rPr sz="400" b="0">
                 <a:solidFill>
-                  <a:srgbClr val="242852"/>
+                  <a:srgbClr val="0A1628"/>
                 </a:solidFill>
                 <a:latin typeface="Calibri"/>
               </a:rPr>
@@ -28268,7 +29438,7 @@
             <a:avLst/>
           </a:prstGeom>
           <a:solidFill>
-            <a:srgbClr val="1A1E42"/>
+            <a:srgbClr val="10203C"/>
           </a:solidFill>
           <a:ln>
             <a:noFill/>
@@ -28311,7 +29481,7 @@
             <a:avLst/>
           </a:prstGeom>
           <a:solidFill>
-            <a:srgbClr val="4A66AC"/>
+            <a:srgbClr val="3D6FCE"/>
           </a:solidFill>
           <a:ln>
             <a:noFill/>
@@ -28400,7 +29570,7 @@
             <a:r>
               <a:rPr sz="750" b="0" i="0">
                 <a:solidFill>
-                  <a:srgbClr val="8FA1CF"/>
+                  <a:srgbClr val="6B9BDB"/>
                 </a:solidFill>
                 <a:latin typeface="Calibri"/>
               </a:rPr>
@@ -28470,7 +29640,7 @@
             <a:r>
               <a:rPr sz="750" b="0" i="0">
                 <a:solidFill>
-                  <a:srgbClr val="8892AA"/>
+                  <a:srgbClr val="7085A8"/>
                 </a:solidFill>
                 <a:latin typeface="Calibri"/>
               </a:rPr>
@@ -28494,7 +29664,7 @@
             <a:avLst/>
           </a:prstGeom>
           <a:solidFill>
-            <a:srgbClr val="0F1125"/>
+            <a:srgbClr val="060E1A"/>
           </a:solidFill>
           <a:ln>
             <a:noFill/>
@@ -28548,7 +29718,7 @@
             <a:r>
               <a:rPr sz="750" b="0" i="0">
                 <a:solidFill>
-                  <a:srgbClr val="8FA1CF"/>
+                  <a:srgbClr val="6B9BDB"/>
                 </a:solidFill>
                 <a:latin typeface="Calibri"/>
               </a:rPr>
@@ -28618,7 +29788,7 @@
             <a:r>
               <a:rPr sz="750" b="0" i="0">
                 <a:solidFill>
-                  <a:srgbClr val="8892AA"/>
+                  <a:srgbClr val="7085A8"/>
                 </a:solidFill>
                 <a:latin typeface="Calibri"/>
               </a:rPr>
@@ -28642,7 +29812,7 @@
             <a:avLst/>
           </a:prstGeom>
           <a:solidFill>
-            <a:srgbClr val="0F1125"/>
+            <a:srgbClr val="060E1A"/>
           </a:solidFill>
           <a:ln>
             <a:noFill/>
@@ -28696,7 +29866,7 @@
             <a:r>
               <a:rPr sz="750" b="0" i="0">
                 <a:solidFill>
-                  <a:srgbClr val="8FA1CF"/>
+                  <a:srgbClr val="6B9BDB"/>
                 </a:solidFill>
                 <a:latin typeface="Calibri"/>
               </a:rPr>
@@ -28766,7 +29936,7 @@
             <a:r>
               <a:rPr sz="750" b="0" i="0">
                 <a:solidFill>
-                  <a:srgbClr val="8892AA"/>
+                  <a:srgbClr val="7085A8"/>
                 </a:solidFill>
                 <a:latin typeface="Calibri"/>
               </a:rPr>
@@ -28790,7 +29960,7 @@
             <a:avLst/>
           </a:prstGeom>
           <a:solidFill>
-            <a:srgbClr val="0F1125"/>
+            <a:srgbClr val="060E1A"/>
           </a:solidFill>
           <a:ln>
             <a:noFill/>
@@ -28844,7 +30014,7 @@
             <a:r>
               <a:rPr sz="750" b="0" i="0">
                 <a:solidFill>
-                  <a:srgbClr val="8FA1CF"/>
+                  <a:srgbClr val="6B9BDB"/>
                 </a:solidFill>
                 <a:latin typeface="Calibri"/>
               </a:rPr>
@@ -28914,7 +30084,7 @@
             <a:r>
               <a:rPr sz="750" b="0" i="0">
                 <a:solidFill>
-                  <a:srgbClr val="8892AA"/>
+                  <a:srgbClr val="7085A8"/>
                 </a:solidFill>
                 <a:latin typeface="Calibri"/>
               </a:rPr>
@@ -28938,7 +30108,7 @@
             <a:avLst/>
           </a:prstGeom>
           <a:solidFill>
-            <a:srgbClr val="0F1125"/>
+            <a:srgbClr val="060E1A"/>
           </a:solidFill>
           <a:ln>
             <a:noFill/>
@@ -28992,7 +30162,7 @@
             <a:r>
               <a:rPr sz="750" b="0" i="0">
                 <a:solidFill>
-                  <a:srgbClr val="8FA1CF"/>
+                  <a:srgbClr val="6B9BDB"/>
                 </a:solidFill>
                 <a:latin typeface="Calibri"/>
               </a:rPr>
@@ -29062,7 +30232,7 @@
             <a:r>
               <a:rPr sz="750" b="0" i="0">
                 <a:solidFill>
-                  <a:srgbClr val="8892AA"/>
+                  <a:srgbClr val="7085A8"/>
                 </a:solidFill>
                 <a:latin typeface="Calibri"/>
               </a:rPr>
@@ -29086,7 +30256,7 @@
             <a:avLst/>
           </a:prstGeom>
           <a:solidFill>
-            <a:srgbClr val="0F1125"/>
+            <a:srgbClr val="060E1A"/>
           </a:solidFill>
           <a:ln>
             <a:noFill/>
@@ -29140,7 +30310,7 @@
             <a:r>
               <a:rPr sz="750" b="0" i="0">
                 <a:solidFill>
-                  <a:srgbClr val="8FA1CF"/>
+                  <a:srgbClr val="6B9BDB"/>
                 </a:solidFill>
                 <a:latin typeface="Calibri"/>
               </a:rPr>
@@ -29210,7 +30380,7 @@
             <a:r>
               <a:rPr sz="750" b="0" i="0">
                 <a:solidFill>
-                  <a:srgbClr val="8892AA"/>
+                  <a:srgbClr val="7085A8"/>
                 </a:solidFill>
                 <a:latin typeface="Calibri"/>
               </a:rPr>
@@ -29280,7 +30450,7 @@
             <a:r>
               <a:rPr sz="700" b="0" i="0">
                 <a:solidFill>
-                  <a:srgbClr val="8892AA"/>
+                  <a:srgbClr val="7085A8"/>
                 </a:solidFill>
                 <a:latin typeface="Calibri"/>
               </a:rPr>
@@ -29315,11 +30485,89 @@
             <a:r>
               <a:rPr sz="800" b="0" i="0">
                 <a:solidFill>
-                  <a:srgbClr val="8892AA"/>
+                  <a:srgbClr val="7085A8"/>
                 </a:solidFill>
                 <a:latin typeface="Calibri"/>
               </a:rPr>
               <a:t>5 / 20</a:t>
+            </a:r>
+          </a:p>
+        </p:txBody>
+      </p:sp>
+      <p:sp>
+        <p:nvSpPr>
+          <p:cNvPr id="36" name="Oval 35"/>
+          <p:cNvSpPr/>
+          <p:nvPr/>
+        </p:nvSpPr>
+        <p:spPr>
+          <a:xfrm>
+            <a:off x="9756648" y="3904488"/>
+            <a:ext cx="1920240" cy="1920240"/>
+          </a:xfrm>
+          <a:prstGeom prst="ellipse">
+            <a:avLst/>
+          </a:prstGeom>
+          <a:noFill/>
+          <a:ln w="25400">
+            <a:solidFill>
+              <a:srgbClr val="E7CC59"/>
+            </a:solidFill>
+          </a:ln>
+        </p:spPr>
+        <p:style>
+          <a:lnRef idx="1">
+            <a:schemeClr val="accent1"/>
+          </a:lnRef>
+          <a:fillRef idx="3">
+            <a:schemeClr val="accent1"/>
+          </a:fillRef>
+          <a:effectRef idx="2">
+            <a:schemeClr val="accent1"/>
+          </a:effectRef>
+          <a:fontRef idx="minor">
+            <a:schemeClr val="lt1"/>
+          </a:fontRef>
+        </p:style>
+        <p:txBody>
+          <a:bodyPr rtlCol="0" anchor="ctr"/>
+          <a:lstStyle/>
+          <a:p>
+            <a:pPr algn="ctr"/>
+          </a:p>
+        </p:txBody>
+      </p:sp>
+      <p:sp>
+        <p:nvSpPr>
+          <p:cNvPr id="37" name="TextBox 36"/>
+          <p:cNvSpPr txBox="1"/>
+          <p:nvPr/>
+        </p:nvSpPr>
+        <p:spPr>
+          <a:xfrm>
+            <a:off x="9829800" y="3831336"/>
+            <a:ext cx="1773936" cy="1920240"/>
+          </a:xfrm>
+          <a:prstGeom prst="rect">
+            <a:avLst/>
+          </a:prstGeom>
+          <a:noFill/>
+        </p:spPr>
+        <p:txBody>
+          <a:bodyPr wrap="square">
+            <a:spAutoFit/>
+          </a:bodyPr>
+          <a:lstStyle/>
+          <a:p>
+            <a:pPr algn="ctr"/>
+            <a:r>
+              <a:rPr sz="11000" b="1" i="0">
+                <a:solidFill>
+                  <a:srgbClr val="142A4A"/>
+                </a:solidFill>
+                <a:latin typeface="Calibri"/>
+              </a:rPr>
+              <a:t>V</a:t>
             </a:r>
           </a:p>
         </p:txBody>
@@ -29338,7 +30586,7 @@
     <p:bg>
       <p:bgPr>
         <a:solidFill>
-          <a:srgbClr val="242852"/>
+          <a:srgbClr val="0A1628"/>
         </a:solidFill>
         <a:effectLst/>
       </p:bgPr>
@@ -29411,7 +30659,7 @@
             <a:r>
               <a:rPr sz="1000" b="0" i="1">
                 <a:solidFill>
-                  <a:srgbClr val="8FA1CF"/>
+                  <a:srgbClr val="6B9BDB"/>
                 </a:solidFill>
                 <a:latin typeface="Calibri"/>
               </a:rPr>
@@ -29536,7 +30784,7 @@
             <a:r>
               <a:rPr sz="400" b="0">
                 <a:solidFill>
-                  <a:srgbClr val="242852"/>
+                  <a:srgbClr val="0A1628"/>
                 </a:solidFill>
                 <a:latin typeface="Calibri"/>
               </a:rPr>
@@ -29560,7 +30808,7 @@
             <a:r>
               <a:rPr sz="300" b="0">
                 <a:solidFill>
-                  <a:srgbClr val="242852"/>
+                  <a:srgbClr val="0A1628"/>
                 </a:solidFill>
                 <a:latin typeface="Calibri"/>
               </a:rPr>
@@ -29584,7 +30832,7 @@
             <a:r>
               <a:rPr sz="300" b="0">
                 <a:solidFill>
-                  <a:srgbClr val="242852"/>
+                  <a:srgbClr val="0A1628"/>
                 </a:solidFill>
                 <a:latin typeface="Calibri"/>
               </a:rPr>
@@ -29608,7 +30856,7 @@
             <a:r>
               <a:rPr sz="400" b="0">
                 <a:solidFill>
-                  <a:srgbClr val="242852"/>
+                  <a:srgbClr val="0A1628"/>
                 </a:solidFill>
                 <a:latin typeface="Calibri"/>
               </a:rPr>
@@ -29632,7 +30880,7 @@
             <a:r>
               <a:rPr sz="300" b="0">
                 <a:solidFill>
-                  <a:srgbClr val="242852"/>
+                  <a:srgbClr val="0A1628"/>
                 </a:solidFill>
                 <a:latin typeface="Calibri"/>
               </a:rPr>
@@ -29656,7 +30904,7 @@
             <a:r>
               <a:rPr sz="400" b="0">
                 <a:solidFill>
-                  <a:srgbClr val="242852"/>
+                  <a:srgbClr val="0A1628"/>
                 </a:solidFill>
                 <a:latin typeface="Calibri"/>
               </a:rPr>
@@ -29680,7 +30928,7 @@
             <a:r>
               <a:rPr sz="300" b="0">
                 <a:solidFill>
-                  <a:srgbClr val="242852"/>
+                  <a:srgbClr val="0A1628"/>
                 </a:solidFill>
                 <a:latin typeface="Calibri"/>
               </a:rPr>
@@ -29704,7 +30952,7 @@
             <a:r>
               <a:rPr sz="400" b="0">
                 <a:solidFill>
-                  <a:srgbClr val="242852"/>
+                  <a:srgbClr val="0A1628"/>
                 </a:solidFill>
                 <a:latin typeface="Calibri"/>
               </a:rPr>
@@ -29728,7 +30976,7 @@
             <a:r>
               <a:rPr sz="300" b="0">
                 <a:solidFill>
-                  <a:srgbClr val="242852"/>
+                  <a:srgbClr val="0A1628"/>
                 </a:solidFill>
                 <a:latin typeface="Calibri"/>
               </a:rPr>
@@ -29752,7 +31000,7 @@
             <a:r>
               <a:rPr sz="300" b="0">
                 <a:solidFill>
-                  <a:srgbClr val="242852"/>
+                  <a:srgbClr val="0A1628"/>
                 </a:solidFill>
                 <a:latin typeface="Calibri"/>
               </a:rPr>
@@ -29776,7 +31024,7 @@
             <a:r>
               <a:rPr sz="300" b="0">
                 <a:solidFill>
-                  <a:srgbClr val="242852"/>
+                  <a:srgbClr val="0A1628"/>
                 </a:solidFill>
                 <a:latin typeface="Calibri"/>
               </a:rPr>
@@ -29800,7 +31048,7 @@
             <a:r>
               <a:rPr sz="400" b="0">
                 <a:solidFill>
-                  <a:srgbClr val="242852"/>
+                  <a:srgbClr val="0A1628"/>
                 </a:solidFill>
                 <a:latin typeface="Calibri"/>
               </a:rPr>
@@ -29824,7 +31072,7 @@
             <a:avLst/>
           </a:prstGeom>
           <a:solidFill>
-            <a:srgbClr val="1A1E42"/>
+            <a:srgbClr val="10203C"/>
           </a:solidFill>
           <a:ln>
             <a:noFill/>
@@ -29867,7 +31115,7 @@
             <a:avLst/>
           </a:prstGeom>
           <a:solidFill>
-            <a:srgbClr val="4A66AC"/>
+            <a:srgbClr val="3D6FCE"/>
           </a:solidFill>
           <a:ln>
             <a:noFill/>
@@ -29956,7 +31204,7 @@
             <a:r>
               <a:rPr sz="750" b="0" i="0">
                 <a:solidFill>
-                  <a:srgbClr val="8FA1CF"/>
+                  <a:srgbClr val="6B9BDB"/>
                 </a:solidFill>
                 <a:latin typeface="Calibri"/>
               </a:rPr>
@@ -30026,7 +31274,7 @@
             <a:r>
               <a:rPr sz="750" b="0" i="0">
                 <a:solidFill>
-                  <a:srgbClr val="8892AA"/>
+                  <a:srgbClr val="7085A8"/>
                 </a:solidFill>
                 <a:latin typeface="Calibri"/>
               </a:rPr>
@@ -30050,7 +31298,7 @@
             <a:avLst/>
           </a:prstGeom>
           <a:solidFill>
-            <a:srgbClr val="0F1125"/>
+            <a:srgbClr val="060E1A"/>
           </a:solidFill>
           <a:ln>
             <a:noFill/>
@@ -30104,7 +31352,7 @@
             <a:r>
               <a:rPr sz="750" b="0" i="0">
                 <a:solidFill>
-                  <a:srgbClr val="8FA1CF"/>
+                  <a:srgbClr val="6B9BDB"/>
                 </a:solidFill>
                 <a:latin typeface="Calibri"/>
               </a:rPr>
@@ -30174,7 +31422,7 @@
             <a:r>
               <a:rPr sz="750" b="0" i="0">
                 <a:solidFill>
-                  <a:srgbClr val="8892AA"/>
+                  <a:srgbClr val="7085A8"/>
                 </a:solidFill>
                 <a:latin typeface="Calibri"/>
               </a:rPr>
@@ -30198,7 +31446,7 @@
             <a:avLst/>
           </a:prstGeom>
           <a:solidFill>
-            <a:srgbClr val="0F1125"/>
+            <a:srgbClr val="060E1A"/>
           </a:solidFill>
           <a:ln>
             <a:noFill/>
@@ -30252,7 +31500,7 @@
             <a:r>
               <a:rPr sz="750" b="0" i="0">
                 <a:solidFill>
-                  <a:srgbClr val="8FA1CF"/>
+                  <a:srgbClr val="6B9BDB"/>
                 </a:solidFill>
                 <a:latin typeface="Calibri"/>
               </a:rPr>
@@ -30322,7 +31570,7 @@
             <a:r>
               <a:rPr sz="750" b="0" i="0">
                 <a:solidFill>
-                  <a:srgbClr val="8892AA"/>
+                  <a:srgbClr val="7085A8"/>
                 </a:solidFill>
                 <a:latin typeface="Calibri"/>
               </a:rPr>
@@ -30346,7 +31594,7 @@
             <a:avLst/>
           </a:prstGeom>
           <a:solidFill>
-            <a:srgbClr val="0F1125"/>
+            <a:srgbClr val="060E1A"/>
           </a:solidFill>
           <a:ln>
             <a:noFill/>
@@ -30400,7 +31648,7 @@
             <a:r>
               <a:rPr sz="750" b="0" i="0">
                 <a:solidFill>
-                  <a:srgbClr val="8FA1CF"/>
+                  <a:srgbClr val="6B9BDB"/>
                 </a:solidFill>
                 <a:latin typeface="Calibri"/>
               </a:rPr>
@@ -30470,7 +31718,7 @@
             <a:r>
               <a:rPr sz="750" b="0" i="0">
                 <a:solidFill>
-                  <a:srgbClr val="8892AA"/>
+                  <a:srgbClr val="7085A8"/>
                 </a:solidFill>
                 <a:latin typeface="Calibri"/>
               </a:rPr>
@@ -30494,7 +31742,7 @@
             <a:avLst/>
           </a:prstGeom>
           <a:solidFill>
-            <a:srgbClr val="0F1125"/>
+            <a:srgbClr val="060E1A"/>
           </a:solidFill>
           <a:ln>
             <a:noFill/>
@@ -30548,7 +31796,7 @@
             <a:r>
               <a:rPr sz="750" b="0" i="0">
                 <a:solidFill>
-                  <a:srgbClr val="8FA1CF"/>
+                  <a:srgbClr val="6B9BDB"/>
                 </a:solidFill>
                 <a:latin typeface="Calibri"/>
               </a:rPr>
@@ -30618,7 +31866,7 @@
             <a:r>
               <a:rPr sz="750" b="0" i="0">
                 <a:solidFill>
-                  <a:srgbClr val="8892AA"/>
+                  <a:srgbClr val="7085A8"/>
                 </a:solidFill>
                 <a:latin typeface="Calibri"/>
               </a:rPr>
@@ -30642,7 +31890,7 @@
             <a:avLst/>
           </a:prstGeom>
           <a:solidFill>
-            <a:srgbClr val="0F1125"/>
+            <a:srgbClr val="060E1A"/>
           </a:solidFill>
           <a:ln>
             <a:noFill/>
@@ -30696,7 +31944,7 @@
             <a:r>
               <a:rPr sz="750" b="0" i="0">
                 <a:solidFill>
-                  <a:srgbClr val="8FA1CF"/>
+                  <a:srgbClr val="6B9BDB"/>
                 </a:solidFill>
                 <a:latin typeface="Calibri"/>
               </a:rPr>
@@ -30766,7 +32014,7 @@
             <a:r>
               <a:rPr sz="750" b="0" i="0">
                 <a:solidFill>
-                  <a:srgbClr val="8892AA"/>
+                  <a:srgbClr val="7085A8"/>
                 </a:solidFill>
                 <a:latin typeface="Calibri"/>
               </a:rPr>
@@ -30836,7 +32084,7 @@
             <a:r>
               <a:rPr sz="700" b="0" i="0">
                 <a:solidFill>
-                  <a:srgbClr val="8892AA"/>
+                  <a:srgbClr val="7085A8"/>
                 </a:solidFill>
                 <a:latin typeface="Calibri"/>
               </a:rPr>
@@ -30871,11 +32119,89 @@
             <a:r>
               <a:rPr sz="800" b="0" i="0">
                 <a:solidFill>
-                  <a:srgbClr val="8892AA"/>
+                  <a:srgbClr val="7085A8"/>
                 </a:solidFill>
                 <a:latin typeface="Calibri"/>
               </a:rPr>
               <a:t>6 / 20</a:t>
+            </a:r>
+          </a:p>
+        </p:txBody>
+      </p:sp>
+      <p:sp>
+        <p:nvSpPr>
+          <p:cNvPr id="36" name="Oval 35"/>
+          <p:cNvSpPr/>
+          <p:nvPr/>
+        </p:nvSpPr>
+        <p:spPr>
+          <a:xfrm>
+            <a:off x="9756648" y="3904488"/>
+            <a:ext cx="1920240" cy="1920240"/>
+          </a:xfrm>
+          <a:prstGeom prst="ellipse">
+            <a:avLst/>
+          </a:prstGeom>
+          <a:noFill/>
+          <a:ln w="25400">
+            <a:solidFill>
+              <a:srgbClr val="E7CC59"/>
+            </a:solidFill>
+          </a:ln>
+        </p:spPr>
+        <p:style>
+          <a:lnRef idx="1">
+            <a:schemeClr val="accent1"/>
+          </a:lnRef>
+          <a:fillRef idx="3">
+            <a:schemeClr val="accent1"/>
+          </a:fillRef>
+          <a:effectRef idx="2">
+            <a:schemeClr val="accent1"/>
+          </a:effectRef>
+          <a:fontRef idx="minor">
+            <a:schemeClr val="lt1"/>
+          </a:fontRef>
+        </p:style>
+        <p:txBody>
+          <a:bodyPr rtlCol="0" anchor="ctr"/>
+          <a:lstStyle/>
+          <a:p>
+            <a:pPr algn="ctr"/>
+          </a:p>
+        </p:txBody>
+      </p:sp>
+      <p:sp>
+        <p:nvSpPr>
+          <p:cNvPr id="37" name="TextBox 36"/>
+          <p:cNvSpPr txBox="1"/>
+          <p:nvPr/>
+        </p:nvSpPr>
+        <p:spPr>
+          <a:xfrm>
+            <a:off x="9829800" y="3831336"/>
+            <a:ext cx="1773936" cy="1920240"/>
+          </a:xfrm>
+          <a:prstGeom prst="rect">
+            <a:avLst/>
+          </a:prstGeom>
+          <a:noFill/>
+        </p:spPr>
+        <p:txBody>
+          <a:bodyPr wrap="square">
+            <a:spAutoFit/>
+          </a:bodyPr>
+          <a:lstStyle/>
+          <a:p>
+            <a:pPr algn="ctr"/>
+            <a:r>
+              <a:rPr sz="11000" b="1" i="0">
+                <a:solidFill>
+                  <a:srgbClr val="142A4A"/>
+                </a:solidFill>
+                <a:latin typeface="Calibri"/>
+              </a:rPr>
+              <a:t>V</a:t>
             </a:r>
           </a:p>
         </p:txBody>
@@ -30894,7 +32220,7 @@
     <p:bg>
       <p:bgPr>
         <a:solidFill>
-          <a:srgbClr val="242852"/>
+          <a:srgbClr val="0A1628"/>
         </a:solidFill>
         <a:effectLst/>
       </p:bgPr>
@@ -30967,7 +32293,7 @@
             <a:r>
               <a:rPr sz="1000" b="0" i="1">
                 <a:solidFill>
-                  <a:srgbClr val="8FA1CF"/>
+                  <a:srgbClr val="6B9BDB"/>
                 </a:solidFill>
                 <a:latin typeface="Calibri"/>
               </a:rPr>
@@ -31092,7 +32418,7 @@
             <a:r>
               <a:rPr sz="400" b="0">
                 <a:solidFill>
-                  <a:srgbClr val="242852"/>
+                  <a:srgbClr val="0A1628"/>
                 </a:solidFill>
                 <a:latin typeface="Calibri"/>
               </a:rPr>
@@ -31116,7 +32442,7 @@
             <a:r>
               <a:rPr sz="300" b="0">
                 <a:solidFill>
-                  <a:srgbClr val="242852"/>
+                  <a:srgbClr val="0A1628"/>
                 </a:solidFill>
                 <a:latin typeface="Calibri"/>
               </a:rPr>
@@ -31140,7 +32466,7 @@
             <a:r>
               <a:rPr sz="400" b="0">
                 <a:solidFill>
-                  <a:srgbClr val="242852"/>
+                  <a:srgbClr val="0A1628"/>
                 </a:solidFill>
                 <a:latin typeface="Calibri"/>
               </a:rPr>
@@ -31164,7 +32490,7 @@
             <a:r>
               <a:rPr sz="300" b="0">
                 <a:solidFill>
-                  <a:srgbClr val="242852"/>
+                  <a:srgbClr val="0A1628"/>
                 </a:solidFill>
                 <a:latin typeface="Calibri"/>
               </a:rPr>
@@ -31188,7 +32514,7 @@
             <a:r>
               <a:rPr sz="300" b="0">
                 <a:solidFill>
-                  <a:srgbClr val="242852"/>
+                  <a:srgbClr val="0A1628"/>
                 </a:solidFill>
                 <a:latin typeface="Calibri"/>
               </a:rPr>
@@ -31212,7 +32538,7 @@
             <a:r>
               <a:rPr sz="400" b="0">
                 <a:solidFill>
-                  <a:srgbClr val="242852"/>
+                  <a:srgbClr val="0A1628"/>
                 </a:solidFill>
                 <a:latin typeface="Calibri"/>
               </a:rPr>
@@ -31236,7 +32562,7 @@
             <a:r>
               <a:rPr sz="400" b="0">
                 <a:solidFill>
-                  <a:srgbClr val="242852"/>
+                  <a:srgbClr val="0A1628"/>
                 </a:solidFill>
                 <a:latin typeface="Calibri"/>
               </a:rPr>
@@ -31260,7 +32586,7 @@
             <a:r>
               <a:rPr sz="300" b="0">
                 <a:solidFill>
-                  <a:srgbClr val="242852"/>
+                  <a:srgbClr val="0A1628"/>
                 </a:solidFill>
                 <a:latin typeface="Calibri"/>
               </a:rPr>
@@ -31284,7 +32610,7 @@
             <a:r>
               <a:rPr sz="400" b="0">
                 <a:solidFill>
-                  <a:srgbClr val="242852"/>
+                  <a:srgbClr val="0A1628"/>
                 </a:solidFill>
                 <a:latin typeface="Calibri"/>
               </a:rPr>
@@ -31308,7 +32634,7 @@
             <a:r>
               <a:rPr sz="400" b="0">
                 <a:solidFill>
-                  <a:srgbClr val="242852"/>
+                  <a:srgbClr val="0A1628"/>
                 </a:solidFill>
                 <a:latin typeface="Calibri"/>
               </a:rPr>
@@ -31332,7 +32658,7 @@
             <a:avLst/>
           </a:prstGeom>
           <a:solidFill>
-            <a:srgbClr val="1A1E42"/>
+            <a:srgbClr val="10203C"/>
           </a:solidFill>
           <a:ln>
             <a:noFill/>
@@ -31375,7 +32701,7 @@
             <a:avLst/>
           </a:prstGeom>
           <a:solidFill>
-            <a:srgbClr val="4A66AC"/>
+            <a:srgbClr val="3D6FCE"/>
           </a:solidFill>
           <a:ln>
             <a:noFill/>
@@ -31464,7 +32790,7 @@
             <a:r>
               <a:rPr sz="750" b="0" i="0">
                 <a:solidFill>
-                  <a:srgbClr val="8FA1CF"/>
+                  <a:srgbClr val="6B9BDB"/>
                 </a:solidFill>
                 <a:latin typeface="Calibri"/>
               </a:rPr>
@@ -31534,7 +32860,7 @@
             <a:r>
               <a:rPr sz="750" b="0" i="0">
                 <a:solidFill>
-                  <a:srgbClr val="8892AA"/>
+                  <a:srgbClr val="7085A8"/>
                 </a:solidFill>
                 <a:latin typeface="Calibri"/>
               </a:rPr>
@@ -31558,7 +32884,7 @@
             <a:avLst/>
           </a:prstGeom>
           <a:solidFill>
-            <a:srgbClr val="0F1125"/>
+            <a:srgbClr val="060E1A"/>
           </a:solidFill>
           <a:ln>
             <a:noFill/>
@@ -31612,7 +32938,7 @@
             <a:r>
               <a:rPr sz="750" b="0" i="0">
                 <a:solidFill>
-                  <a:srgbClr val="8FA1CF"/>
+                  <a:srgbClr val="6B9BDB"/>
                 </a:solidFill>
                 <a:latin typeface="Calibri"/>
               </a:rPr>
@@ -31682,7 +33008,7 @@
             <a:r>
               <a:rPr sz="750" b="0" i="0">
                 <a:solidFill>
-                  <a:srgbClr val="8892AA"/>
+                  <a:srgbClr val="7085A8"/>
                 </a:solidFill>
                 <a:latin typeface="Calibri"/>
               </a:rPr>
@@ -31706,7 +33032,7 @@
             <a:avLst/>
           </a:prstGeom>
           <a:solidFill>
-            <a:srgbClr val="0F1125"/>
+            <a:srgbClr val="060E1A"/>
           </a:solidFill>
           <a:ln>
             <a:noFill/>
@@ -31760,7 +33086,7 @@
             <a:r>
               <a:rPr sz="750" b="0" i="0">
                 <a:solidFill>
-                  <a:srgbClr val="8FA1CF"/>
+                  <a:srgbClr val="6B9BDB"/>
                 </a:solidFill>
                 <a:latin typeface="Calibri"/>
               </a:rPr>
@@ -31830,7 +33156,7 @@
             <a:r>
               <a:rPr sz="750" b="0" i="0">
                 <a:solidFill>
-                  <a:srgbClr val="8892AA"/>
+                  <a:srgbClr val="7085A8"/>
                 </a:solidFill>
                 <a:latin typeface="Calibri"/>
               </a:rPr>
@@ -31854,7 +33180,7 @@
             <a:avLst/>
           </a:prstGeom>
           <a:solidFill>
-            <a:srgbClr val="0F1125"/>
+            <a:srgbClr val="060E1A"/>
           </a:solidFill>
           <a:ln>
             <a:noFill/>
@@ -31908,7 +33234,7 @@
             <a:r>
               <a:rPr sz="750" b="0" i="0">
                 <a:solidFill>
-                  <a:srgbClr val="8FA1CF"/>
+                  <a:srgbClr val="6B9BDB"/>
                 </a:solidFill>
                 <a:latin typeface="Calibri"/>
               </a:rPr>
@@ -31978,7 +33304,7 @@
             <a:r>
               <a:rPr sz="750" b="0" i="0">
                 <a:solidFill>
-                  <a:srgbClr val="8892AA"/>
+                  <a:srgbClr val="7085A8"/>
                 </a:solidFill>
                 <a:latin typeface="Calibri"/>
               </a:rPr>
@@ -32002,7 +33328,7 @@
             <a:avLst/>
           </a:prstGeom>
           <a:solidFill>
-            <a:srgbClr val="0F1125"/>
+            <a:srgbClr val="060E1A"/>
           </a:solidFill>
           <a:ln>
             <a:noFill/>
@@ -32056,7 +33382,7 @@
             <a:r>
               <a:rPr sz="750" b="0" i="0">
                 <a:solidFill>
-                  <a:srgbClr val="8FA1CF"/>
+                  <a:srgbClr val="6B9BDB"/>
                 </a:solidFill>
                 <a:latin typeface="Calibri"/>
               </a:rPr>
@@ -32126,7 +33452,7 @@
             <a:r>
               <a:rPr sz="750" b="0" i="0">
                 <a:solidFill>
-                  <a:srgbClr val="8892AA"/>
+                  <a:srgbClr val="7085A8"/>
                 </a:solidFill>
                 <a:latin typeface="Calibri"/>
               </a:rPr>
@@ -32150,7 +33476,7 @@
             <a:avLst/>
           </a:prstGeom>
           <a:solidFill>
-            <a:srgbClr val="0F1125"/>
+            <a:srgbClr val="060E1A"/>
           </a:solidFill>
           <a:ln>
             <a:noFill/>
@@ -32204,7 +33530,7 @@
             <a:r>
               <a:rPr sz="750" b="0" i="0">
                 <a:solidFill>
-                  <a:srgbClr val="8FA1CF"/>
+                  <a:srgbClr val="6B9BDB"/>
                 </a:solidFill>
                 <a:latin typeface="Calibri"/>
               </a:rPr>
@@ -32274,7 +33600,7 @@
             <a:r>
               <a:rPr sz="750" b="0" i="0">
                 <a:solidFill>
-                  <a:srgbClr val="8892AA"/>
+                  <a:srgbClr val="7085A8"/>
                 </a:solidFill>
                 <a:latin typeface="Calibri"/>
               </a:rPr>
@@ -32344,7 +33670,7 @@
             <a:r>
               <a:rPr sz="700" b="0" i="0">
                 <a:solidFill>
-                  <a:srgbClr val="8892AA"/>
+                  <a:srgbClr val="7085A8"/>
                 </a:solidFill>
                 <a:latin typeface="Calibri"/>
               </a:rPr>
@@ -32379,11 +33705,89 @@
             <a:r>
               <a:rPr sz="800" b="0" i="0">
                 <a:solidFill>
-                  <a:srgbClr val="8892AA"/>
+                  <a:srgbClr val="7085A8"/>
                 </a:solidFill>
                 <a:latin typeface="Calibri"/>
               </a:rPr>
               <a:t>7 / 20</a:t>
+            </a:r>
+          </a:p>
+        </p:txBody>
+      </p:sp>
+      <p:sp>
+        <p:nvSpPr>
+          <p:cNvPr id="36" name="Oval 35"/>
+          <p:cNvSpPr/>
+          <p:nvPr/>
+        </p:nvSpPr>
+        <p:spPr>
+          <a:xfrm>
+            <a:off x="9756648" y="3904488"/>
+            <a:ext cx="1920240" cy="1920240"/>
+          </a:xfrm>
+          <a:prstGeom prst="ellipse">
+            <a:avLst/>
+          </a:prstGeom>
+          <a:noFill/>
+          <a:ln w="25400">
+            <a:solidFill>
+              <a:srgbClr val="E7CC59"/>
+            </a:solidFill>
+          </a:ln>
+        </p:spPr>
+        <p:style>
+          <a:lnRef idx="1">
+            <a:schemeClr val="accent1"/>
+          </a:lnRef>
+          <a:fillRef idx="3">
+            <a:schemeClr val="accent1"/>
+          </a:fillRef>
+          <a:effectRef idx="2">
+            <a:schemeClr val="accent1"/>
+          </a:effectRef>
+          <a:fontRef idx="minor">
+            <a:schemeClr val="lt1"/>
+          </a:fontRef>
+        </p:style>
+        <p:txBody>
+          <a:bodyPr rtlCol="0" anchor="ctr"/>
+          <a:lstStyle/>
+          <a:p>
+            <a:pPr algn="ctr"/>
+          </a:p>
+        </p:txBody>
+      </p:sp>
+      <p:sp>
+        <p:nvSpPr>
+          <p:cNvPr id="37" name="TextBox 36"/>
+          <p:cNvSpPr txBox="1"/>
+          <p:nvPr/>
+        </p:nvSpPr>
+        <p:spPr>
+          <a:xfrm>
+            <a:off x="9829800" y="3831336"/>
+            <a:ext cx="1773936" cy="1920240"/>
+          </a:xfrm>
+          <a:prstGeom prst="rect">
+            <a:avLst/>
+          </a:prstGeom>
+          <a:noFill/>
+        </p:spPr>
+        <p:txBody>
+          <a:bodyPr wrap="square">
+            <a:spAutoFit/>
+          </a:bodyPr>
+          <a:lstStyle/>
+          <a:p>
+            <a:pPr algn="ctr"/>
+            <a:r>
+              <a:rPr sz="11000" b="1" i="0">
+                <a:solidFill>
+                  <a:srgbClr val="142A4A"/>
+                </a:solidFill>
+                <a:latin typeface="Calibri"/>
+              </a:rPr>
+              <a:t>V</a:t>
             </a:r>
           </a:p>
         </p:txBody>
@@ -32402,7 +33806,7 @@
     <p:bg>
       <p:bgPr>
         <a:solidFill>
-          <a:srgbClr val="242852"/>
+          <a:srgbClr val="0A1628"/>
         </a:solidFill>
         <a:effectLst/>
       </p:bgPr>
@@ -32475,7 +33879,7 @@
             <a:r>
               <a:rPr sz="1000" b="0" i="1">
                 <a:solidFill>
-                  <a:srgbClr val="8FA1CF"/>
+                  <a:srgbClr val="6B9BDB"/>
                 </a:solidFill>
                 <a:latin typeface="Calibri"/>
               </a:rPr>
@@ -32600,7 +34004,7 @@
             <a:r>
               <a:rPr sz="400" b="0">
                 <a:solidFill>
-                  <a:srgbClr val="242852"/>
+                  <a:srgbClr val="0A1628"/>
                 </a:solidFill>
                 <a:latin typeface="Calibri"/>
               </a:rPr>
@@ -32624,7 +34028,7 @@
             <a:r>
               <a:rPr sz="300" b="0">
                 <a:solidFill>
-                  <a:srgbClr val="242852"/>
+                  <a:srgbClr val="0A1628"/>
                 </a:solidFill>
                 <a:latin typeface="Calibri"/>
               </a:rPr>
@@ -32648,7 +34052,7 @@
             <a:r>
               <a:rPr sz="400" b="0">
                 <a:solidFill>
-                  <a:srgbClr val="242852"/>
+                  <a:srgbClr val="0A1628"/>
                 </a:solidFill>
                 <a:latin typeface="Calibri"/>
               </a:rPr>
@@ -32672,7 +34076,7 @@
             <a:r>
               <a:rPr sz="400" b="0">
                 <a:solidFill>
-                  <a:srgbClr val="242852"/>
+                  <a:srgbClr val="0A1628"/>
                 </a:solidFill>
                 <a:latin typeface="Calibri"/>
               </a:rPr>
@@ -32696,7 +34100,7 @@
             <a:r>
               <a:rPr sz="400" b="0">
                 <a:solidFill>
-                  <a:srgbClr val="242852"/>
+                  <a:srgbClr val="0A1628"/>
                 </a:solidFill>
                 <a:latin typeface="Calibri"/>
               </a:rPr>
@@ -32720,7 +34124,7 @@
             <a:r>
               <a:rPr sz="300" b="0">
                 <a:solidFill>
-                  <a:srgbClr val="242852"/>
+                  <a:srgbClr val="0A1628"/>
                 </a:solidFill>
                 <a:latin typeface="Calibri"/>
               </a:rPr>
@@ -32744,7 +34148,7 @@
             <a:r>
               <a:rPr sz="400" b="0">
                 <a:solidFill>
-                  <a:srgbClr val="242852"/>
+                  <a:srgbClr val="0A1628"/>
                 </a:solidFill>
                 <a:latin typeface="Calibri"/>
               </a:rPr>
@@ -32768,7 +34172,7 @@
             <a:r>
               <a:rPr sz="400" b="0">
                 <a:solidFill>
-                  <a:srgbClr val="242852"/>
+                  <a:srgbClr val="0A1628"/>
                 </a:solidFill>
                 <a:latin typeface="Calibri"/>
               </a:rPr>
@@ -32792,7 +34196,7 @@
             <a:r>
               <a:rPr sz="400" b="0">
                 <a:solidFill>
-                  <a:srgbClr val="242852"/>
+                  <a:srgbClr val="0A1628"/>
                 </a:solidFill>
                 <a:latin typeface="Calibri"/>
               </a:rPr>
@@ -32816,7 +34220,7 @@
             <a:r>
               <a:rPr sz="400" b="0">
                 <a:solidFill>
-                  <a:srgbClr val="242852"/>
+                  <a:srgbClr val="0A1628"/>
                 </a:solidFill>
                 <a:latin typeface="Calibri"/>
               </a:rPr>
@@ -32840,7 +34244,7 @@
             <a:avLst/>
           </a:prstGeom>
           <a:solidFill>
-            <a:srgbClr val="1A1E42"/>
+            <a:srgbClr val="10203C"/>
           </a:solidFill>
           <a:ln>
             <a:noFill/>
@@ -32883,7 +34287,7 @@
             <a:avLst/>
           </a:prstGeom>
           <a:solidFill>
-            <a:srgbClr val="4A66AC"/>
+            <a:srgbClr val="3D6FCE"/>
           </a:solidFill>
           <a:ln>
             <a:noFill/>
@@ -32972,7 +34376,7 @@
             <a:r>
               <a:rPr sz="750" b="0" i="0">
                 <a:solidFill>
-                  <a:srgbClr val="8FA1CF"/>
+                  <a:srgbClr val="6B9BDB"/>
                 </a:solidFill>
                 <a:latin typeface="Calibri"/>
               </a:rPr>
@@ -33042,7 +34446,7 @@
             <a:r>
               <a:rPr sz="750" b="0" i="0">
                 <a:solidFill>
-                  <a:srgbClr val="8892AA"/>
+                  <a:srgbClr val="7085A8"/>
                 </a:solidFill>
                 <a:latin typeface="Calibri"/>
               </a:rPr>
@@ -33066,7 +34470,7 @@
             <a:avLst/>
           </a:prstGeom>
           <a:solidFill>
-            <a:srgbClr val="0F1125"/>
+            <a:srgbClr val="060E1A"/>
           </a:solidFill>
           <a:ln>
             <a:noFill/>
@@ -33120,7 +34524,7 @@
             <a:r>
               <a:rPr sz="750" b="0" i="0">
                 <a:solidFill>
-                  <a:srgbClr val="8FA1CF"/>
+                  <a:srgbClr val="6B9BDB"/>
                 </a:solidFill>
                 <a:latin typeface="Calibri"/>
               </a:rPr>
@@ -33190,7 +34594,7 @@
             <a:r>
               <a:rPr sz="750" b="0" i="0">
                 <a:solidFill>
-                  <a:srgbClr val="8892AA"/>
+                  <a:srgbClr val="7085A8"/>
                 </a:solidFill>
                 <a:latin typeface="Calibri"/>
               </a:rPr>
@@ -33214,7 +34618,7 @@
             <a:avLst/>
           </a:prstGeom>
           <a:solidFill>
-            <a:srgbClr val="0F1125"/>
+            <a:srgbClr val="060E1A"/>
           </a:solidFill>
           <a:ln>
             <a:noFill/>
@@ -33268,7 +34672,7 @@
             <a:r>
               <a:rPr sz="750" b="0" i="0">
                 <a:solidFill>
-                  <a:srgbClr val="8FA1CF"/>
+                  <a:srgbClr val="6B9BDB"/>
                 </a:solidFill>
                 <a:latin typeface="Calibri"/>
               </a:rPr>
@@ -33338,7 +34742,7 @@
             <a:r>
               <a:rPr sz="750" b="0" i="0">
                 <a:solidFill>
-                  <a:srgbClr val="8892AA"/>
+                  <a:srgbClr val="7085A8"/>
                 </a:solidFill>
                 <a:latin typeface="Calibri"/>
               </a:rPr>
@@ -33362,7 +34766,7 @@
             <a:avLst/>
           </a:prstGeom>
           <a:solidFill>
-            <a:srgbClr val="0F1125"/>
+            <a:srgbClr val="060E1A"/>
           </a:solidFill>
           <a:ln>
             <a:noFill/>
@@ -33416,7 +34820,7 @@
             <a:r>
               <a:rPr sz="750" b="0" i="0">
                 <a:solidFill>
-                  <a:srgbClr val="8FA1CF"/>
+                  <a:srgbClr val="6B9BDB"/>
                 </a:solidFill>
                 <a:latin typeface="Calibri"/>
               </a:rPr>
@@ -33486,7 +34890,7 @@
             <a:r>
               <a:rPr sz="750" b="0" i="0">
                 <a:solidFill>
-                  <a:srgbClr val="8892AA"/>
+                  <a:srgbClr val="7085A8"/>
                 </a:solidFill>
                 <a:latin typeface="Calibri"/>
               </a:rPr>
@@ -33510,7 +34914,7 @@
             <a:avLst/>
           </a:prstGeom>
           <a:solidFill>
-            <a:srgbClr val="0F1125"/>
+            <a:srgbClr val="060E1A"/>
           </a:solidFill>
           <a:ln>
             <a:noFill/>
@@ -33564,7 +34968,7 @@
             <a:r>
               <a:rPr sz="750" b="0" i="0">
                 <a:solidFill>
-                  <a:srgbClr val="8FA1CF"/>
+                  <a:srgbClr val="6B9BDB"/>
                 </a:solidFill>
                 <a:latin typeface="Calibri"/>
               </a:rPr>
@@ -33634,7 +35038,7 @@
             <a:r>
               <a:rPr sz="750" b="0" i="0">
                 <a:solidFill>
-                  <a:srgbClr val="8892AA"/>
+                  <a:srgbClr val="7085A8"/>
                 </a:solidFill>
                 <a:latin typeface="Calibri"/>
               </a:rPr>
@@ -33658,7 +35062,7 @@
             <a:avLst/>
           </a:prstGeom>
           <a:solidFill>
-            <a:srgbClr val="0F1125"/>
+            <a:srgbClr val="060E1A"/>
           </a:solidFill>
           <a:ln>
             <a:noFill/>
@@ -33712,7 +35116,7 @@
             <a:r>
               <a:rPr sz="750" b="0" i="0">
                 <a:solidFill>
-                  <a:srgbClr val="8FA1CF"/>
+                  <a:srgbClr val="6B9BDB"/>
                 </a:solidFill>
                 <a:latin typeface="Calibri"/>
               </a:rPr>
@@ -33782,7 +35186,7 @@
             <a:r>
               <a:rPr sz="750" b="0" i="0">
                 <a:solidFill>
-                  <a:srgbClr val="8892AA"/>
+                  <a:srgbClr val="7085A8"/>
                 </a:solidFill>
                 <a:latin typeface="Calibri"/>
               </a:rPr>
@@ -33852,7 +35256,7 @@
             <a:r>
               <a:rPr sz="700" b="0" i="0">
                 <a:solidFill>
-                  <a:srgbClr val="8892AA"/>
+                  <a:srgbClr val="7085A8"/>
                 </a:solidFill>
                 <a:latin typeface="Calibri"/>
               </a:rPr>
@@ -33887,11 +35291,89 @@
             <a:r>
               <a:rPr sz="800" b="0" i="0">
                 <a:solidFill>
-                  <a:srgbClr val="8892AA"/>
+                  <a:srgbClr val="7085A8"/>
                 </a:solidFill>
                 <a:latin typeface="Calibri"/>
               </a:rPr>
               <a:t>8 / 20</a:t>
+            </a:r>
+          </a:p>
+        </p:txBody>
+      </p:sp>
+      <p:sp>
+        <p:nvSpPr>
+          <p:cNvPr id="36" name="Oval 35"/>
+          <p:cNvSpPr/>
+          <p:nvPr/>
+        </p:nvSpPr>
+        <p:spPr>
+          <a:xfrm>
+            <a:off x="9756648" y="3904488"/>
+            <a:ext cx="1920240" cy="1920240"/>
+          </a:xfrm>
+          <a:prstGeom prst="ellipse">
+            <a:avLst/>
+          </a:prstGeom>
+          <a:noFill/>
+          <a:ln w="25400">
+            <a:solidFill>
+              <a:srgbClr val="E7CC59"/>
+            </a:solidFill>
+          </a:ln>
+        </p:spPr>
+        <p:style>
+          <a:lnRef idx="1">
+            <a:schemeClr val="accent1"/>
+          </a:lnRef>
+          <a:fillRef idx="3">
+            <a:schemeClr val="accent1"/>
+          </a:fillRef>
+          <a:effectRef idx="2">
+            <a:schemeClr val="accent1"/>
+          </a:effectRef>
+          <a:fontRef idx="minor">
+            <a:schemeClr val="lt1"/>
+          </a:fontRef>
+        </p:style>
+        <p:txBody>
+          <a:bodyPr rtlCol="0" anchor="ctr"/>
+          <a:lstStyle/>
+          <a:p>
+            <a:pPr algn="ctr"/>
+          </a:p>
+        </p:txBody>
+      </p:sp>
+      <p:sp>
+        <p:nvSpPr>
+          <p:cNvPr id="37" name="TextBox 36"/>
+          <p:cNvSpPr txBox="1"/>
+          <p:nvPr/>
+        </p:nvSpPr>
+        <p:spPr>
+          <a:xfrm>
+            <a:off x="9829800" y="3831336"/>
+            <a:ext cx="1773936" cy="1920240"/>
+          </a:xfrm>
+          <a:prstGeom prst="rect">
+            <a:avLst/>
+          </a:prstGeom>
+          <a:noFill/>
+        </p:spPr>
+        <p:txBody>
+          <a:bodyPr wrap="square">
+            <a:spAutoFit/>
+          </a:bodyPr>
+          <a:lstStyle/>
+          <a:p>
+            <a:pPr algn="ctr"/>
+            <a:r>
+              <a:rPr sz="11000" b="1" i="0">
+                <a:solidFill>
+                  <a:srgbClr val="142A4A"/>
+                </a:solidFill>
+                <a:latin typeface="Calibri"/>
+              </a:rPr>
+              <a:t>V</a:t>
             </a:r>
           </a:p>
         </p:txBody>
@@ -33910,7 +35392,7 @@
     <p:bg>
       <p:bgPr>
         <a:solidFill>
-          <a:srgbClr val="242852"/>
+          <a:srgbClr val="0A1628"/>
         </a:solidFill>
         <a:effectLst/>
       </p:bgPr>
@@ -33983,7 +35465,7 @@
             <a:r>
               <a:rPr sz="1000" b="0" i="1">
                 <a:solidFill>
-                  <a:srgbClr val="8FA1CF"/>
+                  <a:srgbClr val="6B9BDB"/>
                 </a:solidFill>
                 <a:latin typeface="Calibri"/>
               </a:rPr>
@@ -34108,7 +35590,7 @@
             <a:r>
               <a:rPr sz="400" b="0">
                 <a:solidFill>
-                  <a:srgbClr val="242852"/>
+                  <a:srgbClr val="0A1628"/>
                 </a:solidFill>
                 <a:latin typeface="Calibri"/>
               </a:rPr>
@@ -34132,7 +35614,7 @@
             <a:r>
               <a:rPr sz="300" b="0">
                 <a:solidFill>
-                  <a:srgbClr val="242852"/>
+                  <a:srgbClr val="0A1628"/>
                 </a:solidFill>
                 <a:latin typeface="Calibri"/>
               </a:rPr>
@@ -34156,7 +35638,7 @@
             <a:r>
               <a:rPr sz="400" b="0">
                 <a:solidFill>
-                  <a:srgbClr val="242852"/>
+                  <a:srgbClr val="0A1628"/>
                 </a:solidFill>
                 <a:latin typeface="Calibri"/>
               </a:rPr>
@@ -34180,7 +35662,7 @@
             <a:r>
               <a:rPr sz="300" b="0">
                 <a:solidFill>
-                  <a:srgbClr val="242852"/>
+                  <a:srgbClr val="0A1628"/>
                 </a:solidFill>
                 <a:latin typeface="Calibri"/>
               </a:rPr>
@@ -34204,7 +35686,7 @@
             <a:r>
               <a:rPr sz="400" b="0">
                 <a:solidFill>
-                  <a:srgbClr val="242852"/>
+                  <a:srgbClr val="0A1628"/>
                 </a:solidFill>
                 <a:latin typeface="Calibri"/>
               </a:rPr>
@@ -34228,7 +35710,7 @@
             <a:r>
               <a:rPr sz="300" b="0">
                 <a:solidFill>
-                  <a:srgbClr val="242852"/>
+                  <a:srgbClr val="0A1628"/>
                 </a:solidFill>
                 <a:latin typeface="Calibri"/>
               </a:rPr>
@@ -34252,7 +35734,7 @@
             <a:r>
               <a:rPr sz="400" b="0">
                 <a:solidFill>
-                  <a:srgbClr val="242852"/>
+                  <a:srgbClr val="0A1628"/>
                 </a:solidFill>
                 <a:latin typeface="Calibri"/>
               </a:rPr>
@@ -34276,7 +35758,7 @@
             <a:r>
               <a:rPr sz="400" b="0">
                 <a:solidFill>
-                  <a:srgbClr val="242852"/>
+                  <a:srgbClr val="0A1628"/>
                 </a:solidFill>
                 <a:latin typeface="Calibri"/>
               </a:rPr>
@@ -34300,7 +35782,7 @@
             <a:r>
               <a:rPr sz="400" b="0">
                 <a:solidFill>
-                  <a:srgbClr val="242852"/>
+                  <a:srgbClr val="0A1628"/>
                 </a:solidFill>
                 <a:latin typeface="Calibri"/>
               </a:rPr>
@@ -34324,7 +35806,7 @@
             <a:r>
               <a:rPr sz="400" b="0">
                 <a:solidFill>
-                  <a:srgbClr val="242852"/>
+                  <a:srgbClr val="0A1628"/>
                 </a:solidFill>
                 <a:latin typeface="Calibri"/>
               </a:rPr>
@@ -34348,7 +35830,7 @@
             <a:avLst/>
           </a:prstGeom>
           <a:solidFill>
-            <a:srgbClr val="1A1E42"/>
+            <a:srgbClr val="10203C"/>
           </a:solidFill>
           <a:ln>
             <a:noFill/>
@@ -34391,7 +35873,7 @@
             <a:avLst/>
           </a:prstGeom>
           <a:solidFill>
-            <a:srgbClr val="4A66AC"/>
+            <a:srgbClr val="3D6FCE"/>
           </a:solidFill>
           <a:ln>
             <a:noFill/>
@@ -34480,7 +35962,7 @@
             <a:r>
               <a:rPr sz="750" b="0" i="0">
                 <a:solidFill>
-                  <a:srgbClr val="8FA1CF"/>
+                  <a:srgbClr val="6B9BDB"/>
                 </a:solidFill>
                 <a:latin typeface="Calibri"/>
               </a:rPr>
@@ -34550,7 +36032,7 @@
             <a:r>
               <a:rPr sz="750" b="0" i="0">
                 <a:solidFill>
-                  <a:srgbClr val="8892AA"/>
+                  <a:srgbClr val="7085A8"/>
                 </a:solidFill>
                 <a:latin typeface="Calibri"/>
               </a:rPr>
@@ -34574,7 +36056,7 @@
             <a:avLst/>
           </a:prstGeom>
           <a:solidFill>
-            <a:srgbClr val="0F1125"/>
+            <a:srgbClr val="060E1A"/>
           </a:solidFill>
           <a:ln>
             <a:noFill/>
@@ -34628,7 +36110,7 @@
             <a:r>
               <a:rPr sz="750" b="0" i="0">
                 <a:solidFill>
-                  <a:srgbClr val="8FA1CF"/>
+                  <a:srgbClr val="6B9BDB"/>
                 </a:solidFill>
                 <a:latin typeface="Calibri"/>
               </a:rPr>
@@ -34698,7 +36180,7 @@
             <a:r>
               <a:rPr sz="750" b="0" i="0">
                 <a:solidFill>
-                  <a:srgbClr val="8892AA"/>
+                  <a:srgbClr val="7085A8"/>
                 </a:solidFill>
                 <a:latin typeface="Calibri"/>
               </a:rPr>
@@ -34722,7 +36204,7 @@
             <a:avLst/>
           </a:prstGeom>
           <a:solidFill>
-            <a:srgbClr val="0F1125"/>
+            <a:srgbClr val="060E1A"/>
           </a:solidFill>
           <a:ln>
             <a:noFill/>
@@ -34776,7 +36258,7 @@
             <a:r>
               <a:rPr sz="750" b="0" i="0">
                 <a:solidFill>
-                  <a:srgbClr val="8FA1CF"/>
+                  <a:srgbClr val="6B9BDB"/>
                 </a:solidFill>
                 <a:latin typeface="Calibri"/>
               </a:rPr>
@@ -34846,7 +36328,7 @@
             <a:r>
               <a:rPr sz="750" b="0" i="0">
                 <a:solidFill>
-                  <a:srgbClr val="8892AA"/>
+                  <a:srgbClr val="7085A8"/>
                 </a:solidFill>
                 <a:latin typeface="Calibri"/>
               </a:rPr>
@@ -34870,7 +36352,7 @@
             <a:avLst/>
           </a:prstGeom>
           <a:solidFill>
-            <a:srgbClr val="0F1125"/>
+            <a:srgbClr val="060E1A"/>
           </a:solidFill>
           <a:ln>
             <a:noFill/>
@@ -34924,7 +36406,7 @@
             <a:r>
               <a:rPr sz="750" b="0" i="0">
                 <a:solidFill>
-                  <a:srgbClr val="8FA1CF"/>
+                  <a:srgbClr val="6B9BDB"/>
                 </a:solidFill>
                 <a:latin typeface="Calibri"/>
               </a:rPr>
@@ -34994,7 +36476,7 @@
             <a:r>
               <a:rPr sz="750" b="0" i="0">
                 <a:solidFill>
-                  <a:srgbClr val="8892AA"/>
+                  <a:srgbClr val="7085A8"/>
                 </a:solidFill>
                 <a:latin typeface="Calibri"/>
               </a:rPr>
@@ -35018,7 +36500,7 @@
             <a:avLst/>
           </a:prstGeom>
           <a:solidFill>
-            <a:srgbClr val="0F1125"/>
+            <a:srgbClr val="060E1A"/>
           </a:solidFill>
           <a:ln>
             <a:noFill/>
@@ -35072,7 +36554,7 @@
             <a:r>
               <a:rPr sz="750" b="0" i="0">
                 <a:solidFill>
-                  <a:srgbClr val="8FA1CF"/>
+                  <a:srgbClr val="6B9BDB"/>
                 </a:solidFill>
                 <a:latin typeface="Calibri"/>
               </a:rPr>
@@ -35142,7 +36624,7 @@
             <a:r>
               <a:rPr sz="750" b="0" i="0">
                 <a:solidFill>
-                  <a:srgbClr val="8892AA"/>
+                  <a:srgbClr val="7085A8"/>
                 </a:solidFill>
                 <a:latin typeface="Calibri"/>
               </a:rPr>
@@ -35166,7 +36648,7 @@
             <a:avLst/>
           </a:prstGeom>
           <a:solidFill>
-            <a:srgbClr val="0F1125"/>
+            <a:srgbClr val="060E1A"/>
           </a:solidFill>
           <a:ln>
             <a:noFill/>
@@ -35220,7 +36702,7 @@
             <a:r>
               <a:rPr sz="750" b="0" i="0">
                 <a:solidFill>
-                  <a:srgbClr val="8FA1CF"/>
+                  <a:srgbClr val="6B9BDB"/>
                 </a:solidFill>
                 <a:latin typeface="Calibri"/>
               </a:rPr>
@@ -35290,7 +36772,7 @@
             <a:r>
               <a:rPr sz="750" b="0" i="0">
                 <a:solidFill>
-                  <a:srgbClr val="8892AA"/>
+                  <a:srgbClr val="7085A8"/>
                 </a:solidFill>
                 <a:latin typeface="Calibri"/>
               </a:rPr>
@@ -35360,7 +36842,7 @@
             <a:r>
               <a:rPr sz="700" b="0" i="0">
                 <a:solidFill>
-                  <a:srgbClr val="8892AA"/>
+                  <a:srgbClr val="7085A8"/>
                 </a:solidFill>
                 <a:latin typeface="Calibri"/>
               </a:rPr>
@@ -35395,11 +36877,89 @@
             <a:r>
               <a:rPr sz="800" b="0" i="0">
                 <a:solidFill>
-                  <a:srgbClr val="8892AA"/>
+                  <a:srgbClr val="7085A8"/>
                 </a:solidFill>
                 <a:latin typeface="Calibri"/>
               </a:rPr>
               <a:t>9 / 20</a:t>
+            </a:r>
+          </a:p>
+        </p:txBody>
+      </p:sp>
+      <p:sp>
+        <p:nvSpPr>
+          <p:cNvPr id="36" name="Oval 35"/>
+          <p:cNvSpPr/>
+          <p:nvPr/>
+        </p:nvSpPr>
+        <p:spPr>
+          <a:xfrm>
+            <a:off x="9756648" y="3904488"/>
+            <a:ext cx="1920240" cy="1920240"/>
+          </a:xfrm>
+          <a:prstGeom prst="ellipse">
+            <a:avLst/>
+          </a:prstGeom>
+          <a:noFill/>
+          <a:ln w="25400">
+            <a:solidFill>
+              <a:srgbClr val="E7CC59"/>
+            </a:solidFill>
+          </a:ln>
+        </p:spPr>
+        <p:style>
+          <a:lnRef idx="1">
+            <a:schemeClr val="accent1"/>
+          </a:lnRef>
+          <a:fillRef idx="3">
+            <a:schemeClr val="accent1"/>
+          </a:fillRef>
+          <a:effectRef idx="2">
+            <a:schemeClr val="accent1"/>
+          </a:effectRef>
+          <a:fontRef idx="minor">
+            <a:schemeClr val="lt1"/>
+          </a:fontRef>
+        </p:style>
+        <p:txBody>
+          <a:bodyPr rtlCol="0" anchor="ctr"/>
+          <a:lstStyle/>
+          <a:p>
+            <a:pPr algn="ctr"/>
+          </a:p>
+        </p:txBody>
+      </p:sp>
+      <p:sp>
+        <p:nvSpPr>
+          <p:cNvPr id="37" name="TextBox 36"/>
+          <p:cNvSpPr txBox="1"/>
+          <p:nvPr/>
+        </p:nvSpPr>
+        <p:spPr>
+          <a:xfrm>
+            <a:off x="9829800" y="3831336"/>
+            <a:ext cx="1773936" cy="1920240"/>
+          </a:xfrm>
+          <a:prstGeom prst="rect">
+            <a:avLst/>
+          </a:prstGeom>
+          <a:noFill/>
+        </p:spPr>
+        <p:txBody>
+          <a:bodyPr wrap="square">
+            <a:spAutoFit/>
+          </a:bodyPr>
+          <a:lstStyle/>
+          <a:p>
+            <a:pPr algn="ctr"/>
+            <a:r>
+              <a:rPr sz="11000" b="1" i="0">
+                <a:solidFill>
+                  <a:srgbClr val="142A4A"/>
+                </a:solidFill>
+                <a:latin typeface="Calibri"/>
+              </a:rPr>
+              <a:t>V</a:t>
             </a:r>
           </a:p>
         </p:txBody>

--- a/VisionVirtue_PPT_Template.pptx
+++ b/VisionVirtue_PPT_Template.pptx
@@ -6213,14 +6213,14 @@
         </p:nvSpPr>
         <p:spPr>
           <a:xfrm>
-            <a:off x="9756648" y="3904488"/>
-            <a:ext cx="1920240" cy="1920240"/>
+            <a:off x="11082528" y="6053328"/>
+            <a:ext cx="841248" cy="841248"/>
           </a:xfrm>
           <a:prstGeom prst="ellipse">
             <a:avLst/>
           </a:prstGeom>
           <a:noFill/>
-          <a:ln w="25400">
+          <a:ln w="19050">
             <a:solidFill>
               <a:srgbClr val="E7CC59"/>
             </a:solidFill>
@@ -6256,8 +6256,8 @@
         </p:nvSpPr>
         <p:spPr>
           <a:xfrm>
-            <a:off x="9829800" y="3831336"/>
-            <a:ext cx="1773936" cy="1920240"/>
+            <a:off x="11119103" y="6016752"/>
+            <a:ext cx="768096" cy="841248"/>
           </a:xfrm>
           <a:prstGeom prst="rect">
             <a:avLst/>
@@ -6272,7 +6272,7 @@
           <a:p>
             <a:pPr algn="ctr"/>
             <a:r>
-              <a:rPr sz="11000" b="1" i="0">
+              <a:rPr sz="4800" b="1" i="0">
                 <a:solidFill>
                   <a:srgbClr val="142A4A"/>
                 </a:solidFill>
@@ -6499,7 +6499,7 @@
                 </a:solidFill>
                 <a:latin typeface="Calibri"/>
               </a:rPr>
-              <a:t/>
+              <a:t> </a:t>
             </a:r>
           </a:p>
           <a:p>
@@ -6523,7 +6523,7 @@
                 </a:solidFill>
                 <a:latin typeface="Calibri"/>
               </a:rPr>
-              <a:t/>
+              <a:t> </a:t>
             </a:r>
           </a:p>
           <a:p>
@@ -6547,7 +6547,7 @@
                 </a:solidFill>
                 <a:latin typeface="Calibri"/>
               </a:rPr>
-              <a:t/>
+              <a:t> </a:t>
             </a:r>
           </a:p>
           <a:p>
@@ -6571,7 +6571,7 @@
                 </a:solidFill>
                 <a:latin typeface="Calibri"/>
               </a:rPr>
-              <a:t/>
+              <a:t> </a:t>
             </a:r>
           </a:p>
           <a:p>
@@ -6595,7 +6595,7 @@
                 </a:solidFill>
                 <a:latin typeface="Calibri"/>
               </a:rPr>
-              <a:t/>
+              <a:t> </a:t>
             </a:r>
           </a:p>
           <a:p>
@@ -6619,7 +6619,7 @@
                 </a:solidFill>
                 <a:latin typeface="Calibri"/>
               </a:rPr>
-              <a:t/>
+              <a:t> </a:t>
             </a:r>
           </a:p>
           <a:p>
@@ -6643,7 +6643,7 @@
                 </a:solidFill>
                 <a:latin typeface="Calibri"/>
               </a:rPr>
-              <a:t/>
+              <a:t> </a:t>
             </a:r>
           </a:p>
           <a:p>
@@ -6667,7 +6667,7 @@
                 </a:solidFill>
                 <a:latin typeface="Calibri"/>
               </a:rPr>
-              <a:t/>
+              <a:t> </a:t>
             </a:r>
           </a:p>
           <a:p>
@@ -6691,7 +6691,7 @@
                 </a:solidFill>
                 <a:latin typeface="Calibri"/>
               </a:rPr>
-              <a:t/>
+              <a:t> </a:t>
             </a:r>
           </a:p>
           <a:p>
@@ -6715,7 +6715,7 @@
                 </a:solidFill>
                 <a:latin typeface="Calibri"/>
               </a:rPr>
-              <a:t/>
+              <a:t> </a:t>
             </a:r>
           </a:p>
           <a:p>
@@ -6739,7 +6739,7 @@
                 </a:solidFill>
                 <a:latin typeface="Calibri"/>
               </a:rPr>
-              <a:t/>
+              <a:t> </a:t>
             </a:r>
           </a:p>
         </p:txBody>
@@ -6753,7 +6753,7 @@
         <p:spPr>
           <a:xfrm>
             <a:off x="6446520" y="841248"/>
-            <a:ext cx="5349240" cy="5504688"/>
+            <a:ext cx="5349240" cy="5376672"/>
           </a:xfrm>
           <a:prstGeom prst="rect">
             <a:avLst/>
@@ -6874,7 +6874,7 @@
         <p:spPr>
           <a:xfrm>
             <a:off x="6629400" y="1225296"/>
-            <a:ext cx="4983479" cy="182880"/>
+            <a:ext cx="4983479" cy="164592"/>
           </a:xfrm>
           <a:prstGeom prst="rect">
             <a:avLst/>
@@ -6908,23 +6908,23 @@
         </p:nvSpPr>
         <p:spPr>
           <a:xfrm>
-            <a:off x="6629400" y="1389888"/>
-            <a:ext cx="4983479" cy="347472"/>
-          </a:xfrm>
-          <a:prstGeom prst="rect">
-            <a:avLst/>
-          </a:prstGeom>
-          <a:noFill/>
-        </p:spPr>
-        <p:txBody>
-          <a:bodyPr wrap="square">
-            <a:spAutoFit/>
-          </a:bodyPr>
-          <a:lstStyle/>
-          <a:p>
-            <a:pPr algn="l"/>
-            <a:r>
-              <a:rPr sz="1800" b="1" i="0">
+            <a:off x="6629400" y="1435608"/>
+            <a:ext cx="4983479" cy="292608"/>
+          </a:xfrm>
+          <a:prstGeom prst="rect">
+            <a:avLst/>
+          </a:prstGeom>
+          <a:noFill/>
+        </p:spPr>
+        <p:txBody>
+          <a:bodyPr wrap="square">
+            <a:spAutoFit/>
+          </a:bodyPr>
+          <a:lstStyle/>
+          <a:p>
+            <a:pPr algn="l"/>
+            <a:r>
+              <a:rPr sz="1500" b="1" i="0">
                 <a:solidFill>
                   <a:srgbClr val="E7CC59"/>
                 </a:solidFill>
@@ -6943,8 +6943,8 @@
         </p:nvSpPr>
         <p:spPr>
           <a:xfrm>
-            <a:off x="6629400" y="1719072"/>
-            <a:ext cx="4983479" cy="182880"/>
+            <a:off x="6629400" y="1709928"/>
+            <a:ext cx="4983479" cy="164592"/>
           </a:xfrm>
           <a:prstGeom prst="rect">
             <a:avLst/>
@@ -6978,7 +6978,7 @@
         </p:nvSpPr>
         <p:spPr>
           <a:xfrm>
-            <a:off x="6583680" y="2029968"/>
+            <a:off x="6583680" y="2008632"/>
             <a:ext cx="5074920" cy="9144"/>
           </a:xfrm>
           <a:prstGeom prst="rect">
@@ -7021,8 +7021,8 @@
         </p:nvSpPr>
         <p:spPr>
           <a:xfrm>
-            <a:off x="6629400" y="2084832"/>
-            <a:ext cx="4983479" cy="182880"/>
+            <a:off x="6629400" y="2063496"/>
+            <a:ext cx="4983479" cy="164592"/>
           </a:xfrm>
           <a:prstGeom prst="rect">
             <a:avLst/>
@@ -7056,23 +7056,23 @@
         </p:nvSpPr>
         <p:spPr>
           <a:xfrm>
-            <a:off x="6629400" y="2249424"/>
-            <a:ext cx="4983479" cy="347472"/>
-          </a:xfrm>
-          <a:prstGeom prst="rect">
-            <a:avLst/>
-          </a:prstGeom>
-          <a:noFill/>
-        </p:spPr>
-        <p:txBody>
-          <a:bodyPr wrap="square">
-            <a:spAutoFit/>
-          </a:bodyPr>
-          <a:lstStyle/>
-          <a:p>
-            <a:pPr algn="l"/>
-            <a:r>
-              <a:rPr sz="1800" b="1" i="0">
+            <a:off x="6629400" y="2273808"/>
+            <a:ext cx="4983479" cy="292608"/>
+          </a:xfrm>
+          <a:prstGeom prst="rect">
+            <a:avLst/>
+          </a:prstGeom>
+          <a:noFill/>
+        </p:spPr>
+        <p:txBody>
+          <a:bodyPr wrap="square">
+            <a:spAutoFit/>
+          </a:bodyPr>
+          <a:lstStyle/>
+          <a:p>
+            <a:pPr algn="l"/>
+            <a:r>
+              <a:rPr sz="1500" b="1" i="0">
                 <a:solidFill>
                   <a:srgbClr val="E7CC59"/>
                 </a:solidFill>
@@ -7091,8 +7091,8 @@
         </p:nvSpPr>
         <p:spPr>
           <a:xfrm>
-            <a:off x="6629400" y="2578608"/>
-            <a:ext cx="4983479" cy="182880"/>
+            <a:off x="6629400" y="2548128"/>
+            <a:ext cx="4983479" cy="164592"/>
           </a:xfrm>
           <a:prstGeom prst="rect">
             <a:avLst/>
@@ -7126,7 +7126,7 @@
         </p:nvSpPr>
         <p:spPr>
           <a:xfrm>
-            <a:off x="6583680" y="2889503"/>
+            <a:off x="6583680" y="2846832"/>
             <a:ext cx="5074920" cy="9144"/>
           </a:xfrm>
           <a:prstGeom prst="rect">
@@ -7169,8 +7169,8 @@
         </p:nvSpPr>
         <p:spPr>
           <a:xfrm>
-            <a:off x="6629400" y="2944368"/>
-            <a:ext cx="4983479" cy="182880"/>
+            <a:off x="6629400" y="2901696"/>
+            <a:ext cx="4983479" cy="164592"/>
           </a:xfrm>
           <a:prstGeom prst="rect">
             <a:avLst/>
@@ -7204,23 +7204,23 @@
         </p:nvSpPr>
         <p:spPr>
           <a:xfrm>
-            <a:off x="6629400" y="3108960"/>
-            <a:ext cx="4983479" cy="347472"/>
-          </a:xfrm>
-          <a:prstGeom prst="rect">
-            <a:avLst/>
-          </a:prstGeom>
-          <a:noFill/>
-        </p:spPr>
-        <p:txBody>
-          <a:bodyPr wrap="square">
-            <a:spAutoFit/>
-          </a:bodyPr>
-          <a:lstStyle/>
-          <a:p>
-            <a:pPr algn="l"/>
-            <a:r>
-              <a:rPr sz="1800" b="1" i="0">
+            <a:off x="6629400" y="3112008"/>
+            <a:ext cx="4983479" cy="292608"/>
+          </a:xfrm>
+          <a:prstGeom prst="rect">
+            <a:avLst/>
+          </a:prstGeom>
+          <a:noFill/>
+        </p:spPr>
+        <p:txBody>
+          <a:bodyPr wrap="square">
+            <a:spAutoFit/>
+          </a:bodyPr>
+          <a:lstStyle/>
+          <a:p>
+            <a:pPr algn="l"/>
+            <a:r>
+              <a:rPr sz="1500" b="1" i="0">
                 <a:solidFill>
                   <a:srgbClr val="E7CC59"/>
                 </a:solidFill>
@@ -7239,8 +7239,8 @@
         </p:nvSpPr>
         <p:spPr>
           <a:xfrm>
-            <a:off x="6629400" y="3438144"/>
-            <a:ext cx="4983479" cy="182880"/>
+            <a:off x="6629400" y="3386328"/>
+            <a:ext cx="4983479" cy="164592"/>
           </a:xfrm>
           <a:prstGeom prst="rect">
             <a:avLst/>
@@ -7274,7 +7274,7 @@
         </p:nvSpPr>
         <p:spPr>
           <a:xfrm>
-            <a:off x="6583680" y="3749040"/>
+            <a:off x="6583680" y="3685032"/>
             <a:ext cx="5074920" cy="9144"/>
           </a:xfrm>
           <a:prstGeom prst="rect">
@@ -7317,8 +7317,8 @@
         </p:nvSpPr>
         <p:spPr>
           <a:xfrm>
-            <a:off x="6629400" y="3803904"/>
-            <a:ext cx="4983479" cy="182880"/>
+            <a:off x="6629400" y="3739896"/>
+            <a:ext cx="4983479" cy="164592"/>
           </a:xfrm>
           <a:prstGeom prst="rect">
             <a:avLst/>
@@ -7352,23 +7352,23 @@
         </p:nvSpPr>
         <p:spPr>
           <a:xfrm>
-            <a:off x="6629400" y="3968496"/>
-            <a:ext cx="4983479" cy="347472"/>
-          </a:xfrm>
-          <a:prstGeom prst="rect">
-            <a:avLst/>
-          </a:prstGeom>
-          <a:noFill/>
-        </p:spPr>
-        <p:txBody>
-          <a:bodyPr wrap="square">
-            <a:spAutoFit/>
-          </a:bodyPr>
-          <a:lstStyle/>
-          <a:p>
-            <a:pPr algn="l"/>
-            <a:r>
-              <a:rPr sz="1800" b="1" i="0">
+            <a:off x="6629400" y="3950208"/>
+            <a:ext cx="4983479" cy="292608"/>
+          </a:xfrm>
+          <a:prstGeom prst="rect">
+            <a:avLst/>
+          </a:prstGeom>
+          <a:noFill/>
+        </p:spPr>
+        <p:txBody>
+          <a:bodyPr wrap="square">
+            <a:spAutoFit/>
+          </a:bodyPr>
+          <a:lstStyle/>
+          <a:p>
+            <a:pPr algn="l"/>
+            <a:r>
+              <a:rPr sz="1500" b="1" i="0">
                 <a:solidFill>
                   <a:srgbClr val="E7CC59"/>
                 </a:solidFill>
@@ -7387,8 +7387,8 @@
         </p:nvSpPr>
         <p:spPr>
           <a:xfrm>
-            <a:off x="6629400" y="4297680"/>
-            <a:ext cx="4983479" cy="182880"/>
+            <a:off x="6629400" y="4224528"/>
+            <a:ext cx="4983479" cy="164592"/>
           </a:xfrm>
           <a:prstGeom prst="rect">
             <a:avLst/>
@@ -7422,7 +7422,7 @@
         </p:nvSpPr>
         <p:spPr>
           <a:xfrm>
-            <a:off x="6583680" y="4608576"/>
+            <a:off x="6583680" y="4523232"/>
             <a:ext cx="5074920" cy="9144"/>
           </a:xfrm>
           <a:prstGeom prst="rect">
@@ -7465,8 +7465,8 @@
         </p:nvSpPr>
         <p:spPr>
           <a:xfrm>
-            <a:off x="6629400" y="4663440"/>
-            <a:ext cx="4983479" cy="182880"/>
+            <a:off x="6629400" y="4578096"/>
+            <a:ext cx="4983479" cy="164592"/>
           </a:xfrm>
           <a:prstGeom prst="rect">
             <a:avLst/>
@@ -7500,23 +7500,23 @@
         </p:nvSpPr>
         <p:spPr>
           <a:xfrm>
-            <a:off x="6629400" y="4828031"/>
-            <a:ext cx="4983479" cy="347472"/>
-          </a:xfrm>
-          <a:prstGeom prst="rect">
-            <a:avLst/>
-          </a:prstGeom>
-          <a:noFill/>
-        </p:spPr>
-        <p:txBody>
-          <a:bodyPr wrap="square">
-            <a:spAutoFit/>
-          </a:bodyPr>
-          <a:lstStyle/>
-          <a:p>
-            <a:pPr algn="l"/>
-            <a:r>
-              <a:rPr sz="1800" b="1" i="0">
+            <a:off x="6629400" y="4788408"/>
+            <a:ext cx="4983479" cy="292608"/>
+          </a:xfrm>
+          <a:prstGeom prst="rect">
+            <a:avLst/>
+          </a:prstGeom>
+          <a:noFill/>
+        </p:spPr>
+        <p:txBody>
+          <a:bodyPr wrap="square">
+            <a:spAutoFit/>
+          </a:bodyPr>
+          <a:lstStyle/>
+          <a:p>
+            <a:pPr algn="l"/>
+            <a:r>
+              <a:rPr sz="1500" b="1" i="0">
                 <a:solidFill>
                   <a:srgbClr val="E7CC59"/>
                 </a:solidFill>
@@ -7535,8 +7535,8 @@
         </p:nvSpPr>
         <p:spPr>
           <a:xfrm>
-            <a:off x="6629400" y="5157216"/>
-            <a:ext cx="4983479" cy="182880"/>
+            <a:off x="6629400" y="5062728"/>
+            <a:ext cx="4983479" cy="164592"/>
           </a:xfrm>
           <a:prstGeom prst="rect">
             <a:avLst/>
@@ -7570,7 +7570,7 @@
         </p:nvSpPr>
         <p:spPr>
           <a:xfrm>
-            <a:off x="6583680" y="5468112"/>
+            <a:off x="6583680" y="5361432"/>
             <a:ext cx="5074920" cy="9144"/>
           </a:xfrm>
           <a:prstGeom prst="rect">
@@ -7613,8 +7613,8 @@
         </p:nvSpPr>
         <p:spPr>
           <a:xfrm>
-            <a:off x="6629400" y="5522975"/>
-            <a:ext cx="4983479" cy="182880"/>
+            <a:off x="6629400" y="5416296"/>
+            <a:ext cx="4983479" cy="164592"/>
           </a:xfrm>
           <a:prstGeom prst="rect">
             <a:avLst/>
@@ -7648,23 +7648,23 @@
         </p:nvSpPr>
         <p:spPr>
           <a:xfrm>
-            <a:off x="6629400" y="5687567"/>
-            <a:ext cx="4983479" cy="347472"/>
-          </a:xfrm>
-          <a:prstGeom prst="rect">
-            <a:avLst/>
-          </a:prstGeom>
-          <a:noFill/>
-        </p:spPr>
-        <p:txBody>
-          <a:bodyPr wrap="square">
-            <a:spAutoFit/>
-          </a:bodyPr>
-          <a:lstStyle/>
-          <a:p>
-            <a:pPr algn="l"/>
-            <a:r>
-              <a:rPr sz="1800" b="1" i="0">
+            <a:off x="6629400" y="5626607"/>
+            <a:ext cx="4983479" cy="292608"/>
+          </a:xfrm>
+          <a:prstGeom prst="rect">
+            <a:avLst/>
+          </a:prstGeom>
+          <a:noFill/>
+        </p:spPr>
+        <p:txBody>
+          <a:bodyPr wrap="square">
+            <a:spAutoFit/>
+          </a:bodyPr>
+          <a:lstStyle/>
+          <a:p>
+            <a:pPr algn="l"/>
+            <a:r>
+              <a:rPr sz="1500" b="1" i="0">
                 <a:solidFill>
                   <a:srgbClr val="E7CC59"/>
                 </a:solidFill>
@@ -7683,8 +7683,8 @@
         </p:nvSpPr>
         <p:spPr>
           <a:xfrm>
-            <a:off x="6629400" y="6016751"/>
-            <a:ext cx="4983479" cy="182880"/>
+            <a:off x="6629400" y="5900928"/>
+            <a:ext cx="4983479" cy="164592"/>
           </a:xfrm>
           <a:prstGeom prst="rect">
             <a:avLst/>
@@ -7823,14 +7823,14 @@
         </p:nvSpPr>
         <p:spPr>
           <a:xfrm>
-            <a:off x="9756648" y="3904488"/>
-            <a:ext cx="1920240" cy="1920240"/>
+            <a:off x="11082528" y="6053328"/>
+            <a:ext cx="841248" cy="841248"/>
           </a:xfrm>
           <a:prstGeom prst="ellipse">
             <a:avLst/>
           </a:prstGeom>
           <a:noFill/>
-          <a:ln w="25400">
+          <a:ln w="19050">
             <a:solidFill>
               <a:srgbClr val="E7CC59"/>
             </a:solidFill>
@@ -7866,8 +7866,8 @@
         </p:nvSpPr>
         <p:spPr>
           <a:xfrm>
-            <a:off x="9829800" y="3831336"/>
-            <a:ext cx="1773936" cy="1920240"/>
+            <a:off x="11119103" y="6016752"/>
+            <a:ext cx="768096" cy="841248"/>
           </a:xfrm>
           <a:prstGeom prst="rect">
             <a:avLst/>
@@ -7882,7 +7882,7 @@
           <a:p>
             <a:pPr algn="ctr"/>
             <a:r>
-              <a:rPr sz="11000" b="1" i="0">
+              <a:rPr sz="4800" b="1" i="0">
                 <a:solidFill>
                   <a:srgbClr val="142A4A"/>
                 </a:solidFill>
@@ -10135,14 +10135,14 @@
         </p:nvSpPr>
         <p:spPr>
           <a:xfrm>
-            <a:off x="9756648" y="3904488"/>
-            <a:ext cx="1920240" cy="1920240"/>
+            <a:off x="11082528" y="6053328"/>
+            <a:ext cx="841248" cy="841248"/>
           </a:xfrm>
           <a:prstGeom prst="ellipse">
             <a:avLst/>
           </a:prstGeom>
           <a:noFill/>
-          <a:ln w="25400">
+          <a:ln w="19050">
             <a:solidFill>
               <a:srgbClr val="E7CC59"/>
             </a:solidFill>
@@ -10178,8 +10178,8 @@
         </p:nvSpPr>
         <p:spPr>
           <a:xfrm>
-            <a:off x="9829800" y="3831336"/>
-            <a:ext cx="1773936" cy="1920240"/>
+            <a:off x="11119103" y="6016752"/>
+            <a:ext cx="768096" cy="841248"/>
           </a:xfrm>
           <a:prstGeom prst="rect">
             <a:avLst/>
@@ -10194,7 +10194,7 @@
           <a:p>
             <a:pPr algn="ctr"/>
             <a:r>
-              <a:rPr sz="11000" b="1" i="0">
+              <a:rPr sz="4800" b="1" i="0">
                 <a:solidFill>
                   <a:srgbClr val="142A4A"/>
                 </a:solidFill>
@@ -12062,14 +12062,14 @@
         </p:nvSpPr>
         <p:spPr>
           <a:xfrm>
-            <a:off x="9756648" y="3904488"/>
-            <a:ext cx="1920240" cy="1920240"/>
+            <a:off x="11082528" y="6053328"/>
+            <a:ext cx="841248" cy="841248"/>
           </a:xfrm>
           <a:prstGeom prst="ellipse">
             <a:avLst/>
           </a:prstGeom>
           <a:noFill/>
-          <a:ln w="25400">
+          <a:ln w="19050">
             <a:solidFill>
               <a:srgbClr val="E7CC59"/>
             </a:solidFill>
@@ -12105,8 +12105,8 @@
         </p:nvSpPr>
         <p:spPr>
           <a:xfrm>
-            <a:off x="9829800" y="3831336"/>
-            <a:ext cx="1773936" cy="1920240"/>
+            <a:off x="11119103" y="6016752"/>
+            <a:ext cx="768096" cy="841248"/>
           </a:xfrm>
           <a:prstGeom prst="rect">
             <a:avLst/>
@@ -12121,7 +12121,7 @@
           <a:p>
             <a:pPr algn="ctr"/>
             <a:r>
-              <a:rPr sz="11000" b="1" i="0">
+              <a:rPr sz="4800" b="1" i="0">
                 <a:solidFill>
                   <a:srgbClr val="142A4A"/>
                 </a:solidFill>
@@ -14485,14 +14485,14 @@
         </p:nvSpPr>
         <p:spPr>
           <a:xfrm>
-            <a:off x="9756648" y="3904488"/>
-            <a:ext cx="1920240" cy="1920240"/>
+            <a:off x="11082528" y="6053328"/>
+            <a:ext cx="841248" cy="841248"/>
           </a:xfrm>
           <a:prstGeom prst="ellipse">
             <a:avLst/>
           </a:prstGeom>
           <a:noFill/>
-          <a:ln w="25400">
+          <a:ln w="19050">
             <a:solidFill>
               <a:srgbClr val="E7CC59"/>
             </a:solidFill>
@@ -14528,8 +14528,8 @@
         </p:nvSpPr>
         <p:spPr>
           <a:xfrm>
-            <a:off x="9829800" y="3831336"/>
-            <a:ext cx="1773936" cy="1920240"/>
+            <a:off x="11119103" y="6016752"/>
+            <a:ext cx="768096" cy="841248"/>
           </a:xfrm>
           <a:prstGeom prst="rect">
             <a:avLst/>
@@ -14544,7 +14544,7 @@
           <a:p>
             <a:pPr algn="ctr"/>
             <a:r>
-              <a:rPr sz="11000" b="1" i="0">
+              <a:rPr sz="4800" b="1" i="0">
                 <a:solidFill>
                   <a:srgbClr val="142A4A"/>
                 </a:solidFill>
@@ -14879,14 +14879,14 @@
         </p:nvSpPr>
         <p:spPr>
           <a:xfrm>
-            <a:off x="9756648" y="3904488"/>
-            <a:ext cx="1920240" cy="1920240"/>
+            <a:off x="11082528" y="6053328"/>
+            <a:ext cx="841248" cy="841248"/>
           </a:xfrm>
           <a:prstGeom prst="ellipse">
             <a:avLst/>
           </a:prstGeom>
           <a:noFill/>
-          <a:ln w="25400">
+          <a:ln w="19050">
             <a:solidFill>
               <a:srgbClr val="E7CC59"/>
             </a:solidFill>
@@ -14922,8 +14922,8 @@
         </p:nvSpPr>
         <p:spPr>
           <a:xfrm>
-            <a:off x="9829800" y="3831336"/>
-            <a:ext cx="1773936" cy="1920240"/>
+            <a:off x="11119103" y="6016752"/>
+            <a:ext cx="768096" cy="841248"/>
           </a:xfrm>
           <a:prstGeom prst="rect">
             <a:avLst/>
@@ -14938,7 +14938,7 @@
           <a:p>
             <a:pPr algn="ctr"/>
             <a:r>
-              <a:rPr sz="11000" b="1" i="0">
+              <a:rPr sz="4800" b="1" i="0">
                 <a:solidFill>
                   <a:srgbClr val="142A4A"/>
                 </a:solidFill>
@@ -16896,14 +16896,14 @@
         </p:nvSpPr>
         <p:spPr>
           <a:xfrm>
-            <a:off x="9756648" y="3904488"/>
-            <a:ext cx="1920240" cy="1920240"/>
+            <a:off x="11082528" y="6053328"/>
+            <a:ext cx="841248" cy="841248"/>
           </a:xfrm>
           <a:prstGeom prst="ellipse">
             <a:avLst/>
           </a:prstGeom>
           <a:noFill/>
-          <a:ln w="25400">
+          <a:ln w="19050">
             <a:solidFill>
               <a:srgbClr val="E7CC59"/>
             </a:solidFill>
@@ -16939,8 +16939,8 @@
         </p:nvSpPr>
         <p:spPr>
           <a:xfrm>
-            <a:off x="9829800" y="3831336"/>
-            <a:ext cx="1773936" cy="1920240"/>
+            <a:off x="11119103" y="6016752"/>
+            <a:ext cx="768096" cy="841248"/>
           </a:xfrm>
           <a:prstGeom prst="rect">
             <a:avLst/>
@@ -16955,7 +16955,7 @@
           <a:p>
             <a:pPr algn="ctr"/>
             <a:r>
-              <a:rPr sz="11000" b="1" i="0">
+              <a:rPr sz="4800" b="1" i="0">
                 <a:solidFill>
                   <a:srgbClr val="142A4A"/>
                 </a:solidFill>
@@ -17182,7 +17182,7 @@
                 </a:solidFill>
                 <a:latin typeface="Calibri"/>
               </a:rPr>
-              <a:t/>
+              <a:t> </a:t>
             </a:r>
           </a:p>
           <a:p>
@@ -17206,7 +17206,7 @@
                 </a:solidFill>
                 <a:latin typeface="Calibri"/>
               </a:rPr>
-              <a:t/>
+              <a:t> </a:t>
             </a:r>
           </a:p>
           <a:p>
@@ -17230,7 +17230,7 @@
                 </a:solidFill>
                 <a:latin typeface="Calibri"/>
               </a:rPr>
-              <a:t/>
+              <a:t> </a:t>
             </a:r>
           </a:p>
           <a:p>
@@ -17254,7 +17254,7 @@
                 </a:solidFill>
                 <a:latin typeface="Calibri"/>
               </a:rPr>
-              <a:t/>
+              <a:t> </a:t>
             </a:r>
           </a:p>
           <a:p>
@@ -17278,7 +17278,7 @@
                 </a:solidFill>
                 <a:latin typeface="Calibri"/>
               </a:rPr>
-              <a:t/>
+              <a:t> </a:t>
             </a:r>
           </a:p>
           <a:p>
@@ -17302,7 +17302,7 @@
                 </a:solidFill>
                 <a:latin typeface="Calibri"/>
               </a:rPr>
-              <a:t/>
+              <a:t> </a:t>
             </a:r>
           </a:p>
           <a:p>
@@ -17326,7 +17326,7 @@
                 </a:solidFill>
                 <a:latin typeface="Calibri"/>
               </a:rPr>
-              <a:t/>
+              <a:t> </a:t>
             </a:r>
           </a:p>
           <a:p>
@@ -17350,7 +17350,7 @@
                 </a:solidFill>
                 <a:latin typeface="Calibri"/>
               </a:rPr>
-              <a:t/>
+              <a:t> </a:t>
             </a:r>
           </a:p>
           <a:p>
@@ -17374,7 +17374,7 @@
                 </a:solidFill>
                 <a:latin typeface="Calibri"/>
               </a:rPr>
-              <a:t/>
+              <a:t> </a:t>
             </a:r>
           </a:p>
           <a:p>
@@ -17398,7 +17398,7 @@
                 </a:solidFill>
                 <a:latin typeface="Calibri"/>
               </a:rPr>
-              <a:t/>
+              <a:t> </a:t>
             </a:r>
           </a:p>
           <a:p>
@@ -17422,7 +17422,7 @@
                 </a:solidFill>
                 <a:latin typeface="Calibri"/>
               </a:rPr>
-              <a:t/>
+              <a:t> </a:t>
             </a:r>
           </a:p>
           <a:p>
@@ -17446,7 +17446,7 @@
                 </a:solidFill>
                 <a:latin typeface="Calibri"/>
               </a:rPr>
-              <a:t/>
+              <a:t> </a:t>
             </a:r>
           </a:p>
           <a:p>
@@ -17470,7 +17470,7 @@
                 </a:solidFill>
                 <a:latin typeface="Calibri"/>
               </a:rPr>
-              <a:t/>
+              <a:t> </a:t>
             </a:r>
           </a:p>
         </p:txBody>
@@ -17484,7 +17484,7 @@
         <p:spPr>
           <a:xfrm>
             <a:off x="6446520" y="841248"/>
-            <a:ext cx="5349240" cy="5504688"/>
+            <a:ext cx="5349240" cy="5376672"/>
           </a:xfrm>
           <a:prstGeom prst="rect">
             <a:avLst/>
@@ -17605,7 +17605,7 @@
         <p:spPr>
           <a:xfrm>
             <a:off x="6629400" y="1225296"/>
-            <a:ext cx="4983479" cy="182880"/>
+            <a:ext cx="4983479" cy="164592"/>
           </a:xfrm>
           <a:prstGeom prst="rect">
             <a:avLst/>
@@ -17639,23 +17639,23 @@
         </p:nvSpPr>
         <p:spPr>
           <a:xfrm>
-            <a:off x="6629400" y="1389888"/>
-            <a:ext cx="4983479" cy="347472"/>
-          </a:xfrm>
-          <a:prstGeom prst="rect">
-            <a:avLst/>
-          </a:prstGeom>
-          <a:noFill/>
-        </p:spPr>
-        <p:txBody>
-          <a:bodyPr wrap="square">
-            <a:spAutoFit/>
-          </a:bodyPr>
-          <a:lstStyle/>
-          <a:p>
-            <a:pPr algn="l"/>
-            <a:r>
-              <a:rPr sz="1800" b="1" i="0">
+            <a:off x="6629400" y="1435608"/>
+            <a:ext cx="4983479" cy="292608"/>
+          </a:xfrm>
+          <a:prstGeom prst="rect">
+            <a:avLst/>
+          </a:prstGeom>
+          <a:noFill/>
+        </p:spPr>
+        <p:txBody>
+          <a:bodyPr wrap="square">
+            <a:spAutoFit/>
+          </a:bodyPr>
+          <a:lstStyle/>
+          <a:p>
+            <a:pPr algn="l"/>
+            <a:r>
+              <a:rPr sz="1500" b="1" i="0">
                 <a:solidFill>
                   <a:srgbClr val="E7CC59"/>
                 </a:solidFill>
@@ -17674,8 +17674,8 @@
         </p:nvSpPr>
         <p:spPr>
           <a:xfrm>
-            <a:off x="6629400" y="1719072"/>
-            <a:ext cx="4983479" cy="182880"/>
+            <a:off x="6629400" y="1709928"/>
+            <a:ext cx="4983479" cy="164592"/>
           </a:xfrm>
           <a:prstGeom prst="rect">
             <a:avLst/>
@@ -17709,7 +17709,7 @@
         </p:nvSpPr>
         <p:spPr>
           <a:xfrm>
-            <a:off x="6583680" y="2029968"/>
+            <a:off x="6583680" y="2008632"/>
             <a:ext cx="5074920" cy="9144"/>
           </a:xfrm>
           <a:prstGeom prst="rect">
@@ -17752,8 +17752,8 @@
         </p:nvSpPr>
         <p:spPr>
           <a:xfrm>
-            <a:off x="6629400" y="2084832"/>
-            <a:ext cx="4983479" cy="182880"/>
+            <a:off x="6629400" y="2063496"/>
+            <a:ext cx="4983479" cy="164592"/>
           </a:xfrm>
           <a:prstGeom prst="rect">
             <a:avLst/>
@@ -17787,23 +17787,23 @@
         </p:nvSpPr>
         <p:spPr>
           <a:xfrm>
-            <a:off x="6629400" y="2249424"/>
-            <a:ext cx="4983479" cy="347472"/>
-          </a:xfrm>
-          <a:prstGeom prst="rect">
-            <a:avLst/>
-          </a:prstGeom>
-          <a:noFill/>
-        </p:spPr>
-        <p:txBody>
-          <a:bodyPr wrap="square">
-            <a:spAutoFit/>
-          </a:bodyPr>
-          <a:lstStyle/>
-          <a:p>
-            <a:pPr algn="l"/>
-            <a:r>
-              <a:rPr sz="1800" b="1" i="0">
+            <a:off x="6629400" y="2273808"/>
+            <a:ext cx="4983479" cy="292608"/>
+          </a:xfrm>
+          <a:prstGeom prst="rect">
+            <a:avLst/>
+          </a:prstGeom>
+          <a:noFill/>
+        </p:spPr>
+        <p:txBody>
+          <a:bodyPr wrap="square">
+            <a:spAutoFit/>
+          </a:bodyPr>
+          <a:lstStyle/>
+          <a:p>
+            <a:pPr algn="l"/>
+            <a:r>
+              <a:rPr sz="1500" b="1" i="0">
                 <a:solidFill>
                   <a:srgbClr val="E7CC59"/>
                 </a:solidFill>
@@ -17822,8 +17822,8 @@
         </p:nvSpPr>
         <p:spPr>
           <a:xfrm>
-            <a:off x="6629400" y="2578608"/>
-            <a:ext cx="4983479" cy="182880"/>
+            <a:off x="6629400" y="2548128"/>
+            <a:ext cx="4983479" cy="164592"/>
           </a:xfrm>
           <a:prstGeom prst="rect">
             <a:avLst/>
@@ -17857,7 +17857,7 @@
         </p:nvSpPr>
         <p:spPr>
           <a:xfrm>
-            <a:off x="6583680" y="2889503"/>
+            <a:off x="6583680" y="2846832"/>
             <a:ext cx="5074920" cy="9144"/>
           </a:xfrm>
           <a:prstGeom prst="rect">
@@ -17900,8 +17900,8 @@
         </p:nvSpPr>
         <p:spPr>
           <a:xfrm>
-            <a:off x="6629400" y="2944368"/>
-            <a:ext cx="4983479" cy="182880"/>
+            <a:off x="6629400" y="2901696"/>
+            <a:ext cx="4983479" cy="164592"/>
           </a:xfrm>
           <a:prstGeom prst="rect">
             <a:avLst/>
@@ -17935,23 +17935,23 @@
         </p:nvSpPr>
         <p:spPr>
           <a:xfrm>
-            <a:off x="6629400" y="3108960"/>
-            <a:ext cx="4983479" cy="347472"/>
-          </a:xfrm>
-          <a:prstGeom prst="rect">
-            <a:avLst/>
-          </a:prstGeom>
-          <a:noFill/>
-        </p:spPr>
-        <p:txBody>
-          <a:bodyPr wrap="square">
-            <a:spAutoFit/>
-          </a:bodyPr>
-          <a:lstStyle/>
-          <a:p>
-            <a:pPr algn="l"/>
-            <a:r>
-              <a:rPr sz="1800" b="1" i="0">
+            <a:off x="6629400" y="3112008"/>
+            <a:ext cx="4983479" cy="292608"/>
+          </a:xfrm>
+          <a:prstGeom prst="rect">
+            <a:avLst/>
+          </a:prstGeom>
+          <a:noFill/>
+        </p:spPr>
+        <p:txBody>
+          <a:bodyPr wrap="square">
+            <a:spAutoFit/>
+          </a:bodyPr>
+          <a:lstStyle/>
+          <a:p>
+            <a:pPr algn="l"/>
+            <a:r>
+              <a:rPr sz="1500" b="1" i="0">
                 <a:solidFill>
                   <a:srgbClr val="E7CC59"/>
                 </a:solidFill>
@@ -17970,7 +17970,7 @@
         </p:nvSpPr>
         <p:spPr>
           <a:xfrm>
-            <a:off x="6583680" y="3749040"/>
+            <a:off x="6583680" y="3685032"/>
             <a:ext cx="5074920" cy="9144"/>
           </a:xfrm>
           <a:prstGeom prst="rect">
@@ -18013,8 +18013,8 @@
         </p:nvSpPr>
         <p:spPr>
           <a:xfrm>
-            <a:off x="6629400" y="3803904"/>
-            <a:ext cx="4983479" cy="182880"/>
+            <a:off x="6629400" y="3739896"/>
+            <a:ext cx="4983479" cy="164592"/>
           </a:xfrm>
           <a:prstGeom prst="rect">
             <a:avLst/>
@@ -18048,23 +18048,23 @@
         </p:nvSpPr>
         <p:spPr>
           <a:xfrm>
-            <a:off x="6629400" y="3968496"/>
-            <a:ext cx="4983479" cy="347472"/>
-          </a:xfrm>
-          <a:prstGeom prst="rect">
-            <a:avLst/>
-          </a:prstGeom>
-          <a:noFill/>
-        </p:spPr>
-        <p:txBody>
-          <a:bodyPr wrap="square">
-            <a:spAutoFit/>
-          </a:bodyPr>
-          <a:lstStyle/>
-          <a:p>
-            <a:pPr algn="l"/>
-            <a:r>
-              <a:rPr sz="1800" b="1" i="0">
+            <a:off x="6629400" y="3950208"/>
+            <a:ext cx="4983479" cy="292608"/>
+          </a:xfrm>
+          <a:prstGeom prst="rect">
+            <a:avLst/>
+          </a:prstGeom>
+          <a:noFill/>
+        </p:spPr>
+        <p:txBody>
+          <a:bodyPr wrap="square">
+            <a:spAutoFit/>
+          </a:bodyPr>
+          <a:lstStyle/>
+          <a:p>
+            <a:pPr algn="l"/>
+            <a:r>
+              <a:rPr sz="1500" b="1" i="0">
                 <a:solidFill>
                   <a:srgbClr val="E7CC59"/>
                 </a:solidFill>
@@ -18083,8 +18083,8 @@
         </p:nvSpPr>
         <p:spPr>
           <a:xfrm>
-            <a:off x="6629400" y="4297680"/>
-            <a:ext cx="4983479" cy="182880"/>
+            <a:off x="6629400" y="4224528"/>
+            <a:ext cx="4983479" cy="164592"/>
           </a:xfrm>
           <a:prstGeom prst="rect">
             <a:avLst/>
@@ -18118,7 +18118,7 @@
         </p:nvSpPr>
         <p:spPr>
           <a:xfrm>
-            <a:off x="6583680" y="4608576"/>
+            <a:off x="6583680" y="4523232"/>
             <a:ext cx="5074920" cy="9144"/>
           </a:xfrm>
           <a:prstGeom prst="rect">
@@ -18161,8 +18161,8 @@
         </p:nvSpPr>
         <p:spPr>
           <a:xfrm>
-            <a:off x="6629400" y="4663440"/>
-            <a:ext cx="4983479" cy="182880"/>
+            <a:off x="6629400" y="4578096"/>
+            <a:ext cx="4983479" cy="164592"/>
           </a:xfrm>
           <a:prstGeom prst="rect">
             <a:avLst/>
@@ -18196,23 +18196,23 @@
         </p:nvSpPr>
         <p:spPr>
           <a:xfrm>
-            <a:off x="6629400" y="4828031"/>
-            <a:ext cx="4983479" cy="347472"/>
-          </a:xfrm>
-          <a:prstGeom prst="rect">
-            <a:avLst/>
-          </a:prstGeom>
-          <a:noFill/>
-        </p:spPr>
-        <p:txBody>
-          <a:bodyPr wrap="square">
-            <a:spAutoFit/>
-          </a:bodyPr>
-          <a:lstStyle/>
-          <a:p>
-            <a:pPr algn="l"/>
-            <a:r>
-              <a:rPr sz="1800" b="1" i="0">
+            <a:off x="6629400" y="4788408"/>
+            <a:ext cx="4983479" cy="292608"/>
+          </a:xfrm>
+          <a:prstGeom prst="rect">
+            <a:avLst/>
+          </a:prstGeom>
+          <a:noFill/>
+        </p:spPr>
+        <p:txBody>
+          <a:bodyPr wrap="square">
+            <a:spAutoFit/>
+          </a:bodyPr>
+          <a:lstStyle/>
+          <a:p>
+            <a:pPr algn="l"/>
+            <a:r>
+              <a:rPr sz="1500" b="1" i="0">
                 <a:solidFill>
                   <a:srgbClr val="E7CC59"/>
                 </a:solidFill>
@@ -18231,8 +18231,8 @@
         </p:nvSpPr>
         <p:spPr>
           <a:xfrm>
-            <a:off x="6629400" y="5157216"/>
-            <a:ext cx="4983479" cy="182880"/>
+            <a:off x="6629400" y="5062728"/>
+            <a:ext cx="4983479" cy="164592"/>
           </a:xfrm>
           <a:prstGeom prst="rect">
             <a:avLst/>
@@ -18266,7 +18266,7 @@
         </p:nvSpPr>
         <p:spPr>
           <a:xfrm>
-            <a:off x="6583680" y="5468112"/>
+            <a:off x="6583680" y="5361432"/>
             <a:ext cx="5074920" cy="9144"/>
           </a:xfrm>
           <a:prstGeom prst="rect">
@@ -18309,8 +18309,8 @@
         </p:nvSpPr>
         <p:spPr>
           <a:xfrm>
-            <a:off x="6629400" y="5522975"/>
-            <a:ext cx="4983479" cy="182880"/>
+            <a:off x="6629400" y="5416296"/>
+            <a:ext cx="4983479" cy="164592"/>
           </a:xfrm>
           <a:prstGeom prst="rect">
             <a:avLst/>
@@ -18344,23 +18344,23 @@
         </p:nvSpPr>
         <p:spPr>
           <a:xfrm>
-            <a:off x="6629400" y="5687567"/>
-            <a:ext cx="4983479" cy="347472"/>
-          </a:xfrm>
-          <a:prstGeom prst="rect">
-            <a:avLst/>
-          </a:prstGeom>
-          <a:noFill/>
-        </p:spPr>
-        <p:txBody>
-          <a:bodyPr wrap="square">
-            <a:spAutoFit/>
-          </a:bodyPr>
-          <a:lstStyle/>
-          <a:p>
-            <a:pPr algn="l"/>
-            <a:r>
-              <a:rPr sz="1800" b="1" i="0">
+            <a:off x="6629400" y="5626607"/>
+            <a:ext cx="4983479" cy="292608"/>
+          </a:xfrm>
+          <a:prstGeom prst="rect">
+            <a:avLst/>
+          </a:prstGeom>
+          <a:noFill/>
+        </p:spPr>
+        <p:txBody>
+          <a:bodyPr wrap="square">
+            <a:spAutoFit/>
+          </a:bodyPr>
+          <a:lstStyle/>
+          <a:p>
+            <a:pPr algn="l"/>
+            <a:r>
+              <a:rPr sz="1500" b="1" i="0">
                 <a:solidFill>
                   <a:srgbClr val="E7CC59"/>
                 </a:solidFill>
@@ -18379,8 +18379,8 @@
         </p:nvSpPr>
         <p:spPr>
           <a:xfrm>
-            <a:off x="6629400" y="6016751"/>
-            <a:ext cx="4983479" cy="182880"/>
+            <a:off x="6629400" y="5900928"/>
+            <a:ext cx="4983479" cy="164592"/>
           </a:xfrm>
           <a:prstGeom prst="rect">
             <a:avLst/>
@@ -18519,14 +18519,14 @@
         </p:nvSpPr>
         <p:spPr>
           <a:xfrm>
-            <a:off x="9756648" y="3904488"/>
-            <a:ext cx="1920240" cy="1920240"/>
+            <a:off x="11082528" y="6053328"/>
+            <a:ext cx="841248" cy="841248"/>
           </a:xfrm>
           <a:prstGeom prst="ellipse">
             <a:avLst/>
           </a:prstGeom>
           <a:noFill/>
-          <a:ln w="25400">
+          <a:ln w="19050">
             <a:solidFill>
               <a:srgbClr val="E7CC59"/>
             </a:solidFill>
@@ -18562,8 +18562,8 @@
         </p:nvSpPr>
         <p:spPr>
           <a:xfrm>
-            <a:off x="9829800" y="3831336"/>
-            <a:ext cx="1773936" cy="1920240"/>
+            <a:off x="11119103" y="6016752"/>
+            <a:ext cx="768096" cy="841248"/>
           </a:xfrm>
           <a:prstGeom prst="rect">
             <a:avLst/>
@@ -18578,7 +18578,7 @@
           <a:p>
             <a:pPr algn="ctr"/>
             <a:r>
-              <a:rPr sz="11000" b="1" i="0">
+              <a:rPr sz="4800" b="1" i="0">
                 <a:solidFill>
                   <a:srgbClr val="142A4A"/>
                 </a:solidFill>
@@ -18805,7 +18805,19 @@
                 </a:solidFill>
                 <a:latin typeface="Calibri"/>
               </a:rPr>
-              <a:t/>
+              <a:t> </a:t>
+            </a:r>
+          </a:p>
+          <a:p>
+            <a:pPr algn="l"/>
+            <a:r>
+              <a:rPr sz="600" b="0">
+                <a:solidFill>
+                  <a:srgbClr val="0A1628"/>
+                </a:solidFill>
+                <a:latin typeface="Calibri"/>
+              </a:rPr>
+              <a:t> </a:t>
             </a:r>
           </a:p>
           <a:p>
@@ -18817,7 +18829,7 @@
                 </a:solidFill>
                 <a:latin typeface="Calibri"/>
               </a:rPr>
-              <a:t>— </a:t>
+              <a:t>— Lever 1: Sales Capacity Scale</a:t>
             </a:r>
           </a:p>
           <a:p>
@@ -18829,7 +18841,91 @@
                 </a:solidFill>
                 <a:latin typeface="Calibri"/>
               </a:rPr>
-              <a:t/>
+              <a:t> </a:t>
+            </a:r>
+          </a:p>
+          <a:p>
+            <a:pPr algn="l"/>
+            <a:r>
+              <a:rPr sz="1000" b="0">
+                <a:solidFill>
+                  <a:srgbClr val="C8D0E0"/>
+                </a:solidFill>
+                <a:latin typeface="Calibri"/>
+              </a:rPr>
+              <a:t>    · 2 AEs now → 8 AEs by Y3 (Series A capital)</a:t>
+            </a:r>
+          </a:p>
+          <a:p>
+            <a:pPr algn="l"/>
+            <a:r>
+              <a:rPr sz="300" b="0">
+                <a:solidFill>
+                  <a:srgbClr val="0A1628"/>
+                </a:solidFill>
+                <a:latin typeface="Calibri"/>
+              </a:rPr>
+              <a:t> </a:t>
+            </a:r>
+          </a:p>
+          <a:p>
+            <a:pPr algn="l"/>
+            <a:r>
+              <a:rPr sz="1000" b="0">
+                <a:solidFill>
+                  <a:srgbClr val="C8D0E0"/>
+                </a:solidFill>
+                <a:latin typeface="Calibri"/>
+              </a:rPr>
+              <a:t>    · AE ramp model: $720K ARR quota at full ramp (month 7+)</a:t>
+            </a:r>
+          </a:p>
+          <a:p>
+            <a:pPr algn="l"/>
+            <a:r>
+              <a:rPr sz="300" b="0">
+                <a:solidFill>
+                  <a:srgbClr val="0A1628"/>
+                </a:solidFill>
+                <a:latin typeface="Calibri"/>
+              </a:rPr>
+              <a:t> </a:t>
+            </a:r>
+          </a:p>
+          <a:p>
+            <a:pPr algn="l"/>
+            <a:r>
+              <a:rPr sz="1000" b="0">
+                <a:solidFill>
+                  <a:srgbClr val="C8D0E0"/>
+                </a:solidFill>
+                <a:latin typeface="Calibri"/>
+              </a:rPr>
+              <a:t>    · SDR-to-AE ratio: 1:2 → maintained through scale</a:t>
+            </a:r>
+          </a:p>
+          <a:p>
+            <a:pPr algn="l"/>
+            <a:r>
+              <a:rPr sz="300" b="0">
+                <a:solidFill>
+                  <a:srgbClr val="0A1628"/>
+                </a:solidFill>
+                <a:latin typeface="Calibri"/>
+              </a:rPr>
+              <a:t> </a:t>
+            </a:r>
+          </a:p>
+          <a:p>
+            <a:pPr algn="l"/>
+            <a:r>
+              <a:rPr sz="600" b="0">
+                <a:solidFill>
+                  <a:srgbClr val="0A1628"/>
+                </a:solidFill>
+                <a:latin typeface="Calibri"/>
+              </a:rPr>
+              <a:t> </a:t>
             </a:r>
           </a:p>
           <a:p>
@@ -18841,7 +18937,7 @@
                 </a:solidFill>
                 <a:latin typeface="Calibri"/>
               </a:rPr>
-              <a:t>— Lever 1: Sales Capacity Scale</a:t>
+              <a:t>— Lever 2: CAC Compression via Inbound</a:t>
             </a:r>
           </a:p>
           <a:p>
@@ -18853,7 +18949,7 @@
                 </a:solidFill>
                 <a:latin typeface="Calibri"/>
               </a:rPr>
-              <a:t/>
+              <a:t> </a:t>
             </a:r>
           </a:p>
           <a:p>
@@ -18865,7 +18961,7 @@
                 </a:solidFill>
                 <a:latin typeface="Calibri"/>
               </a:rPr>
-              <a:t>    · 2 AEs now → 8 AEs by Y3 (Series A capital)</a:t>
+              <a:t>    · Content + SEO + LinkedIn: 15% of leads now → 40% by Y3</a:t>
             </a:r>
           </a:p>
           <a:p>
@@ -18877,7 +18973,7 @@
                 </a:solidFill>
                 <a:latin typeface="Calibri"/>
               </a:rPr>
-              <a:t/>
+              <a:t> </a:t>
             </a:r>
           </a:p>
           <a:p>
@@ -18889,7 +18985,7 @@
                 </a:solidFill>
                 <a:latin typeface="Calibri"/>
               </a:rPr>
-              <a:t>    · AE ramp model: $720K ARR quota at full ramp (month 7+)</a:t>
+              <a:t>    · [Assumption] Inbound leads cost 4× less than outbound</a:t>
             </a:r>
           </a:p>
           <a:p>
@@ -18901,7 +18997,7 @@
                 </a:solidFill>
                 <a:latin typeface="Calibri"/>
               </a:rPr>
-              <a:t/>
+              <a:t> </a:t>
             </a:r>
           </a:p>
           <a:p>
@@ -18913,7 +19009,7 @@
                 </a:solidFill>
                 <a:latin typeface="Calibri"/>
               </a:rPr>
-              <a:t>    · SDR-to-AE ratio: 1:2 → maintained through scale</a:t>
+              <a:t>    · CAC improves from $12K → $7K by Y5 — 42% reduction</a:t>
             </a:r>
           </a:p>
           <a:p>
@@ -18925,7 +19021,19 @@
                 </a:solidFill>
                 <a:latin typeface="Calibri"/>
               </a:rPr>
-              <a:t/>
+              <a:t> </a:t>
+            </a:r>
+          </a:p>
+          <a:p>
+            <a:pPr algn="l"/>
+            <a:r>
+              <a:rPr sz="600" b="0">
+                <a:solidFill>
+                  <a:srgbClr val="0A1628"/>
+                </a:solidFill>
+                <a:latin typeface="Calibri"/>
+              </a:rPr>
+              <a:t> </a:t>
             </a:r>
           </a:p>
           <a:p>
@@ -18937,7 +19045,7 @@
                 </a:solidFill>
                 <a:latin typeface="Calibri"/>
               </a:rPr>
-              <a:t>— </a:t>
+              <a:t>— Lever 3: NRR Engine (Land &amp; Expand)</a:t>
             </a:r>
           </a:p>
           <a:p>
@@ -18949,31 +19057,31 @@
                 </a:solidFill>
                 <a:latin typeface="Calibri"/>
               </a:rPr>
-              <a:t/>
-            </a:r>
-          </a:p>
-          <a:p>
-            <a:pPr algn="l"/>
-            <a:r>
-              <a:rPr sz="1250" b="0">
-                <a:solidFill>
-                  <a:srgbClr val="FFFFFF"/>
-                </a:solidFill>
-                <a:latin typeface="Calibri"/>
-              </a:rPr>
-              <a:t>— Lever 2: CAC Compression via Inbound</a:t>
-            </a:r>
-          </a:p>
-          <a:p>
-            <a:pPr algn="l"/>
-            <a:r>
-              <a:rPr sz="400" b="0">
+              <a:t> </a:t>
+            </a:r>
+          </a:p>
+          <a:p>
+            <a:pPr algn="l"/>
+            <a:r>
+              <a:rPr sz="1000" b="0">
+                <a:solidFill>
+                  <a:srgbClr val="C8D0E0"/>
+                </a:solidFill>
+                <a:latin typeface="Calibri"/>
+              </a:rPr>
+              <a:t>    · Module 1 → Modules 2+3 expansion path: 15% revenue uplift per cohort</a:t>
+            </a:r>
+          </a:p>
+          <a:p>
+            <a:pPr algn="l"/>
+            <a:r>
+              <a:rPr sz="300" b="0">
                 <a:solidFill>
                   <a:srgbClr val="0A1628"/>
                 </a:solidFill>
                 <a:latin typeface="Calibri"/>
               </a:rPr>
-              <a:t/>
+              <a:t> </a:t>
             </a:r>
           </a:p>
           <a:p>
@@ -18985,7 +19093,7 @@
                 </a:solidFill>
                 <a:latin typeface="Calibri"/>
               </a:rPr>
-              <a:t>    · Content + SEO + LinkedIn: 15% of leads now → 40% by Y3</a:t>
+              <a:t>    · Enterprise tier adds $60K+ incremental ARPU to existing accounts</a:t>
             </a:r>
           </a:p>
           <a:p>
@@ -18997,7 +19105,7 @@
                 </a:solidFill>
                 <a:latin typeface="Calibri"/>
               </a:rPr>
-              <a:t/>
+              <a:t> </a:t>
             </a:r>
           </a:p>
           <a:p>
@@ -19009,7 +19117,7 @@
                 </a:solidFill>
                 <a:latin typeface="Calibri"/>
               </a:rPr>
-              <a:t>    · [Assumption] Inbound leads cost 4× less than outbound</a:t>
+              <a:t>    · NRR of 115%+ means ARR grows even with zero new logos</a:t>
             </a:r>
           </a:p>
           <a:p>
@@ -19021,151 +19129,7 @@
                 </a:solidFill>
                 <a:latin typeface="Calibri"/>
               </a:rPr>
-              <a:t/>
-            </a:r>
-          </a:p>
-          <a:p>
-            <a:pPr algn="l"/>
-            <a:r>
-              <a:rPr sz="1000" b="0">
-                <a:solidFill>
-                  <a:srgbClr val="C8D0E0"/>
-                </a:solidFill>
-                <a:latin typeface="Calibri"/>
-              </a:rPr>
-              <a:t>    · CAC improves from $12K → $7K by Y5 — 42% reduction</a:t>
-            </a:r>
-          </a:p>
-          <a:p>
-            <a:pPr algn="l"/>
-            <a:r>
-              <a:rPr sz="300" b="0">
-                <a:solidFill>
-                  <a:srgbClr val="0A1628"/>
-                </a:solidFill>
-                <a:latin typeface="Calibri"/>
-              </a:rPr>
-              <a:t/>
-            </a:r>
-          </a:p>
-          <a:p>
-            <a:pPr algn="l"/>
-            <a:r>
-              <a:rPr sz="1250" b="0">
-                <a:solidFill>
-                  <a:srgbClr val="FFFFFF"/>
-                </a:solidFill>
-                <a:latin typeface="Calibri"/>
-              </a:rPr>
-              <a:t>— </a:t>
-            </a:r>
-          </a:p>
-          <a:p>
-            <a:pPr algn="l"/>
-            <a:r>
-              <a:rPr sz="400" b="0">
-                <a:solidFill>
-                  <a:srgbClr val="0A1628"/>
-                </a:solidFill>
-                <a:latin typeface="Calibri"/>
-              </a:rPr>
-              <a:t/>
-            </a:r>
-          </a:p>
-          <a:p>
-            <a:pPr algn="l"/>
-            <a:r>
-              <a:rPr sz="1250" b="0">
-                <a:solidFill>
-                  <a:srgbClr val="FFFFFF"/>
-                </a:solidFill>
-                <a:latin typeface="Calibri"/>
-              </a:rPr>
-              <a:t>— Lever 3: NRR Engine (Land &amp; Expand)</a:t>
-            </a:r>
-          </a:p>
-          <a:p>
-            <a:pPr algn="l"/>
-            <a:r>
-              <a:rPr sz="400" b="0">
-                <a:solidFill>
-                  <a:srgbClr val="0A1628"/>
-                </a:solidFill>
-                <a:latin typeface="Calibri"/>
-              </a:rPr>
-              <a:t/>
-            </a:r>
-          </a:p>
-          <a:p>
-            <a:pPr algn="l"/>
-            <a:r>
-              <a:rPr sz="1000" b="0">
-                <a:solidFill>
-                  <a:srgbClr val="C8D0E0"/>
-                </a:solidFill>
-                <a:latin typeface="Calibri"/>
-              </a:rPr>
-              <a:t>    · Module 1 → Modules 2+3 expansion path: 15% revenue uplift per cohort</a:t>
-            </a:r>
-          </a:p>
-          <a:p>
-            <a:pPr algn="l"/>
-            <a:r>
-              <a:rPr sz="300" b="0">
-                <a:solidFill>
-                  <a:srgbClr val="0A1628"/>
-                </a:solidFill>
-                <a:latin typeface="Calibri"/>
-              </a:rPr>
-              <a:t/>
-            </a:r>
-          </a:p>
-          <a:p>
-            <a:pPr algn="l"/>
-            <a:r>
-              <a:rPr sz="1000" b="0">
-                <a:solidFill>
-                  <a:srgbClr val="C8D0E0"/>
-                </a:solidFill>
-                <a:latin typeface="Calibri"/>
-              </a:rPr>
-              <a:t>    · Enterprise tier adds $60K+ incremental ARPU to existing accounts</a:t>
-            </a:r>
-          </a:p>
-          <a:p>
-            <a:pPr algn="l"/>
-            <a:r>
-              <a:rPr sz="300" b="0">
-                <a:solidFill>
-                  <a:srgbClr val="0A1628"/>
-                </a:solidFill>
-                <a:latin typeface="Calibri"/>
-              </a:rPr>
-              <a:t/>
-            </a:r>
-          </a:p>
-          <a:p>
-            <a:pPr algn="l"/>
-            <a:r>
-              <a:rPr sz="1000" b="0">
-                <a:solidFill>
-                  <a:srgbClr val="C8D0E0"/>
-                </a:solidFill>
-                <a:latin typeface="Calibri"/>
-              </a:rPr>
-              <a:t>    · NRR of 115%+ means ARR grows even with zero new logos</a:t>
-            </a:r>
-          </a:p>
-          <a:p>
-            <a:pPr algn="l"/>
-            <a:r>
-              <a:rPr sz="300" b="0">
-                <a:solidFill>
-                  <a:srgbClr val="0A1628"/>
-                </a:solidFill>
-                <a:latin typeface="Calibri"/>
-              </a:rPr>
-              <a:t/>
+              <a:t> </a:t>
             </a:r>
           </a:p>
         </p:txBody>
@@ -19179,7 +19143,7 @@
         <p:spPr>
           <a:xfrm>
             <a:off x="6446520" y="841248"/>
-            <a:ext cx="5349240" cy="5504688"/>
+            <a:ext cx="5349240" cy="5376672"/>
           </a:xfrm>
           <a:prstGeom prst="rect">
             <a:avLst/>
@@ -19300,7 +19264,7 @@
         <p:spPr>
           <a:xfrm>
             <a:off x="6629400" y="1225296"/>
-            <a:ext cx="4983479" cy="182880"/>
+            <a:ext cx="4983479" cy="164592"/>
           </a:xfrm>
           <a:prstGeom prst="rect">
             <a:avLst/>
@@ -19334,23 +19298,23 @@
         </p:nvSpPr>
         <p:spPr>
           <a:xfrm>
-            <a:off x="6629400" y="1389888"/>
-            <a:ext cx="4983479" cy="347472"/>
-          </a:xfrm>
-          <a:prstGeom prst="rect">
-            <a:avLst/>
-          </a:prstGeom>
-          <a:noFill/>
-        </p:spPr>
-        <p:txBody>
-          <a:bodyPr wrap="square">
-            <a:spAutoFit/>
-          </a:bodyPr>
-          <a:lstStyle/>
-          <a:p>
-            <a:pPr algn="l"/>
-            <a:r>
-              <a:rPr sz="1800" b="1" i="0">
+            <a:off x="6629400" y="1435608"/>
+            <a:ext cx="4983479" cy="292608"/>
+          </a:xfrm>
+          <a:prstGeom prst="rect">
+            <a:avLst/>
+          </a:prstGeom>
+          <a:noFill/>
+        </p:spPr>
+        <p:txBody>
+          <a:bodyPr wrap="square">
+            <a:spAutoFit/>
+          </a:bodyPr>
+          <a:lstStyle/>
+          <a:p>
+            <a:pPr algn="l"/>
+            <a:r>
+              <a:rPr sz="1500" b="1" i="0">
                 <a:solidFill>
                   <a:srgbClr val="E7CC59"/>
                 </a:solidFill>
@@ -19369,8 +19333,8 @@
         </p:nvSpPr>
         <p:spPr>
           <a:xfrm>
-            <a:off x="6629400" y="1719072"/>
-            <a:ext cx="4983479" cy="182880"/>
+            <a:off x="6629400" y="1709928"/>
+            <a:ext cx="4983479" cy="164592"/>
           </a:xfrm>
           <a:prstGeom prst="rect">
             <a:avLst/>
@@ -19404,7 +19368,7 @@
         </p:nvSpPr>
         <p:spPr>
           <a:xfrm>
-            <a:off x="6583680" y="2029968"/>
+            <a:off x="6583680" y="2008632"/>
             <a:ext cx="5074920" cy="9144"/>
           </a:xfrm>
           <a:prstGeom prst="rect">
@@ -19447,8 +19411,8 @@
         </p:nvSpPr>
         <p:spPr>
           <a:xfrm>
-            <a:off x="6629400" y="2084832"/>
-            <a:ext cx="4983479" cy="182880"/>
+            <a:off x="6629400" y="2063496"/>
+            <a:ext cx="4983479" cy="164592"/>
           </a:xfrm>
           <a:prstGeom prst="rect">
             <a:avLst/>
@@ -19482,23 +19446,23 @@
         </p:nvSpPr>
         <p:spPr>
           <a:xfrm>
-            <a:off x="6629400" y="2249424"/>
-            <a:ext cx="4983479" cy="347472"/>
-          </a:xfrm>
-          <a:prstGeom prst="rect">
-            <a:avLst/>
-          </a:prstGeom>
-          <a:noFill/>
-        </p:spPr>
-        <p:txBody>
-          <a:bodyPr wrap="square">
-            <a:spAutoFit/>
-          </a:bodyPr>
-          <a:lstStyle/>
-          <a:p>
-            <a:pPr algn="l"/>
-            <a:r>
-              <a:rPr sz="1800" b="1" i="0">
+            <a:off x="6629400" y="2273808"/>
+            <a:ext cx="4983479" cy="292608"/>
+          </a:xfrm>
+          <a:prstGeom prst="rect">
+            <a:avLst/>
+          </a:prstGeom>
+          <a:noFill/>
+        </p:spPr>
+        <p:txBody>
+          <a:bodyPr wrap="square">
+            <a:spAutoFit/>
+          </a:bodyPr>
+          <a:lstStyle/>
+          <a:p>
+            <a:pPr algn="l"/>
+            <a:r>
+              <a:rPr sz="1500" b="1" i="0">
                 <a:solidFill>
                   <a:srgbClr val="E7CC59"/>
                 </a:solidFill>
@@ -19517,8 +19481,8 @@
         </p:nvSpPr>
         <p:spPr>
           <a:xfrm>
-            <a:off x="6629400" y="2578608"/>
-            <a:ext cx="4983479" cy="182880"/>
+            <a:off x="6629400" y="2548128"/>
+            <a:ext cx="4983479" cy="164592"/>
           </a:xfrm>
           <a:prstGeom prst="rect">
             <a:avLst/>
@@ -19552,7 +19516,7 @@
         </p:nvSpPr>
         <p:spPr>
           <a:xfrm>
-            <a:off x="6583680" y="2889503"/>
+            <a:off x="6583680" y="2846832"/>
             <a:ext cx="5074920" cy="9144"/>
           </a:xfrm>
           <a:prstGeom prst="rect">
@@ -19595,8 +19559,8 @@
         </p:nvSpPr>
         <p:spPr>
           <a:xfrm>
-            <a:off x="6629400" y="2944368"/>
-            <a:ext cx="4983479" cy="182880"/>
+            <a:off x="6629400" y="2901696"/>
+            <a:ext cx="4983479" cy="164592"/>
           </a:xfrm>
           <a:prstGeom prst="rect">
             <a:avLst/>
@@ -19630,23 +19594,23 @@
         </p:nvSpPr>
         <p:spPr>
           <a:xfrm>
-            <a:off x="6629400" y="3108960"/>
-            <a:ext cx="4983479" cy="347472"/>
-          </a:xfrm>
-          <a:prstGeom prst="rect">
-            <a:avLst/>
-          </a:prstGeom>
-          <a:noFill/>
-        </p:spPr>
-        <p:txBody>
-          <a:bodyPr wrap="square">
-            <a:spAutoFit/>
-          </a:bodyPr>
-          <a:lstStyle/>
-          <a:p>
-            <a:pPr algn="l"/>
-            <a:r>
-              <a:rPr sz="1800" b="1" i="0">
+            <a:off x="6629400" y="3112008"/>
+            <a:ext cx="4983479" cy="292608"/>
+          </a:xfrm>
+          <a:prstGeom prst="rect">
+            <a:avLst/>
+          </a:prstGeom>
+          <a:noFill/>
+        </p:spPr>
+        <p:txBody>
+          <a:bodyPr wrap="square">
+            <a:spAutoFit/>
+          </a:bodyPr>
+          <a:lstStyle/>
+          <a:p>
+            <a:pPr algn="l"/>
+            <a:r>
+              <a:rPr sz="1500" b="1" i="0">
                 <a:solidFill>
                   <a:srgbClr val="E7CC59"/>
                 </a:solidFill>
@@ -19665,8 +19629,8 @@
         </p:nvSpPr>
         <p:spPr>
           <a:xfrm>
-            <a:off x="6629400" y="3438144"/>
-            <a:ext cx="4983479" cy="182880"/>
+            <a:off x="6629400" y="3386328"/>
+            <a:ext cx="4983479" cy="164592"/>
           </a:xfrm>
           <a:prstGeom prst="rect">
             <a:avLst/>
@@ -19700,7 +19664,7 @@
         </p:nvSpPr>
         <p:spPr>
           <a:xfrm>
-            <a:off x="6583680" y="3749040"/>
+            <a:off x="6583680" y="3685032"/>
             <a:ext cx="5074920" cy="9144"/>
           </a:xfrm>
           <a:prstGeom prst="rect">
@@ -19743,8 +19707,8 @@
         </p:nvSpPr>
         <p:spPr>
           <a:xfrm>
-            <a:off x="6629400" y="3803904"/>
-            <a:ext cx="4983479" cy="182880"/>
+            <a:off x="6629400" y="3739896"/>
+            <a:ext cx="4983479" cy="164592"/>
           </a:xfrm>
           <a:prstGeom prst="rect">
             <a:avLst/>
@@ -19778,23 +19742,23 @@
         </p:nvSpPr>
         <p:spPr>
           <a:xfrm>
-            <a:off x="6629400" y="3968496"/>
-            <a:ext cx="4983479" cy="347472"/>
-          </a:xfrm>
-          <a:prstGeom prst="rect">
-            <a:avLst/>
-          </a:prstGeom>
-          <a:noFill/>
-        </p:spPr>
-        <p:txBody>
-          <a:bodyPr wrap="square">
-            <a:spAutoFit/>
-          </a:bodyPr>
-          <a:lstStyle/>
-          <a:p>
-            <a:pPr algn="l"/>
-            <a:r>
-              <a:rPr sz="1800" b="1" i="0">
+            <a:off x="6629400" y="3950208"/>
+            <a:ext cx="4983479" cy="292608"/>
+          </a:xfrm>
+          <a:prstGeom prst="rect">
+            <a:avLst/>
+          </a:prstGeom>
+          <a:noFill/>
+        </p:spPr>
+        <p:txBody>
+          <a:bodyPr wrap="square">
+            <a:spAutoFit/>
+          </a:bodyPr>
+          <a:lstStyle/>
+          <a:p>
+            <a:pPr algn="l"/>
+            <a:r>
+              <a:rPr sz="1500" b="1" i="0">
                 <a:solidFill>
                   <a:srgbClr val="E7CC59"/>
                 </a:solidFill>
@@ -19813,8 +19777,8 @@
         </p:nvSpPr>
         <p:spPr>
           <a:xfrm>
-            <a:off x="6629400" y="4297680"/>
-            <a:ext cx="4983479" cy="182880"/>
+            <a:off x="6629400" y="4224528"/>
+            <a:ext cx="4983479" cy="164592"/>
           </a:xfrm>
           <a:prstGeom prst="rect">
             <a:avLst/>
@@ -19848,7 +19812,7 @@
         </p:nvSpPr>
         <p:spPr>
           <a:xfrm>
-            <a:off x="6583680" y="4608576"/>
+            <a:off x="6583680" y="4523232"/>
             <a:ext cx="5074920" cy="9144"/>
           </a:xfrm>
           <a:prstGeom prst="rect">
@@ -19891,8 +19855,8 @@
         </p:nvSpPr>
         <p:spPr>
           <a:xfrm>
-            <a:off x="6629400" y="4663440"/>
-            <a:ext cx="4983479" cy="182880"/>
+            <a:off x="6629400" y="4578096"/>
+            <a:ext cx="4983479" cy="164592"/>
           </a:xfrm>
           <a:prstGeom prst="rect">
             <a:avLst/>
@@ -19926,23 +19890,23 @@
         </p:nvSpPr>
         <p:spPr>
           <a:xfrm>
-            <a:off x="6629400" y="4828031"/>
-            <a:ext cx="4983479" cy="347472"/>
-          </a:xfrm>
-          <a:prstGeom prst="rect">
-            <a:avLst/>
-          </a:prstGeom>
-          <a:noFill/>
-        </p:spPr>
-        <p:txBody>
-          <a:bodyPr wrap="square">
-            <a:spAutoFit/>
-          </a:bodyPr>
-          <a:lstStyle/>
-          <a:p>
-            <a:pPr algn="l"/>
-            <a:r>
-              <a:rPr sz="1800" b="1" i="0">
+            <a:off x="6629400" y="4788408"/>
+            <a:ext cx="4983479" cy="292608"/>
+          </a:xfrm>
+          <a:prstGeom prst="rect">
+            <a:avLst/>
+          </a:prstGeom>
+          <a:noFill/>
+        </p:spPr>
+        <p:txBody>
+          <a:bodyPr wrap="square">
+            <a:spAutoFit/>
+          </a:bodyPr>
+          <a:lstStyle/>
+          <a:p>
+            <a:pPr algn="l"/>
+            <a:r>
+              <a:rPr sz="1500" b="1" i="0">
                 <a:solidFill>
                   <a:srgbClr val="E7CC59"/>
                 </a:solidFill>
@@ -19961,8 +19925,8 @@
         </p:nvSpPr>
         <p:spPr>
           <a:xfrm>
-            <a:off x="6629400" y="5157216"/>
-            <a:ext cx="4983479" cy="182880"/>
+            <a:off x="6629400" y="5062728"/>
+            <a:ext cx="4983479" cy="164592"/>
           </a:xfrm>
           <a:prstGeom prst="rect">
             <a:avLst/>
@@ -19996,7 +19960,7 @@
         </p:nvSpPr>
         <p:spPr>
           <a:xfrm>
-            <a:off x="6583680" y="5468112"/>
+            <a:off x="6583680" y="5361432"/>
             <a:ext cx="5074920" cy="9144"/>
           </a:xfrm>
           <a:prstGeom prst="rect">
@@ -20039,8 +20003,8 @@
         </p:nvSpPr>
         <p:spPr>
           <a:xfrm>
-            <a:off x="6629400" y="5522975"/>
-            <a:ext cx="4983479" cy="182880"/>
+            <a:off x="6629400" y="5416296"/>
+            <a:ext cx="4983479" cy="164592"/>
           </a:xfrm>
           <a:prstGeom prst="rect">
             <a:avLst/>
@@ -20074,23 +20038,23 @@
         </p:nvSpPr>
         <p:spPr>
           <a:xfrm>
-            <a:off x="6629400" y="5687567"/>
-            <a:ext cx="4983479" cy="347472"/>
-          </a:xfrm>
-          <a:prstGeom prst="rect">
-            <a:avLst/>
-          </a:prstGeom>
-          <a:noFill/>
-        </p:spPr>
-        <p:txBody>
-          <a:bodyPr wrap="square">
-            <a:spAutoFit/>
-          </a:bodyPr>
-          <a:lstStyle/>
-          <a:p>
-            <a:pPr algn="l"/>
-            <a:r>
-              <a:rPr sz="1800" b="1" i="0">
+            <a:off x="6629400" y="5626607"/>
+            <a:ext cx="4983479" cy="292608"/>
+          </a:xfrm>
+          <a:prstGeom prst="rect">
+            <a:avLst/>
+          </a:prstGeom>
+          <a:noFill/>
+        </p:spPr>
+        <p:txBody>
+          <a:bodyPr wrap="square">
+            <a:spAutoFit/>
+          </a:bodyPr>
+          <a:lstStyle/>
+          <a:p>
+            <a:pPr algn="l"/>
+            <a:r>
+              <a:rPr sz="1500" b="1" i="0">
                 <a:solidFill>
                   <a:srgbClr val="E7CC59"/>
                 </a:solidFill>
@@ -20109,8 +20073,8 @@
         </p:nvSpPr>
         <p:spPr>
           <a:xfrm>
-            <a:off x="6629400" y="6016751"/>
-            <a:ext cx="4983479" cy="182880"/>
+            <a:off x="6629400" y="5900928"/>
+            <a:ext cx="4983479" cy="164592"/>
           </a:xfrm>
           <a:prstGeom prst="rect">
             <a:avLst/>
@@ -20249,14 +20213,14 @@
         </p:nvSpPr>
         <p:spPr>
           <a:xfrm>
-            <a:off x="9756648" y="3904488"/>
-            <a:ext cx="1920240" cy="1920240"/>
+            <a:off x="11082528" y="6053328"/>
+            <a:ext cx="841248" cy="841248"/>
           </a:xfrm>
           <a:prstGeom prst="ellipse">
             <a:avLst/>
           </a:prstGeom>
           <a:noFill/>
-          <a:ln w="25400">
+          <a:ln w="19050">
             <a:solidFill>
               <a:srgbClr val="E7CC59"/>
             </a:solidFill>
@@ -20292,8 +20256,8 @@
         </p:nvSpPr>
         <p:spPr>
           <a:xfrm>
-            <a:off x="9829800" y="3831336"/>
-            <a:ext cx="1773936" cy="1920240"/>
+            <a:off x="11119103" y="6016752"/>
+            <a:ext cx="768096" cy="841248"/>
           </a:xfrm>
           <a:prstGeom prst="rect">
             <a:avLst/>
@@ -20308,7 +20272,7 @@
           <a:p>
             <a:pPr algn="ctr"/>
             <a:r>
-              <a:rPr sz="11000" b="1" i="0">
+              <a:rPr sz="4800" b="1" i="0">
                 <a:solidFill>
                   <a:srgbClr val="142A4A"/>
                 </a:solidFill>
@@ -21873,14 +21837,14 @@
         </p:nvSpPr>
         <p:spPr>
           <a:xfrm>
-            <a:off x="9756648" y="3904488"/>
-            <a:ext cx="1920240" cy="1920240"/>
+            <a:off x="11082528" y="6053328"/>
+            <a:ext cx="841248" cy="841248"/>
           </a:xfrm>
           <a:prstGeom prst="ellipse">
             <a:avLst/>
           </a:prstGeom>
           <a:noFill/>
-          <a:ln w="25400">
+          <a:ln w="19050">
             <a:solidFill>
               <a:srgbClr val="E7CC59"/>
             </a:solidFill>
@@ -21916,8 +21880,8 @@
         </p:nvSpPr>
         <p:spPr>
           <a:xfrm>
-            <a:off x="9829800" y="3831336"/>
-            <a:ext cx="1773936" cy="1920240"/>
+            <a:off x="11119103" y="6016752"/>
+            <a:ext cx="768096" cy="841248"/>
           </a:xfrm>
           <a:prstGeom prst="rect">
             <a:avLst/>
@@ -21932,7 +21896,7 @@
           <a:p>
             <a:pPr algn="ctr"/>
             <a:r>
-              <a:rPr sz="11000" b="1" i="0">
+              <a:rPr sz="4800" b="1" i="0">
                 <a:solidFill>
                   <a:srgbClr val="142A4A"/>
                 </a:solidFill>
@@ -23037,14 +23001,14 @@
         </p:nvSpPr>
         <p:spPr>
           <a:xfrm>
-            <a:off x="9756648" y="3904488"/>
-            <a:ext cx="1920240" cy="1920240"/>
+            <a:off x="11082528" y="6053328"/>
+            <a:ext cx="841248" cy="841248"/>
           </a:xfrm>
           <a:prstGeom prst="ellipse">
             <a:avLst/>
           </a:prstGeom>
           <a:noFill/>
-          <a:ln w="25400">
+          <a:ln w="19050">
             <a:solidFill>
               <a:srgbClr val="E7CC59"/>
             </a:solidFill>
@@ -23080,8 +23044,8 @@
         </p:nvSpPr>
         <p:spPr>
           <a:xfrm>
-            <a:off x="9829800" y="3831336"/>
-            <a:ext cx="1773936" cy="1920240"/>
+            <a:off x="11119103" y="6016752"/>
+            <a:ext cx="768096" cy="841248"/>
           </a:xfrm>
           <a:prstGeom prst="rect">
             <a:avLst/>
@@ -23096,7 +23060,7 @@
           <a:p>
             <a:pPr algn="ctr"/>
             <a:r>
-              <a:rPr sz="11000" b="1" i="0">
+              <a:rPr sz="4800" b="1" i="0">
                 <a:solidFill>
                   <a:srgbClr val="142A4A"/>
                 </a:solidFill>
@@ -23323,7 +23287,7 @@
                 </a:solidFill>
                 <a:latin typeface="Calibri"/>
               </a:rPr>
-              <a:t/>
+              <a:t> </a:t>
             </a:r>
           </a:p>
           <a:p>
@@ -23347,7 +23311,7 @@
                 </a:solidFill>
                 <a:latin typeface="Calibri"/>
               </a:rPr>
-              <a:t/>
+              <a:t> </a:t>
             </a:r>
           </a:p>
           <a:p>
@@ -23371,7 +23335,7 @@
                 </a:solidFill>
                 <a:latin typeface="Calibri"/>
               </a:rPr>
-              <a:t/>
+              <a:t> </a:t>
             </a:r>
           </a:p>
           <a:p>
@@ -23395,7 +23359,7 @@
                 </a:solidFill>
                 <a:latin typeface="Calibri"/>
               </a:rPr>
-              <a:t/>
+              <a:t> </a:t>
             </a:r>
           </a:p>
           <a:p>
@@ -23419,7 +23383,7 @@
                 </a:solidFill>
                 <a:latin typeface="Calibri"/>
               </a:rPr>
-              <a:t/>
+              <a:t> </a:t>
             </a:r>
           </a:p>
           <a:p>
@@ -23443,7 +23407,7 @@
                 </a:solidFill>
                 <a:latin typeface="Calibri"/>
               </a:rPr>
-              <a:t/>
+              <a:t> </a:t>
             </a:r>
           </a:p>
           <a:p>
@@ -23467,7 +23431,7 @@
                 </a:solidFill>
                 <a:latin typeface="Calibri"/>
               </a:rPr>
-              <a:t/>
+              <a:t> </a:t>
             </a:r>
           </a:p>
           <a:p>
@@ -23491,7 +23455,7 @@
                 </a:solidFill>
                 <a:latin typeface="Calibri"/>
               </a:rPr>
-              <a:t/>
+              <a:t> </a:t>
             </a:r>
           </a:p>
         </p:txBody>
@@ -23505,7 +23469,7 @@
         <p:spPr>
           <a:xfrm>
             <a:off x="6446520" y="841248"/>
-            <a:ext cx="5349240" cy="5504688"/>
+            <a:ext cx="5349240" cy="5376672"/>
           </a:xfrm>
           <a:prstGeom prst="rect">
             <a:avLst/>
@@ -23626,7 +23590,7 @@
         <p:spPr>
           <a:xfrm>
             <a:off x="6629400" y="1225296"/>
-            <a:ext cx="4983479" cy="182880"/>
+            <a:ext cx="4983479" cy="164592"/>
           </a:xfrm>
           <a:prstGeom prst="rect">
             <a:avLst/>
@@ -23660,23 +23624,23 @@
         </p:nvSpPr>
         <p:spPr>
           <a:xfrm>
-            <a:off x="6629400" y="1389888"/>
-            <a:ext cx="4983479" cy="347472"/>
-          </a:xfrm>
-          <a:prstGeom prst="rect">
-            <a:avLst/>
-          </a:prstGeom>
-          <a:noFill/>
-        </p:spPr>
-        <p:txBody>
-          <a:bodyPr wrap="square">
-            <a:spAutoFit/>
-          </a:bodyPr>
-          <a:lstStyle/>
-          <a:p>
-            <a:pPr algn="l"/>
-            <a:r>
-              <a:rPr sz="1800" b="1" i="0">
+            <a:off x="6629400" y="1435608"/>
+            <a:ext cx="4983479" cy="292608"/>
+          </a:xfrm>
+          <a:prstGeom prst="rect">
+            <a:avLst/>
+          </a:prstGeom>
+          <a:noFill/>
+        </p:spPr>
+        <p:txBody>
+          <a:bodyPr wrap="square">
+            <a:spAutoFit/>
+          </a:bodyPr>
+          <a:lstStyle/>
+          <a:p>
+            <a:pPr algn="l"/>
+            <a:r>
+              <a:rPr sz="1500" b="1" i="0">
                 <a:solidFill>
                   <a:srgbClr val="E7CC59"/>
                 </a:solidFill>
@@ -23695,8 +23659,8 @@
         </p:nvSpPr>
         <p:spPr>
           <a:xfrm>
-            <a:off x="6629400" y="1719072"/>
-            <a:ext cx="4983479" cy="182880"/>
+            <a:off x="6629400" y="1709928"/>
+            <a:ext cx="4983479" cy="164592"/>
           </a:xfrm>
           <a:prstGeom prst="rect">
             <a:avLst/>
@@ -23730,7 +23694,7 @@
         </p:nvSpPr>
         <p:spPr>
           <a:xfrm>
-            <a:off x="6583680" y="2029968"/>
+            <a:off x="6583680" y="2008632"/>
             <a:ext cx="5074920" cy="9144"/>
           </a:xfrm>
           <a:prstGeom prst="rect">
@@ -23773,8 +23737,8 @@
         </p:nvSpPr>
         <p:spPr>
           <a:xfrm>
-            <a:off x="6629400" y="2084832"/>
-            <a:ext cx="4983479" cy="182880"/>
+            <a:off x="6629400" y="2063496"/>
+            <a:ext cx="4983479" cy="164592"/>
           </a:xfrm>
           <a:prstGeom prst="rect">
             <a:avLst/>
@@ -23808,23 +23772,23 @@
         </p:nvSpPr>
         <p:spPr>
           <a:xfrm>
-            <a:off x="6629400" y="2249424"/>
-            <a:ext cx="4983479" cy="347472"/>
-          </a:xfrm>
-          <a:prstGeom prst="rect">
-            <a:avLst/>
-          </a:prstGeom>
-          <a:noFill/>
-        </p:spPr>
-        <p:txBody>
-          <a:bodyPr wrap="square">
-            <a:spAutoFit/>
-          </a:bodyPr>
-          <a:lstStyle/>
-          <a:p>
-            <a:pPr algn="l"/>
-            <a:r>
-              <a:rPr sz="1800" b="1" i="0">
+            <a:off x="6629400" y="2273808"/>
+            <a:ext cx="4983479" cy="292608"/>
+          </a:xfrm>
+          <a:prstGeom prst="rect">
+            <a:avLst/>
+          </a:prstGeom>
+          <a:noFill/>
+        </p:spPr>
+        <p:txBody>
+          <a:bodyPr wrap="square">
+            <a:spAutoFit/>
+          </a:bodyPr>
+          <a:lstStyle/>
+          <a:p>
+            <a:pPr algn="l"/>
+            <a:r>
+              <a:rPr sz="1500" b="1" i="0">
                 <a:solidFill>
                   <a:srgbClr val="E7CC59"/>
                 </a:solidFill>
@@ -23843,8 +23807,8 @@
         </p:nvSpPr>
         <p:spPr>
           <a:xfrm>
-            <a:off x="6629400" y="2578608"/>
-            <a:ext cx="4983479" cy="182880"/>
+            <a:off x="6629400" y="2548128"/>
+            <a:ext cx="4983479" cy="164592"/>
           </a:xfrm>
           <a:prstGeom prst="rect">
             <a:avLst/>
@@ -23878,7 +23842,7 @@
         </p:nvSpPr>
         <p:spPr>
           <a:xfrm>
-            <a:off x="6583680" y="2889503"/>
+            <a:off x="6583680" y="2846832"/>
             <a:ext cx="5074920" cy="9144"/>
           </a:xfrm>
           <a:prstGeom prst="rect">
@@ -23921,8 +23885,8 @@
         </p:nvSpPr>
         <p:spPr>
           <a:xfrm>
-            <a:off x="6629400" y="2944368"/>
-            <a:ext cx="4983479" cy="182880"/>
+            <a:off x="6629400" y="2901696"/>
+            <a:ext cx="4983479" cy="164592"/>
           </a:xfrm>
           <a:prstGeom prst="rect">
             <a:avLst/>
@@ -23956,23 +23920,23 @@
         </p:nvSpPr>
         <p:spPr>
           <a:xfrm>
-            <a:off x="6629400" y="3108960"/>
-            <a:ext cx="4983479" cy="347472"/>
-          </a:xfrm>
-          <a:prstGeom prst="rect">
-            <a:avLst/>
-          </a:prstGeom>
-          <a:noFill/>
-        </p:spPr>
-        <p:txBody>
-          <a:bodyPr wrap="square">
-            <a:spAutoFit/>
-          </a:bodyPr>
-          <a:lstStyle/>
-          <a:p>
-            <a:pPr algn="l"/>
-            <a:r>
-              <a:rPr sz="1800" b="1" i="0">
+            <a:off x="6629400" y="3112008"/>
+            <a:ext cx="4983479" cy="292608"/>
+          </a:xfrm>
+          <a:prstGeom prst="rect">
+            <a:avLst/>
+          </a:prstGeom>
+          <a:noFill/>
+        </p:spPr>
+        <p:txBody>
+          <a:bodyPr wrap="square">
+            <a:spAutoFit/>
+          </a:bodyPr>
+          <a:lstStyle/>
+          <a:p>
+            <a:pPr algn="l"/>
+            <a:r>
+              <a:rPr sz="1500" b="1" i="0">
                 <a:solidFill>
                   <a:srgbClr val="E7CC59"/>
                 </a:solidFill>
@@ -23991,8 +23955,8 @@
         </p:nvSpPr>
         <p:spPr>
           <a:xfrm>
-            <a:off x="6629400" y="3438144"/>
-            <a:ext cx="4983479" cy="182880"/>
+            <a:off x="6629400" y="3386328"/>
+            <a:ext cx="4983479" cy="164592"/>
           </a:xfrm>
           <a:prstGeom prst="rect">
             <a:avLst/>
@@ -24026,7 +23990,7 @@
         </p:nvSpPr>
         <p:spPr>
           <a:xfrm>
-            <a:off x="6583680" y="3749040"/>
+            <a:off x="6583680" y="3685032"/>
             <a:ext cx="5074920" cy="9144"/>
           </a:xfrm>
           <a:prstGeom prst="rect">
@@ -24069,8 +24033,8 @@
         </p:nvSpPr>
         <p:spPr>
           <a:xfrm>
-            <a:off x="6629400" y="3803904"/>
-            <a:ext cx="4983479" cy="182880"/>
+            <a:off x="6629400" y="3739896"/>
+            <a:ext cx="4983479" cy="164592"/>
           </a:xfrm>
           <a:prstGeom prst="rect">
             <a:avLst/>
@@ -24104,23 +24068,23 @@
         </p:nvSpPr>
         <p:spPr>
           <a:xfrm>
-            <a:off x="6629400" y="3968496"/>
-            <a:ext cx="4983479" cy="347472"/>
-          </a:xfrm>
-          <a:prstGeom prst="rect">
-            <a:avLst/>
-          </a:prstGeom>
-          <a:noFill/>
-        </p:spPr>
-        <p:txBody>
-          <a:bodyPr wrap="square">
-            <a:spAutoFit/>
-          </a:bodyPr>
-          <a:lstStyle/>
-          <a:p>
-            <a:pPr algn="l"/>
-            <a:r>
-              <a:rPr sz="1800" b="1" i="0">
+            <a:off x="6629400" y="3950208"/>
+            <a:ext cx="4983479" cy="292608"/>
+          </a:xfrm>
+          <a:prstGeom prst="rect">
+            <a:avLst/>
+          </a:prstGeom>
+          <a:noFill/>
+        </p:spPr>
+        <p:txBody>
+          <a:bodyPr wrap="square">
+            <a:spAutoFit/>
+          </a:bodyPr>
+          <a:lstStyle/>
+          <a:p>
+            <a:pPr algn="l"/>
+            <a:r>
+              <a:rPr sz="1500" b="1" i="0">
                 <a:solidFill>
                   <a:srgbClr val="E7CC59"/>
                 </a:solidFill>
@@ -24139,8 +24103,8 @@
         </p:nvSpPr>
         <p:spPr>
           <a:xfrm>
-            <a:off x="6629400" y="4297680"/>
-            <a:ext cx="4983479" cy="182880"/>
+            <a:off x="6629400" y="4224528"/>
+            <a:ext cx="4983479" cy="164592"/>
           </a:xfrm>
           <a:prstGeom prst="rect">
             <a:avLst/>
@@ -24174,7 +24138,7 @@
         </p:nvSpPr>
         <p:spPr>
           <a:xfrm>
-            <a:off x="6583680" y="4608576"/>
+            <a:off x="6583680" y="4523232"/>
             <a:ext cx="5074920" cy="9144"/>
           </a:xfrm>
           <a:prstGeom prst="rect">
@@ -24217,8 +24181,8 @@
         </p:nvSpPr>
         <p:spPr>
           <a:xfrm>
-            <a:off x="6629400" y="4663440"/>
-            <a:ext cx="4983479" cy="182880"/>
+            <a:off x="6629400" y="4578096"/>
+            <a:ext cx="4983479" cy="164592"/>
           </a:xfrm>
           <a:prstGeom prst="rect">
             <a:avLst/>
@@ -24252,23 +24216,23 @@
         </p:nvSpPr>
         <p:spPr>
           <a:xfrm>
-            <a:off x="6629400" y="4828031"/>
-            <a:ext cx="4983479" cy="347472"/>
-          </a:xfrm>
-          <a:prstGeom prst="rect">
-            <a:avLst/>
-          </a:prstGeom>
-          <a:noFill/>
-        </p:spPr>
-        <p:txBody>
-          <a:bodyPr wrap="square">
-            <a:spAutoFit/>
-          </a:bodyPr>
-          <a:lstStyle/>
-          <a:p>
-            <a:pPr algn="l"/>
-            <a:r>
-              <a:rPr sz="1800" b="1" i="0">
+            <a:off x="6629400" y="4788408"/>
+            <a:ext cx="4983479" cy="292608"/>
+          </a:xfrm>
+          <a:prstGeom prst="rect">
+            <a:avLst/>
+          </a:prstGeom>
+          <a:noFill/>
+        </p:spPr>
+        <p:txBody>
+          <a:bodyPr wrap="square">
+            <a:spAutoFit/>
+          </a:bodyPr>
+          <a:lstStyle/>
+          <a:p>
+            <a:pPr algn="l"/>
+            <a:r>
+              <a:rPr sz="1500" b="1" i="0">
                 <a:solidFill>
                   <a:srgbClr val="E7CC59"/>
                 </a:solidFill>
@@ -24287,7 +24251,7 @@
         </p:nvSpPr>
         <p:spPr>
           <a:xfrm>
-            <a:off x="6583680" y="5468112"/>
+            <a:off x="6583680" y="5361432"/>
             <a:ext cx="5074920" cy="9144"/>
           </a:xfrm>
           <a:prstGeom prst="rect">
@@ -24330,8 +24294,8 @@
         </p:nvSpPr>
         <p:spPr>
           <a:xfrm>
-            <a:off x="6629400" y="5522975"/>
-            <a:ext cx="4983479" cy="182880"/>
+            <a:off x="6629400" y="5416296"/>
+            <a:ext cx="4983479" cy="164592"/>
           </a:xfrm>
           <a:prstGeom prst="rect">
             <a:avLst/>
@@ -24365,23 +24329,23 @@
         </p:nvSpPr>
         <p:spPr>
           <a:xfrm>
-            <a:off x="6629400" y="5687567"/>
-            <a:ext cx="4983479" cy="347472"/>
-          </a:xfrm>
-          <a:prstGeom prst="rect">
-            <a:avLst/>
-          </a:prstGeom>
-          <a:noFill/>
-        </p:spPr>
-        <p:txBody>
-          <a:bodyPr wrap="square">
-            <a:spAutoFit/>
-          </a:bodyPr>
-          <a:lstStyle/>
-          <a:p>
-            <a:pPr algn="l"/>
-            <a:r>
-              <a:rPr sz="1800" b="1" i="0">
+            <a:off x="6629400" y="5626607"/>
+            <a:ext cx="4983479" cy="292608"/>
+          </a:xfrm>
+          <a:prstGeom prst="rect">
+            <a:avLst/>
+          </a:prstGeom>
+          <a:noFill/>
+        </p:spPr>
+        <p:txBody>
+          <a:bodyPr wrap="square">
+            <a:spAutoFit/>
+          </a:bodyPr>
+          <a:lstStyle/>
+          <a:p>
+            <a:pPr algn="l"/>
+            <a:r>
+              <a:rPr sz="1500" b="1" i="0">
                 <a:solidFill>
                   <a:srgbClr val="E7CC59"/>
                 </a:solidFill>
@@ -24400,8 +24364,8 @@
         </p:nvSpPr>
         <p:spPr>
           <a:xfrm>
-            <a:off x="6629400" y="6016751"/>
-            <a:ext cx="4983479" cy="182880"/>
+            <a:off x="6629400" y="5900928"/>
+            <a:ext cx="4983479" cy="164592"/>
           </a:xfrm>
           <a:prstGeom prst="rect">
             <a:avLst/>
@@ -24540,14 +24504,14 @@
         </p:nvSpPr>
         <p:spPr>
           <a:xfrm>
-            <a:off x="9756648" y="3904488"/>
-            <a:ext cx="1920240" cy="1920240"/>
+            <a:off x="11082528" y="6053328"/>
+            <a:ext cx="841248" cy="841248"/>
           </a:xfrm>
           <a:prstGeom prst="ellipse">
             <a:avLst/>
           </a:prstGeom>
           <a:noFill/>
-          <a:ln w="25400">
+          <a:ln w="19050">
             <a:solidFill>
               <a:srgbClr val="E7CC59"/>
             </a:solidFill>
@@ -24583,8 +24547,8 @@
         </p:nvSpPr>
         <p:spPr>
           <a:xfrm>
-            <a:off x="9829800" y="3831336"/>
-            <a:ext cx="1773936" cy="1920240"/>
+            <a:off x="11119103" y="6016752"/>
+            <a:ext cx="768096" cy="841248"/>
           </a:xfrm>
           <a:prstGeom prst="rect">
             <a:avLst/>
@@ -24599,7 +24563,7 @@
           <a:p>
             <a:pPr algn="ctr"/>
             <a:r>
-              <a:rPr sz="11000" b="1" i="0">
+              <a:rPr sz="4800" b="1" i="0">
                 <a:solidFill>
                   <a:srgbClr val="142A4A"/>
                 </a:solidFill>
@@ -25720,14 +25684,14 @@
         </p:nvSpPr>
         <p:spPr>
           <a:xfrm>
-            <a:off x="9756648" y="3904488"/>
-            <a:ext cx="1920240" cy="1920240"/>
+            <a:off x="11082528" y="6053328"/>
+            <a:ext cx="841248" cy="841248"/>
           </a:xfrm>
           <a:prstGeom prst="ellipse">
             <a:avLst/>
           </a:prstGeom>
           <a:noFill/>
-          <a:ln w="25400">
+          <a:ln w="19050">
             <a:solidFill>
               <a:srgbClr val="E7CC59"/>
             </a:solidFill>
@@ -25763,8 +25727,8 @@
         </p:nvSpPr>
         <p:spPr>
           <a:xfrm>
-            <a:off x="9829800" y="3831336"/>
-            <a:ext cx="1773936" cy="1920240"/>
+            <a:off x="11119103" y="6016752"/>
+            <a:ext cx="768096" cy="841248"/>
           </a:xfrm>
           <a:prstGeom prst="rect">
             <a:avLst/>
@@ -25779,7 +25743,7 @@
           <a:p>
             <a:pPr algn="ctr"/>
             <a:r>
-              <a:rPr sz="11000" b="1" i="0">
+              <a:rPr sz="4800" b="1" i="0">
                 <a:solidFill>
                   <a:srgbClr val="142A4A"/>
                 </a:solidFill>
@@ -26006,7 +25970,7 @@
                 </a:solidFill>
                 <a:latin typeface="Calibri"/>
               </a:rPr>
-              <a:t/>
+              <a:t> </a:t>
             </a:r>
           </a:p>
           <a:p>
@@ -26030,7 +25994,7 @@
                 </a:solidFill>
                 <a:latin typeface="Calibri"/>
               </a:rPr>
-              <a:t/>
+              <a:t> </a:t>
             </a:r>
           </a:p>
           <a:p>
@@ -26054,7 +26018,7 @@
                 </a:solidFill>
                 <a:latin typeface="Calibri"/>
               </a:rPr>
-              <a:t/>
+              <a:t> </a:t>
             </a:r>
           </a:p>
           <a:p>
@@ -26078,7 +26042,7 @@
                 </a:solidFill>
                 <a:latin typeface="Calibri"/>
               </a:rPr>
-              <a:t/>
+              <a:t> </a:t>
             </a:r>
           </a:p>
           <a:p>
@@ -26102,7 +26066,7 @@
                 </a:solidFill>
                 <a:latin typeface="Calibri"/>
               </a:rPr>
-              <a:t/>
+              <a:t> </a:t>
             </a:r>
           </a:p>
           <a:p>
@@ -26126,7 +26090,7 @@
                 </a:solidFill>
                 <a:latin typeface="Calibri"/>
               </a:rPr>
-              <a:t/>
+              <a:t> </a:t>
             </a:r>
           </a:p>
           <a:p>
@@ -26150,7 +26114,7 @@
                 </a:solidFill>
                 <a:latin typeface="Calibri"/>
               </a:rPr>
-              <a:t/>
+              <a:t> </a:t>
             </a:r>
           </a:p>
           <a:p>
@@ -26174,7 +26138,7 @@
                 </a:solidFill>
                 <a:latin typeface="Calibri"/>
               </a:rPr>
-              <a:t/>
+              <a:t> </a:t>
             </a:r>
           </a:p>
           <a:p>
@@ -26198,7 +26162,7 @@
                 </a:solidFill>
                 <a:latin typeface="Calibri"/>
               </a:rPr>
-              <a:t/>
+              <a:t> </a:t>
             </a:r>
           </a:p>
           <a:p>
@@ -26222,7 +26186,7 @@
                 </a:solidFill>
                 <a:latin typeface="Calibri"/>
               </a:rPr>
-              <a:t/>
+              <a:t> </a:t>
             </a:r>
           </a:p>
         </p:txBody>
@@ -26236,7 +26200,7 @@
         <p:spPr>
           <a:xfrm>
             <a:off x="6446520" y="841248"/>
-            <a:ext cx="5349240" cy="5504688"/>
+            <a:ext cx="5349240" cy="5376672"/>
           </a:xfrm>
           <a:prstGeom prst="rect">
             <a:avLst/>
@@ -26357,7 +26321,7 @@
         <p:spPr>
           <a:xfrm>
             <a:off x="6629400" y="1225296"/>
-            <a:ext cx="4983479" cy="182880"/>
+            <a:ext cx="4983479" cy="164592"/>
           </a:xfrm>
           <a:prstGeom prst="rect">
             <a:avLst/>
@@ -26391,23 +26355,23 @@
         </p:nvSpPr>
         <p:spPr>
           <a:xfrm>
-            <a:off x="6629400" y="1389888"/>
-            <a:ext cx="4983479" cy="347472"/>
-          </a:xfrm>
-          <a:prstGeom prst="rect">
-            <a:avLst/>
-          </a:prstGeom>
-          <a:noFill/>
-        </p:spPr>
-        <p:txBody>
-          <a:bodyPr wrap="square">
-            <a:spAutoFit/>
-          </a:bodyPr>
-          <a:lstStyle/>
-          <a:p>
-            <a:pPr algn="l"/>
-            <a:r>
-              <a:rPr sz="1800" b="1" i="0">
+            <a:off x="6629400" y="1435608"/>
+            <a:ext cx="4983479" cy="292608"/>
+          </a:xfrm>
+          <a:prstGeom prst="rect">
+            <a:avLst/>
+          </a:prstGeom>
+          <a:noFill/>
+        </p:spPr>
+        <p:txBody>
+          <a:bodyPr wrap="square">
+            <a:spAutoFit/>
+          </a:bodyPr>
+          <a:lstStyle/>
+          <a:p>
+            <a:pPr algn="l"/>
+            <a:r>
+              <a:rPr sz="1500" b="1" i="0">
                 <a:solidFill>
                   <a:srgbClr val="E7CC59"/>
                 </a:solidFill>
@@ -26426,8 +26390,8 @@
         </p:nvSpPr>
         <p:spPr>
           <a:xfrm>
-            <a:off x="6629400" y="1719072"/>
-            <a:ext cx="4983479" cy="182880"/>
+            <a:off x="6629400" y="1709928"/>
+            <a:ext cx="4983479" cy="164592"/>
           </a:xfrm>
           <a:prstGeom prst="rect">
             <a:avLst/>
@@ -26461,7 +26425,7 @@
         </p:nvSpPr>
         <p:spPr>
           <a:xfrm>
-            <a:off x="6583680" y="2029968"/>
+            <a:off x="6583680" y="2008632"/>
             <a:ext cx="5074920" cy="9144"/>
           </a:xfrm>
           <a:prstGeom prst="rect">
@@ -26504,8 +26468,8 @@
         </p:nvSpPr>
         <p:spPr>
           <a:xfrm>
-            <a:off x="6629400" y="2084832"/>
-            <a:ext cx="4983479" cy="182880"/>
+            <a:off x="6629400" y="2063496"/>
+            <a:ext cx="4983479" cy="164592"/>
           </a:xfrm>
           <a:prstGeom prst="rect">
             <a:avLst/>
@@ -26539,23 +26503,23 @@
         </p:nvSpPr>
         <p:spPr>
           <a:xfrm>
-            <a:off x="6629400" y="2249424"/>
-            <a:ext cx="4983479" cy="347472"/>
-          </a:xfrm>
-          <a:prstGeom prst="rect">
-            <a:avLst/>
-          </a:prstGeom>
-          <a:noFill/>
-        </p:spPr>
-        <p:txBody>
-          <a:bodyPr wrap="square">
-            <a:spAutoFit/>
-          </a:bodyPr>
-          <a:lstStyle/>
-          <a:p>
-            <a:pPr algn="l"/>
-            <a:r>
-              <a:rPr sz="1800" b="1" i="0">
+            <a:off x="6629400" y="2273808"/>
+            <a:ext cx="4983479" cy="292608"/>
+          </a:xfrm>
+          <a:prstGeom prst="rect">
+            <a:avLst/>
+          </a:prstGeom>
+          <a:noFill/>
+        </p:spPr>
+        <p:txBody>
+          <a:bodyPr wrap="square">
+            <a:spAutoFit/>
+          </a:bodyPr>
+          <a:lstStyle/>
+          <a:p>
+            <a:pPr algn="l"/>
+            <a:r>
+              <a:rPr sz="1500" b="1" i="0">
                 <a:solidFill>
                   <a:srgbClr val="E7CC59"/>
                 </a:solidFill>
@@ -26574,8 +26538,8 @@
         </p:nvSpPr>
         <p:spPr>
           <a:xfrm>
-            <a:off x="6629400" y="2578608"/>
-            <a:ext cx="4983479" cy="182880"/>
+            <a:off x="6629400" y="2548128"/>
+            <a:ext cx="4983479" cy="164592"/>
           </a:xfrm>
           <a:prstGeom prst="rect">
             <a:avLst/>
@@ -26609,7 +26573,7 @@
         </p:nvSpPr>
         <p:spPr>
           <a:xfrm>
-            <a:off x="6583680" y="2889503"/>
+            <a:off x="6583680" y="2846832"/>
             <a:ext cx="5074920" cy="9144"/>
           </a:xfrm>
           <a:prstGeom prst="rect">
@@ -26652,8 +26616,8 @@
         </p:nvSpPr>
         <p:spPr>
           <a:xfrm>
-            <a:off x="6629400" y="2944368"/>
-            <a:ext cx="4983479" cy="182880"/>
+            <a:off x="6629400" y="2901696"/>
+            <a:ext cx="4983479" cy="164592"/>
           </a:xfrm>
           <a:prstGeom prst="rect">
             <a:avLst/>
@@ -26687,23 +26651,23 @@
         </p:nvSpPr>
         <p:spPr>
           <a:xfrm>
-            <a:off x="6629400" y="3108960"/>
-            <a:ext cx="4983479" cy="347472"/>
-          </a:xfrm>
-          <a:prstGeom prst="rect">
-            <a:avLst/>
-          </a:prstGeom>
-          <a:noFill/>
-        </p:spPr>
-        <p:txBody>
-          <a:bodyPr wrap="square">
-            <a:spAutoFit/>
-          </a:bodyPr>
-          <a:lstStyle/>
-          <a:p>
-            <a:pPr algn="l"/>
-            <a:r>
-              <a:rPr sz="1800" b="1" i="0">
+            <a:off x="6629400" y="3112008"/>
+            <a:ext cx="4983479" cy="292608"/>
+          </a:xfrm>
+          <a:prstGeom prst="rect">
+            <a:avLst/>
+          </a:prstGeom>
+          <a:noFill/>
+        </p:spPr>
+        <p:txBody>
+          <a:bodyPr wrap="square">
+            <a:spAutoFit/>
+          </a:bodyPr>
+          <a:lstStyle/>
+          <a:p>
+            <a:pPr algn="l"/>
+            <a:r>
+              <a:rPr sz="1500" b="1" i="0">
                 <a:solidFill>
                   <a:srgbClr val="E7CC59"/>
                 </a:solidFill>
@@ -26722,8 +26686,8 @@
         </p:nvSpPr>
         <p:spPr>
           <a:xfrm>
-            <a:off x="6629400" y="3438144"/>
-            <a:ext cx="4983479" cy="182880"/>
+            <a:off x="6629400" y="3386328"/>
+            <a:ext cx="4983479" cy="164592"/>
           </a:xfrm>
           <a:prstGeom prst="rect">
             <a:avLst/>
@@ -26757,7 +26721,7 @@
         </p:nvSpPr>
         <p:spPr>
           <a:xfrm>
-            <a:off x="6583680" y="3749040"/>
+            <a:off x="6583680" y="3685032"/>
             <a:ext cx="5074920" cy="9144"/>
           </a:xfrm>
           <a:prstGeom prst="rect">
@@ -26800,8 +26764,8 @@
         </p:nvSpPr>
         <p:spPr>
           <a:xfrm>
-            <a:off x="6629400" y="3803904"/>
-            <a:ext cx="4983479" cy="182880"/>
+            <a:off x="6629400" y="3739896"/>
+            <a:ext cx="4983479" cy="164592"/>
           </a:xfrm>
           <a:prstGeom prst="rect">
             <a:avLst/>
@@ -26835,23 +26799,23 @@
         </p:nvSpPr>
         <p:spPr>
           <a:xfrm>
-            <a:off x="6629400" y="3968496"/>
-            <a:ext cx="4983479" cy="347472"/>
-          </a:xfrm>
-          <a:prstGeom prst="rect">
-            <a:avLst/>
-          </a:prstGeom>
-          <a:noFill/>
-        </p:spPr>
-        <p:txBody>
-          <a:bodyPr wrap="square">
-            <a:spAutoFit/>
-          </a:bodyPr>
-          <a:lstStyle/>
-          <a:p>
-            <a:pPr algn="l"/>
-            <a:r>
-              <a:rPr sz="1800" b="1" i="0">
+            <a:off x="6629400" y="3950208"/>
+            <a:ext cx="4983479" cy="292608"/>
+          </a:xfrm>
+          <a:prstGeom prst="rect">
+            <a:avLst/>
+          </a:prstGeom>
+          <a:noFill/>
+        </p:spPr>
+        <p:txBody>
+          <a:bodyPr wrap="square">
+            <a:spAutoFit/>
+          </a:bodyPr>
+          <a:lstStyle/>
+          <a:p>
+            <a:pPr algn="l"/>
+            <a:r>
+              <a:rPr sz="1500" b="1" i="0">
                 <a:solidFill>
                   <a:srgbClr val="E7CC59"/>
                 </a:solidFill>
@@ -26870,8 +26834,8 @@
         </p:nvSpPr>
         <p:spPr>
           <a:xfrm>
-            <a:off x="6629400" y="4297680"/>
-            <a:ext cx="4983479" cy="182880"/>
+            <a:off x="6629400" y="4224528"/>
+            <a:ext cx="4983479" cy="164592"/>
           </a:xfrm>
           <a:prstGeom prst="rect">
             <a:avLst/>
@@ -26905,7 +26869,7 @@
         </p:nvSpPr>
         <p:spPr>
           <a:xfrm>
-            <a:off x="6583680" y="4608576"/>
+            <a:off x="6583680" y="4523232"/>
             <a:ext cx="5074920" cy="9144"/>
           </a:xfrm>
           <a:prstGeom prst="rect">
@@ -26948,8 +26912,8 @@
         </p:nvSpPr>
         <p:spPr>
           <a:xfrm>
-            <a:off x="6629400" y="4663440"/>
-            <a:ext cx="4983479" cy="182880"/>
+            <a:off x="6629400" y="4578096"/>
+            <a:ext cx="4983479" cy="164592"/>
           </a:xfrm>
           <a:prstGeom prst="rect">
             <a:avLst/>
@@ -26983,23 +26947,23 @@
         </p:nvSpPr>
         <p:spPr>
           <a:xfrm>
-            <a:off x="6629400" y="4828031"/>
-            <a:ext cx="4983479" cy="347472"/>
-          </a:xfrm>
-          <a:prstGeom prst="rect">
-            <a:avLst/>
-          </a:prstGeom>
-          <a:noFill/>
-        </p:spPr>
-        <p:txBody>
-          <a:bodyPr wrap="square">
-            <a:spAutoFit/>
-          </a:bodyPr>
-          <a:lstStyle/>
-          <a:p>
-            <a:pPr algn="l"/>
-            <a:r>
-              <a:rPr sz="1800" b="1" i="0">
+            <a:off x="6629400" y="4788408"/>
+            <a:ext cx="4983479" cy="292608"/>
+          </a:xfrm>
+          <a:prstGeom prst="rect">
+            <a:avLst/>
+          </a:prstGeom>
+          <a:noFill/>
+        </p:spPr>
+        <p:txBody>
+          <a:bodyPr wrap="square">
+            <a:spAutoFit/>
+          </a:bodyPr>
+          <a:lstStyle/>
+          <a:p>
+            <a:pPr algn="l"/>
+            <a:r>
+              <a:rPr sz="1500" b="1" i="0">
                 <a:solidFill>
                   <a:srgbClr val="E7CC59"/>
                 </a:solidFill>
@@ -27018,8 +26982,8 @@
         </p:nvSpPr>
         <p:spPr>
           <a:xfrm>
-            <a:off x="6629400" y="5157216"/>
-            <a:ext cx="4983479" cy="182880"/>
+            <a:off x="6629400" y="5062728"/>
+            <a:ext cx="4983479" cy="164592"/>
           </a:xfrm>
           <a:prstGeom prst="rect">
             <a:avLst/>
@@ -27053,7 +27017,7 @@
         </p:nvSpPr>
         <p:spPr>
           <a:xfrm>
-            <a:off x="6583680" y="5468112"/>
+            <a:off x="6583680" y="5361432"/>
             <a:ext cx="5074920" cy="9144"/>
           </a:xfrm>
           <a:prstGeom prst="rect">
@@ -27096,8 +27060,8 @@
         </p:nvSpPr>
         <p:spPr>
           <a:xfrm>
-            <a:off x="6629400" y="5522975"/>
-            <a:ext cx="4983479" cy="182880"/>
+            <a:off x="6629400" y="5416296"/>
+            <a:ext cx="4983479" cy="164592"/>
           </a:xfrm>
           <a:prstGeom prst="rect">
             <a:avLst/>
@@ -27131,23 +27095,23 @@
         </p:nvSpPr>
         <p:spPr>
           <a:xfrm>
-            <a:off x="6629400" y="5687567"/>
-            <a:ext cx="4983479" cy="347472"/>
-          </a:xfrm>
-          <a:prstGeom prst="rect">
-            <a:avLst/>
-          </a:prstGeom>
-          <a:noFill/>
-        </p:spPr>
-        <p:txBody>
-          <a:bodyPr wrap="square">
-            <a:spAutoFit/>
-          </a:bodyPr>
-          <a:lstStyle/>
-          <a:p>
-            <a:pPr algn="l"/>
-            <a:r>
-              <a:rPr sz="1800" b="1" i="0">
+            <a:off x="6629400" y="5626607"/>
+            <a:ext cx="4983479" cy="292608"/>
+          </a:xfrm>
+          <a:prstGeom prst="rect">
+            <a:avLst/>
+          </a:prstGeom>
+          <a:noFill/>
+        </p:spPr>
+        <p:txBody>
+          <a:bodyPr wrap="square">
+            <a:spAutoFit/>
+          </a:bodyPr>
+          <a:lstStyle/>
+          <a:p>
+            <a:pPr algn="l"/>
+            <a:r>
+              <a:rPr sz="1500" b="1" i="0">
                 <a:solidFill>
                   <a:srgbClr val="E7CC59"/>
                 </a:solidFill>
@@ -27166,8 +27130,8 @@
         </p:nvSpPr>
         <p:spPr>
           <a:xfrm>
-            <a:off x="6629400" y="6016751"/>
-            <a:ext cx="4983479" cy="182880"/>
+            <a:off x="6629400" y="5900928"/>
+            <a:ext cx="4983479" cy="164592"/>
           </a:xfrm>
           <a:prstGeom prst="rect">
             <a:avLst/>
@@ -27306,14 +27270,14 @@
         </p:nvSpPr>
         <p:spPr>
           <a:xfrm>
-            <a:off x="9756648" y="3904488"/>
-            <a:ext cx="1920240" cy="1920240"/>
+            <a:off x="11082528" y="6053328"/>
+            <a:ext cx="841248" cy="841248"/>
           </a:xfrm>
           <a:prstGeom prst="ellipse">
             <a:avLst/>
           </a:prstGeom>
           <a:noFill/>
-          <a:ln w="25400">
+          <a:ln w="19050">
             <a:solidFill>
               <a:srgbClr val="E7CC59"/>
             </a:solidFill>
@@ -27349,8 +27313,8 @@
         </p:nvSpPr>
         <p:spPr>
           <a:xfrm>
-            <a:off x="9829800" y="3831336"/>
-            <a:ext cx="1773936" cy="1920240"/>
+            <a:off x="11119103" y="6016752"/>
+            <a:ext cx="768096" cy="841248"/>
           </a:xfrm>
           <a:prstGeom prst="rect">
             <a:avLst/>
@@ -27365,7 +27329,7 @@
           <a:p>
             <a:pPr algn="ctr"/>
             <a:r>
-              <a:rPr sz="11000" b="1" i="0">
+              <a:rPr sz="4800" b="1" i="0">
                 <a:solidFill>
                   <a:srgbClr val="142A4A"/>
                 </a:solidFill>
@@ -27592,7 +27556,7 @@
                 </a:solidFill>
                 <a:latin typeface="Calibri"/>
               </a:rPr>
-              <a:t/>
+              <a:t> </a:t>
             </a:r>
           </a:p>
           <a:p>
@@ -27616,7 +27580,7 @@
                 </a:solidFill>
                 <a:latin typeface="Calibri"/>
               </a:rPr>
-              <a:t/>
+              <a:t> </a:t>
             </a:r>
           </a:p>
           <a:p>
@@ -27640,7 +27604,7 @@
                 </a:solidFill>
                 <a:latin typeface="Calibri"/>
               </a:rPr>
-              <a:t/>
+              <a:t> </a:t>
             </a:r>
           </a:p>
           <a:p>
@@ -27664,7 +27628,7 @@
                 </a:solidFill>
                 <a:latin typeface="Calibri"/>
               </a:rPr>
-              <a:t/>
+              <a:t> </a:t>
             </a:r>
           </a:p>
           <a:p>
@@ -27688,7 +27652,7 @@
                 </a:solidFill>
                 <a:latin typeface="Calibri"/>
               </a:rPr>
-              <a:t/>
+              <a:t> </a:t>
             </a:r>
           </a:p>
           <a:p>
@@ -27712,7 +27676,7 @@
                 </a:solidFill>
                 <a:latin typeface="Calibri"/>
               </a:rPr>
-              <a:t/>
+              <a:t> </a:t>
             </a:r>
           </a:p>
           <a:p>
@@ -27736,7 +27700,7 @@
                 </a:solidFill>
                 <a:latin typeface="Calibri"/>
               </a:rPr>
-              <a:t/>
+              <a:t> </a:t>
             </a:r>
           </a:p>
           <a:p>
@@ -27760,7 +27724,7 @@
                 </a:solidFill>
                 <a:latin typeface="Calibri"/>
               </a:rPr>
-              <a:t/>
+              <a:t> </a:t>
             </a:r>
           </a:p>
           <a:p>
@@ -27784,7 +27748,7 @@
                 </a:solidFill>
                 <a:latin typeface="Calibri"/>
               </a:rPr>
-              <a:t/>
+              <a:t> </a:t>
             </a:r>
           </a:p>
           <a:p>
@@ -27808,7 +27772,7 @@
                 </a:solidFill>
                 <a:latin typeface="Calibri"/>
               </a:rPr>
-              <a:t/>
+              <a:t> </a:t>
             </a:r>
           </a:p>
           <a:p>
@@ -27832,7 +27796,7 @@
                 </a:solidFill>
                 <a:latin typeface="Calibri"/>
               </a:rPr>
-              <a:t/>
+              <a:t> </a:t>
             </a:r>
           </a:p>
         </p:txBody>
@@ -27846,7 +27810,7 @@
         <p:spPr>
           <a:xfrm>
             <a:off x="6446520" y="841248"/>
-            <a:ext cx="5349240" cy="5504688"/>
+            <a:ext cx="5349240" cy="5376672"/>
           </a:xfrm>
           <a:prstGeom prst="rect">
             <a:avLst/>
@@ -27967,7 +27931,7 @@
         <p:spPr>
           <a:xfrm>
             <a:off x="6629400" y="1225296"/>
-            <a:ext cx="4983479" cy="182880"/>
+            <a:ext cx="4983479" cy="164592"/>
           </a:xfrm>
           <a:prstGeom prst="rect">
             <a:avLst/>
@@ -28001,23 +27965,23 @@
         </p:nvSpPr>
         <p:spPr>
           <a:xfrm>
-            <a:off x="6629400" y="1389888"/>
-            <a:ext cx="4983479" cy="347472"/>
-          </a:xfrm>
-          <a:prstGeom prst="rect">
-            <a:avLst/>
-          </a:prstGeom>
-          <a:noFill/>
-        </p:spPr>
-        <p:txBody>
-          <a:bodyPr wrap="square">
-            <a:spAutoFit/>
-          </a:bodyPr>
-          <a:lstStyle/>
-          <a:p>
-            <a:pPr algn="l"/>
-            <a:r>
-              <a:rPr sz="1800" b="1" i="0">
+            <a:off x="6629400" y="1435608"/>
+            <a:ext cx="4983479" cy="292608"/>
+          </a:xfrm>
+          <a:prstGeom prst="rect">
+            <a:avLst/>
+          </a:prstGeom>
+          <a:noFill/>
+        </p:spPr>
+        <p:txBody>
+          <a:bodyPr wrap="square">
+            <a:spAutoFit/>
+          </a:bodyPr>
+          <a:lstStyle/>
+          <a:p>
+            <a:pPr algn="l"/>
+            <a:r>
+              <a:rPr sz="1500" b="1" i="0">
                 <a:solidFill>
                   <a:srgbClr val="E7CC59"/>
                 </a:solidFill>
@@ -28036,8 +28000,8 @@
         </p:nvSpPr>
         <p:spPr>
           <a:xfrm>
-            <a:off x="6629400" y="1719072"/>
-            <a:ext cx="4983479" cy="182880"/>
+            <a:off x="6629400" y="1709928"/>
+            <a:ext cx="4983479" cy="164592"/>
           </a:xfrm>
           <a:prstGeom prst="rect">
             <a:avLst/>
@@ -28071,7 +28035,7 @@
         </p:nvSpPr>
         <p:spPr>
           <a:xfrm>
-            <a:off x="6583680" y="2029968"/>
+            <a:off x="6583680" y="2008632"/>
             <a:ext cx="5074920" cy="9144"/>
           </a:xfrm>
           <a:prstGeom prst="rect">
@@ -28114,8 +28078,8 @@
         </p:nvSpPr>
         <p:spPr>
           <a:xfrm>
-            <a:off x="6629400" y="2084832"/>
-            <a:ext cx="4983479" cy="182880"/>
+            <a:off x="6629400" y="2063496"/>
+            <a:ext cx="4983479" cy="164592"/>
           </a:xfrm>
           <a:prstGeom prst="rect">
             <a:avLst/>
@@ -28149,23 +28113,23 @@
         </p:nvSpPr>
         <p:spPr>
           <a:xfrm>
-            <a:off x="6629400" y="2249424"/>
-            <a:ext cx="4983479" cy="347472"/>
-          </a:xfrm>
-          <a:prstGeom prst="rect">
-            <a:avLst/>
-          </a:prstGeom>
-          <a:noFill/>
-        </p:spPr>
-        <p:txBody>
-          <a:bodyPr wrap="square">
-            <a:spAutoFit/>
-          </a:bodyPr>
-          <a:lstStyle/>
-          <a:p>
-            <a:pPr algn="l"/>
-            <a:r>
-              <a:rPr sz="1800" b="1" i="0">
+            <a:off x="6629400" y="2273808"/>
+            <a:ext cx="4983479" cy="292608"/>
+          </a:xfrm>
+          <a:prstGeom prst="rect">
+            <a:avLst/>
+          </a:prstGeom>
+          <a:noFill/>
+        </p:spPr>
+        <p:txBody>
+          <a:bodyPr wrap="square">
+            <a:spAutoFit/>
+          </a:bodyPr>
+          <a:lstStyle/>
+          <a:p>
+            <a:pPr algn="l"/>
+            <a:r>
+              <a:rPr sz="1500" b="1" i="0">
                 <a:solidFill>
                   <a:srgbClr val="E7CC59"/>
                 </a:solidFill>
@@ -28184,8 +28148,8 @@
         </p:nvSpPr>
         <p:spPr>
           <a:xfrm>
-            <a:off x="6629400" y="2578608"/>
-            <a:ext cx="4983479" cy="182880"/>
+            <a:off x="6629400" y="2548128"/>
+            <a:ext cx="4983479" cy="164592"/>
           </a:xfrm>
           <a:prstGeom prst="rect">
             <a:avLst/>
@@ -28219,7 +28183,7 @@
         </p:nvSpPr>
         <p:spPr>
           <a:xfrm>
-            <a:off x="6583680" y="2889503"/>
+            <a:off x="6583680" y="2846832"/>
             <a:ext cx="5074920" cy="9144"/>
           </a:xfrm>
           <a:prstGeom prst="rect">
@@ -28262,8 +28226,8 @@
         </p:nvSpPr>
         <p:spPr>
           <a:xfrm>
-            <a:off x="6629400" y="2944368"/>
-            <a:ext cx="4983479" cy="182880"/>
+            <a:off x="6629400" y="2901696"/>
+            <a:ext cx="4983479" cy="164592"/>
           </a:xfrm>
           <a:prstGeom prst="rect">
             <a:avLst/>
@@ -28297,23 +28261,23 @@
         </p:nvSpPr>
         <p:spPr>
           <a:xfrm>
-            <a:off x="6629400" y="3108960"/>
-            <a:ext cx="4983479" cy="347472"/>
-          </a:xfrm>
-          <a:prstGeom prst="rect">
-            <a:avLst/>
-          </a:prstGeom>
-          <a:noFill/>
-        </p:spPr>
-        <p:txBody>
-          <a:bodyPr wrap="square">
-            <a:spAutoFit/>
-          </a:bodyPr>
-          <a:lstStyle/>
-          <a:p>
-            <a:pPr algn="l"/>
-            <a:r>
-              <a:rPr sz="1800" b="1" i="0">
+            <a:off x="6629400" y="3112008"/>
+            <a:ext cx="4983479" cy="292608"/>
+          </a:xfrm>
+          <a:prstGeom prst="rect">
+            <a:avLst/>
+          </a:prstGeom>
+          <a:noFill/>
+        </p:spPr>
+        <p:txBody>
+          <a:bodyPr wrap="square">
+            <a:spAutoFit/>
+          </a:bodyPr>
+          <a:lstStyle/>
+          <a:p>
+            <a:pPr algn="l"/>
+            <a:r>
+              <a:rPr sz="1500" b="1" i="0">
                 <a:solidFill>
                   <a:srgbClr val="E7CC59"/>
                 </a:solidFill>
@@ -28332,8 +28296,8 @@
         </p:nvSpPr>
         <p:spPr>
           <a:xfrm>
-            <a:off x="6629400" y="3438144"/>
-            <a:ext cx="4983479" cy="182880"/>
+            <a:off x="6629400" y="3386328"/>
+            <a:ext cx="4983479" cy="164592"/>
           </a:xfrm>
           <a:prstGeom prst="rect">
             <a:avLst/>
@@ -28367,7 +28331,7 @@
         </p:nvSpPr>
         <p:spPr>
           <a:xfrm>
-            <a:off x="6583680" y="3749040"/>
+            <a:off x="6583680" y="3685032"/>
             <a:ext cx="5074920" cy="9144"/>
           </a:xfrm>
           <a:prstGeom prst="rect">
@@ -28410,8 +28374,8 @@
         </p:nvSpPr>
         <p:spPr>
           <a:xfrm>
-            <a:off x="6629400" y="3803904"/>
-            <a:ext cx="4983479" cy="182880"/>
+            <a:off x="6629400" y="3739896"/>
+            <a:ext cx="4983479" cy="164592"/>
           </a:xfrm>
           <a:prstGeom prst="rect">
             <a:avLst/>
@@ -28445,23 +28409,23 @@
         </p:nvSpPr>
         <p:spPr>
           <a:xfrm>
-            <a:off x="6629400" y="3968496"/>
-            <a:ext cx="4983479" cy="347472"/>
-          </a:xfrm>
-          <a:prstGeom prst="rect">
-            <a:avLst/>
-          </a:prstGeom>
-          <a:noFill/>
-        </p:spPr>
-        <p:txBody>
-          <a:bodyPr wrap="square">
-            <a:spAutoFit/>
-          </a:bodyPr>
-          <a:lstStyle/>
-          <a:p>
-            <a:pPr algn="l"/>
-            <a:r>
-              <a:rPr sz="1800" b="1" i="0">
+            <a:off x="6629400" y="3950208"/>
+            <a:ext cx="4983479" cy="292608"/>
+          </a:xfrm>
+          <a:prstGeom prst="rect">
+            <a:avLst/>
+          </a:prstGeom>
+          <a:noFill/>
+        </p:spPr>
+        <p:txBody>
+          <a:bodyPr wrap="square">
+            <a:spAutoFit/>
+          </a:bodyPr>
+          <a:lstStyle/>
+          <a:p>
+            <a:pPr algn="l"/>
+            <a:r>
+              <a:rPr sz="1500" b="1" i="0">
                 <a:solidFill>
                   <a:srgbClr val="E7CC59"/>
                 </a:solidFill>
@@ -28480,8 +28444,8 @@
         </p:nvSpPr>
         <p:spPr>
           <a:xfrm>
-            <a:off x="6629400" y="4297680"/>
-            <a:ext cx="4983479" cy="182880"/>
+            <a:off x="6629400" y="4224528"/>
+            <a:ext cx="4983479" cy="164592"/>
           </a:xfrm>
           <a:prstGeom prst="rect">
             <a:avLst/>
@@ -28515,7 +28479,7 @@
         </p:nvSpPr>
         <p:spPr>
           <a:xfrm>
-            <a:off x="6583680" y="4608576"/>
+            <a:off x="6583680" y="4523232"/>
             <a:ext cx="5074920" cy="9144"/>
           </a:xfrm>
           <a:prstGeom prst="rect">
@@ -28558,8 +28522,8 @@
         </p:nvSpPr>
         <p:spPr>
           <a:xfrm>
-            <a:off x="6629400" y="4663440"/>
-            <a:ext cx="4983479" cy="182880"/>
+            <a:off x="6629400" y="4578096"/>
+            <a:ext cx="4983479" cy="164592"/>
           </a:xfrm>
           <a:prstGeom prst="rect">
             <a:avLst/>
@@ -28593,23 +28557,23 @@
         </p:nvSpPr>
         <p:spPr>
           <a:xfrm>
-            <a:off x="6629400" y="4828031"/>
-            <a:ext cx="4983479" cy="347472"/>
-          </a:xfrm>
-          <a:prstGeom prst="rect">
-            <a:avLst/>
-          </a:prstGeom>
-          <a:noFill/>
-        </p:spPr>
-        <p:txBody>
-          <a:bodyPr wrap="square">
-            <a:spAutoFit/>
-          </a:bodyPr>
-          <a:lstStyle/>
-          <a:p>
-            <a:pPr algn="l"/>
-            <a:r>
-              <a:rPr sz="1800" b="1" i="0">
+            <a:off x="6629400" y="4788408"/>
+            <a:ext cx="4983479" cy="292608"/>
+          </a:xfrm>
+          <a:prstGeom prst="rect">
+            <a:avLst/>
+          </a:prstGeom>
+          <a:noFill/>
+        </p:spPr>
+        <p:txBody>
+          <a:bodyPr wrap="square">
+            <a:spAutoFit/>
+          </a:bodyPr>
+          <a:lstStyle/>
+          <a:p>
+            <a:pPr algn="l"/>
+            <a:r>
+              <a:rPr sz="1500" b="1" i="0">
                 <a:solidFill>
                   <a:srgbClr val="E7CC59"/>
                 </a:solidFill>
@@ -28628,8 +28592,8 @@
         </p:nvSpPr>
         <p:spPr>
           <a:xfrm>
-            <a:off x="6629400" y="5157216"/>
-            <a:ext cx="4983479" cy="182880"/>
+            <a:off x="6629400" y="5062728"/>
+            <a:ext cx="4983479" cy="164592"/>
           </a:xfrm>
           <a:prstGeom prst="rect">
             <a:avLst/>
@@ -28663,7 +28627,7 @@
         </p:nvSpPr>
         <p:spPr>
           <a:xfrm>
-            <a:off x="6583680" y="5468112"/>
+            <a:off x="6583680" y="5361432"/>
             <a:ext cx="5074920" cy="9144"/>
           </a:xfrm>
           <a:prstGeom prst="rect">
@@ -28706,8 +28670,8 @@
         </p:nvSpPr>
         <p:spPr>
           <a:xfrm>
-            <a:off x="6629400" y="5522975"/>
-            <a:ext cx="4983479" cy="182880"/>
+            <a:off x="6629400" y="5416296"/>
+            <a:ext cx="4983479" cy="164592"/>
           </a:xfrm>
           <a:prstGeom prst="rect">
             <a:avLst/>
@@ -28741,23 +28705,23 @@
         </p:nvSpPr>
         <p:spPr>
           <a:xfrm>
-            <a:off x="6629400" y="5687567"/>
-            <a:ext cx="4983479" cy="347472"/>
-          </a:xfrm>
-          <a:prstGeom prst="rect">
-            <a:avLst/>
-          </a:prstGeom>
-          <a:noFill/>
-        </p:spPr>
-        <p:txBody>
-          <a:bodyPr wrap="square">
-            <a:spAutoFit/>
-          </a:bodyPr>
-          <a:lstStyle/>
-          <a:p>
-            <a:pPr algn="l"/>
-            <a:r>
-              <a:rPr sz="1800" b="1" i="0">
+            <a:off x="6629400" y="5626607"/>
+            <a:ext cx="4983479" cy="292608"/>
+          </a:xfrm>
+          <a:prstGeom prst="rect">
+            <a:avLst/>
+          </a:prstGeom>
+          <a:noFill/>
+        </p:spPr>
+        <p:txBody>
+          <a:bodyPr wrap="square">
+            <a:spAutoFit/>
+          </a:bodyPr>
+          <a:lstStyle/>
+          <a:p>
+            <a:pPr algn="l"/>
+            <a:r>
+              <a:rPr sz="1500" b="1" i="0">
                 <a:solidFill>
                   <a:srgbClr val="E7CC59"/>
                 </a:solidFill>
@@ -28776,8 +28740,8 @@
         </p:nvSpPr>
         <p:spPr>
           <a:xfrm>
-            <a:off x="6629400" y="6016751"/>
-            <a:ext cx="4983479" cy="182880"/>
+            <a:off x="6629400" y="5900928"/>
+            <a:ext cx="4983479" cy="164592"/>
           </a:xfrm>
           <a:prstGeom prst="rect">
             <a:avLst/>
@@ -28916,14 +28880,14 @@
         </p:nvSpPr>
         <p:spPr>
           <a:xfrm>
-            <a:off x="9756648" y="3904488"/>
-            <a:ext cx="1920240" cy="1920240"/>
+            <a:off x="11082528" y="6053328"/>
+            <a:ext cx="841248" cy="841248"/>
           </a:xfrm>
           <a:prstGeom prst="ellipse">
             <a:avLst/>
           </a:prstGeom>
           <a:noFill/>
-          <a:ln w="25400">
+          <a:ln w="19050">
             <a:solidFill>
               <a:srgbClr val="E7CC59"/>
             </a:solidFill>
@@ -28959,8 +28923,8 @@
         </p:nvSpPr>
         <p:spPr>
           <a:xfrm>
-            <a:off x="9829800" y="3831336"/>
-            <a:ext cx="1773936" cy="1920240"/>
+            <a:off x="11119103" y="6016752"/>
+            <a:ext cx="768096" cy="841248"/>
           </a:xfrm>
           <a:prstGeom prst="rect">
             <a:avLst/>
@@ -28975,7 +28939,7 @@
           <a:p>
             <a:pPr algn="ctr"/>
             <a:r>
-              <a:rPr sz="11000" b="1" i="0">
+              <a:rPr sz="4800" b="1" i="0">
                 <a:solidFill>
                   <a:srgbClr val="142A4A"/>
                 </a:solidFill>
@@ -29202,7 +29166,7 @@
                 </a:solidFill>
                 <a:latin typeface="Calibri"/>
               </a:rPr>
-              <a:t/>
+              <a:t> </a:t>
             </a:r>
           </a:p>
           <a:p>
@@ -29226,7 +29190,7 @@
                 </a:solidFill>
                 <a:latin typeface="Calibri"/>
               </a:rPr>
-              <a:t/>
+              <a:t> </a:t>
             </a:r>
           </a:p>
           <a:p>
@@ -29250,7 +29214,7 @@
                 </a:solidFill>
                 <a:latin typeface="Calibri"/>
               </a:rPr>
-              <a:t/>
+              <a:t> </a:t>
             </a:r>
           </a:p>
           <a:p>
@@ -29274,7 +29238,7 @@
                 </a:solidFill>
                 <a:latin typeface="Calibri"/>
               </a:rPr>
-              <a:t/>
+              <a:t> </a:t>
             </a:r>
           </a:p>
           <a:p>
@@ -29298,7 +29262,7 @@
                 </a:solidFill>
                 <a:latin typeface="Calibri"/>
               </a:rPr>
-              <a:t/>
+              <a:t> </a:t>
             </a:r>
           </a:p>
           <a:p>
@@ -29322,7 +29286,7 @@
                 </a:solidFill>
                 <a:latin typeface="Calibri"/>
               </a:rPr>
-              <a:t/>
+              <a:t> </a:t>
             </a:r>
           </a:p>
           <a:p>
@@ -29346,7 +29310,7 @@
                 </a:solidFill>
                 <a:latin typeface="Calibri"/>
               </a:rPr>
-              <a:t/>
+              <a:t> </a:t>
             </a:r>
           </a:p>
           <a:p>
@@ -29370,7 +29334,7 @@
                 </a:solidFill>
                 <a:latin typeface="Calibri"/>
               </a:rPr>
-              <a:t/>
+              <a:t> </a:t>
             </a:r>
           </a:p>
           <a:p>
@@ -29394,7 +29358,7 @@
                 </a:solidFill>
                 <a:latin typeface="Calibri"/>
               </a:rPr>
-              <a:t/>
+              <a:t> </a:t>
             </a:r>
           </a:p>
           <a:p>
@@ -29418,7 +29382,7 @@
                 </a:solidFill>
                 <a:latin typeface="Calibri"/>
               </a:rPr>
-              <a:t/>
+              <a:t> </a:t>
             </a:r>
           </a:p>
         </p:txBody>
@@ -29432,7 +29396,7 @@
         <p:spPr>
           <a:xfrm>
             <a:off x="6446520" y="841248"/>
-            <a:ext cx="5349240" cy="5504688"/>
+            <a:ext cx="5349240" cy="5376672"/>
           </a:xfrm>
           <a:prstGeom prst="rect">
             <a:avLst/>
@@ -29553,7 +29517,7 @@
         <p:spPr>
           <a:xfrm>
             <a:off x="6629400" y="1225296"/>
-            <a:ext cx="4983479" cy="182880"/>
+            <a:ext cx="4983479" cy="164592"/>
           </a:xfrm>
           <a:prstGeom prst="rect">
             <a:avLst/>
@@ -29587,23 +29551,23 @@
         </p:nvSpPr>
         <p:spPr>
           <a:xfrm>
-            <a:off x="6629400" y="1389888"/>
-            <a:ext cx="4983479" cy="347472"/>
-          </a:xfrm>
-          <a:prstGeom prst="rect">
-            <a:avLst/>
-          </a:prstGeom>
-          <a:noFill/>
-        </p:spPr>
-        <p:txBody>
-          <a:bodyPr wrap="square">
-            <a:spAutoFit/>
-          </a:bodyPr>
-          <a:lstStyle/>
-          <a:p>
-            <a:pPr algn="l"/>
-            <a:r>
-              <a:rPr sz="1800" b="1" i="0">
+            <a:off x="6629400" y="1435608"/>
+            <a:ext cx="4983479" cy="292608"/>
+          </a:xfrm>
+          <a:prstGeom prst="rect">
+            <a:avLst/>
+          </a:prstGeom>
+          <a:noFill/>
+        </p:spPr>
+        <p:txBody>
+          <a:bodyPr wrap="square">
+            <a:spAutoFit/>
+          </a:bodyPr>
+          <a:lstStyle/>
+          <a:p>
+            <a:pPr algn="l"/>
+            <a:r>
+              <a:rPr sz="1500" b="1" i="0">
                 <a:solidFill>
                   <a:srgbClr val="E7CC59"/>
                 </a:solidFill>
@@ -29622,8 +29586,8 @@
         </p:nvSpPr>
         <p:spPr>
           <a:xfrm>
-            <a:off x="6629400" y="1719072"/>
-            <a:ext cx="4983479" cy="182880"/>
+            <a:off x="6629400" y="1709928"/>
+            <a:ext cx="4983479" cy="164592"/>
           </a:xfrm>
           <a:prstGeom prst="rect">
             <a:avLst/>
@@ -29657,7 +29621,7 @@
         </p:nvSpPr>
         <p:spPr>
           <a:xfrm>
-            <a:off x="6583680" y="2029968"/>
+            <a:off x="6583680" y="2008632"/>
             <a:ext cx="5074920" cy="9144"/>
           </a:xfrm>
           <a:prstGeom prst="rect">
@@ -29700,8 +29664,8 @@
         </p:nvSpPr>
         <p:spPr>
           <a:xfrm>
-            <a:off x="6629400" y="2084832"/>
-            <a:ext cx="4983479" cy="182880"/>
+            <a:off x="6629400" y="2063496"/>
+            <a:ext cx="4983479" cy="164592"/>
           </a:xfrm>
           <a:prstGeom prst="rect">
             <a:avLst/>
@@ -29735,23 +29699,23 @@
         </p:nvSpPr>
         <p:spPr>
           <a:xfrm>
-            <a:off x="6629400" y="2249424"/>
-            <a:ext cx="4983479" cy="347472"/>
-          </a:xfrm>
-          <a:prstGeom prst="rect">
-            <a:avLst/>
-          </a:prstGeom>
-          <a:noFill/>
-        </p:spPr>
-        <p:txBody>
-          <a:bodyPr wrap="square">
-            <a:spAutoFit/>
-          </a:bodyPr>
-          <a:lstStyle/>
-          <a:p>
-            <a:pPr algn="l"/>
-            <a:r>
-              <a:rPr sz="1800" b="1" i="0">
+            <a:off x="6629400" y="2273808"/>
+            <a:ext cx="4983479" cy="292608"/>
+          </a:xfrm>
+          <a:prstGeom prst="rect">
+            <a:avLst/>
+          </a:prstGeom>
+          <a:noFill/>
+        </p:spPr>
+        <p:txBody>
+          <a:bodyPr wrap="square">
+            <a:spAutoFit/>
+          </a:bodyPr>
+          <a:lstStyle/>
+          <a:p>
+            <a:pPr algn="l"/>
+            <a:r>
+              <a:rPr sz="1500" b="1" i="0">
                 <a:solidFill>
                   <a:srgbClr val="E7CC59"/>
                 </a:solidFill>
@@ -29770,8 +29734,8 @@
         </p:nvSpPr>
         <p:spPr>
           <a:xfrm>
-            <a:off x="6629400" y="2578608"/>
-            <a:ext cx="4983479" cy="182880"/>
+            <a:off x="6629400" y="2548128"/>
+            <a:ext cx="4983479" cy="164592"/>
           </a:xfrm>
           <a:prstGeom prst="rect">
             <a:avLst/>
@@ -29805,7 +29769,7 @@
         </p:nvSpPr>
         <p:spPr>
           <a:xfrm>
-            <a:off x="6583680" y="2889503"/>
+            <a:off x="6583680" y="2846832"/>
             <a:ext cx="5074920" cy="9144"/>
           </a:xfrm>
           <a:prstGeom prst="rect">
@@ -29848,8 +29812,8 @@
         </p:nvSpPr>
         <p:spPr>
           <a:xfrm>
-            <a:off x="6629400" y="2944368"/>
-            <a:ext cx="4983479" cy="182880"/>
+            <a:off x="6629400" y="2901696"/>
+            <a:ext cx="4983479" cy="164592"/>
           </a:xfrm>
           <a:prstGeom prst="rect">
             <a:avLst/>
@@ -29883,23 +29847,23 @@
         </p:nvSpPr>
         <p:spPr>
           <a:xfrm>
-            <a:off x="6629400" y="3108960"/>
-            <a:ext cx="4983479" cy="347472"/>
-          </a:xfrm>
-          <a:prstGeom prst="rect">
-            <a:avLst/>
-          </a:prstGeom>
-          <a:noFill/>
-        </p:spPr>
-        <p:txBody>
-          <a:bodyPr wrap="square">
-            <a:spAutoFit/>
-          </a:bodyPr>
-          <a:lstStyle/>
-          <a:p>
-            <a:pPr algn="l"/>
-            <a:r>
-              <a:rPr sz="1800" b="1" i="0">
+            <a:off x="6629400" y="3112008"/>
+            <a:ext cx="4983479" cy="292608"/>
+          </a:xfrm>
+          <a:prstGeom prst="rect">
+            <a:avLst/>
+          </a:prstGeom>
+          <a:noFill/>
+        </p:spPr>
+        <p:txBody>
+          <a:bodyPr wrap="square">
+            <a:spAutoFit/>
+          </a:bodyPr>
+          <a:lstStyle/>
+          <a:p>
+            <a:pPr algn="l"/>
+            <a:r>
+              <a:rPr sz="1500" b="1" i="0">
                 <a:solidFill>
                   <a:srgbClr val="E7CC59"/>
                 </a:solidFill>
@@ -29918,8 +29882,8 @@
         </p:nvSpPr>
         <p:spPr>
           <a:xfrm>
-            <a:off x="6629400" y="3438144"/>
-            <a:ext cx="4983479" cy="182880"/>
+            <a:off x="6629400" y="3386328"/>
+            <a:ext cx="4983479" cy="164592"/>
           </a:xfrm>
           <a:prstGeom prst="rect">
             <a:avLst/>
@@ -29953,7 +29917,7 @@
         </p:nvSpPr>
         <p:spPr>
           <a:xfrm>
-            <a:off x="6583680" y="3749040"/>
+            <a:off x="6583680" y="3685032"/>
             <a:ext cx="5074920" cy="9144"/>
           </a:xfrm>
           <a:prstGeom prst="rect">
@@ -29996,8 +29960,8 @@
         </p:nvSpPr>
         <p:spPr>
           <a:xfrm>
-            <a:off x="6629400" y="3803904"/>
-            <a:ext cx="4983479" cy="182880"/>
+            <a:off x="6629400" y="3739896"/>
+            <a:ext cx="4983479" cy="164592"/>
           </a:xfrm>
           <a:prstGeom prst="rect">
             <a:avLst/>
@@ -30031,23 +29995,23 @@
         </p:nvSpPr>
         <p:spPr>
           <a:xfrm>
-            <a:off x="6629400" y="3968496"/>
-            <a:ext cx="4983479" cy="347472"/>
-          </a:xfrm>
-          <a:prstGeom prst="rect">
-            <a:avLst/>
-          </a:prstGeom>
-          <a:noFill/>
-        </p:spPr>
-        <p:txBody>
-          <a:bodyPr wrap="square">
-            <a:spAutoFit/>
-          </a:bodyPr>
-          <a:lstStyle/>
-          <a:p>
-            <a:pPr algn="l"/>
-            <a:r>
-              <a:rPr sz="1800" b="1" i="0">
+            <a:off x="6629400" y="3950208"/>
+            <a:ext cx="4983479" cy="292608"/>
+          </a:xfrm>
+          <a:prstGeom prst="rect">
+            <a:avLst/>
+          </a:prstGeom>
+          <a:noFill/>
+        </p:spPr>
+        <p:txBody>
+          <a:bodyPr wrap="square">
+            <a:spAutoFit/>
+          </a:bodyPr>
+          <a:lstStyle/>
+          <a:p>
+            <a:pPr algn="l"/>
+            <a:r>
+              <a:rPr sz="1500" b="1" i="0">
                 <a:solidFill>
                   <a:srgbClr val="E7CC59"/>
                 </a:solidFill>
@@ -30066,8 +30030,8 @@
         </p:nvSpPr>
         <p:spPr>
           <a:xfrm>
-            <a:off x="6629400" y="4297680"/>
-            <a:ext cx="4983479" cy="182880"/>
+            <a:off x="6629400" y="4224528"/>
+            <a:ext cx="4983479" cy="164592"/>
           </a:xfrm>
           <a:prstGeom prst="rect">
             <a:avLst/>
@@ -30101,7 +30065,7 @@
         </p:nvSpPr>
         <p:spPr>
           <a:xfrm>
-            <a:off x="6583680" y="4608576"/>
+            <a:off x="6583680" y="4523232"/>
             <a:ext cx="5074920" cy="9144"/>
           </a:xfrm>
           <a:prstGeom prst="rect">
@@ -30144,8 +30108,8 @@
         </p:nvSpPr>
         <p:spPr>
           <a:xfrm>
-            <a:off x="6629400" y="4663440"/>
-            <a:ext cx="4983479" cy="182880"/>
+            <a:off x="6629400" y="4578096"/>
+            <a:ext cx="4983479" cy="164592"/>
           </a:xfrm>
           <a:prstGeom prst="rect">
             <a:avLst/>
@@ -30179,23 +30143,23 @@
         </p:nvSpPr>
         <p:spPr>
           <a:xfrm>
-            <a:off x="6629400" y="4828031"/>
-            <a:ext cx="4983479" cy="347472"/>
-          </a:xfrm>
-          <a:prstGeom prst="rect">
-            <a:avLst/>
-          </a:prstGeom>
-          <a:noFill/>
-        </p:spPr>
-        <p:txBody>
-          <a:bodyPr wrap="square">
-            <a:spAutoFit/>
-          </a:bodyPr>
-          <a:lstStyle/>
-          <a:p>
-            <a:pPr algn="l"/>
-            <a:r>
-              <a:rPr sz="1800" b="1" i="0">
+            <a:off x="6629400" y="4788408"/>
+            <a:ext cx="4983479" cy="292608"/>
+          </a:xfrm>
+          <a:prstGeom prst="rect">
+            <a:avLst/>
+          </a:prstGeom>
+          <a:noFill/>
+        </p:spPr>
+        <p:txBody>
+          <a:bodyPr wrap="square">
+            <a:spAutoFit/>
+          </a:bodyPr>
+          <a:lstStyle/>
+          <a:p>
+            <a:pPr algn="l"/>
+            <a:r>
+              <a:rPr sz="1500" b="1" i="0">
                 <a:solidFill>
                   <a:srgbClr val="E7CC59"/>
                 </a:solidFill>
@@ -30214,8 +30178,8 @@
         </p:nvSpPr>
         <p:spPr>
           <a:xfrm>
-            <a:off x="6629400" y="5157216"/>
-            <a:ext cx="4983479" cy="182880"/>
+            <a:off x="6629400" y="5062728"/>
+            <a:ext cx="4983479" cy="164592"/>
           </a:xfrm>
           <a:prstGeom prst="rect">
             <a:avLst/>
@@ -30249,7 +30213,7 @@
         </p:nvSpPr>
         <p:spPr>
           <a:xfrm>
-            <a:off x="6583680" y="5468112"/>
+            <a:off x="6583680" y="5361432"/>
             <a:ext cx="5074920" cy="9144"/>
           </a:xfrm>
           <a:prstGeom prst="rect">
@@ -30292,8 +30256,8 @@
         </p:nvSpPr>
         <p:spPr>
           <a:xfrm>
-            <a:off x="6629400" y="5522975"/>
-            <a:ext cx="4983479" cy="182880"/>
+            <a:off x="6629400" y="5416296"/>
+            <a:ext cx="4983479" cy="164592"/>
           </a:xfrm>
           <a:prstGeom prst="rect">
             <a:avLst/>
@@ -30327,23 +30291,23 @@
         </p:nvSpPr>
         <p:spPr>
           <a:xfrm>
-            <a:off x="6629400" y="5687567"/>
-            <a:ext cx="4983479" cy="347472"/>
-          </a:xfrm>
-          <a:prstGeom prst="rect">
-            <a:avLst/>
-          </a:prstGeom>
-          <a:noFill/>
-        </p:spPr>
-        <p:txBody>
-          <a:bodyPr wrap="square">
-            <a:spAutoFit/>
-          </a:bodyPr>
-          <a:lstStyle/>
-          <a:p>
-            <a:pPr algn="l"/>
-            <a:r>
-              <a:rPr sz="1800" b="1" i="0">
+            <a:off x="6629400" y="5626607"/>
+            <a:ext cx="4983479" cy="292608"/>
+          </a:xfrm>
+          <a:prstGeom prst="rect">
+            <a:avLst/>
+          </a:prstGeom>
+          <a:noFill/>
+        </p:spPr>
+        <p:txBody>
+          <a:bodyPr wrap="square">
+            <a:spAutoFit/>
+          </a:bodyPr>
+          <a:lstStyle/>
+          <a:p>
+            <a:pPr algn="l"/>
+            <a:r>
+              <a:rPr sz="1500" b="1" i="0">
                 <a:solidFill>
                   <a:srgbClr val="E7CC59"/>
                 </a:solidFill>
@@ -30362,8 +30326,8 @@
         </p:nvSpPr>
         <p:spPr>
           <a:xfrm>
-            <a:off x="6629400" y="6016751"/>
-            <a:ext cx="4983479" cy="182880"/>
+            <a:off x="6629400" y="5900928"/>
+            <a:ext cx="4983479" cy="164592"/>
           </a:xfrm>
           <a:prstGeom prst="rect">
             <a:avLst/>
@@ -30502,14 +30466,14 @@
         </p:nvSpPr>
         <p:spPr>
           <a:xfrm>
-            <a:off x="9756648" y="3904488"/>
-            <a:ext cx="1920240" cy="1920240"/>
+            <a:off x="11082528" y="6053328"/>
+            <a:ext cx="841248" cy="841248"/>
           </a:xfrm>
           <a:prstGeom prst="ellipse">
             <a:avLst/>
           </a:prstGeom>
           <a:noFill/>
-          <a:ln w="25400">
+          <a:ln w="19050">
             <a:solidFill>
               <a:srgbClr val="E7CC59"/>
             </a:solidFill>
@@ -30545,8 +30509,8 @@
         </p:nvSpPr>
         <p:spPr>
           <a:xfrm>
-            <a:off x="9829800" y="3831336"/>
-            <a:ext cx="1773936" cy="1920240"/>
+            <a:off x="11119103" y="6016752"/>
+            <a:ext cx="768096" cy="841248"/>
           </a:xfrm>
           <a:prstGeom prst="rect">
             <a:avLst/>
@@ -30561,7 +30525,7 @@
           <a:p>
             <a:pPr algn="ctr"/>
             <a:r>
-              <a:rPr sz="11000" b="1" i="0">
+              <a:rPr sz="4800" b="1" i="0">
                 <a:solidFill>
                   <a:srgbClr val="142A4A"/>
                 </a:solidFill>
@@ -30788,7 +30752,7 @@
                 </a:solidFill>
                 <a:latin typeface="Calibri"/>
               </a:rPr>
-              <a:t/>
+              <a:t> </a:t>
             </a:r>
           </a:p>
           <a:p>
@@ -30812,7 +30776,7 @@
                 </a:solidFill>
                 <a:latin typeface="Calibri"/>
               </a:rPr>
-              <a:t/>
+              <a:t> </a:t>
             </a:r>
           </a:p>
           <a:p>
@@ -30836,7 +30800,7 @@
                 </a:solidFill>
                 <a:latin typeface="Calibri"/>
               </a:rPr>
-              <a:t/>
+              <a:t> </a:t>
             </a:r>
           </a:p>
           <a:p>
@@ -30860,7 +30824,7 @@
                 </a:solidFill>
                 <a:latin typeface="Calibri"/>
               </a:rPr>
-              <a:t/>
+              <a:t> </a:t>
             </a:r>
           </a:p>
           <a:p>
@@ -30884,7 +30848,7 @@
                 </a:solidFill>
                 <a:latin typeface="Calibri"/>
               </a:rPr>
-              <a:t/>
+              <a:t> </a:t>
             </a:r>
           </a:p>
           <a:p>
@@ -30908,7 +30872,7 @@
                 </a:solidFill>
                 <a:latin typeface="Calibri"/>
               </a:rPr>
-              <a:t/>
+              <a:t> </a:t>
             </a:r>
           </a:p>
           <a:p>
@@ -30932,7 +30896,7 @@
                 </a:solidFill>
                 <a:latin typeface="Calibri"/>
               </a:rPr>
-              <a:t/>
+              <a:t> </a:t>
             </a:r>
           </a:p>
           <a:p>
@@ -30956,7 +30920,7 @@
                 </a:solidFill>
                 <a:latin typeface="Calibri"/>
               </a:rPr>
-              <a:t/>
+              <a:t> </a:t>
             </a:r>
           </a:p>
           <a:p>
@@ -30980,7 +30944,7 @@
                 </a:solidFill>
                 <a:latin typeface="Calibri"/>
               </a:rPr>
-              <a:t/>
+              <a:t> </a:t>
             </a:r>
           </a:p>
           <a:p>
@@ -31004,7 +30968,7 @@
                 </a:solidFill>
                 <a:latin typeface="Calibri"/>
               </a:rPr>
-              <a:t/>
+              <a:t> </a:t>
             </a:r>
           </a:p>
           <a:p>
@@ -31028,7 +30992,7 @@
                 </a:solidFill>
                 <a:latin typeface="Calibri"/>
               </a:rPr>
-              <a:t/>
+              <a:t> </a:t>
             </a:r>
           </a:p>
           <a:p>
@@ -31052,7 +31016,7 @@
                 </a:solidFill>
                 <a:latin typeface="Calibri"/>
               </a:rPr>
-              <a:t/>
+              <a:t> </a:t>
             </a:r>
           </a:p>
         </p:txBody>
@@ -31066,7 +31030,7 @@
         <p:spPr>
           <a:xfrm>
             <a:off x="6446520" y="841248"/>
-            <a:ext cx="5349240" cy="5504688"/>
+            <a:ext cx="5349240" cy="5376672"/>
           </a:xfrm>
           <a:prstGeom prst="rect">
             <a:avLst/>
@@ -31187,7 +31151,7 @@
         <p:spPr>
           <a:xfrm>
             <a:off x="6629400" y="1225296"/>
-            <a:ext cx="4983479" cy="182880"/>
+            <a:ext cx="4983479" cy="164592"/>
           </a:xfrm>
           <a:prstGeom prst="rect">
             <a:avLst/>
@@ -31221,23 +31185,23 @@
         </p:nvSpPr>
         <p:spPr>
           <a:xfrm>
-            <a:off x="6629400" y="1389888"/>
-            <a:ext cx="4983479" cy="347472"/>
-          </a:xfrm>
-          <a:prstGeom prst="rect">
-            <a:avLst/>
-          </a:prstGeom>
-          <a:noFill/>
-        </p:spPr>
-        <p:txBody>
-          <a:bodyPr wrap="square">
-            <a:spAutoFit/>
-          </a:bodyPr>
-          <a:lstStyle/>
-          <a:p>
-            <a:pPr algn="l"/>
-            <a:r>
-              <a:rPr sz="1800" b="1" i="0">
+            <a:off x="6629400" y="1435608"/>
+            <a:ext cx="4983479" cy="292608"/>
+          </a:xfrm>
+          <a:prstGeom prst="rect">
+            <a:avLst/>
+          </a:prstGeom>
+          <a:noFill/>
+        </p:spPr>
+        <p:txBody>
+          <a:bodyPr wrap="square">
+            <a:spAutoFit/>
+          </a:bodyPr>
+          <a:lstStyle/>
+          <a:p>
+            <a:pPr algn="l"/>
+            <a:r>
+              <a:rPr sz="1500" b="1" i="0">
                 <a:solidFill>
                   <a:srgbClr val="E7CC59"/>
                 </a:solidFill>
@@ -31256,8 +31220,8 @@
         </p:nvSpPr>
         <p:spPr>
           <a:xfrm>
-            <a:off x="6629400" y="1719072"/>
-            <a:ext cx="4983479" cy="182880"/>
+            <a:off x="6629400" y="1709928"/>
+            <a:ext cx="4983479" cy="164592"/>
           </a:xfrm>
           <a:prstGeom prst="rect">
             <a:avLst/>
@@ -31291,7 +31255,7 @@
         </p:nvSpPr>
         <p:spPr>
           <a:xfrm>
-            <a:off x="6583680" y="2029968"/>
+            <a:off x="6583680" y="2008632"/>
             <a:ext cx="5074920" cy="9144"/>
           </a:xfrm>
           <a:prstGeom prst="rect">
@@ -31334,8 +31298,8 @@
         </p:nvSpPr>
         <p:spPr>
           <a:xfrm>
-            <a:off x="6629400" y="2084832"/>
-            <a:ext cx="4983479" cy="182880"/>
+            <a:off x="6629400" y="2063496"/>
+            <a:ext cx="4983479" cy="164592"/>
           </a:xfrm>
           <a:prstGeom prst="rect">
             <a:avLst/>
@@ -31369,23 +31333,23 @@
         </p:nvSpPr>
         <p:spPr>
           <a:xfrm>
-            <a:off x="6629400" y="2249424"/>
-            <a:ext cx="4983479" cy="347472"/>
-          </a:xfrm>
-          <a:prstGeom prst="rect">
-            <a:avLst/>
-          </a:prstGeom>
-          <a:noFill/>
-        </p:spPr>
-        <p:txBody>
-          <a:bodyPr wrap="square">
-            <a:spAutoFit/>
-          </a:bodyPr>
-          <a:lstStyle/>
-          <a:p>
-            <a:pPr algn="l"/>
-            <a:r>
-              <a:rPr sz="1800" b="1" i="0">
+            <a:off x="6629400" y="2273808"/>
+            <a:ext cx="4983479" cy="292608"/>
+          </a:xfrm>
+          <a:prstGeom prst="rect">
+            <a:avLst/>
+          </a:prstGeom>
+          <a:noFill/>
+        </p:spPr>
+        <p:txBody>
+          <a:bodyPr wrap="square">
+            <a:spAutoFit/>
+          </a:bodyPr>
+          <a:lstStyle/>
+          <a:p>
+            <a:pPr algn="l"/>
+            <a:r>
+              <a:rPr sz="1500" b="1" i="0">
                 <a:solidFill>
                   <a:srgbClr val="E7CC59"/>
                 </a:solidFill>
@@ -31404,8 +31368,8 @@
         </p:nvSpPr>
         <p:spPr>
           <a:xfrm>
-            <a:off x="6629400" y="2578608"/>
-            <a:ext cx="4983479" cy="182880"/>
+            <a:off x="6629400" y="2548128"/>
+            <a:ext cx="4983479" cy="164592"/>
           </a:xfrm>
           <a:prstGeom prst="rect">
             <a:avLst/>
@@ -31439,7 +31403,7 @@
         </p:nvSpPr>
         <p:spPr>
           <a:xfrm>
-            <a:off x="6583680" y="2889503"/>
+            <a:off x="6583680" y="2846832"/>
             <a:ext cx="5074920" cy="9144"/>
           </a:xfrm>
           <a:prstGeom prst="rect">
@@ -31482,8 +31446,8 @@
         </p:nvSpPr>
         <p:spPr>
           <a:xfrm>
-            <a:off x="6629400" y="2944368"/>
-            <a:ext cx="4983479" cy="182880"/>
+            <a:off x="6629400" y="2901696"/>
+            <a:ext cx="4983479" cy="164592"/>
           </a:xfrm>
           <a:prstGeom prst="rect">
             <a:avLst/>
@@ -31517,23 +31481,23 @@
         </p:nvSpPr>
         <p:spPr>
           <a:xfrm>
-            <a:off x="6629400" y="3108960"/>
-            <a:ext cx="4983479" cy="347472"/>
-          </a:xfrm>
-          <a:prstGeom prst="rect">
-            <a:avLst/>
-          </a:prstGeom>
-          <a:noFill/>
-        </p:spPr>
-        <p:txBody>
-          <a:bodyPr wrap="square">
-            <a:spAutoFit/>
-          </a:bodyPr>
-          <a:lstStyle/>
-          <a:p>
-            <a:pPr algn="l"/>
-            <a:r>
-              <a:rPr sz="1800" b="1" i="0">
+            <a:off x="6629400" y="3112008"/>
+            <a:ext cx="4983479" cy="292608"/>
+          </a:xfrm>
+          <a:prstGeom prst="rect">
+            <a:avLst/>
+          </a:prstGeom>
+          <a:noFill/>
+        </p:spPr>
+        <p:txBody>
+          <a:bodyPr wrap="square">
+            <a:spAutoFit/>
+          </a:bodyPr>
+          <a:lstStyle/>
+          <a:p>
+            <a:pPr algn="l"/>
+            <a:r>
+              <a:rPr sz="1500" b="1" i="0">
                 <a:solidFill>
                   <a:srgbClr val="E7CC59"/>
                 </a:solidFill>
@@ -31552,8 +31516,8 @@
         </p:nvSpPr>
         <p:spPr>
           <a:xfrm>
-            <a:off x="6629400" y="3438144"/>
-            <a:ext cx="4983479" cy="182880"/>
+            <a:off x="6629400" y="3386328"/>
+            <a:ext cx="4983479" cy="164592"/>
           </a:xfrm>
           <a:prstGeom prst="rect">
             <a:avLst/>
@@ -31587,7 +31551,7 @@
         </p:nvSpPr>
         <p:spPr>
           <a:xfrm>
-            <a:off x="6583680" y="3749040"/>
+            <a:off x="6583680" y="3685032"/>
             <a:ext cx="5074920" cy="9144"/>
           </a:xfrm>
           <a:prstGeom prst="rect">
@@ -31630,8 +31594,8 @@
         </p:nvSpPr>
         <p:spPr>
           <a:xfrm>
-            <a:off x="6629400" y="3803904"/>
-            <a:ext cx="4983479" cy="182880"/>
+            <a:off x="6629400" y="3739896"/>
+            <a:ext cx="4983479" cy="164592"/>
           </a:xfrm>
           <a:prstGeom prst="rect">
             <a:avLst/>
@@ -31665,23 +31629,23 @@
         </p:nvSpPr>
         <p:spPr>
           <a:xfrm>
-            <a:off x="6629400" y="3968496"/>
-            <a:ext cx="4983479" cy="347472"/>
-          </a:xfrm>
-          <a:prstGeom prst="rect">
-            <a:avLst/>
-          </a:prstGeom>
-          <a:noFill/>
-        </p:spPr>
-        <p:txBody>
-          <a:bodyPr wrap="square">
-            <a:spAutoFit/>
-          </a:bodyPr>
-          <a:lstStyle/>
-          <a:p>
-            <a:pPr algn="l"/>
-            <a:r>
-              <a:rPr sz="1800" b="1" i="0">
+            <a:off x="6629400" y="3950208"/>
+            <a:ext cx="4983479" cy="292608"/>
+          </a:xfrm>
+          <a:prstGeom prst="rect">
+            <a:avLst/>
+          </a:prstGeom>
+          <a:noFill/>
+        </p:spPr>
+        <p:txBody>
+          <a:bodyPr wrap="square">
+            <a:spAutoFit/>
+          </a:bodyPr>
+          <a:lstStyle/>
+          <a:p>
+            <a:pPr algn="l"/>
+            <a:r>
+              <a:rPr sz="1500" b="1" i="0">
                 <a:solidFill>
                   <a:srgbClr val="E7CC59"/>
                 </a:solidFill>
@@ -31700,8 +31664,8 @@
         </p:nvSpPr>
         <p:spPr>
           <a:xfrm>
-            <a:off x="6629400" y="4297680"/>
-            <a:ext cx="4983479" cy="182880"/>
+            <a:off x="6629400" y="4224528"/>
+            <a:ext cx="4983479" cy="164592"/>
           </a:xfrm>
           <a:prstGeom prst="rect">
             <a:avLst/>
@@ -31735,7 +31699,7 @@
         </p:nvSpPr>
         <p:spPr>
           <a:xfrm>
-            <a:off x="6583680" y="4608576"/>
+            <a:off x="6583680" y="4523232"/>
             <a:ext cx="5074920" cy="9144"/>
           </a:xfrm>
           <a:prstGeom prst="rect">
@@ -31778,8 +31742,8 @@
         </p:nvSpPr>
         <p:spPr>
           <a:xfrm>
-            <a:off x="6629400" y="4663440"/>
-            <a:ext cx="4983479" cy="182880"/>
+            <a:off x="6629400" y="4578096"/>
+            <a:ext cx="4983479" cy="164592"/>
           </a:xfrm>
           <a:prstGeom prst="rect">
             <a:avLst/>
@@ -31813,23 +31777,23 @@
         </p:nvSpPr>
         <p:spPr>
           <a:xfrm>
-            <a:off x="6629400" y="4828031"/>
-            <a:ext cx="4983479" cy="347472"/>
-          </a:xfrm>
-          <a:prstGeom prst="rect">
-            <a:avLst/>
-          </a:prstGeom>
-          <a:noFill/>
-        </p:spPr>
-        <p:txBody>
-          <a:bodyPr wrap="square">
-            <a:spAutoFit/>
-          </a:bodyPr>
-          <a:lstStyle/>
-          <a:p>
-            <a:pPr algn="l"/>
-            <a:r>
-              <a:rPr sz="1800" b="1" i="0">
+            <a:off x="6629400" y="4788408"/>
+            <a:ext cx="4983479" cy="292608"/>
+          </a:xfrm>
+          <a:prstGeom prst="rect">
+            <a:avLst/>
+          </a:prstGeom>
+          <a:noFill/>
+        </p:spPr>
+        <p:txBody>
+          <a:bodyPr wrap="square">
+            <a:spAutoFit/>
+          </a:bodyPr>
+          <a:lstStyle/>
+          <a:p>
+            <a:pPr algn="l"/>
+            <a:r>
+              <a:rPr sz="1500" b="1" i="0">
                 <a:solidFill>
                   <a:srgbClr val="E7CC59"/>
                 </a:solidFill>
@@ -31848,8 +31812,8 @@
         </p:nvSpPr>
         <p:spPr>
           <a:xfrm>
-            <a:off x="6629400" y="5157216"/>
-            <a:ext cx="4983479" cy="182880"/>
+            <a:off x="6629400" y="5062728"/>
+            <a:ext cx="4983479" cy="164592"/>
           </a:xfrm>
           <a:prstGeom prst="rect">
             <a:avLst/>
@@ -31883,7 +31847,7 @@
         </p:nvSpPr>
         <p:spPr>
           <a:xfrm>
-            <a:off x="6583680" y="5468112"/>
+            <a:off x="6583680" y="5361432"/>
             <a:ext cx="5074920" cy="9144"/>
           </a:xfrm>
           <a:prstGeom prst="rect">
@@ -31926,8 +31890,8 @@
         </p:nvSpPr>
         <p:spPr>
           <a:xfrm>
-            <a:off x="6629400" y="5522975"/>
-            <a:ext cx="4983479" cy="182880"/>
+            <a:off x="6629400" y="5416296"/>
+            <a:ext cx="4983479" cy="164592"/>
           </a:xfrm>
           <a:prstGeom prst="rect">
             <a:avLst/>
@@ -31961,23 +31925,23 @@
         </p:nvSpPr>
         <p:spPr>
           <a:xfrm>
-            <a:off x="6629400" y="5687567"/>
-            <a:ext cx="4983479" cy="347472"/>
-          </a:xfrm>
-          <a:prstGeom prst="rect">
-            <a:avLst/>
-          </a:prstGeom>
-          <a:noFill/>
-        </p:spPr>
-        <p:txBody>
-          <a:bodyPr wrap="square">
-            <a:spAutoFit/>
-          </a:bodyPr>
-          <a:lstStyle/>
-          <a:p>
-            <a:pPr algn="l"/>
-            <a:r>
-              <a:rPr sz="1800" b="1" i="0">
+            <a:off x="6629400" y="5626607"/>
+            <a:ext cx="4983479" cy="292608"/>
+          </a:xfrm>
+          <a:prstGeom prst="rect">
+            <a:avLst/>
+          </a:prstGeom>
+          <a:noFill/>
+        </p:spPr>
+        <p:txBody>
+          <a:bodyPr wrap="square">
+            <a:spAutoFit/>
+          </a:bodyPr>
+          <a:lstStyle/>
+          <a:p>
+            <a:pPr algn="l"/>
+            <a:r>
+              <a:rPr sz="1500" b="1" i="0">
                 <a:solidFill>
                   <a:srgbClr val="E7CC59"/>
                 </a:solidFill>
@@ -31996,8 +31960,8 @@
         </p:nvSpPr>
         <p:spPr>
           <a:xfrm>
-            <a:off x="6629400" y="6016751"/>
-            <a:ext cx="4983479" cy="182880"/>
+            <a:off x="6629400" y="5900928"/>
+            <a:ext cx="4983479" cy="164592"/>
           </a:xfrm>
           <a:prstGeom prst="rect">
             <a:avLst/>
@@ -32136,14 +32100,14 @@
         </p:nvSpPr>
         <p:spPr>
           <a:xfrm>
-            <a:off x="9756648" y="3904488"/>
-            <a:ext cx="1920240" cy="1920240"/>
+            <a:off x="11082528" y="6053328"/>
+            <a:ext cx="841248" cy="841248"/>
           </a:xfrm>
           <a:prstGeom prst="ellipse">
             <a:avLst/>
           </a:prstGeom>
           <a:noFill/>
-          <a:ln w="25400">
+          <a:ln w="19050">
             <a:solidFill>
               <a:srgbClr val="E7CC59"/>
             </a:solidFill>
@@ -32179,8 +32143,8 @@
         </p:nvSpPr>
         <p:spPr>
           <a:xfrm>
-            <a:off x="9829800" y="3831336"/>
-            <a:ext cx="1773936" cy="1920240"/>
+            <a:off x="11119103" y="6016752"/>
+            <a:ext cx="768096" cy="841248"/>
           </a:xfrm>
           <a:prstGeom prst="rect">
             <a:avLst/>
@@ -32195,7 +32159,7 @@
           <a:p>
             <a:pPr algn="ctr"/>
             <a:r>
-              <a:rPr sz="11000" b="1" i="0">
+              <a:rPr sz="4800" b="1" i="0">
                 <a:solidFill>
                   <a:srgbClr val="142A4A"/>
                 </a:solidFill>
@@ -32422,7 +32386,7 @@
                 </a:solidFill>
                 <a:latin typeface="Calibri"/>
               </a:rPr>
-              <a:t/>
+              <a:t> </a:t>
             </a:r>
           </a:p>
           <a:p>
@@ -32446,7 +32410,7 @@
                 </a:solidFill>
                 <a:latin typeface="Calibri"/>
               </a:rPr>
-              <a:t/>
+              <a:t> </a:t>
             </a:r>
           </a:p>
           <a:p>
@@ -32470,7 +32434,7 @@
                 </a:solidFill>
                 <a:latin typeface="Calibri"/>
               </a:rPr>
-              <a:t/>
+              <a:t> </a:t>
             </a:r>
           </a:p>
           <a:p>
@@ -32494,7 +32458,7 @@
                 </a:solidFill>
                 <a:latin typeface="Calibri"/>
               </a:rPr>
-              <a:t/>
+              <a:t> </a:t>
             </a:r>
           </a:p>
           <a:p>
@@ -32518,7 +32482,7 @@
                 </a:solidFill>
                 <a:latin typeface="Calibri"/>
               </a:rPr>
-              <a:t/>
+              <a:t> </a:t>
             </a:r>
           </a:p>
           <a:p>
@@ -32542,7 +32506,7 @@
                 </a:solidFill>
                 <a:latin typeface="Calibri"/>
               </a:rPr>
-              <a:t/>
+              <a:t> </a:t>
             </a:r>
           </a:p>
           <a:p>
@@ -32566,7 +32530,7 @@
                 </a:solidFill>
                 <a:latin typeface="Calibri"/>
               </a:rPr>
-              <a:t/>
+              <a:t> </a:t>
             </a:r>
           </a:p>
           <a:p>
@@ -32590,7 +32554,7 @@
                 </a:solidFill>
                 <a:latin typeface="Calibri"/>
               </a:rPr>
-              <a:t/>
+              <a:t> </a:t>
             </a:r>
           </a:p>
           <a:p>
@@ -32614,7 +32578,7 @@
                 </a:solidFill>
                 <a:latin typeface="Calibri"/>
               </a:rPr>
-              <a:t/>
+              <a:t> </a:t>
             </a:r>
           </a:p>
           <a:p>
@@ -32638,7 +32602,7 @@
                 </a:solidFill>
                 <a:latin typeface="Calibri"/>
               </a:rPr>
-              <a:t/>
+              <a:t> </a:t>
             </a:r>
           </a:p>
         </p:txBody>
@@ -32652,7 +32616,7 @@
         <p:spPr>
           <a:xfrm>
             <a:off x="6446520" y="841248"/>
-            <a:ext cx="5349240" cy="5504688"/>
+            <a:ext cx="5349240" cy="5376672"/>
           </a:xfrm>
           <a:prstGeom prst="rect">
             <a:avLst/>
@@ -32773,7 +32737,7 @@
         <p:spPr>
           <a:xfrm>
             <a:off x="6629400" y="1225296"/>
-            <a:ext cx="4983479" cy="182880"/>
+            <a:ext cx="4983479" cy="164592"/>
           </a:xfrm>
           <a:prstGeom prst="rect">
             <a:avLst/>
@@ -32807,23 +32771,23 @@
         </p:nvSpPr>
         <p:spPr>
           <a:xfrm>
-            <a:off x="6629400" y="1389888"/>
-            <a:ext cx="4983479" cy="347472"/>
-          </a:xfrm>
-          <a:prstGeom prst="rect">
-            <a:avLst/>
-          </a:prstGeom>
-          <a:noFill/>
-        </p:spPr>
-        <p:txBody>
-          <a:bodyPr wrap="square">
-            <a:spAutoFit/>
-          </a:bodyPr>
-          <a:lstStyle/>
-          <a:p>
-            <a:pPr algn="l"/>
-            <a:r>
-              <a:rPr sz="1800" b="1" i="0">
+            <a:off x="6629400" y="1435608"/>
+            <a:ext cx="4983479" cy="292608"/>
+          </a:xfrm>
+          <a:prstGeom prst="rect">
+            <a:avLst/>
+          </a:prstGeom>
+          <a:noFill/>
+        </p:spPr>
+        <p:txBody>
+          <a:bodyPr wrap="square">
+            <a:spAutoFit/>
+          </a:bodyPr>
+          <a:lstStyle/>
+          <a:p>
+            <a:pPr algn="l"/>
+            <a:r>
+              <a:rPr sz="1500" b="1" i="0">
                 <a:solidFill>
                   <a:srgbClr val="E7CC59"/>
                 </a:solidFill>
@@ -32842,8 +32806,8 @@
         </p:nvSpPr>
         <p:spPr>
           <a:xfrm>
-            <a:off x="6629400" y="1719072"/>
-            <a:ext cx="4983479" cy="182880"/>
+            <a:off x="6629400" y="1709928"/>
+            <a:ext cx="4983479" cy="164592"/>
           </a:xfrm>
           <a:prstGeom prst="rect">
             <a:avLst/>
@@ -32877,7 +32841,7 @@
         </p:nvSpPr>
         <p:spPr>
           <a:xfrm>
-            <a:off x="6583680" y="2029968"/>
+            <a:off x="6583680" y="2008632"/>
             <a:ext cx="5074920" cy="9144"/>
           </a:xfrm>
           <a:prstGeom prst="rect">
@@ -32920,8 +32884,8 @@
         </p:nvSpPr>
         <p:spPr>
           <a:xfrm>
-            <a:off x="6629400" y="2084832"/>
-            <a:ext cx="4983479" cy="182880"/>
+            <a:off x="6629400" y="2063496"/>
+            <a:ext cx="4983479" cy="164592"/>
           </a:xfrm>
           <a:prstGeom prst="rect">
             <a:avLst/>
@@ -32955,23 +32919,23 @@
         </p:nvSpPr>
         <p:spPr>
           <a:xfrm>
-            <a:off x="6629400" y="2249424"/>
-            <a:ext cx="4983479" cy="347472"/>
-          </a:xfrm>
-          <a:prstGeom prst="rect">
-            <a:avLst/>
-          </a:prstGeom>
-          <a:noFill/>
-        </p:spPr>
-        <p:txBody>
-          <a:bodyPr wrap="square">
-            <a:spAutoFit/>
-          </a:bodyPr>
-          <a:lstStyle/>
-          <a:p>
-            <a:pPr algn="l"/>
-            <a:r>
-              <a:rPr sz="1800" b="1" i="0">
+            <a:off x="6629400" y="2273808"/>
+            <a:ext cx="4983479" cy="292608"/>
+          </a:xfrm>
+          <a:prstGeom prst="rect">
+            <a:avLst/>
+          </a:prstGeom>
+          <a:noFill/>
+        </p:spPr>
+        <p:txBody>
+          <a:bodyPr wrap="square">
+            <a:spAutoFit/>
+          </a:bodyPr>
+          <a:lstStyle/>
+          <a:p>
+            <a:pPr algn="l"/>
+            <a:r>
+              <a:rPr sz="1500" b="1" i="0">
                 <a:solidFill>
                   <a:srgbClr val="E7CC59"/>
                 </a:solidFill>
@@ -32990,8 +32954,8 @@
         </p:nvSpPr>
         <p:spPr>
           <a:xfrm>
-            <a:off x="6629400" y="2578608"/>
-            <a:ext cx="4983479" cy="182880"/>
+            <a:off x="6629400" y="2548128"/>
+            <a:ext cx="4983479" cy="164592"/>
           </a:xfrm>
           <a:prstGeom prst="rect">
             <a:avLst/>
@@ -33025,7 +32989,7 @@
         </p:nvSpPr>
         <p:spPr>
           <a:xfrm>
-            <a:off x="6583680" y="2889503"/>
+            <a:off x="6583680" y="2846832"/>
             <a:ext cx="5074920" cy="9144"/>
           </a:xfrm>
           <a:prstGeom prst="rect">
@@ -33068,8 +33032,8 @@
         </p:nvSpPr>
         <p:spPr>
           <a:xfrm>
-            <a:off x="6629400" y="2944368"/>
-            <a:ext cx="4983479" cy="182880"/>
+            <a:off x="6629400" y="2901696"/>
+            <a:ext cx="4983479" cy="164592"/>
           </a:xfrm>
           <a:prstGeom prst="rect">
             <a:avLst/>
@@ -33103,23 +33067,23 @@
         </p:nvSpPr>
         <p:spPr>
           <a:xfrm>
-            <a:off x="6629400" y="3108960"/>
-            <a:ext cx="4983479" cy="347472"/>
-          </a:xfrm>
-          <a:prstGeom prst="rect">
-            <a:avLst/>
-          </a:prstGeom>
-          <a:noFill/>
-        </p:spPr>
-        <p:txBody>
-          <a:bodyPr wrap="square">
-            <a:spAutoFit/>
-          </a:bodyPr>
-          <a:lstStyle/>
-          <a:p>
-            <a:pPr algn="l"/>
-            <a:r>
-              <a:rPr sz="1800" b="1" i="0">
+            <a:off x="6629400" y="3112008"/>
+            <a:ext cx="4983479" cy="292608"/>
+          </a:xfrm>
+          <a:prstGeom prst="rect">
+            <a:avLst/>
+          </a:prstGeom>
+          <a:noFill/>
+        </p:spPr>
+        <p:txBody>
+          <a:bodyPr wrap="square">
+            <a:spAutoFit/>
+          </a:bodyPr>
+          <a:lstStyle/>
+          <a:p>
+            <a:pPr algn="l"/>
+            <a:r>
+              <a:rPr sz="1500" b="1" i="0">
                 <a:solidFill>
                   <a:srgbClr val="E7CC59"/>
                 </a:solidFill>
@@ -33138,8 +33102,8 @@
         </p:nvSpPr>
         <p:spPr>
           <a:xfrm>
-            <a:off x="6629400" y="3438144"/>
-            <a:ext cx="4983479" cy="182880"/>
+            <a:off x="6629400" y="3386328"/>
+            <a:ext cx="4983479" cy="164592"/>
           </a:xfrm>
           <a:prstGeom prst="rect">
             <a:avLst/>
@@ -33173,7 +33137,7 @@
         </p:nvSpPr>
         <p:spPr>
           <a:xfrm>
-            <a:off x="6583680" y="3749040"/>
+            <a:off x="6583680" y="3685032"/>
             <a:ext cx="5074920" cy="9144"/>
           </a:xfrm>
           <a:prstGeom prst="rect">
@@ -33216,8 +33180,8 @@
         </p:nvSpPr>
         <p:spPr>
           <a:xfrm>
-            <a:off x="6629400" y="3803904"/>
-            <a:ext cx="4983479" cy="182880"/>
+            <a:off x="6629400" y="3739896"/>
+            <a:ext cx="4983479" cy="164592"/>
           </a:xfrm>
           <a:prstGeom prst="rect">
             <a:avLst/>
@@ -33251,23 +33215,23 @@
         </p:nvSpPr>
         <p:spPr>
           <a:xfrm>
-            <a:off x="6629400" y="3968496"/>
-            <a:ext cx="4983479" cy="347472"/>
-          </a:xfrm>
-          <a:prstGeom prst="rect">
-            <a:avLst/>
-          </a:prstGeom>
-          <a:noFill/>
-        </p:spPr>
-        <p:txBody>
-          <a:bodyPr wrap="square">
-            <a:spAutoFit/>
-          </a:bodyPr>
-          <a:lstStyle/>
-          <a:p>
-            <a:pPr algn="l"/>
-            <a:r>
-              <a:rPr sz="1800" b="1" i="0">
+            <a:off x="6629400" y="3950208"/>
+            <a:ext cx="4983479" cy="292608"/>
+          </a:xfrm>
+          <a:prstGeom prst="rect">
+            <a:avLst/>
+          </a:prstGeom>
+          <a:noFill/>
+        </p:spPr>
+        <p:txBody>
+          <a:bodyPr wrap="square">
+            <a:spAutoFit/>
+          </a:bodyPr>
+          <a:lstStyle/>
+          <a:p>
+            <a:pPr algn="l"/>
+            <a:r>
+              <a:rPr sz="1500" b="1" i="0">
                 <a:solidFill>
                   <a:srgbClr val="E7CC59"/>
                 </a:solidFill>
@@ -33286,8 +33250,8 @@
         </p:nvSpPr>
         <p:spPr>
           <a:xfrm>
-            <a:off x="6629400" y="4297680"/>
-            <a:ext cx="4983479" cy="182880"/>
+            <a:off x="6629400" y="4224528"/>
+            <a:ext cx="4983479" cy="164592"/>
           </a:xfrm>
           <a:prstGeom prst="rect">
             <a:avLst/>
@@ -33321,7 +33285,7 @@
         </p:nvSpPr>
         <p:spPr>
           <a:xfrm>
-            <a:off x="6583680" y="4608576"/>
+            <a:off x="6583680" y="4523232"/>
             <a:ext cx="5074920" cy="9144"/>
           </a:xfrm>
           <a:prstGeom prst="rect">
@@ -33364,8 +33328,8 @@
         </p:nvSpPr>
         <p:spPr>
           <a:xfrm>
-            <a:off x="6629400" y="4663440"/>
-            <a:ext cx="4983479" cy="182880"/>
+            <a:off x="6629400" y="4578096"/>
+            <a:ext cx="4983479" cy="164592"/>
           </a:xfrm>
           <a:prstGeom prst="rect">
             <a:avLst/>
@@ -33399,23 +33363,23 @@
         </p:nvSpPr>
         <p:spPr>
           <a:xfrm>
-            <a:off x="6629400" y="4828031"/>
-            <a:ext cx="4983479" cy="347472"/>
-          </a:xfrm>
-          <a:prstGeom prst="rect">
-            <a:avLst/>
-          </a:prstGeom>
-          <a:noFill/>
-        </p:spPr>
-        <p:txBody>
-          <a:bodyPr wrap="square">
-            <a:spAutoFit/>
-          </a:bodyPr>
-          <a:lstStyle/>
-          <a:p>
-            <a:pPr algn="l"/>
-            <a:r>
-              <a:rPr sz="1800" b="1" i="0">
+            <a:off x="6629400" y="4788408"/>
+            <a:ext cx="4983479" cy="292608"/>
+          </a:xfrm>
+          <a:prstGeom prst="rect">
+            <a:avLst/>
+          </a:prstGeom>
+          <a:noFill/>
+        </p:spPr>
+        <p:txBody>
+          <a:bodyPr wrap="square">
+            <a:spAutoFit/>
+          </a:bodyPr>
+          <a:lstStyle/>
+          <a:p>
+            <a:pPr algn="l"/>
+            <a:r>
+              <a:rPr sz="1500" b="1" i="0">
                 <a:solidFill>
                   <a:srgbClr val="E7CC59"/>
                 </a:solidFill>
@@ -33434,8 +33398,8 @@
         </p:nvSpPr>
         <p:spPr>
           <a:xfrm>
-            <a:off x="6629400" y="5157216"/>
-            <a:ext cx="4983479" cy="182880"/>
+            <a:off x="6629400" y="5062728"/>
+            <a:ext cx="4983479" cy="164592"/>
           </a:xfrm>
           <a:prstGeom prst="rect">
             <a:avLst/>
@@ -33469,7 +33433,7 @@
         </p:nvSpPr>
         <p:spPr>
           <a:xfrm>
-            <a:off x="6583680" y="5468112"/>
+            <a:off x="6583680" y="5361432"/>
             <a:ext cx="5074920" cy="9144"/>
           </a:xfrm>
           <a:prstGeom prst="rect">
@@ -33512,8 +33476,8 @@
         </p:nvSpPr>
         <p:spPr>
           <a:xfrm>
-            <a:off x="6629400" y="5522975"/>
-            <a:ext cx="4983479" cy="182880"/>
+            <a:off x="6629400" y="5416296"/>
+            <a:ext cx="4983479" cy="164592"/>
           </a:xfrm>
           <a:prstGeom prst="rect">
             <a:avLst/>
@@ -33547,23 +33511,23 @@
         </p:nvSpPr>
         <p:spPr>
           <a:xfrm>
-            <a:off x="6629400" y="5687567"/>
-            <a:ext cx="4983479" cy="347472"/>
-          </a:xfrm>
-          <a:prstGeom prst="rect">
-            <a:avLst/>
-          </a:prstGeom>
-          <a:noFill/>
-        </p:spPr>
-        <p:txBody>
-          <a:bodyPr wrap="square">
-            <a:spAutoFit/>
-          </a:bodyPr>
-          <a:lstStyle/>
-          <a:p>
-            <a:pPr algn="l"/>
-            <a:r>
-              <a:rPr sz="1800" b="1" i="0">
+            <a:off x="6629400" y="5626607"/>
+            <a:ext cx="4983479" cy="292608"/>
+          </a:xfrm>
+          <a:prstGeom prst="rect">
+            <a:avLst/>
+          </a:prstGeom>
+          <a:noFill/>
+        </p:spPr>
+        <p:txBody>
+          <a:bodyPr wrap="square">
+            <a:spAutoFit/>
+          </a:bodyPr>
+          <a:lstStyle/>
+          <a:p>
+            <a:pPr algn="l"/>
+            <a:r>
+              <a:rPr sz="1500" b="1" i="0">
                 <a:solidFill>
                   <a:srgbClr val="E7CC59"/>
                 </a:solidFill>
@@ -33582,8 +33546,8 @@
         </p:nvSpPr>
         <p:spPr>
           <a:xfrm>
-            <a:off x="6629400" y="6016751"/>
-            <a:ext cx="4983479" cy="182880"/>
+            <a:off x="6629400" y="5900928"/>
+            <a:ext cx="4983479" cy="164592"/>
           </a:xfrm>
           <a:prstGeom prst="rect">
             <a:avLst/>
@@ -33722,14 +33686,14 @@
         </p:nvSpPr>
         <p:spPr>
           <a:xfrm>
-            <a:off x="9756648" y="3904488"/>
-            <a:ext cx="1920240" cy="1920240"/>
+            <a:off x="11082528" y="6053328"/>
+            <a:ext cx="841248" cy="841248"/>
           </a:xfrm>
           <a:prstGeom prst="ellipse">
             <a:avLst/>
           </a:prstGeom>
           <a:noFill/>
-          <a:ln w="25400">
+          <a:ln w="19050">
             <a:solidFill>
               <a:srgbClr val="E7CC59"/>
             </a:solidFill>
@@ -33765,8 +33729,8 @@
         </p:nvSpPr>
         <p:spPr>
           <a:xfrm>
-            <a:off x="9829800" y="3831336"/>
-            <a:ext cx="1773936" cy="1920240"/>
+            <a:off x="11119103" y="6016752"/>
+            <a:ext cx="768096" cy="841248"/>
           </a:xfrm>
           <a:prstGeom prst="rect">
             <a:avLst/>
@@ -33781,7 +33745,7 @@
           <a:p>
             <a:pPr algn="ctr"/>
             <a:r>
-              <a:rPr sz="11000" b="1" i="0">
+              <a:rPr sz="4800" b="1" i="0">
                 <a:solidFill>
                   <a:srgbClr val="142A4A"/>
                 </a:solidFill>
@@ -34008,7 +33972,7 @@
                 </a:solidFill>
                 <a:latin typeface="Calibri"/>
               </a:rPr>
-              <a:t/>
+              <a:t> </a:t>
             </a:r>
           </a:p>
           <a:p>
@@ -34032,7 +33996,7 @@
                 </a:solidFill>
                 <a:latin typeface="Calibri"/>
               </a:rPr>
-              <a:t/>
+              <a:t> </a:t>
             </a:r>
           </a:p>
           <a:p>
@@ -34056,7 +34020,7 @@
                 </a:solidFill>
                 <a:latin typeface="Calibri"/>
               </a:rPr>
-              <a:t/>
+              <a:t> </a:t>
             </a:r>
           </a:p>
           <a:p>
@@ -34080,7 +34044,7 @@
                 </a:solidFill>
                 <a:latin typeface="Calibri"/>
               </a:rPr>
-              <a:t/>
+              <a:t> </a:t>
             </a:r>
           </a:p>
           <a:p>
@@ -34104,7 +34068,7 @@
                 </a:solidFill>
                 <a:latin typeface="Calibri"/>
               </a:rPr>
-              <a:t/>
+              <a:t> </a:t>
             </a:r>
           </a:p>
           <a:p>
@@ -34128,7 +34092,7 @@
                 </a:solidFill>
                 <a:latin typeface="Calibri"/>
               </a:rPr>
-              <a:t/>
+              <a:t> </a:t>
             </a:r>
           </a:p>
           <a:p>
@@ -34152,7 +34116,7 @@
                 </a:solidFill>
                 <a:latin typeface="Calibri"/>
               </a:rPr>
-              <a:t/>
+              <a:t> </a:t>
             </a:r>
           </a:p>
           <a:p>
@@ -34176,7 +34140,7 @@
                 </a:solidFill>
                 <a:latin typeface="Calibri"/>
               </a:rPr>
-              <a:t/>
+              <a:t> </a:t>
             </a:r>
           </a:p>
           <a:p>
@@ -34200,7 +34164,7 @@
                 </a:solidFill>
                 <a:latin typeface="Calibri"/>
               </a:rPr>
-              <a:t/>
+              <a:t> </a:t>
             </a:r>
           </a:p>
           <a:p>
@@ -34224,7 +34188,7 @@
                 </a:solidFill>
                 <a:latin typeface="Calibri"/>
               </a:rPr>
-              <a:t/>
+              <a:t> </a:t>
             </a:r>
           </a:p>
         </p:txBody>
@@ -34238,7 +34202,7 @@
         <p:spPr>
           <a:xfrm>
             <a:off x="6446520" y="841248"/>
-            <a:ext cx="5349240" cy="5504688"/>
+            <a:ext cx="5349240" cy="5376672"/>
           </a:xfrm>
           <a:prstGeom prst="rect">
             <a:avLst/>
@@ -34359,7 +34323,7 @@
         <p:spPr>
           <a:xfrm>
             <a:off x="6629400" y="1225296"/>
-            <a:ext cx="4983479" cy="182880"/>
+            <a:ext cx="4983479" cy="164592"/>
           </a:xfrm>
           <a:prstGeom prst="rect">
             <a:avLst/>
@@ -34393,23 +34357,23 @@
         </p:nvSpPr>
         <p:spPr>
           <a:xfrm>
-            <a:off x="6629400" y="1389888"/>
-            <a:ext cx="4983479" cy="347472"/>
-          </a:xfrm>
-          <a:prstGeom prst="rect">
-            <a:avLst/>
-          </a:prstGeom>
-          <a:noFill/>
-        </p:spPr>
-        <p:txBody>
-          <a:bodyPr wrap="square">
-            <a:spAutoFit/>
-          </a:bodyPr>
-          <a:lstStyle/>
-          <a:p>
-            <a:pPr algn="l"/>
-            <a:r>
-              <a:rPr sz="1800" b="1" i="0">
+            <a:off x="6629400" y="1435608"/>
+            <a:ext cx="4983479" cy="292608"/>
+          </a:xfrm>
+          <a:prstGeom prst="rect">
+            <a:avLst/>
+          </a:prstGeom>
+          <a:noFill/>
+        </p:spPr>
+        <p:txBody>
+          <a:bodyPr wrap="square">
+            <a:spAutoFit/>
+          </a:bodyPr>
+          <a:lstStyle/>
+          <a:p>
+            <a:pPr algn="l"/>
+            <a:r>
+              <a:rPr sz="1500" b="1" i="0">
                 <a:solidFill>
                   <a:srgbClr val="E7CC59"/>
                 </a:solidFill>
@@ -34428,8 +34392,8 @@
         </p:nvSpPr>
         <p:spPr>
           <a:xfrm>
-            <a:off x="6629400" y="1719072"/>
-            <a:ext cx="4983479" cy="182880"/>
+            <a:off x="6629400" y="1709928"/>
+            <a:ext cx="4983479" cy="164592"/>
           </a:xfrm>
           <a:prstGeom prst="rect">
             <a:avLst/>
@@ -34463,7 +34427,7 @@
         </p:nvSpPr>
         <p:spPr>
           <a:xfrm>
-            <a:off x="6583680" y="2029968"/>
+            <a:off x="6583680" y="2008632"/>
             <a:ext cx="5074920" cy="9144"/>
           </a:xfrm>
           <a:prstGeom prst="rect">
@@ -34506,8 +34470,8 @@
         </p:nvSpPr>
         <p:spPr>
           <a:xfrm>
-            <a:off x="6629400" y="2084832"/>
-            <a:ext cx="4983479" cy="182880"/>
+            <a:off x="6629400" y="2063496"/>
+            <a:ext cx="4983479" cy="164592"/>
           </a:xfrm>
           <a:prstGeom prst="rect">
             <a:avLst/>
@@ -34541,23 +34505,23 @@
         </p:nvSpPr>
         <p:spPr>
           <a:xfrm>
-            <a:off x="6629400" y="2249424"/>
-            <a:ext cx="4983479" cy="347472"/>
-          </a:xfrm>
-          <a:prstGeom prst="rect">
-            <a:avLst/>
-          </a:prstGeom>
-          <a:noFill/>
-        </p:spPr>
-        <p:txBody>
-          <a:bodyPr wrap="square">
-            <a:spAutoFit/>
-          </a:bodyPr>
-          <a:lstStyle/>
-          <a:p>
-            <a:pPr algn="l"/>
-            <a:r>
-              <a:rPr sz="1800" b="1" i="0">
+            <a:off x="6629400" y="2273808"/>
+            <a:ext cx="4983479" cy="292608"/>
+          </a:xfrm>
+          <a:prstGeom prst="rect">
+            <a:avLst/>
+          </a:prstGeom>
+          <a:noFill/>
+        </p:spPr>
+        <p:txBody>
+          <a:bodyPr wrap="square">
+            <a:spAutoFit/>
+          </a:bodyPr>
+          <a:lstStyle/>
+          <a:p>
+            <a:pPr algn="l"/>
+            <a:r>
+              <a:rPr sz="1500" b="1" i="0">
                 <a:solidFill>
                   <a:srgbClr val="E7CC59"/>
                 </a:solidFill>
@@ -34576,8 +34540,8 @@
         </p:nvSpPr>
         <p:spPr>
           <a:xfrm>
-            <a:off x="6629400" y="2578608"/>
-            <a:ext cx="4983479" cy="182880"/>
+            <a:off x="6629400" y="2548128"/>
+            <a:ext cx="4983479" cy="164592"/>
           </a:xfrm>
           <a:prstGeom prst="rect">
             <a:avLst/>
@@ -34611,7 +34575,7 @@
         </p:nvSpPr>
         <p:spPr>
           <a:xfrm>
-            <a:off x="6583680" y="2889503"/>
+            <a:off x="6583680" y="2846832"/>
             <a:ext cx="5074920" cy="9144"/>
           </a:xfrm>
           <a:prstGeom prst="rect">
@@ -34654,8 +34618,8 @@
         </p:nvSpPr>
         <p:spPr>
           <a:xfrm>
-            <a:off x="6629400" y="2944368"/>
-            <a:ext cx="4983479" cy="182880"/>
+            <a:off x="6629400" y="2901696"/>
+            <a:ext cx="4983479" cy="164592"/>
           </a:xfrm>
           <a:prstGeom prst="rect">
             <a:avLst/>
@@ -34689,23 +34653,23 @@
         </p:nvSpPr>
         <p:spPr>
           <a:xfrm>
-            <a:off x="6629400" y="3108960"/>
-            <a:ext cx="4983479" cy="347472"/>
-          </a:xfrm>
-          <a:prstGeom prst="rect">
-            <a:avLst/>
-          </a:prstGeom>
-          <a:noFill/>
-        </p:spPr>
-        <p:txBody>
-          <a:bodyPr wrap="square">
-            <a:spAutoFit/>
-          </a:bodyPr>
-          <a:lstStyle/>
-          <a:p>
-            <a:pPr algn="l"/>
-            <a:r>
-              <a:rPr sz="1800" b="1" i="0">
+            <a:off x="6629400" y="3112008"/>
+            <a:ext cx="4983479" cy="292608"/>
+          </a:xfrm>
+          <a:prstGeom prst="rect">
+            <a:avLst/>
+          </a:prstGeom>
+          <a:noFill/>
+        </p:spPr>
+        <p:txBody>
+          <a:bodyPr wrap="square">
+            <a:spAutoFit/>
+          </a:bodyPr>
+          <a:lstStyle/>
+          <a:p>
+            <a:pPr algn="l"/>
+            <a:r>
+              <a:rPr sz="1500" b="1" i="0">
                 <a:solidFill>
                   <a:srgbClr val="E7CC59"/>
                 </a:solidFill>
@@ -34724,8 +34688,8 @@
         </p:nvSpPr>
         <p:spPr>
           <a:xfrm>
-            <a:off x="6629400" y="3438144"/>
-            <a:ext cx="4983479" cy="182880"/>
+            <a:off x="6629400" y="3386328"/>
+            <a:ext cx="4983479" cy="164592"/>
           </a:xfrm>
           <a:prstGeom prst="rect">
             <a:avLst/>
@@ -34759,7 +34723,7 @@
         </p:nvSpPr>
         <p:spPr>
           <a:xfrm>
-            <a:off x="6583680" y="3749040"/>
+            <a:off x="6583680" y="3685032"/>
             <a:ext cx="5074920" cy="9144"/>
           </a:xfrm>
           <a:prstGeom prst="rect">
@@ -34802,8 +34766,8 @@
         </p:nvSpPr>
         <p:spPr>
           <a:xfrm>
-            <a:off x="6629400" y="3803904"/>
-            <a:ext cx="4983479" cy="182880"/>
+            <a:off x="6629400" y="3739896"/>
+            <a:ext cx="4983479" cy="164592"/>
           </a:xfrm>
           <a:prstGeom prst="rect">
             <a:avLst/>
@@ -34837,23 +34801,23 @@
         </p:nvSpPr>
         <p:spPr>
           <a:xfrm>
-            <a:off x="6629400" y="3968496"/>
-            <a:ext cx="4983479" cy="347472"/>
-          </a:xfrm>
-          <a:prstGeom prst="rect">
-            <a:avLst/>
-          </a:prstGeom>
-          <a:noFill/>
-        </p:spPr>
-        <p:txBody>
-          <a:bodyPr wrap="square">
-            <a:spAutoFit/>
-          </a:bodyPr>
-          <a:lstStyle/>
-          <a:p>
-            <a:pPr algn="l"/>
-            <a:r>
-              <a:rPr sz="1800" b="1" i="0">
+            <a:off x="6629400" y="3950208"/>
+            <a:ext cx="4983479" cy="292608"/>
+          </a:xfrm>
+          <a:prstGeom prst="rect">
+            <a:avLst/>
+          </a:prstGeom>
+          <a:noFill/>
+        </p:spPr>
+        <p:txBody>
+          <a:bodyPr wrap="square">
+            <a:spAutoFit/>
+          </a:bodyPr>
+          <a:lstStyle/>
+          <a:p>
+            <a:pPr algn="l"/>
+            <a:r>
+              <a:rPr sz="1500" b="1" i="0">
                 <a:solidFill>
                   <a:srgbClr val="E7CC59"/>
                 </a:solidFill>
@@ -34872,8 +34836,8 @@
         </p:nvSpPr>
         <p:spPr>
           <a:xfrm>
-            <a:off x="6629400" y="4297680"/>
-            <a:ext cx="4983479" cy="182880"/>
+            <a:off x="6629400" y="4224528"/>
+            <a:ext cx="4983479" cy="164592"/>
           </a:xfrm>
           <a:prstGeom prst="rect">
             <a:avLst/>
@@ -34907,7 +34871,7 @@
         </p:nvSpPr>
         <p:spPr>
           <a:xfrm>
-            <a:off x="6583680" y="4608576"/>
+            <a:off x="6583680" y="4523232"/>
             <a:ext cx="5074920" cy="9144"/>
           </a:xfrm>
           <a:prstGeom prst="rect">
@@ -34950,8 +34914,8 @@
         </p:nvSpPr>
         <p:spPr>
           <a:xfrm>
-            <a:off x="6629400" y="4663440"/>
-            <a:ext cx="4983479" cy="182880"/>
+            <a:off x="6629400" y="4578096"/>
+            <a:ext cx="4983479" cy="164592"/>
           </a:xfrm>
           <a:prstGeom prst="rect">
             <a:avLst/>
@@ -34985,23 +34949,23 @@
         </p:nvSpPr>
         <p:spPr>
           <a:xfrm>
-            <a:off x="6629400" y="4828031"/>
-            <a:ext cx="4983479" cy="347472"/>
-          </a:xfrm>
-          <a:prstGeom prst="rect">
-            <a:avLst/>
-          </a:prstGeom>
-          <a:noFill/>
-        </p:spPr>
-        <p:txBody>
-          <a:bodyPr wrap="square">
-            <a:spAutoFit/>
-          </a:bodyPr>
-          <a:lstStyle/>
-          <a:p>
-            <a:pPr algn="l"/>
-            <a:r>
-              <a:rPr sz="1800" b="1" i="0">
+            <a:off x="6629400" y="4788408"/>
+            <a:ext cx="4983479" cy="292608"/>
+          </a:xfrm>
+          <a:prstGeom prst="rect">
+            <a:avLst/>
+          </a:prstGeom>
+          <a:noFill/>
+        </p:spPr>
+        <p:txBody>
+          <a:bodyPr wrap="square">
+            <a:spAutoFit/>
+          </a:bodyPr>
+          <a:lstStyle/>
+          <a:p>
+            <a:pPr algn="l"/>
+            <a:r>
+              <a:rPr sz="1500" b="1" i="0">
                 <a:solidFill>
                   <a:srgbClr val="E7CC59"/>
                 </a:solidFill>
@@ -35020,8 +34984,8 @@
         </p:nvSpPr>
         <p:spPr>
           <a:xfrm>
-            <a:off x="6629400" y="5157216"/>
-            <a:ext cx="4983479" cy="182880"/>
+            <a:off x="6629400" y="5062728"/>
+            <a:ext cx="4983479" cy="164592"/>
           </a:xfrm>
           <a:prstGeom prst="rect">
             <a:avLst/>
@@ -35055,7 +35019,7 @@
         </p:nvSpPr>
         <p:spPr>
           <a:xfrm>
-            <a:off x="6583680" y="5468112"/>
+            <a:off x="6583680" y="5361432"/>
             <a:ext cx="5074920" cy="9144"/>
           </a:xfrm>
           <a:prstGeom prst="rect">
@@ -35098,8 +35062,8 @@
         </p:nvSpPr>
         <p:spPr>
           <a:xfrm>
-            <a:off x="6629400" y="5522975"/>
-            <a:ext cx="4983479" cy="182880"/>
+            <a:off x="6629400" y="5416296"/>
+            <a:ext cx="4983479" cy="164592"/>
           </a:xfrm>
           <a:prstGeom prst="rect">
             <a:avLst/>
@@ -35133,23 +35097,23 @@
         </p:nvSpPr>
         <p:spPr>
           <a:xfrm>
-            <a:off x="6629400" y="5687567"/>
-            <a:ext cx="4983479" cy="347472"/>
-          </a:xfrm>
-          <a:prstGeom prst="rect">
-            <a:avLst/>
-          </a:prstGeom>
-          <a:noFill/>
-        </p:spPr>
-        <p:txBody>
-          <a:bodyPr wrap="square">
-            <a:spAutoFit/>
-          </a:bodyPr>
-          <a:lstStyle/>
-          <a:p>
-            <a:pPr algn="l"/>
-            <a:r>
-              <a:rPr sz="1800" b="1" i="0">
+            <a:off x="6629400" y="5626607"/>
+            <a:ext cx="4983479" cy="292608"/>
+          </a:xfrm>
+          <a:prstGeom prst="rect">
+            <a:avLst/>
+          </a:prstGeom>
+          <a:noFill/>
+        </p:spPr>
+        <p:txBody>
+          <a:bodyPr wrap="square">
+            <a:spAutoFit/>
+          </a:bodyPr>
+          <a:lstStyle/>
+          <a:p>
+            <a:pPr algn="l"/>
+            <a:r>
+              <a:rPr sz="1500" b="1" i="0">
                 <a:solidFill>
                   <a:srgbClr val="E7CC59"/>
                 </a:solidFill>
@@ -35168,8 +35132,8 @@
         </p:nvSpPr>
         <p:spPr>
           <a:xfrm>
-            <a:off x="6629400" y="6016751"/>
-            <a:ext cx="4983479" cy="182880"/>
+            <a:off x="6629400" y="5900928"/>
+            <a:ext cx="4983479" cy="164592"/>
           </a:xfrm>
           <a:prstGeom prst="rect">
             <a:avLst/>
@@ -35308,14 +35272,14 @@
         </p:nvSpPr>
         <p:spPr>
           <a:xfrm>
-            <a:off x="9756648" y="3904488"/>
-            <a:ext cx="1920240" cy="1920240"/>
+            <a:off x="11082528" y="6053328"/>
+            <a:ext cx="841248" cy="841248"/>
           </a:xfrm>
           <a:prstGeom prst="ellipse">
             <a:avLst/>
           </a:prstGeom>
           <a:noFill/>
-          <a:ln w="25400">
+          <a:ln w="19050">
             <a:solidFill>
               <a:srgbClr val="E7CC59"/>
             </a:solidFill>
@@ -35351,8 +35315,8 @@
         </p:nvSpPr>
         <p:spPr>
           <a:xfrm>
-            <a:off x="9829800" y="3831336"/>
-            <a:ext cx="1773936" cy="1920240"/>
+            <a:off x="11119103" y="6016752"/>
+            <a:ext cx="768096" cy="841248"/>
           </a:xfrm>
           <a:prstGeom prst="rect">
             <a:avLst/>
@@ -35367,7 +35331,7 @@
           <a:p>
             <a:pPr algn="ctr"/>
             <a:r>
-              <a:rPr sz="11000" b="1" i="0">
+              <a:rPr sz="4800" b="1" i="0">
                 <a:solidFill>
                   <a:srgbClr val="142A4A"/>
                 </a:solidFill>
@@ -35594,7 +35558,7 @@
                 </a:solidFill>
                 <a:latin typeface="Calibri"/>
               </a:rPr>
-              <a:t/>
+              <a:t> </a:t>
             </a:r>
           </a:p>
           <a:p>
@@ -35618,7 +35582,7 @@
                 </a:solidFill>
                 <a:latin typeface="Calibri"/>
               </a:rPr>
-              <a:t/>
+              <a:t> </a:t>
             </a:r>
           </a:p>
           <a:p>
@@ -35642,7 +35606,7 @@
                 </a:solidFill>
                 <a:latin typeface="Calibri"/>
               </a:rPr>
-              <a:t/>
+              <a:t> </a:t>
             </a:r>
           </a:p>
           <a:p>
@@ -35666,7 +35630,7 @@
                 </a:solidFill>
                 <a:latin typeface="Calibri"/>
               </a:rPr>
-              <a:t/>
+              <a:t> </a:t>
             </a:r>
           </a:p>
           <a:p>
@@ -35690,7 +35654,7 @@
                 </a:solidFill>
                 <a:latin typeface="Calibri"/>
               </a:rPr>
-              <a:t/>
+              <a:t> </a:t>
             </a:r>
           </a:p>
           <a:p>
@@ -35714,7 +35678,7 @@
                 </a:solidFill>
                 <a:latin typeface="Calibri"/>
               </a:rPr>
-              <a:t/>
+              <a:t> </a:t>
             </a:r>
           </a:p>
           <a:p>
@@ -35738,7 +35702,7 @@
                 </a:solidFill>
                 <a:latin typeface="Calibri"/>
               </a:rPr>
-              <a:t/>
+              <a:t> </a:t>
             </a:r>
           </a:p>
           <a:p>
@@ -35762,7 +35726,7 @@
                 </a:solidFill>
                 <a:latin typeface="Calibri"/>
               </a:rPr>
-              <a:t/>
+              <a:t> </a:t>
             </a:r>
           </a:p>
           <a:p>
@@ -35786,7 +35750,7 @@
                 </a:solidFill>
                 <a:latin typeface="Calibri"/>
               </a:rPr>
-              <a:t/>
+              <a:t> </a:t>
             </a:r>
           </a:p>
           <a:p>
@@ -35810,7 +35774,7 @@
                 </a:solidFill>
                 <a:latin typeface="Calibri"/>
               </a:rPr>
-              <a:t/>
+              <a:t> </a:t>
             </a:r>
           </a:p>
         </p:txBody>
@@ -35824,7 +35788,7 @@
         <p:spPr>
           <a:xfrm>
             <a:off x="6446520" y="841248"/>
-            <a:ext cx="5349240" cy="5504688"/>
+            <a:ext cx="5349240" cy="5376672"/>
           </a:xfrm>
           <a:prstGeom prst="rect">
             <a:avLst/>
@@ -35945,7 +35909,7 @@
         <p:spPr>
           <a:xfrm>
             <a:off x="6629400" y="1225296"/>
-            <a:ext cx="4983479" cy="182880"/>
+            <a:ext cx="4983479" cy="164592"/>
           </a:xfrm>
           <a:prstGeom prst="rect">
             <a:avLst/>
@@ -35979,23 +35943,23 @@
         </p:nvSpPr>
         <p:spPr>
           <a:xfrm>
-            <a:off x="6629400" y="1389888"/>
-            <a:ext cx="4983479" cy="347472"/>
-          </a:xfrm>
-          <a:prstGeom prst="rect">
-            <a:avLst/>
-          </a:prstGeom>
-          <a:noFill/>
-        </p:spPr>
-        <p:txBody>
-          <a:bodyPr wrap="square">
-            <a:spAutoFit/>
-          </a:bodyPr>
-          <a:lstStyle/>
-          <a:p>
-            <a:pPr algn="l"/>
-            <a:r>
-              <a:rPr sz="1800" b="1" i="0">
+            <a:off x="6629400" y="1435608"/>
+            <a:ext cx="4983479" cy="292608"/>
+          </a:xfrm>
+          <a:prstGeom prst="rect">
+            <a:avLst/>
+          </a:prstGeom>
+          <a:noFill/>
+        </p:spPr>
+        <p:txBody>
+          <a:bodyPr wrap="square">
+            <a:spAutoFit/>
+          </a:bodyPr>
+          <a:lstStyle/>
+          <a:p>
+            <a:pPr algn="l"/>
+            <a:r>
+              <a:rPr sz="1500" b="1" i="0">
                 <a:solidFill>
                   <a:srgbClr val="E7CC59"/>
                 </a:solidFill>
@@ -36014,8 +35978,8 @@
         </p:nvSpPr>
         <p:spPr>
           <a:xfrm>
-            <a:off x="6629400" y="1719072"/>
-            <a:ext cx="4983479" cy="182880"/>
+            <a:off x="6629400" y="1709928"/>
+            <a:ext cx="4983479" cy="164592"/>
           </a:xfrm>
           <a:prstGeom prst="rect">
             <a:avLst/>
@@ -36049,7 +36013,7 @@
         </p:nvSpPr>
         <p:spPr>
           <a:xfrm>
-            <a:off x="6583680" y="2029968"/>
+            <a:off x="6583680" y="2008632"/>
             <a:ext cx="5074920" cy="9144"/>
           </a:xfrm>
           <a:prstGeom prst="rect">
@@ -36092,8 +36056,8 @@
         </p:nvSpPr>
         <p:spPr>
           <a:xfrm>
-            <a:off x="6629400" y="2084832"/>
-            <a:ext cx="4983479" cy="182880"/>
+            <a:off x="6629400" y="2063496"/>
+            <a:ext cx="4983479" cy="164592"/>
           </a:xfrm>
           <a:prstGeom prst="rect">
             <a:avLst/>
@@ -36127,23 +36091,23 @@
         </p:nvSpPr>
         <p:spPr>
           <a:xfrm>
-            <a:off x="6629400" y="2249424"/>
-            <a:ext cx="4983479" cy="347472"/>
-          </a:xfrm>
-          <a:prstGeom prst="rect">
-            <a:avLst/>
-          </a:prstGeom>
-          <a:noFill/>
-        </p:spPr>
-        <p:txBody>
-          <a:bodyPr wrap="square">
-            <a:spAutoFit/>
-          </a:bodyPr>
-          <a:lstStyle/>
-          <a:p>
-            <a:pPr algn="l"/>
-            <a:r>
-              <a:rPr sz="1800" b="1" i="0">
+            <a:off x="6629400" y="2273808"/>
+            <a:ext cx="4983479" cy="292608"/>
+          </a:xfrm>
+          <a:prstGeom prst="rect">
+            <a:avLst/>
+          </a:prstGeom>
+          <a:noFill/>
+        </p:spPr>
+        <p:txBody>
+          <a:bodyPr wrap="square">
+            <a:spAutoFit/>
+          </a:bodyPr>
+          <a:lstStyle/>
+          <a:p>
+            <a:pPr algn="l"/>
+            <a:r>
+              <a:rPr sz="1500" b="1" i="0">
                 <a:solidFill>
                   <a:srgbClr val="E7CC59"/>
                 </a:solidFill>
@@ -36162,8 +36126,8 @@
         </p:nvSpPr>
         <p:spPr>
           <a:xfrm>
-            <a:off x="6629400" y="2578608"/>
-            <a:ext cx="4983479" cy="182880"/>
+            <a:off x="6629400" y="2548128"/>
+            <a:ext cx="4983479" cy="164592"/>
           </a:xfrm>
           <a:prstGeom prst="rect">
             <a:avLst/>
@@ -36197,7 +36161,7 @@
         </p:nvSpPr>
         <p:spPr>
           <a:xfrm>
-            <a:off x="6583680" y="2889503"/>
+            <a:off x="6583680" y="2846832"/>
             <a:ext cx="5074920" cy="9144"/>
           </a:xfrm>
           <a:prstGeom prst="rect">
@@ -36240,8 +36204,8 @@
         </p:nvSpPr>
         <p:spPr>
           <a:xfrm>
-            <a:off x="6629400" y="2944368"/>
-            <a:ext cx="4983479" cy="182880"/>
+            <a:off x="6629400" y="2901696"/>
+            <a:ext cx="4983479" cy="164592"/>
           </a:xfrm>
           <a:prstGeom prst="rect">
             <a:avLst/>
@@ -36275,23 +36239,23 @@
         </p:nvSpPr>
         <p:spPr>
           <a:xfrm>
-            <a:off x="6629400" y="3108960"/>
-            <a:ext cx="4983479" cy="347472"/>
-          </a:xfrm>
-          <a:prstGeom prst="rect">
-            <a:avLst/>
-          </a:prstGeom>
-          <a:noFill/>
-        </p:spPr>
-        <p:txBody>
-          <a:bodyPr wrap="square">
-            <a:spAutoFit/>
-          </a:bodyPr>
-          <a:lstStyle/>
-          <a:p>
-            <a:pPr algn="l"/>
-            <a:r>
-              <a:rPr sz="1800" b="1" i="0">
+            <a:off x="6629400" y="3112008"/>
+            <a:ext cx="4983479" cy="292608"/>
+          </a:xfrm>
+          <a:prstGeom prst="rect">
+            <a:avLst/>
+          </a:prstGeom>
+          <a:noFill/>
+        </p:spPr>
+        <p:txBody>
+          <a:bodyPr wrap="square">
+            <a:spAutoFit/>
+          </a:bodyPr>
+          <a:lstStyle/>
+          <a:p>
+            <a:pPr algn="l"/>
+            <a:r>
+              <a:rPr sz="1500" b="1" i="0">
                 <a:solidFill>
                   <a:srgbClr val="E7CC59"/>
                 </a:solidFill>
@@ -36310,8 +36274,8 @@
         </p:nvSpPr>
         <p:spPr>
           <a:xfrm>
-            <a:off x="6629400" y="3438144"/>
-            <a:ext cx="4983479" cy="182880"/>
+            <a:off x="6629400" y="3386328"/>
+            <a:ext cx="4983479" cy="164592"/>
           </a:xfrm>
           <a:prstGeom prst="rect">
             <a:avLst/>
@@ -36345,7 +36309,7 @@
         </p:nvSpPr>
         <p:spPr>
           <a:xfrm>
-            <a:off x="6583680" y="3749040"/>
+            <a:off x="6583680" y="3685032"/>
             <a:ext cx="5074920" cy="9144"/>
           </a:xfrm>
           <a:prstGeom prst="rect">
@@ -36388,8 +36352,8 @@
         </p:nvSpPr>
         <p:spPr>
           <a:xfrm>
-            <a:off x="6629400" y="3803904"/>
-            <a:ext cx="4983479" cy="182880"/>
+            <a:off x="6629400" y="3739896"/>
+            <a:ext cx="4983479" cy="164592"/>
           </a:xfrm>
           <a:prstGeom prst="rect">
             <a:avLst/>
@@ -36423,23 +36387,23 @@
         </p:nvSpPr>
         <p:spPr>
           <a:xfrm>
-            <a:off x="6629400" y="3968496"/>
-            <a:ext cx="4983479" cy="347472"/>
-          </a:xfrm>
-          <a:prstGeom prst="rect">
-            <a:avLst/>
-          </a:prstGeom>
-          <a:noFill/>
-        </p:spPr>
-        <p:txBody>
-          <a:bodyPr wrap="square">
-            <a:spAutoFit/>
-          </a:bodyPr>
-          <a:lstStyle/>
-          <a:p>
-            <a:pPr algn="l"/>
-            <a:r>
-              <a:rPr sz="1800" b="1" i="0">
+            <a:off x="6629400" y="3950208"/>
+            <a:ext cx="4983479" cy="292608"/>
+          </a:xfrm>
+          <a:prstGeom prst="rect">
+            <a:avLst/>
+          </a:prstGeom>
+          <a:noFill/>
+        </p:spPr>
+        <p:txBody>
+          <a:bodyPr wrap="square">
+            <a:spAutoFit/>
+          </a:bodyPr>
+          <a:lstStyle/>
+          <a:p>
+            <a:pPr algn="l"/>
+            <a:r>
+              <a:rPr sz="1500" b="1" i="0">
                 <a:solidFill>
                   <a:srgbClr val="E7CC59"/>
                 </a:solidFill>
@@ -36458,8 +36422,8 @@
         </p:nvSpPr>
         <p:spPr>
           <a:xfrm>
-            <a:off x="6629400" y="4297680"/>
-            <a:ext cx="4983479" cy="182880"/>
+            <a:off x="6629400" y="4224528"/>
+            <a:ext cx="4983479" cy="164592"/>
           </a:xfrm>
           <a:prstGeom prst="rect">
             <a:avLst/>
@@ -36493,7 +36457,7 @@
         </p:nvSpPr>
         <p:spPr>
           <a:xfrm>
-            <a:off x="6583680" y="4608576"/>
+            <a:off x="6583680" y="4523232"/>
             <a:ext cx="5074920" cy="9144"/>
           </a:xfrm>
           <a:prstGeom prst="rect">
@@ -36536,8 +36500,8 @@
         </p:nvSpPr>
         <p:spPr>
           <a:xfrm>
-            <a:off x="6629400" y="4663440"/>
-            <a:ext cx="4983479" cy="182880"/>
+            <a:off x="6629400" y="4578096"/>
+            <a:ext cx="4983479" cy="164592"/>
           </a:xfrm>
           <a:prstGeom prst="rect">
             <a:avLst/>
@@ -36571,23 +36535,23 @@
         </p:nvSpPr>
         <p:spPr>
           <a:xfrm>
-            <a:off x="6629400" y="4828031"/>
-            <a:ext cx="4983479" cy="347472"/>
-          </a:xfrm>
-          <a:prstGeom prst="rect">
-            <a:avLst/>
-          </a:prstGeom>
-          <a:noFill/>
-        </p:spPr>
-        <p:txBody>
-          <a:bodyPr wrap="square">
-            <a:spAutoFit/>
-          </a:bodyPr>
-          <a:lstStyle/>
-          <a:p>
-            <a:pPr algn="l"/>
-            <a:r>
-              <a:rPr sz="1800" b="1" i="0">
+            <a:off x="6629400" y="4788408"/>
+            <a:ext cx="4983479" cy="292608"/>
+          </a:xfrm>
+          <a:prstGeom prst="rect">
+            <a:avLst/>
+          </a:prstGeom>
+          <a:noFill/>
+        </p:spPr>
+        <p:txBody>
+          <a:bodyPr wrap="square">
+            <a:spAutoFit/>
+          </a:bodyPr>
+          <a:lstStyle/>
+          <a:p>
+            <a:pPr algn="l"/>
+            <a:r>
+              <a:rPr sz="1500" b="1" i="0">
                 <a:solidFill>
                   <a:srgbClr val="E7CC59"/>
                 </a:solidFill>
@@ -36606,8 +36570,8 @@
         </p:nvSpPr>
         <p:spPr>
           <a:xfrm>
-            <a:off x="6629400" y="5157216"/>
-            <a:ext cx="4983479" cy="182880"/>
+            <a:off x="6629400" y="5062728"/>
+            <a:ext cx="4983479" cy="164592"/>
           </a:xfrm>
           <a:prstGeom prst="rect">
             <a:avLst/>
@@ -36641,7 +36605,7 @@
         </p:nvSpPr>
         <p:spPr>
           <a:xfrm>
-            <a:off x="6583680" y="5468112"/>
+            <a:off x="6583680" y="5361432"/>
             <a:ext cx="5074920" cy="9144"/>
           </a:xfrm>
           <a:prstGeom prst="rect">
@@ -36684,8 +36648,8 @@
         </p:nvSpPr>
         <p:spPr>
           <a:xfrm>
-            <a:off x="6629400" y="5522975"/>
-            <a:ext cx="4983479" cy="182880"/>
+            <a:off x="6629400" y="5416296"/>
+            <a:ext cx="4983479" cy="164592"/>
           </a:xfrm>
           <a:prstGeom prst="rect">
             <a:avLst/>
@@ -36719,23 +36683,23 @@
         </p:nvSpPr>
         <p:spPr>
           <a:xfrm>
-            <a:off x="6629400" y="5687567"/>
-            <a:ext cx="4983479" cy="347472"/>
-          </a:xfrm>
-          <a:prstGeom prst="rect">
-            <a:avLst/>
-          </a:prstGeom>
-          <a:noFill/>
-        </p:spPr>
-        <p:txBody>
-          <a:bodyPr wrap="square">
-            <a:spAutoFit/>
-          </a:bodyPr>
-          <a:lstStyle/>
-          <a:p>
-            <a:pPr algn="l"/>
-            <a:r>
-              <a:rPr sz="1800" b="1" i="0">
+            <a:off x="6629400" y="5626607"/>
+            <a:ext cx="4983479" cy="292608"/>
+          </a:xfrm>
+          <a:prstGeom prst="rect">
+            <a:avLst/>
+          </a:prstGeom>
+          <a:noFill/>
+        </p:spPr>
+        <p:txBody>
+          <a:bodyPr wrap="square">
+            <a:spAutoFit/>
+          </a:bodyPr>
+          <a:lstStyle/>
+          <a:p>
+            <a:pPr algn="l"/>
+            <a:r>
+              <a:rPr sz="1500" b="1" i="0">
                 <a:solidFill>
                   <a:srgbClr val="E7CC59"/>
                 </a:solidFill>
@@ -36754,8 +36718,8 @@
         </p:nvSpPr>
         <p:spPr>
           <a:xfrm>
-            <a:off x="6629400" y="6016751"/>
-            <a:ext cx="4983479" cy="182880"/>
+            <a:off x="6629400" y="5900928"/>
+            <a:ext cx="4983479" cy="164592"/>
           </a:xfrm>
           <a:prstGeom prst="rect">
             <a:avLst/>
@@ -36894,14 +36858,14 @@
         </p:nvSpPr>
         <p:spPr>
           <a:xfrm>
-            <a:off x="9756648" y="3904488"/>
-            <a:ext cx="1920240" cy="1920240"/>
+            <a:off x="11082528" y="6053328"/>
+            <a:ext cx="841248" cy="841248"/>
           </a:xfrm>
           <a:prstGeom prst="ellipse">
             <a:avLst/>
           </a:prstGeom>
           <a:noFill/>
-          <a:ln w="25400">
+          <a:ln w="19050">
             <a:solidFill>
               <a:srgbClr val="E7CC59"/>
             </a:solidFill>
@@ -36937,8 +36901,8 @@
         </p:nvSpPr>
         <p:spPr>
           <a:xfrm>
-            <a:off x="9829800" y="3831336"/>
-            <a:ext cx="1773936" cy="1920240"/>
+            <a:off x="11119103" y="6016752"/>
+            <a:ext cx="768096" cy="841248"/>
           </a:xfrm>
           <a:prstGeom prst="rect">
             <a:avLst/>
@@ -36953,7 +36917,7 @@
           <a:p>
             <a:pPr algn="ctr"/>
             <a:r>
-              <a:rPr sz="11000" b="1" i="0">
+              <a:rPr sz="4800" b="1" i="0">
                 <a:solidFill>
                   <a:srgbClr val="142A4A"/>
                 </a:solidFill>
